--- a/卒業ゼミ発表.pptx
+++ b/卒業ゼミ発表.pptx
@@ -105,6 +105,11 @@
       </a:defRPr>
     </a:lvl9pPr>
   </p:defaultTextStyle>
+  <p:extLst>
+    <p:ext uri="{EFAFB233-063F-42B5-8137-9DF3F51BA10A}">
+      <p15:sldGuideLst xmlns:p15="http://schemas.microsoft.com/office/powerpoint/2012/main"/>
+    </p:ext>
+  </p:extLst>
 </p:presentation>
 </file>
 
@@ -3624,8 +3629,8 @@
         </p:nvSpPr>
         <p:spPr>
           <a:xfrm>
-            <a:off x="6858000" y="2455333"/>
-            <a:ext cx="4521200" cy="1323439"/>
+            <a:off x="5094514" y="2455333"/>
+            <a:ext cx="6696891" cy="1938992"/>
           </a:xfrm>
           <a:prstGeom prst="rect">
             <a:avLst/>
@@ -3658,13 +3663,27 @@
                 <a:latin typeface="HGS創英角ﾎﾟｯﾌﾟ体" panose="040B0A00000000000000" pitchFamily="50" charset="-128"/>
                 <a:ea typeface="HGS創英角ﾎﾟｯﾌﾟ体" panose="040B0A00000000000000" pitchFamily="50" charset="-128"/>
               </a:rPr>
-              <a:t>美容サイトの制作</a:t>
-            </a:r>
-            <a:endParaRPr kumimoji="1" lang="en-US" altLang="ja-JP" sz="4000" dirty="0">
+              <a:t>美容サイト</a:t>
+            </a:r>
+            <a:endParaRPr lang="en-US" altLang="ja-JP" sz="4000" dirty="0">
               <a:latin typeface="HGS創英角ﾎﾟｯﾌﾟ体" panose="040B0A00000000000000" pitchFamily="50" charset="-128"/>
               <a:ea typeface="HGS創英角ﾎﾟｯﾌﾟ体" panose="040B0A00000000000000" pitchFamily="50" charset="-128"/>
             </a:endParaRPr>
           </a:p>
+          <a:p>
+            <a:pPr algn="ctr"/>
+            <a:r>
+              <a:rPr lang="ja-JP" altLang="en-US" sz="4000" dirty="0">
+                <a:latin typeface="HGS創英角ﾎﾟｯﾌﾟ体" panose="040B0A00000000000000" pitchFamily="50" charset="-128"/>
+                <a:ea typeface="HGS創英角ﾎﾟｯﾌﾟ体" panose="040B0A00000000000000" pitchFamily="50" charset="-128"/>
+              </a:rPr>
+              <a:t>メニュー表ポスターの制作</a:t>
+            </a:r>
+            <a:endParaRPr lang="en-US" altLang="ja-JP" sz="4000" dirty="0">
+              <a:latin typeface="HGS創英角ﾎﾟｯﾌﾟ体" panose="040B0A00000000000000" pitchFamily="50" charset="-128"/>
+              <a:ea typeface="HGS創英角ﾎﾟｯﾌﾟ体" panose="040B0A00000000000000" pitchFamily="50" charset="-128"/>
+            </a:endParaRPr>
+          </a:p>
         </p:txBody>
       </p:sp>
       <p:sp>
@@ -3682,7 +3701,7 @@
         <p:spPr>
           <a:xfrm>
             <a:off x="-2638696" y="0"/>
-            <a:ext cx="8534399" cy="6858000"/>
+            <a:ext cx="7654833" cy="6858000"/>
           </a:xfrm>
           <a:prstGeom prst="parallelogram">
             <a:avLst/>
@@ -3709,7 +3728,7 @@
           <a:lstStyle/>
           <a:p>
             <a:pPr algn="ctr"/>
-            <a:endParaRPr kumimoji="1" lang="ja-JP" altLang="en-US"/>
+            <a:endParaRPr kumimoji="1" lang="ja-JP" altLang="en-US" dirty="0"/>
           </a:p>
         </p:txBody>
       </p:sp>
@@ -3786,6 +3805,146 @@
           <a:chExt cx="0" cy="0"/>
         </a:xfrm>
       </p:grpSpPr>
+      <p:pic>
+        <p:nvPicPr>
+          <p:cNvPr id="3" name="図 2">
+            <a:extLst>
+              <a:ext uri="{FF2B5EF4-FFF2-40B4-BE49-F238E27FC236}">
+                <a16:creationId xmlns:a16="http://schemas.microsoft.com/office/drawing/2014/main" id="{61AD315D-B714-BE16-9728-E581B3E2CD98}"/>
+              </a:ext>
+            </a:extLst>
+          </p:cNvPr>
+          <p:cNvPicPr>
+            <a:picLocks noChangeAspect="1"/>
+          </p:cNvPicPr>
+          <p:nvPr/>
+        </p:nvPicPr>
+        <p:blipFill>
+          <a:blip r:embed="rId2">
+            <a:extLst>
+              <a:ext uri="{28A0092B-C50C-407E-A947-70E740481C1C}">
+                <a14:useLocalDpi xmlns:a14="http://schemas.microsoft.com/office/drawing/2010/main" val="0"/>
+              </a:ext>
+            </a:extLst>
+          </a:blip>
+          <a:stretch>
+            <a:fillRect/>
+          </a:stretch>
+        </p:blipFill>
+        <p:spPr>
+          <a:xfrm>
+            <a:off x="7030720" y="701040"/>
+            <a:ext cx="4023360" cy="5029200"/>
+          </a:xfrm>
+          <a:prstGeom prst="rect">
+            <a:avLst/>
+          </a:prstGeom>
+        </p:spPr>
+      </p:pic>
+      <p:sp>
+        <p:nvSpPr>
+          <p:cNvPr id="4" name="正方形/長方形 3">
+            <a:extLst>
+              <a:ext uri="{FF2B5EF4-FFF2-40B4-BE49-F238E27FC236}">
+                <a16:creationId xmlns:a16="http://schemas.microsoft.com/office/drawing/2014/main" id="{43C75826-A79C-835B-7F4B-8F9537812EB3}"/>
+              </a:ext>
+            </a:extLst>
+          </p:cNvPr>
+          <p:cNvSpPr/>
+          <p:nvPr/>
+        </p:nvSpPr>
+        <p:spPr>
+          <a:xfrm>
+            <a:off x="1535854" y="701040"/>
+            <a:ext cx="4023360" cy="5113867"/>
+          </a:xfrm>
+          <a:prstGeom prst="rect">
+            <a:avLst/>
+          </a:prstGeom>
+        </p:spPr>
+        <p:style>
+          <a:lnRef idx="2">
+            <a:schemeClr val="dk1"/>
+          </a:lnRef>
+          <a:fillRef idx="1">
+            <a:schemeClr val="lt1"/>
+          </a:fillRef>
+          <a:effectRef idx="0">
+            <a:schemeClr val="dk1"/>
+          </a:effectRef>
+          <a:fontRef idx="minor">
+            <a:schemeClr val="dk1"/>
+          </a:fontRef>
+        </p:style>
+        <p:txBody>
+          <a:bodyPr rtlCol="0" anchor="ctr"/>
+          <a:lstStyle/>
+          <a:p>
+            <a:pPr algn="ctr"/>
+            <a:r>
+              <a:rPr kumimoji="1" lang="ja-JP" altLang="en-US" dirty="0"/>
+              <a:t>メニュー表</a:t>
+            </a:r>
+            <a:endParaRPr kumimoji="1" lang="en-US" altLang="ja-JP" dirty="0"/>
+          </a:p>
+          <a:p>
+            <a:pPr algn="ctr"/>
+            <a:r>
+              <a:rPr kumimoji="1" lang="ja-JP" altLang="en-US" dirty="0"/>
+              <a:t>デザインとしては</a:t>
+            </a:r>
+            <a:endParaRPr kumimoji="1" lang="en-US" altLang="ja-JP" dirty="0"/>
+          </a:p>
+          <a:p>
+            <a:pPr algn="ctr"/>
+            <a:r>
+              <a:rPr kumimoji="1" lang="ja-JP" altLang="en-US" dirty="0"/>
+              <a:t>このような感じの</a:t>
+            </a:r>
+            <a:endParaRPr kumimoji="1" lang="en-US" altLang="ja-JP" dirty="0"/>
+          </a:p>
+          <a:p>
+            <a:pPr algn="ctr"/>
+            <a:r>
+              <a:rPr kumimoji="1" lang="ja-JP" altLang="en-US" dirty="0"/>
+              <a:t>デザインが作られていますが</a:t>
+            </a:r>
+            <a:endParaRPr kumimoji="1" lang="en-US" altLang="ja-JP" dirty="0"/>
+          </a:p>
+          <a:p>
+            <a:pPr algn="ctr"/>
+            <a:r>
+              <a:rPr lang="ja-JP" altLang="en-US" dirty="0"/>
+              <a:t>文字などのデザインを</a:t>
+            </a:r>
+            <a:endParaRPr lang="en-US" altLang="ja-JP" dirty="0"/>
+          </a:p>
+          <a:p>
+            <a:pPr algn="ctr"/>
+            <a:r>
+              <a:rPr lang="ja-JP" altLang="en-US" dirty="0"/>
+              <a:t>こだわりたいこともあり</a:t>
+            </a:r>
+            <a:endParaRPr lang="en-US" altLang="ja-JP" dirty="0"/>
+          </a:p>
+          <a:p>
+            <a:pPr algn="ctr"/>
+            <a:r>
+              <a:rPr lang="ja-JP" altLang="en-US" dirty="0"/>
+              <a:t>そこが改良する感じになって</a:t>
+            </a:r>
+            <a:endParaRPr lang="en-US" altLang="ja-JP" dirty="0"/>
+          </a:p>
+          <a:p>
+            <a:pPr algn="ctr"/>
+            <a:r>
+              <a:rPr lang="ja-JP" altLang="en-US" dirty="0"/>
+              <a:t>おります。</a:t>
+            </a:r>
+            <a:endParaRPr lang="en-US" altLang="ja-JP" dirty="0"/>
+          </a:p>
+        </p:txBody>
+      </p:sp>
     </p:spTree>
     <p:extLst>
       <p:ext uri="{BB962C8B-B14F-4D97-AF65-F5344CB8AC3E}">

--- a/卒業ゼミ発表.pptx
+++ b/卒業ゼミ発表.pptx
@@ -2,20 +2,26 @@
 <file path=ppt/presentation.xml><?xml version="1.0" encoding="utf-8"?>
 <p:presentation xmlns:a="http://schemas.openxmlformats.org/drawingml/2006/main" xmlns:r="http://schemas.openxmlformats.org/officeDocument/2006/relationships" xmlns:p="http://schemas.openxmlformats.org/presentationml/2006/main" saveSubsetFonts="1">
   <p:sldMasterIdLst>
-    <p:sldMasterId id="2147483648" r:id="rId1"/>
+    <p:sldMasterId id="2147483660" r:id="rId1"/>
   </p:sldMasterIdLst>
   <p:sldIdLst>
-    <p:sldId id="256" r:id="rId2"/>
-    <p:sldId id="257" r:id="rId3"/>
+    <p:sldId id="258" r:id="rId2"/>
+    <p:sldId id="259" r:id="rId3"/>
+    <p:sldId id="256" r:id="rId4"/>
+    <p:sldId id="260" r:id="rId5"/>
+    <p:sldId id="261" r:id="rId6"/>
+    <p:sldId id="262" r:id="rId7"/>
+    <p:sldId id="263" r:id="rId8"/>
+    <p:sldId id="264" r:id="rId9"/>
   </p:sldIdLst>
   <p:sldSz cx="12192000" cy="6858000"/>
   <p:notesSz cx="6858000" cy="9144000"/>
   <p:defaultTextStyle>
     <a:defPPr>
-      <a:defRPr lang="ja-JP"/>
+      <a:defRPr lang="en-US"/>
     </a:defPPr>
-    <a:lvl1pPr marL="0" algn="l" defTabSz="914400" rtl="0" eaLnBrk="1" latinLnBrk="0" hangingPunct="1">
-      <a:defRPr kumimoji="1" sz="1800" kern="1200">
+    <a:lvl1pPr marL="0" algn="l" defTabSz="457200" rtl="0" eaLnBrk="1" latinLnBrk="0" hangingPunct="1">
+      <a:defRPr sz="1800" kern="1200">
         <a:solidFill>
           <a:schemeClr val="tx1"/>
         </a:solidFill>
@@ -24,8 +30,8 @@
         <a:cs typeface="+mn-cs"/>
       </a:defRPr>
     </a:lvl1pPr>
-    <a:lvl2pPr marL="457200" algn="l" defTabSz="914400" rtl="0" eaLnBrk="1" latinLnBrk="0" hangingPunct="1">
-      <a:defRPr kumimoji="1" sz="1800" kern="1200">
+    <a:lvl2pPr marL="457200" algn="l" defTabSz="457200" rtl="0" eaLnBrk="1" latinLnBrk="0" hangingPunct="1">
+      <a:defRPr sz="1800" kern="1200">
         <a:solidFill>
           <a:schemeClr val="tx1"/>
         </a:solidFill>
@@ -34,8 +40,8 @@
         <a:cs typeface="+mn-cs"/>
       </a:defRPr>
     </a:lvl2pPr>
-    <a:lvl3pPr marL="914400" algn="l" defTabSz="914400" rtl="0" eaLnBrk="1" latinLnBrk="0" hangingPunct="1">
-      <a:defRPr kumimoji="1" sz="1800" kern="1200">
+    <a:lvl3pPr marL="914400" algn="l" defTabSz="457200" rtl="0" eaLnBrk="1" latinLnBrk="0" hangingPunct="1">
+      <a:defRPr sz="1800" kern="1200">
         <a:solidFill>
           <a:schemeClr val="tx1"/>
         </a:solidFill>
@@ -44,8 +50,8 @@
         <a:cs typeface="+mn-cs"/>
       </a:defRPr>
     </a:lvl3pPr>
-    <a:lvl4pPr marL="1371600" algn="l" defTabSz="914400" rtl="0" eaLnBrk="1" latinLnBrk="0" hangingPunct="1">
-      <a:defRPr kumimoji="1" sz="1800" kern="1200">
+    <a:lvl4pPr marL="1371600" algn="l" defTabSz="457200" rtl="0" eaLnBrk="1" latinLnBrk="0" hangingPunct="1">
+      <a:defRPr sz="1800" kern="1200">
         <a:solidFill>
           <a:schemeClr val="tx1"/>
         </a:solidFill>
@@ -54,8 +60,8 @@
         <a:cs typeface="+mn-cs"/>
       </a:defRPr>
     </a:lvl4pPr>
-    <a:lvl5pPr marL="1828800" algn="l" defTabSz="914400" rtl="0" eaLnBrk="1" latinLnBrk="0" hangingPunct="1">
-      <a:defRPr kumimoji="1" sz="1800" kern="1200">
+    <a:lvl5pPr marL="1828800" algn="l" defTabSz="457200" rtl="0" eaLnBrk="1" latinLnBrk="0" hangingPunct="1">
+      <a:defRPr sz="1800" kern="1200">
         <a:solidFill>
           <a:schemeClr val="tx1"/>
         </a:solidFill>
@@ -64,8 +70,8 @@
         <a:cs typeface="+mn-cs"/>
       </a:defRPr>
     </a:lvl5pPr>
-    <a:lvl6pPr marL="2286000" algn="l" defTabSz="914400" rtl="0" eaLnBrk="1" latinLnBrk="0" hangingPunct="1">
-      <a:defRPr kumimoji="1" sz="1800" kern="1200">
+    <a:lvl6pPr marL="2286000" algn="l" defTabSz="457200" rtl="0" eaLnBrk="1" latinLnBrk="0" hangingPunct="1">
+      <a:defRPr sz="1800" kern="1200">
         <a:solidFill>
           <a:schemeClr val="tx1"/>
         </a:solidFill>
@@ -74,8 +80,8 @@
         <a:cs typeface="+mn-cs"/>
       </a:defRPr>
     </a:lvl6pPr>
-    <a:lvl7pPr marL="2743200" algn="l" defTabSz="914400" rtl="0" eaLnBrk="1" latinLnBrk="0" hangingPunct="1">
-      <a:defRPr kumimoji="1" sz="1800" kern="1200">
+    <a:lvl7pPr marL="2743200" algn="l" defTabSz="457200" rtl="0" eaLnBrk="1" latinLnBrk="0" hangingPunct="1">
+      <a:defRPr sz="1800" kern="1200">
         <a:solidFill>
           <a:schemeClr val="tx1"/>
         </a:solidFill>
@@ -84,8 +90,8 @@
         <a:cs typeface="+mn-cs"/>
       </a:defRPr>
     </a:lvl7pPr>
-    <a:lvl8pPr marL="3200400" algn="l" defTabSz="914400" rtl="0" eaLnBrk="1" latinLnBrk="0" hangingPunct="1">
-      <a:defRPr kumimoji="1" sz="1800" kern="1200">
+    <a:lvl8pPr marL="3200400" algn="l" defTabSz="457200" rtl="0" eaLnBrk="1" latinLnBrk="0" hangingPunct="1">
+      <a:defRPr sz="1800" kern="1200">
         <a:solidFill>
           <a:schemeClr val="tx1"/>
         </a:solidFill>
@@ -94,8 +100,8 @@
         <a:cs typeface="+mn-cs"/>
       </a:defRPr>
     </a:lvl8pPr>
-    <a:lvl9pPr marL="3657600" algn="l" defTabSz="914400" rtl="0" eaLnBrk="1" latinLnBrk="0" hangingPunct="1">
-      <a:defRPr kumimoji="1" sz="1800" kern="1200">
+    <a:lvl9pPr marL="3657600" algn="l" defTabSz="457200" rtl="0" eaLnBrk="1" latinLnBrk="0" hangingPunct="1">
+      <a:defRPr sz="1800" kern="1200">
         <a:solidFill>
           <a:schemeClr val="tx1"/>
         </a:solidFill>
@@ -114,8 +120,16 @@
 </file>
 
 <file path=ppt/slideLayouts/slideLayout1.xml><?xml version="1.0" encoding="utf-8"?>
-<p:sldLayout xmlns:a="http://schemas.openxmlformats.org/drawingml/2006/main" xmlns:r="http://schemas.openxmlformats.org/officeDocument/2006/relationships" xmlns:p="http://schemas.openxmlformats.org/presentationml/2006/main" type="title" preserve="1">
+<p:sldLayout xmlns:a="http://schemas.openxmlformats.org/drawingml/2006/main" xmlns:r="http://schemas.openxmlformats.org/officeDocument/2006/relationships" xmlns:p="http://schemas.openxmlformats.org/presentationml/2006/main" showMasterSp="0" type="title" preserve="1">
   <p:cSld name="タイトル スライド">
+    <p:bg>
+      <p:bgPr>
+        <a:solidFill>
+          <a:schemeClr val="bg2"/>
+        </a:solidFill>
+        <a:effectLst/>
+      </p:bgPr>
+    </p:bg>
     <p:spTree>
       <p:nvGrpSpPr>
         <p:cNvPr id="1" name=""/>
@@ -132,13 +146,7 @@
       </p:grpSpPr>
       <p:sp>
         <p:nvSpPr>
-          <p:cNvPr id="2" name="タイトル 1">
-            <a:extLst>
-              <a:ext uri="{FF2B5EF4-FFF2-40B4-BE49-F238E27FC236}">
-                <a16:creationId xmlns:a16="http://schemas.microsoft.com/office/drawing/2014/main" id="{3BAEAE9F-6F7B-48EF-4FA8-22B59AC27B7A}"/>
-              </a:ext>
-            </a:extLst>
-          </p:cNvPr>
+          <p:cNvPr id="2" name="Title 1"/>
           <p:cNvSpPr>
             <a:spLocks noGrp="1"/>
           </p:cNvSpPr>
@@ -148,34 +156,35 @@
         </p:nvSpPr>
         <p:spPr>
           <a:xfrm>
-            <a:off x="1524000" y="1122363"/>
-            <a:ext cx="9144000" cy="2387600"/>
-          </a:xfrm>
-        </p:spPr>
-        <p:txBody>
-          <a:bodyPr anchor="b"/>
+            <a:off x="1915128" y="1788454"/>
+            <a:ext cx="8361229" cy="2098226"/>
+          </a:xfrm>
+        </p:spPr>
+        <p:txBody>
+          <a:bodyPr anchor="b">
+            <a:noAutofit/>
+          </a:bodyPr>
           <a:lstStyle>
             <a:lvl1pPr algn="ctr">
-              <a:defRPr sz="6000"/>
+              <a:defRPr sz="7200" cap="all" baseline="0">
+                <a:solidFill>
+                  <a:schemeClr val="tx2"/>
+                </a:solidFill>
+              </a:defRPr>
             </a:lvl1pPr>
           </a:lstStyle>
           <a:p>
             <a:r>
-              <a:rPr kumimoji="1" lang="ja-JP" altLang="en-US"/>
+              <a:rPr lang="ja-JP" altLang="en-US"/>
               <a:t>マスター タイトルの書式設定</a:t>
             </a:r>
-          </a:p>
-        </p:txBody>
-      </p:sp>
-      <p:sp>
-        <p:nvSpPr>
-          <p:cNvPr id="3" name="字幕 2">
-            <a:extLst>
-              <a:ext uri="{FF2B5EF4-FFF2-40B4-BE49-F238E27FC236}">
-                <a16:creationId xmlns:a16="http://schemas.microsoft.com/office/drawing/2014/main" id="{13EABEBF-7E77-9901-B74C-2CC2D4F6B374}"/>
-              </a:ext>
-            </a:extLst>
-          </p:cNvPr>
+            <a:endParaRPr lang="en-US" dirty="0"/>
+          </a:p>
+        </p:txBody>
+      </p:sp>
+      <p:sp>
+        <p:nvSpPr>
+          <p:cNvPr id="3" name="Subtitle 2"/>
           <p:cNvSpPr>
             <a:spLocks noGrp="1"/>
           </p:cNvSpPr>
@@ -185,16 +194,27 @@
         </p:nvSpPr>
         <p:spPr>
           <a:xfrm>
-            <a:off x="1524000" y="3602038"/>
-            <a:ext cx="9144000" cy="1655762"/>
-          </a:xfrm>
-        </p:spPr>
-        <p:txBody>
-          <a:bodyPr/>
+            <a:off x="2679906" y="3956279"/>
+            <a:ext cx="6831673" cy="1086237"/>
+          </a:xfrm>
+        </p:spPr>
+        <p:txBody>
+          <a:bodyPr>
+            <a:normAutofit/>
+          </a:bodyPr>
           <a:lstStyle>
             <a:lvl1pPr marL="0" indent="0" algn="ctr">
+              <a:lnSpc>
+                <a:spcPct val="112000"/>
+              </a:lnSpc>
+              <a:spcBef>
+                <a:spcPts val="0"/>
+              </a:spcBef>
+              <a:spcAft>
+                <a:spcPts val="0"/>
+              </a:spcAft>
               <a:buNone/>
-              <a:defRPr sz="2400"/>
+              <a:defRPr sz="2300"/>
             </a:lvl1pPr>
             <a:lvl2pPr marL="457200" indent="0" algn="ctr">
               <a:buNone/>
@@ -231,21 +251,16 @@
           </a:lstStyle>
           <a:p>
             <a:r>
-              <a:rPr kumimoji="1" lang="ja-JP" altLang="en-US"/>
+              <a:rPr lang="ja-JP" altLang="en-US"/>
               <a:t>マスター サブタイトルの書式設定</a:t>
             </a:r>
-          </a:p>
-        </p:txBody>
-      </p:sp>
-      <p:sp>
-        <p:nvSpPr>
-          <p:cNvPr id="4" name="日付プレースホルダー 3">
-            <a:extLst>
-              <a:ext uri="{FF2B5EF4-FFF2-40B4-BE49-F238E27FC236}">
-                <a16:creationId xmlns:a16="http://schemas.microsoft.com/office/drawing/2014/main" id="{0D795051-61C9-AA4F-099C-6E74D4A79136}"/>
-              </a:ext>
-            </a:extLst>
-          </p:cNvPr>
+            <a:endParaRPr lang="en-US" dirty="0"/>
+          </a:p>
+        </p:txBody>
+      </p:sp>
+      <p:sp>
+        <p:nvSpPr>
+          <p:cNvPr id="4" name="Date Placeholder 3"/>
           <p:cNvSpPr>
             <a:spLocks noGrp="1"/>
           </p:cNvSpPr>
@@ -253,14 +268,27 @@
             <p:ph type="dt" sz="half" idx="10"/>
           </p:nvPr>
         </p:nvSpPr>
-        <p:spPr/>
+        <p:spPr>
+          <a:xfrm>
+            <a:off x="752858" y="6453386"/>
+            <a:ext cx="1607944" cy="404614"/>
+          </a:xfrm>
+        </p:spPr>
         <p:txBody>
           <a:bodyPr/>
-          <a:lstStyle/>
+          <a:lstStyle>
+            <a:lvl1pPr>
+              <a:defRPr baseline="0">
+                <a:solidFill>
+                  <a:schemeClr val="tx2"/>
+                </a:solidFill>
+              </a:defRPr>
+            </a:lvl1pPr>
+          </a:lstStyle>
           <a:p>
             <a:fld id="{60AD3CCE-071F-4B8E-8AC5-D36671CE0CE8}" type="datetimeFigureOut">
               <a:rPr kumimoji="1" lang="ja-JP" altLang="en-US" smtClean="0"/>
-              <a:t>2026/7/3</a:t>
+              <a:t>2026/7/6</a:t>
             </a:fld>
             <a:endParaRPr kumimoji="1" lang="ja-JP" altLang="en-US"/>
           </a:p>
@@ -268,13 +296,7 @@
       </p:sp>
       <p:sp>
         <p:nvSpPr>
-          <p:cNvPr id="5" name="フッター プレースホルダー 4">
-            <a:extLst>
-              <a:ext uri="{FF2B5EF4-FFF2-40B4-BE49-F238E27FC236}">
-                <a16:creationId xmlns:a16="http://schemas.microsoft.com/office/drawing/2014/main" id="{08B2D722-EFC7-403D-46CC-90A55460B6DC}"/>
-              </a:ext>
-            </a:extLst>
-          </p:cNvPr>
+          <p:cNvPr id="5" name="Footer Placeholder 4"/>
           <p:cNvSpPr>
             <a:spLocks noGrp="1"/>
           </p:cNvSpPr>
@@ -282,10 +304,23 @@
             <p:ph type="ftr" sz="quarter" idx="11"/>
           </p:nvPr>
         </p:nvSpPr>
-        <p:spPr/>
+        <p:spPr>
+          <a:xfrm>
+            <a:off x="2584054" y="6453386"/>
+            <a:ext cx="7023377" cy="404614"/>
+          </a:xfrm>
+        </p:spPr>
         <p:txBody>
           <a:bodyPr/>
-          <a:lstStyle/>
+          <a:lstStyle>
+            <a:lvl1pPr algn="ctr">
+              <a:defRPr baseline="0">
+                <a:solidFill>
+                  <a:schemeClr val="tx2"/>
+                </a:solidFill>
+              </a:defRPr>
+            </a:lvl1pPr>
+          </a:lstStyle>
           <a:p>
             <a:endParaRPr kumimoji="1" lang="ja-JP" altLang="en-US"/>
           </a:p>
@@ -293,13 +328,7 @@
       </p:sp>
       <p:sp>
         <p:nvSpPr>
-          <p:cNvPr id="6" name="スライド番号プレースホルダー 5">
-            <a:extLst>
-              <a:ext uri="{FF2B5EF4-FFF2-40B4-BE49-F238E27FC236}">
-                <a16:creationId xmlns:a16="http://schemas.microsoft.com/office/drawing/2014/main" id="{85F1FCAB-1929-45A3-2DE9-C14424C54820}"/>
-              </a:ext>
-            </a:extLst>
-          </p:cNvPr>
+          <p:cNvPr id="6" name="Slide Number Placeholder 5"/>
           <p:cNvSpPr>
             <a:spLocks noGrp="1"/>
           </p:cNvSpPr>
@@ -307,10 +336,23 @@
             <p:ph type="sldNum" sz="quarter" idx="12"/>
           </p:nvPr>
         </p:nvSpPr>
-        <p:spPr/>
+        <p:spPr>
+          <a:xfrm>
+            <a:off x="9830683" y="6453386"/>
+            <a:ext cx="1596292" cy="404614"/>
+          </a:xfrm>
+        </p:spPr>
         <p:txBody>
           <a:bodyPr/>
-          <a:lstStyle/>
+          <a:lstStyle>
+            <a:lvl1pPr>
+              <a:defRPr baseline="0">
+                <a:solidFill>
+                  <a:schemeClr val="tx2"/>
+                </a:solidFill>
+              </a:defRPr>
+            </a:lvl1pPr>
+          </a:lstStyle>
           <a:p>
             <a:fld id="{B37D7E2B-F8ED-469C-8F05-023F1D7F84D6}" type="slidenum">
               <a:rPr kumimoji="1" lang="ja-JP" altLang="en-US" smtClean="0"/>
@@ -320,15 +362,144 @@
           </a:p>
         </p:txBody>
       </p:sp>
+      <p:grpSp>
+        <p:nvGrpSpPr>
+          <p:cNvPr id="7" name="Group 6"/>
+          <p:cNvGrpSpPr/>
+          <p:nvPr/>
+        </p:nvGrpSpPr>
+        <p:grpSpPr>
+          <a:xfrm>
+            <a:off x="752858" y="744469"/>
+            <a:ext cx="10674117" cy="5349671"/>
+            <a:chOff x="752858" y="744469"/>
+            <a:chExt cx="10674117" cy="5349671"/>
+          </a:xfrm>
+        </p:grpSpPr>
+        <p:sp>
+          <p:nvSpPr>
+            <p:cNvPr id="11" name="Freeform 6"/>
+            <p:cNvSpPr/>
+            <p:nvPr/>
+          </p:nvSpPr>
+          <p:spPr bwMode="auto">
+            <a:xfrm>
+              <a:off x="8151962" y="1685652"/>
+              <a:ext cx="3275013" cy="4408488"/>
+            </a:xfrm>
+            <a:custGeom>
+              <a:avLst/>
+              <a:gdLst/>
+              <a:ahLst/>
+              <a:cxnLst/>
+              <a:rect l="l" t="t" r="r" b="b"/>
+              <a:pathLst>
+                <a:path w="10000" h="10000">
+                  <a:moveTo>
+                    <a:pt x="8761" y="0"/>
+                  </a:moveTo>
+                  <a:lnTo>
+                    <a:pt x="10000" y="0"/>
+                  </a:lnTo>
+                  <a:lnTo>
+                    <a:pt x="10000" y="10000"/>
+                  </a:lnTo>
+                  <a:lnTo>
+                    <a:pt x="0" y="10000"/>
+                  </a:lnTo>
+                  <a:lnTo>
+                    <a:pt x="0" y="9126"/>
+                  </a:lnTo>
+                  <a:lnTo>
+                    <a:pt x="8761" y="9127"/>
+                  </a:lnTo>
+                  <a:lnTo>
+                    <a:pt x="8761" y="0"/>
+                  </a:lnTo>
+                  <a:close/>
+                </a:path>
+              </a:pathLst>
+            </a:custGeom>
+            <a:solidFill>
+              <a:schemeClr val="tx2"/>
+            </a:solidFill>
+            <a:ln w="0">
+              <a:noFill/>
+              <a:prstDash val="solid"/>
+              <a:round/>
+              <a:headEnd/>
+              <a:tailEnd/>
+            </a:ln>
+          </p:spPr>
+        </p:sp>
+        <p:sp>
+          <p:nvSpPr>
+            <p:cNvPr id="14" name="Freeform 6"/>
+            <p:cNvSpPr/>
+            <p:nvPr/>
+          </p:nvSpPr>
+          <p:spPr bwMode="auto">
+            <a:xfrm flipH="1" flipV="1">
+              <a:off x="752858" y="744469"/>
+              <a:ext cx="3275668" cy="4408488"/>
+            </a:xfrm>
+            <a:custGeom>
+              <a:avLst/>
+              <a:gdLst/>
+              <a:ahLst/>
+              <a:cxnLst/>
+              <a:rect l="l" t="t" r="r" b="b"/>
+              <a:pathLst>
+                <a:path w="10002" h="10000">
+                  <a:moveTo>
+                    <a:pt x="8763" y="0"/>
+                  </a:moveTo>
+                  <a:lnTo>
+                    <a:pt x="10002" y="0"/>
+                  </a:lnTo>
+                  <a:lnTo>
+                    <a:pt x="10002" y="10000"/>
+                  </a:lnTo>
+                  <a:lnTo>
+                    <a:pt x="2" y="10000"/>
+                  </a:lnTo>
+                  <a:cubicBezTo>
+                    <a:pt x="-2" y="9698"/>
+                    <a:pt x="4" y="9427"/>
+                    <a:pt x="0" y="9125"/>
+                  </a:cubicBezTo>
+                  <a:lnTo>
+                    <a:pt x="8763" y="9128"/>
+                  </a:lnTo>
+                  <a:lnTo>
+                    <a:pt x="8763" y="0"/>
+                  </a:lnTo>
+                  <a:close/>
+                </a:path>
+              </a:pathLst>
+            </a:custGeom>
+            <a:solidFill>
+              <a:schemeClr val="tx2"/>
+            </a:solidFill>
+            <a:ln w="0">
+              <a:noFill/>
+              <a:prstDash val="solid"/>
+              <a:round/>
+              <a:headEnd/>
+              <a:tailEnd/>
+            </a:ln>
+          </p:spPr>
+        </p:sp>
+      </p:grpSp>
     </p:spTree>
     <p:extLst>
       <p:ext uri="{BB962C8B-B14F-4D97-AF65-F5344CB8AC3E}">
-        <p14:creationId xmlns:p14="http://schemas.microsoft.com/office/powerpoint/2010/main" val="291195183"/>
+        <p14:creationId xmlns:p14="http://schemas.microsoft.com/office/powerpoint/2010/main" val="2958202245"/>
       </p:ext>
     </p:extLst>
   </p:cSld>
   <p:clrMapOvr>
-    <a:masterClrMapping/>
+    <a:overrideClrMapping bg1="lt1" tx1="dk1" bg2="lt2" tx2="dk2" accent1="accent1" accent2="accent2" accent3="accent3" accent4="accent4" accent5="accent5" accent6="accent6" hlink="hlink" folHlink="folHlink"/>
   </p:clrMapOvr>
 </p:sldLayout>
 </file>
@@ -352,13 +523,7 @@
       </p:grpSpPr>
       <p:sp>
         <p:nvSpPr>
-          <p:cNvPr id="2" name="タイトル 1">
-            <a:extLst>
-              <a:ext uri="{FF2B5EF4-FFF2-40B4-BE49-F238E27FC236}">
-                <a16:creationId xmlns:a16="http://schemas.microsoft.com/office/drawing/2014/main" id="{1133A3F7-51F7-E93E-D767-D0116D1DFFC5}"/>
-              </a:ext>
-            </a:extLst>
-          </p:cNvPr>
+          <p:cNvPr id="2" name="Title 1"/>
           <p:cNvSpPr>
             <a:spLocks noGrp="1"/>
           </p:cNvSpPr>
@@ -372,21 +537,16 @@
           <a:lstStyle/>
           <a:p>
             <a:r>
-              <a:rPr kumimoji="1" lang="ja-JP" altLang="en-US"/>
+              <a:rPr lang="ja-JP" altLang="en-US"/>
               <a:t>マスター タイトルの書式設定</a:t>
             </a:r>
-          </a:p>
-        </p:txBody>
-      </p:sp>
-      <p:sp>
-        <p:nvSpPr>
-          <p:cNvPr id="3" name="縦書きテキスト プレースホルダー 2">
-            <a:extLst>
-              <a:ext uri="{FF2B5EF4-FFF2-40B4-BE49-F238E27FC236}">
-                <a16:creationId xmlns:a16="http://schemas.microsoft.com/office/drawing/2014/main" id="{669DE89E-EBC6-57B9-A267-487FB752E8D5}"/>
-              </a:ext>
-            </a:extLst>
-          </p:cNvPr>
+            <a:endParaRPr lang="en-US" dirty="0"/>
+          </a:p>
+        </p:txBody>
+      </p:sp>
+      <p:sp>
+        <p:nvSpPr>
+          <p:cNvPr id="3" name="Vertical Text Placeholder 2"/>
           <p:cNvSpPr>
             <a:spLocks noGrp="1"/>
           </p:cNvSpPr>
@@ -394,88 +554,88 @@
             <p:ph type="body" orient="vert" idx="1"/>
           </p:nvPr>
         </p:nvSpPr>
-        <p:spPr/>
+        <p:spPr>
+          <a:xfrm>
+            <a:off x="1371600" y="2295525"/>
+            <a:ext cx="9601200" cy="3571875"/>
+          </a:xfrm>
+        </p:spPr>
         <p:txBody>
           <a:bodyPr vert="eaVert"/>
           <a:lstStyle/>
           <a:p>
             <a:pPr lvl="0"/>
             <a:r>
-              <a:rPr kumimoji="1" lang="ja-JP" altLang="en-US"/>
+              <a:rPr lang="ja-JP" altLang="en-US"/>
               <a:t>マスター テキストの書式設定</a:t>
             </a:r>
           </a:p>
           <a:p>
             <a:pPr lvl="1"/>
             <a:r>
-              <a:rPr kumimoji="1" lang="ja-JP" altLang="en-US"/>
+              <a:rPr lang="ja-JP" altLang="en-US"/>
               <a:t>第 </a:t>
             </a:r>
             <a:r>
-              <a:rPr kumimoji="1" lang="en-US" altLang="ja-JP"/>
+              <a:rPr lang="en-US" altLang="ja-JP"/>
               <a:t>2 </a:t>
             </a:r>
             <a:r>
-              <a:rPr kumimoji="1" lang="ja-JP" altLang="en-US"/>
+              <a:rPr lang="ja-JP" altLang="en-US"/>
               <a:t>レベル</a:t>
             </a:r>
           </a:p>
           <a:p>
             <a:pPr lvl="2"/>
             <a:r>
-              <a:rPr kumimoji="1" lang="ja-JP" altLang="en-US"/>
+              <a:rPr lang="ja-JP" altLang="en-US"/>
               <a:t>第 </a:t>
             </a:r>
             <a:r>
-              <a:rPr kumimoji="1" lang="en-US" altLang="ja-JP"/>
+              <a:rPr lang="en-US" altLang="ja-JP"/>
               <a:t>3 </a:t>
             </a:r>
             <a:r>
-              <a:rPr kumimoji="1" lang="ja-JP" altLang="en-US"/>
+              <a:rPr lang="ja-JP" altLang="en-US"/>
               <a:t>レベル</a:t>
             </a:r>
           </a:p>
           <a:p>
             <a:pPr lvl="3"/>
             <a:r>
-              <a:rPr kumimoji="1" lang="ja-JP" altLang="en-US"/>
+              <a:rPr lang="ja-JP" altLang="en-US"/>
               <a:t>第 </a:t>
             </a:r>
             <a:r>
-              <a:rPr kumimoji="1" lang="en-US" altLang="ja-JP"/>
+              <a:rPr lang="en-US" altLang="ja-JP"/>
               <a:t>4 </a:t>
             </a:r>
             <a:r>
-              <a:rPr kumimoji="1" lang="ja-JP" altLang="en-US"/>
+              <a:rPr lang="ja-JP" altLang="en-US"/>
               <a:t>レベル</a:t>
             </a:r>
           </a:p>
           <a:p>
             <a:pPr lvl="4"/>
             <a:r>
-              <a:rPr kumimoji="1" lang="ja-JP" altLang="en-US"/>
+              <a:rPr lang="ja-JP" altLang="en-US"/>
               <a:t>第 </a:t>
             </a:r>
             <a:r>
-              <a:rPr kumimoji="1" lang="en-US" altLang="ja-JP"/>
+              <a:rPr lang="en-US" altLang="ja-JP"/>
               <a:t>5 </a:t>
             </a:r>
             <a:r>
-              <a:rPr kumimoji="1" lang="ja-JP" altLang="en-US"/>
+              <a:rPr lang="ja-JP" altLang="en-US"/>
               <a:t>レベル</a:t>
             </a:r>
-          </a:p>
-        </p:txBody>
-      </p:sp>
-      <p:sp>
-        <p:nvSpPr>
-          <p:cNvPr id="4" name="日付プレースホルダー 3">
-            <a:extLst>
-              <a:ext uri="{FF2B5EF4-FFF2-40B4-BE49-F238E27FC236}">
-                <a16:creationId xmlns:a16="http://schemas.microsoft.com/office/drawing/2014/main" id="{ECCBCDBE-AA0D-C13E-DC18-6C54D41CCBA3}"/>
-              </a:ext>
-            </a:extLst>
-          </p:cNvPr>
+            <a:endParaRPr lang="en-US" dirty="0"/>
+          </a:p>
+        </p:txBody>
+      </p:sp>
+      <p:sp>
+        <p:nvSpPr>
+          <p:cNvPr id="4" name="Date Placeholder 3"/>
           <p:cNvSpPr>
             <a:spLocks noGrp="1"/>
           </p:cNvSpPr>
@@ -490,7 +650,7 @@
           <a:p>
             <a:fld id="{60AD3CCE-071F-4B8E-8AC5-D36671CE0CE8}" type="datetimeFigureOut">
               <a:rPr kumimoji="1" lang="ja-JP" altLang="en-US" smtClean="0"/>
-              <a:t>2026/7/3</a:t>
+              <a:t>2026/7/6</a:t>
             </a:fld>
             <a:endParaRPr kumimoji="1" lang="ja-JP" altLang="en-US"/>
           </a:p>
@@ -498,13 +658,7 @@
       </p:sp>
       <p:sp>
         <p:nvSpPr>
-          <p:cNvPr id="5" name="フッター プレースホルダー 4">
-            <a:extLst>
-              <a:ext uri="{FF2B5EF4-FFF2-40B4-BE49-F238E27FC236}">
-                <a16:creationId xmlns:a16="http://schemas.microsoft.com/office/drawing/2014/main" id="{392A4E2F-790E-6761-F9A7-CB9AC8E94D56}"/>
-              </a:ext>
-            </a:extLst>
-          </p:cNvPr>
+          <p:cNvPr id="5" name="Footer Placeholder 4"/>
           <p:cNvSpPr>
             <a:spLocks noGrp="1"/>
           </p:cNvSpPr>
@@ -523,13 +677,7 @@
       </p:sp>
       <p:sp>
         <p:nvSpPr>
-          <p:cNvPr id="6" name="スライド番号プレースホルダー 5">
-            <a:extLst>
-              <a:ext uri="{FF2B5EF4-FFF2-40B4-BE49-F238E27FC236}">
-                <a16:creationId xmlns:a16="http://schemas.microsoft.com/office/drawing/2014/main" id="{5ABD47E2-F83A-1A3D-AD8B-D3DC12159B93}"/>
-              </a:ext>
-            </a:extLst>
-          </p:cNvPr>
+          <p:cNvPr id="6" name="Slide Number Placeholder 5"/>
           <p:cNvSpPr>
             <a:spLocks noGrp="1"/>
           </p:cNvSpPr>
@@ -553,7 +701,7 @@
     </p:spTree>
     <p:extLst>
       <p:ext uri="{BB962C8B-B14F-4D97-AF65-F5344CB8AC3E}">
-        <p14:creationId xmlns:p14="http://schemas.microsoft.com/office/powerpoint/2010/main" val="3695546409"/>
+        <p14:creationId xmlns:p14="http://schemas.microsoft.com/office/powerpoint/2010/main" val="1689628314"/>
       </p:ext>
     </p:extLst>
   </p:cSld>
@@ -582,13 +730,7 @@
       </p:grpSpPr>
       <p:sp>
         <p:nvSpPr>
-          <p:cNvPr id="2" name="縦書きタイトル 1">
-            <a:extLst>
-              <a:ext uri="{FF2B5EF4-FFF2-40B4-BE49-F238E27FC236}">
-                <a16:creationId xmlns:a16="http://schemas.microsoft.com/office/drawing/2014/main" id="{4C3EC8DE-AD60-500F-4BB4-ACBAAB55E674}"/>
-              </a:ext>
-            </a:extLst>
-          </p:cNvPr>
+          <p:cNvPr id="2" name="Vertical Title 1"/>
           <p:cNvSpPr>
             <a:spLocks noGrp="1"/>
           </p:cNvSpPr>
@@ -598,8 +740,8 @@
         </p:nvSpPr>
         <p:spPr>
           <a:xfrm>
-            <a:off x="8724900" y="365125"/>
-            <a:ext cx="2628900" cy="5811838"/>
+            <a:off x="9596561" y="624156"/>
+            <a:ext cx="1565766" cy="5243244"/>
           </a:xfrm>
         </p:spPr>
         <p:txBody>
@@ -607,21 +749,16 @@
           <a:lstStyle/>
           <a:p>
             <a:r>
-              <a:rPr kumimoji="1" lang="ja-JP" altLang="en-US"/>
+              <a:rPr lang="ja-JP" altLang="en-US"/>
               <a:t>マスター タイトルの書式設定</a:t>
             </a:r>
-          </a:p>
-        </p:txBody>
-      </p:sp>
-      <p:sp>
-        <p:nvSpPr>
-          <p:cNvPr id="3" name="縦書きテキスト プレースホルダー 2">
-            <a:extLst>
-              <a:ext uri="{FF2B5EF4-FFF2-40B4-BE49-F238E27FC236}">
-                <a16:creationId xmlns:a16="http://schemas.microsoft.com/office/drawing/2014/main" id="{43AD64F5-B1FC-F273-3143-E76595ED0F2A}"/>
-              </a:ext>
-            </a:extLst>
-          </p:cNvPr>
+            <a:endParaRPr lang="en-US" dirty="0"/>
+          </a:p>
+        </p:txBody>
+      </p:sp>
+      <p:sp>
+        <p:nvSpPr>
+          <p:cNvPr id="3" name="Vertical Text Placeholder 2"/>
           <p:cNvSpPr>
             <a:spLocks noGrp="1"/>
           </p:cNvSpPr>
@@ -631,8 +768,8 @@
         </p:nvSpPr>
         <p:spPr>
           <a:xfrm>
-            <a:off x="838200" y="365125"/>
-            <a:ext cx="7734300" cy="5811838"/>
+            <a:off x="1371600" y="624156"/>
+            <a:ext cx="8179641" cy="5243244"/>
           </a:xfrm>
         </p:spPr>
         <p:txBody>
@@ -641,81 +778,76 @@
           <a:p>
             <a:pPr lvl="0"/>
             <a:r>
-              <a:rPr kumimoji="1" lang="ja-JP" altLang="en-US"/>
+              <a:rPr lang="ja-JP" altLang="en-US"/>
               <a:t>マスター テキストの書式設定</a:t>
             </a:r>
           </a:p>
           <a:p>
             <a:pPr lvl="1"/>
             <a:r>
-              <a:rPr kumimoji="1" lang="ja-JP" altLang="en-US"/>
+              <a:rPr lang="ja-JP" altLang="en-US"/>
               <a:t>第 </a:t>
             </a:r>
             <a:r>
-              <a:rPr kumimoji="1" lang="en-US" altLang="ja-JP"/>
+              <a:rPr lang="en-US" altLang="ja-JP"/>
               <a:t>2 </a:t>
             </a:r>
             <a:r>
-              <a:rPr kumimoji="1" lang="ja-JP" altLang="en-US"/>
+              <a:rPr lang="ja-JP" altLang="en-US"/>
               <a:t>レベル</a:t>
             </a:r>
           </a:p>
           <a:p>
             <a:pPr lvl="2"/>
             <a:r>
-              <a:rPr kumimoji="1" lang="ja-JP" altLang="en-US"/>
+              <a:rPr lang="ja-JP" altLang="en-US"/>
               <a:t>第 </a:t>
             </a:r>
             <a:r>
-              <a:rPr kumimoji="1" lang="en-US" altLang="ja-JP"/>
+              <a:rPr lang="en-US" altLang="ja-JP"/>
               <a:t>3 </a:t>
             </a:r>
             <a:r>
-              <a:rPr kumimoji="1" lang="ja-JP" altLang="en-US"/>
+              <a:rPr lang="ja-JP" altLang="en-US"/>
               <a:t>レベル</a:t>
             </a:r>
           </a:p>
           <a:p>
             <a:pPr lvl="3"/>
             <a:r>
-              <a:rPr kumimoji="1" lang="ja-JP" altLang="en-US"/>
+              <a:rPr lang="ja-JP" altLang="en-US"/>
               <a:t>第 </a:t>
             </a:r>
             <a:r>
-              <a:rPr kumimoji="1" lang="en-US" altLang="ja-JP"/>
+              <a:rPr lang="en-US" altLang="ja-JP"/>
               <a:t>4 </a:t>
             </a:r>
             <a:r>
-              <a:rPr kumimoji="1" lang="ja-JP" altLang="en-US"/>
+              <a:rPr lang="ja-JP" altLang="en-US"/>
               <a:t>レベル</a:t>
             </a:r>
           </a:p>
           <a:p>
             <a:pPr lvl="4"/>
             <a:r>
-              <a:rPr kumimoji="1" lang="ja-JP" altLang="en-US"/>
+              <a:rPr lang="ja-JP" altLang="en-US"/>
               <a:t>第 </a:t>
             </a:r>
             <a:r>
-              <a:rPr kumimoji="1" lang="en-US" altLang="ja-JP"/>
+              <a:rPr lang="en-US" altLang="ja-JP"/>
               <a:t>5 </a:t>
             </a:r>
             <a:r>
-              <a:rPr kumimoji="1" lang="ja-JP" altLang="en-US"/>
+              <a:rPr lang="ja-JP" altLang="en-US"/>
               <a:t>レベル</a:t>
             </a:r>
-          </a:p>
-        </p:txBody>
-      </p:sp>
-      <p:sp>
-        <p:nvSpPr>
-          <p:cNvPr id="4" name="日付プレースホルダー 3">
-            <a:extLst>
-              <a:ext uri="{FF2B5EF4-FFF2-40B4-BE49-F238E27FC236}">
-                <a16:creationId xmlns:a16="http://schemas.microsoft.com/office/drawing/2014/main" id="{88BC94C5-FDF5-71DE-4D87-B5790E585D2E}"/>
-              </a:ext>
-            </a:extLst>
-          </p:cNvPr>
+            <a:endParaRPr lang="en-US" dirty="0"/>
+          </a:p>
+        </p:txBody>
+      </p:sp>
+      <p:sp>
+        <p:nvSpPr>
+          <p:cNvPr id="4" name="Date Placeholder 3"/>
           <p:cNvSpPr>
             <a:spLocks noGrp="1"/>
           </p:cNvSpPr>
@@ -730,7 +862,7 @@
           <a:p>
             <a:fld id="{60AD3CCE-071F-4B8E-8AC5-D36671CE0CE8}" type="datetimeFigureOut">
               <a:rPr kumimoji="1" lang="ja-JP" altLang="en-US" smtClean="0"/>
-              <a:t>2026/7/3</a:t>
+              <a:t>2026/7/6</a:t>
             </a:fld>
             <a:endParaRPr kumimoji="1" lang="ja-JP" altLang="en-US"/>
           </a:p>
@@ -738,13 +870,7 @@
       </p:sp>
       <p:sp>
         <p:nvSpPr>
-          <p:cNvPr id="5" name="フッター プレースホルダー 4">
-            <a:extLst>
-              <a:ext uri="{FF2B5EF4-FFF2-40B4-BE49-F238E27FC236}">
-                <a16:creationId xmlns:a16="http://schemas.microsoft.com/office/drawing/2014/main" id="{87655EC1-BB9F-C7F1-CAA1-911E38915943}"/>
-              </a:ext>
-            </a:extLst>
-          </p:cNvPr>
+          <p:cNvPr id="5" name="Footer Placeholder 4"/>
           <p:cNvSpPr>
             <a:spLocks noGrp="1"/>
           </p:cNvSpPr>
@@ -763,13 +889,7 @@
       </p:sp>
       <p:sp>
         <p:nvSpPr>
-          <p:cNvPr id="6" name="スライド番号プレースホルダー 5">
-            <a:extLst>
-              <a:ext uri="{FF2B5EF4-FFF2-40B4-BE49-F238E27FC236}">
-                <a16:creationId xmlns:a16="http://schemas.microsoft.com/office/drawing/2014/main" id="{0AEB3415-F30B-AA64-C899-F5E38C47C5D6}"/>
-              </a:ext>
-            </a:extLst>
-          </p:cNvPr>
+          <p:cNvPr id="6" name="Slide Number Placeholder 5"/>
           <p:cNvSpPr>
             <a:spLocks noGrp="1"/>
           </p:cNvSpPr>
@@ -793,7 +913,7 @@
     </p:spTree>
     <p:extLst>
       <p:ext uri="{BB962C8B-B14F-4D97-AF65-F5344CB8AC3E}">
-        <p14:creationId xmlns:p14="http://schemas.microsoft.com/office/powerpoint/2010/main" val="1179145074"/>
+        <p14:creationId xmlns:p14="http://schemas.microsoft.com/office/powerpoint/2010/main" val="1592345013"/>
       </p:ext>
     </p:extLst>
   </p:cSld>
@@ -822,13 +942,7 @@
       </p:grpSpPr>
       <p:sp>
         <p:nvSpPr>
-          <p:cNvPr id="2" name="タイトル 1">
-            <a:extLst>
-              <a:ext uri="{FF2B5EF4-FFF2-40B4-BE49-F238E27FC236}">
-                <a16:creationId xmlns:a16="http://schemas.microsoft.com/office/drawing/2014/main" id="{B0B9F323-8660-637E-A5B6-1237E2BE1066}"/>
-              </a:ext>
-            </a:extLst>
-          </p:cNvPr>
+          <p:cNvPr id="2" name="Title 1"/>
           <p:cNvSpPr>
             <a:spLocks noGrp="1"/>
           </p:cNvSpPr>
@@ -842,21 +956,16 @@
           <a:lstStyle/>
           <a:p>
             <a:r>
-              <a:rPr kumimoji="1" lang="ja-JP" altLang="en-US"/>
+              <a:rPr lang="ja-JP" altLang="en-US"/>
               <a:t>マスター タイトルの書式設定</a:t>
             </a:r>
-          </a:p>
-        </p:txBody>
-      </p:sp>
-      <p:sp>
-        <p:nvSpPr>
-          <p:cNvPr id="3" name="コンテンツ プレースホルダー 2">
-            <a:extLst>
-              <a:ext uri="{FF2B5EF4-FFF2-40B4-BE49-F238E27FC236}">
-                <a16:creationId xmlns:a16="http://schemas.microsoft.com/office/drawing/2014/main" id="{E239DEBD-723B-695A-84B5-9ED132FECDC8}"/>
-              </a:ext>
-            </a:extLst>
-          </p:cNvPr>
+            <a:endParaRPr lang="en-US" dirty="0"/>
+          </a:p>
+        </p:txBody>
+      </p:sp>
+      <p:sp>
+        <p:nvSpPr>
+          <p:cNvPr id="3" name="Content Placeholder 2"/>
           <p:cNvSpPr>
             <a:spLocks noGrp="1"/>
           </p:cNvSpPr>
@@ -871,81 +980,76 @@
           <a:p>
             <a:pPr lvl="0"/>
             <a:r>
-              <a:rPr kumimoji="1" lang="ja-JP" altLang="en-US"/>
+              <a:rPr lang="ja-JP" altLang="en-US"/>
               <a:t>マスター テキストの書式設定</a:t>
             </a:r>
           </a:p>
           <a:p>
             <a:pPr lvl="1"/>
             <a:r>
-              <a:rPr kumimoji="1" lang="ja-JP" altLang="en-US"/>
+              <a:rPr lang="ja-JP" altLang="en-US"/>
               <a:t>第 </a:t>
             </a:r>
             <a:r>
-              <a:rPr kumimoji="1" lang="en-US" altLang="ja-JP"/>
+              <a:rPr lang="en-US" altLang="ja-JP"/>
               <a:t>2 </a:t>
             </a:r>
             <a:r>
-              <a:rPr kumimoji="1" lang="ja-JP" altLang="en-US"/>
+              <a:rPr lang="ja-JP" altLang="en-US"/>
               <a:t>レベル</a:t>
             </a:r>
           </a:p>
           <a:p>
             <a:pPr lvl="2"/>
             <a:r>
-              <a:rPr kumimoji="1" lang="ja-JP" altLang="en-US"/>
+              <a:rPr lang="ja-JP" altLang="en-US"/>
               <a:t>第 </a:t>
             </a:r>
             <a:r>
-              <a:rPr kumimoji="1" lang="en-US" altLang="ja-JP"/>
+              <a:rPr lang="en-US" altLang="ja-JP"/>
               <a:t>3 </a:t>
             </a:r>
             <a:r>
-              <a:rPr kumimoji="1" lang="ja-JP" altLang="en-US"/>
+              <a:rPr lang="ja-JP" altLang="en-US"/>
               <a:t>レベル</a:t>
             </a:r>
           </a:p>
           <a:p>
             <a:pPr lvl="3"/>
             <a:r>
-              <a:rPr kumimoji="1" lang="ja-JP" altLang="en-US"/>
+              <a:rPr lang="ja-JP" altLang="en-US"/>
               <a:t>第 </a:t>
             </a:r>
             <a:r>
-              <a:rPr kumimoji="1" lang="en-US" altLang="ja-JP"/>
+              <a:rPr lang="en-US" altLang="ja-JP"/>
               <a:t>4 </a:t>
             </a:r>
             <a:r>
-              <a:rPr kumimoji="1" lang="ja-JP" altLang="en-US"/>
+              <a:rPr lang="ja-JP" altLang="en-US"/>
               <a:t>レベル</a:t>
             </a:r>
           </a:p>
           <a:p>
             <a:pPr lvl="4"/>
             <a:r>
-              <a:rPr kumimoji="1" lang="ja-JP" altLang="en-US"/>
+              <a:rPr lang="ja-JP" altLang="en-US"/>
               <a:t>第 </a:t>
             </a:r>
             <a:r>
-              <a:rPr kumimoji="1" lang="en-US" altLang="ja-JP"/>
+              <a:rPr lang="en-US" altLang="ja-JP"/>
               <a:t>5 </a:t>
             </a:r>
             <a:r>
-              <a:rPr kumimoji="1" lang="ja-JP" altLang="en-US"/>
+              <a:rPr lang="ja-JP" altLang="en-US"/>
               <a:t>レベル</a:t>
             </a:r>
-          </a:p>
-        </p:txBody>
-      </p:sp>
-      <p:sp>
-        <p:nvSpPr>
-          <p:cNvPr id="4" name="日付プレースホルダー 3">
-            <a:extLst>
-              <a:ext uri="{FF2B5EF4-FFF2-40B4-BE49-F238E27FC236}">
-                <a16:creationId xmlns:a16="http://schemas.microsoft.com/office/drawing/2014/main" id="{3A549422-83A0-1882-87F1-6104080B009A}"/>
-              </a:ext>
-            </a:extLst>
-          </p:cNvPr>
+            <a:endParaRPr lang="en-US" dirty="0"/>
+          </a:p>
+        </p:txBody>
+      </p:sp>
+      <p:sp>
+        <p:nvSpPr>
+          <p:cNvPr id="4" name="Date Placeholder 3"/>
           <p:cNvSpPr>
             <a:spLocks noGrp="1"/>
           </p:cNvSpPr>
@@ -960,7 +1064,7 @@
           <a:p>
             <a:fld id="{60AD3CCE-071F-4B8E-8AC5-D36671CE0CE8}" type="datetimeFigureOut">
               <a:rPr kumimoji="1" lang="ja-JP" altLang="en-US" smtClean="0"/>
-              <a:t>2026/7/3</a:t>
+              <a:t>2026/7/6</a:t>
             </a:fld>
             <a:endParaRPr kumimoji="1" lang="ja-JP" altLang="en-US"/>
           </a:p>
@@ -968,13 +1072,7 @@
       </p:sp>
       <p:sp>
         <p:nvSpPr>
-          <p:cNvPr id="5" name="フッター プレースホルダー 4">
-            <a:extLst>
-              <a:ext uri="{FF2B5EF4-FFF2-40B4-BE49-F238E27FC236}">
-                <a16:creationId xmlns:a16="http://schemas.microsoft.com/office/drawing/2014/main" id="{0665903C-E77F-F3AC-35B4-793E1A451424}"/>
-              </a:ext>
-            </a:extLst>
-          </p:cNvPr>
+          <p:cNvPr id="5" name="Footer Placeholder 4"/>
           <p:cNvSpPr>
             <a:spLocks noGrp="1"/>
           </p:cNvSpPr>
@@ -993,13 +1091,7 @@
       </p:sp>
       <p:sp>
         <p:nvSpPr>
-          <p:cNvPr id="6" name="スライド番号プレースホルダー 5">
-            <a:extLst>
-              <a:ext uri="{FF2B5EF4-FFF2-40B4-BE49-F238E27FC236}">
-                <a16:creationId xmlns:a16="http://schemas.microsoft.com/office/drawing/2014/main" id="{6D803432-7F93-227E-0267-03C8AD7D7254}"/>
-              </a:ext>
-            </a:extLst>
-          </p:cNvPr>
+          <p:cNvPr id="6" name="Slide Number Placeholder 5"/>
           <p:cNvSpPr>
             <a:spLocks noGrp="1"/>
           </p:cNvSpPr>
@@ -1023,7 +1115,7 @@
     </p:spTree>
     <p:extLst>
       <p:ext uri="{BB962C8B-B14F-4D97-AF65-F5344CB8AC3E}">
-        <p14:creationId xmlns:p14="http://schemas.microsoft.com/office/powerpoint/2010/main" val="967851922"/>
+        <p14:creationId xmlns:p14="http://schemas.microsoft.com/office/powerpoint/2010/main" val="1459478957"/>
       </p:ext>
     </p:extLst>
   </p:cSld>
@@ -1034,8 +1126,13 @@
 </file>
 
 <file path=ppt/slideLayouts/slideLayout3.xml><?xml version="1.0" encoding="utf-8"?>
-<p:sldLayout xmlns:a="http://schemas.openxmlformats.org/drawingml/2006/main" xmlns:r="http://schemas.openxmlformats.org/officeDocument/2006/relationships" xmlns:p="http://schemas.openxmlformats.org/presentationml/2006/main" type="secHead" preserve="1">
+<p:sldLayout xmlns:a="http://schemas.openxmlformats.org/drawingml/2006/main" xmlns:r="http://schemas.openxmlformats.org/officeDocument/2006/relationships" xmlns:p="http://schemas.openxmlformats.org/presentationml/2006/main" showMasterSp="0" type="secHead" preserve="1">
   <p:cSld name="セクション見出し">
+    <p:bg>
+      <p:bgRef idx="1001">
+        <a:schemeClr val="bg2"/>
+      </p:bgRef>
+    </p:bg>
     <p:spTree>
       <p:nvGrpSpPr>
         <p:cNvPr id="1" name=""/>
@@ -1052,13 +1149,7 @@
       </p:grpSpPr>
       <p:sp>
         <p:nvSpPr>
-          <p:cNvPr id="2" name="タイトル 1">
-            <a:extLst>
-              <a:ext uri="{FF2B5EF4-FFF2-40B4-BE49-F238E27FC236}">
-                <a16:creationId xmlns:a16="http://schemas.microsoft.com/office/drawing/2014/main" id="{78ADA0D3-6738-6D3B-4042-BD1EA27A7501}"/>
-              </a:ext>
-            </a:extLst>
-          </p:cNvPr>
+          <p:cNvPr id="2" name="Title 1"/>
           <p:cNvSpPr>
             <a:spLocks noGrp="1"/>
           </p:cNvSpPr>
@@ -1068,34 +1159,35 @@
         </p:nvSpPr>
         <p:spPr>
           <a:xfrm>
-            <a:off x="831850" y="1709738"/>
-            <a:ext cx="10515600" cy="2852737"/>
-          </a:xfrm>
-        </p:spPr>
-        <p:txBody>
-          <a:bodyPr anchor="b"/>
+            <a:off x="765025" y="1301360"/>
+            <a:ext cx="9612971" cy="2852737"/>
+          </a:xfrm>
+        </p:spPr>
+        <p:txBody>
+          <a:bodyPr anchor="b">
+            <a:normAutofit/>
+          </a:bodyPr>
           <a:lstStyle>
-            <a:lvl1pPr>
-              <a:defRPr sz="6000"/>
+            <a:lvl1pPr algn="r">
+              <a:defRPr sz="7200" cap="all" baseline="0">
+                <a:solidFill>
+                  <a:schemeClr val="tx2"/>
+                </a:solidFill>
+              </a:defRPr>
             </a:lvl1pPr>
           </a:lstStyle>
           <a:p>
             <a:r>
-              <a:rPr kumimoji="1" lang="ja-JP" altLang="en-US"/>
+              <a:rPr lang="ja-JP" altLang="en-US"/>
               <a:t>マスター タイトルの書式設定</a:t>
             </a:r>
-          </a:p>
-        </p:txBody>
-      </p:sp>
-      <p:sp>
-        <p:nvSpPr>
-          <p:cNvPr id="3" name="テキスト プレースホルダー 2">
-            <a:extLst>
-              <a:ext uri="{FF2B5EF4-FFF2-40B4-BE49-F238E27FC236}">
-                <a16:creationId xmlns:a16="http://schemas.microsoft.com/office/drawing/2014/main" id="{05B6C9D4-4485-49D1-A32A-665AB9C12AF7}"/>
-              </a:ext>
-            </a:extLst>
-          </p:cNvPr>
+            <a:endParaRPr lang="en-US" dirty="0"/>
+          </a:p>
+        </p:txBody>
+      </p:sp>
+      <p:sp>
+        <p:nvSpPr>
+          <p:cNvPr id="3" name="Text Placeholder 2"/>
           <p:cNvSpPr>
             <a:spLocks noGrp="1"/>
           </p:cNvSpPr>
@@ -1105,20 +1197,27 @@
         </p:nvSpPr>
         <p:spPr>
           <a:xfrm>
-            <a:off x="831850" y="4589463"/>
-            <a:ext cx="10515600" cy="1500187"/>
+            <a:off x="765025" y="4216328"/>
+            <a:ext cx="9612971" cy="1143324"/>
           </a:xfrm>
         </p:spPr>
         <p:txBody>
           <a:bodyPr/>
           <a:lstStyle>
-            <a:lvl1pPr marL="0" indent="0">
+            <a:lvl1pPr marL="0" indent="0" algn="r">
+              <a:lnSpc>
+                <a:spcPct val="112000"/>
+              </a:lnSpc>
+              <a:spcBef>
+                <a:spcPts val="0"/>
+              </a:spcBef>
+              <a:spcAft>
+                <a:spcPts val="0"/>
+              </a:spcAft>
               <a:buNone/>
               <a:defRPr sz="2400">
                 <a:solidFill>
-                  <a:schemeClr val="tx1">
-                    <a:tint val="82000"/>
-                  </a:schemeClr>
+                  <a:schemeClr val="tx2"/>
                 </a:solidFill>
               </a:defRPr>
             </a:lvl1pPr>
@@ -1127,7 +1226,7 @@
               <a:defRPr sz="2000">
                 <a:solidFill>
                   <a:schemeClr val="tx1">
-                    <a:tint val="82000"/>
+                    <a:tint val="75000"/>
                   </a:schemeClr>
                 </a:solidFill>
               </a:defRPr>
@@ -1137,7 +1236,7 @@
               <a:defRPr sz="1800">
                 <a:solidFill>
                   <a:schemeClr val="tx1">
-                    <a:tint val="82000"/>
+                    <a:tint val="75000"/>
                   </a:schemeClr>
                 </a:solidFill>
               </a:defRPr>
@@ -1147,7 +1246,7 @@
               <a:defRPr sz="1600">
                 <a:solidFill>
                   <a:schemeClr val="tx1">
-                    <a:tint val="82000"/>
+                    <a:tint val="75000"/>
                   </a:schemeClr>
                 </a:solidFill>
               </a:defRPr>
@@ -1157,7 +1256,7 @@
               <a:defRPr sz="1600">
                 <a:solidFill>
                   <a:schemeClr val="tx1">
-                    <a:tint val="82000"/>
+                    <a:tint val="75000"/>
                   </a:schemeClr>
                 </a:solidFill>
               </a:defRPr>
@@ -1167,7 +1266,7 @@
               <a:defRPr sz="1600">
                 <a:solidFill>
                   <a:schemeClr val="tx1">
-                    <a:tint val="82000"/>
+                    <a:tint val="75000"/>
                   </a:schemeClr>
                 </a:solidFill>
               </a:defRPr>
@@ -1177,7 +1276,7 @@
               <a:defRPr sz="1600">
                 <a:solidFill>
                   <a:schemeClr val="tx1">
-                    <a:tint val="82000"/>
+                    <a:tint val="75000"/>
                   </a:schemeClr>
                 </a:solidFill>
               </a:defRPr>
@@ -1187,7 +1286,7 @@
               <a:defRPr sz="1600">
                 <a:solidFill>
                   <a:schemeClr val="tx1">
-                    <a:tint val="82000"/>
+                    <a:tint val="75000"/>
                   </a:schemeClr>
                 </a:solidFill>
               </a:defRPr>
@@ -1197,7 +1296,7 @@
               <a:defRPr sz="1600">
                 <a:solidFill>
                   <a:schemeClr val="tx1">
-                    <a:tint val="82000"/>
+                    <a:tint val="75000"/>
                   </a:schemeClr>
                 </a:solidFill>
               </a:defRPr>
@@ -1206,7 +1305,7 @@
           <a:p>
             <a:pPr lvl="0"/>
             <a:r>
-              <a:rPr kumimoji="1" lang="ja-JP" altLang="en-US"/>
+              <a:rPr lang="ja-JP" altLang="en-US"/>
               <a:t>マスター テキストの書式設定</a:t>
             </a:r>
           </a:p>
@@ -1214,13 +1313,7 @@
       </p:sp>
       <p:sp>
         <p:nvSpPr>
-          <p:cNvPr id="4" name="日付プレースホルダー 3">
-            <a:extLst>
-              <a:ext uri="{FF2B5EF4-FFF2-40B4-BE49-F238E27FC236}">
-                <a16:creationId xmlns:a16="http://schemas.microsoft.com/office/drawing/2014/main" id="{4E107AE7-EC38-B91B-A10F-B47FAC12E057}"/>
-              </a:ext>
-            </a:extLst>
-          </p:cNvPr>
+          <p:cNvPr id="4" name="Date Placeholder 3"/>
           <p:cNvSpPr>
             <a:spLocks noGrp="1"/>
           </p:cNvSpPr>
@@ -1228,14 +1321,27 @@
             <p:ph type="dt" sz="half" idx="10"/>
           </p:nvPr>
         </p:nvSpPr>
-        <p:spPr/>
+        <p:spPr>
+          <a:xfrm>
+            <a:off x="738908" y="6453386"/>
+            <a:ext cx="1622409" cy="404614"/>
+          </a:xfrm>
+        </p:spPr>
         <p:txBody>
           <a:bodyPr/>
-          <a:lstStyle/>
+          <a:lstStyle>
+            <a:lvl1pPr>
+              <a:defRPr>
+                <a:solidFill>
+                  <a:schemeClr val="tx2"/>
+                </a:solidFill>
+              </a:defRPr>
+            </a:lvl1pPr>
+          </a:lstStyle>
           <a:p>
             <a:fld id="{60AD3CCE-071F-4B8E-8AC5-D36671CE0CE8}" type="datetimeFigureOut">
               <a:rPr kumimoji="1" lang="ja-JP" altLang="en-US" smtClean="0"/>
-              <a:t>2026/7/3</a:t>
+              <a:t>2026/7/6</a:t>
             </a:fld>
             <a:endParaRPr kumimoji="1" lang="ja-JP" altLang="en-US"/>
           </a:p>
@@ -1243,13 +1349,7 @@
       </p:sp>
       <p:sp>
         <p:nvSpPr>
-          <p:cNvPr id="5" name="フッター プレースホルダー 4">
-            <a:extLst>
-              <a:ext uri="{FF2B5EF4-FFF2-40B4-BE49-F238E27FC236}">
-                <a16:creationId xmlns:a16="http://schemas.microsoft.com/office/drawing/2014/main" id="{3ED4DB8C-5D53-3B95-AA85-427D622D97E9}"/>
-              </a:ext>
-            </a:extLst>
-          </p:cNvPr>
+          <p:cNvPr id="5" name="Footer Placeholder 4"/>
           <p:cNvSpPr>
             <a:spLocks noGrp="1"/>
           </p:cNvSpPr>
@@ -1257,10 +1357,23 @@
             <p:ph type="ftr" sz="quarter" idx="11"/>
           </p:nvPr>
         </p:nvSpPr>
-        <p:spPr/>
+        <p:spPr>
+          <a:xfrm>
+            <a:off x="2584312" y="6453386"/>
+            <a:ext cx="7023377" cy="404614"/>
+          </a:xfrm>
+        </p:spPr>
         <p:txBody>
           <a:bodyPr/>
-          <a:lstStyle/>
+          <a:lstStyle>
+            <a:lvl1pPr algn="ctr">
+              <a:defRPr>
+                <a:solidFill>
+                  <a:schemeClr val="tx2"/>
+                </a:solidFill>
+              </a:defRPr>
+            </a:lvl1pPr>
+          </a:lstStyle>
           <a:p>
             <a:endParaRPr kumimoji="1" lang="ja-JP" altLang="en-US"/>
           </a:p>
@@ -1268,13 +1381,7 @@
       </p:sp>
       <p:sp>
         <p:nvSpPr>
-          <p:cNvPr id="6" name="スライド番号プレースホルダー 5">
-            <a:extLst>
-              <a:ext uri="{FF2B5EF4-FFF2-40B4-BE49-F238E27FC236}">
-                <a16:creationId xmlns:a16="http://schemas.microsoft.com/office/drawing/2014/main" id="{C8B31C2D-5E65-D824-CB44-FABC41296238}"/>
-              </a:ext>
-            </a:extLst>
-          </p:cNvPr>
+          <p:cNvPr id="6" name="Slide Number Placeholder 5"/>
           <p:cNvSpPr>
             <a:spLocks noGrp="1"/>
           </p:cNvSpPr>
@@ -1282,10 +1389,23 @@
             <p:ph type="sldNum" sz="quarter" idx="12"/>
           </p:nvPr>
         </p:nvSpPr>
-        <p:spPr/>
+        <p:spPr>
+          <a:xfrm>
+            <a:off x="9830683" y="6453386"/>
+            <a:ext cx="1596292" cy="404614"/>
+          </a:xfrm>
+        </p:spPr>
         <p:txBody>
           <a:bodyPr/>
-          <a:lstStyle/>
+          <a:lstStyle>
+            <a:lvl1pPr>
+              <a:defRPr>
+                <a:solidFill>
+                  <a:schemeClr val="tx2"/>
+                </a:solidFill>
+              </a:defRPr>
+            </a:lvl1pPr>
+          </a:lstStyle>
           <a:p>
             <a:fld id="{B37D7E2B-F8ED-469C-8F05-023F1D7F84D6}" type="slidenum">
               <a:rPr kumimoji="1" lang="ja-JP" altLang="en-US" smtClean="0"/>
@@ -1295,15 +1415,71 @@
           </a:p>
         </p:txBody>
       </p:sp>
+      <p:sp>
+        <p:nvSpPr>
+          <p:cNvPr id="7" name="Freeform 6" title="Crop Mark"/>
+          <p:cNvSpPr/>
+          <p:nvPr/>
+        </p:nvSpPr>
+        <p:spPr bwMode="auto">
+          <a:xfrm>
+            <a:off x="8151962" y="1685652"/>
+            <a:ext cx="3275013" cy="4408488"/>
+          </a:xfrm>
+          <a:custGeom>
+            <a:avLst/>
+            <a:gdLst/>
+            <a:ahLst/>
+            <a:cxnLst/>
+            <a:rect l="0" t="0" r="r" b="b"/>
+            <a:pathLst>
+              <a:path w="4125" h="5554">
+                <a:moveTo>
+                  <a:pt x="3614" y="0"/>
+                </a:moveTo>
+                <a:lnTo>
+                  <a:pt x="4125" y="0"/>
+                </a:lnTo>
+                <a:lnTo>
+                  <a:pt x="4125" y="5554"/>
+                </a:lnTo>
+                <a:lnTo>
+                  <a:pt x="0" y="5554"/>
+                </a:lnTo>
+                <a:lnTo>
+                  <a:pt x="0" y="5074"/>
+                </a:lnTo>
+                <a:lnTo>
+                  <a:pt x="3614" y="5074"/>
+                </a:lnTo>
+                <a:lnTo>
+                  <a:pt x="3614" y="0"/>
+                </a:lnTo>
+                <a:close/>
+              </a:path>
+            </a:pathLst>
+          </a:custGeom>
+          <a:solidFill>
+            <a:schemeClr val="tx2"/>
+          </a:solidFill>
+          <a:ln w="0">
+            <a:noFill/>
+            <a:prstDash val="solid"/>
+            <a:round/>
+            <a:headEnd/>
+            <a:tailEnd/>
+          </a:ln>
+        </p:spPr>
+      </p:sp>
     </p:spTree>
     <p:extLst>
       <p:ext uri="{BB962C8B-B14F-4D97-AF65-F5344CB8AC3E}">
-        <p14:creationId xmlns:p14="http://schemas.microsoft.com/office/powerpoint/2010/main" val="3497325474"/>
+        <p14:creationId xmlns:p14="http://schemas.microsoft.com/office/powerpoint/2010/main" val="3356724110"/>
       </p:ext>
     </p:extLst>
   </p:cSld>
   <p:clrMapOvr>
-    <a:masterClrMapping/>
+    <a:overrideClrMapping bg1="dk1" tx1="lt1" bg2="dk2" tx2="lt2" accent1="accent1" accent2="accent2" accent3="accent3" accent4="accent4" accent5="accent5" accent6="accent6" hlink="hlink" folHlink="folHlink"/>
   </p:clrMapOvr>
 </p:sldLayout>
 </file>
@@ -1327,18 +1503,293 @@
       </p:grpSpPr>
       <p:sp>
         <p:nvSpPr>
-          <p:cNvPr id="2" name="タイトル 1">
-            <a:extLst>
-              <a:ext uri="{FF2B5EF4-FFF2-40B4-BE49-F238E27FC236}">
-                <a16:creationId xmlns:a16="http://schemas.microsoft.com/office/drawing/2014/main" id="{F5368D48-4852-038C-A758-57CFF187FBAF}"/>
-              </a:ext>
-            </a:extLst>
-          </p:cNvPr>
+          <p:cNvPr id="2" name="Title 1"/>
           <p:cNvSpPr>
             <a:spLocks noGrp="1"/>
           </p:cNvSpPr>
           <p:nvPr>
             <p:ph type="title"/>
+          </p:nvPr>
+        </p:nvSpPr>
+        <p:spPr/>
+        <p:txBody>
+          <a:bodyPr/>
+          <a:lstStyle>
+            <a:lvl1pPr>
+              <a:defRPr>
+                <a:solidFill>
+                  <a:schemeClr val="tx2"/>
+                </a:solidFill>
+              </a:defRPr>
+            </a:lvl1pPr>
+          </a:lstStyle>
+          <a:p>
+            <a:r>
+              <a:rPr lang="ja-JP" altLang="en-US"/>
+              <a:t>マスター タイトルの書式設定</a:t>
+            </a:r>
+            <a:endParaRPr lang="en-US" dirty="0"/>
+          </a:p>
+        </p:txBody>
+      </p:sp>
+      <p:sp>
+        <p:nvSpPr>
+          <p:cNvPr id="3" name="Content Placeholder 2"/>
+          <p:cNvSpPr>
+            <a:spLocks noGrp="1"/>
+          </p:cNvSpPr>
+          <p:nvPr>
+            <p:ph sz="half" idx="1"/>
+          </p:nvPr>
+        </p:nvSpPr>
+        <p:spPr>
+          <a:xfrm>
+            <a:off x="1371600" y="2285999"/>
+            <a:ext cx="4447786" cy="3581401"/>
+          </a:xfrm>
+        </p:spPr>
+        <p:txBody>
+          <a:bodyPr/>
+          <a:lstStyle>
+            <a:lvl1pPr>
+              <a:defRPr baseline="0">
+                <a:solidFill>
+                  <a:schemeClr val="tx2"/>
+                </a:solidFill>
+              </a:defRPr>
+            </a:lvl1pPr>
+            <a:lvl2pPr>
+              <a:defRPr baseline="0">
+                <a:solidFill>
+                  <a:schemeClr val="tx2"/>
+                </a:solidFill>
+              </a:defRPr>
+            </a:lvl2pPr>
+            <a:lvl3pPr>
+              <a:defRPr baseline="0">
+                <a:solidFill>
+                  <a:schemeClr val="tx2"/>
+                </a:solidFill>
+              </a:defRPr>
+            </a:lvl3pPr>
+            <a:lvl4pPr>
+              <a:defRPr baseline="0">
+                <a:solidFill>
+                  <a:schemeClr val="tx2"/>
+                </a:solidFill>
+              </a:defRPr>
+            </a:lvl4pPr>
+            <a:lvl5pPr>
+              <a:defRPr baseline="0">
+                <a:solidFill>
+                  <a:schemeClr val="tx2"/>
+                </a:solidFill>
+              </a:defRPr>
+            </a:lvl5pPr>
+          </a:lstStyle>
+          <a:p>
+            <a:pPr lvl="0"/>
+            <a:r>
+              <a:rPr lang="ja-JP" altLang="en-US"/>
+              <a:t>マスター テキストの書式設定</a:t>
+            </a:r>
+          </a:p>
+          <a:p>
+            <a:pPr lvl="1"/>
+            <a:r>
+              <a:rPr lang="ja-JP" altLang="en-US"/>
+              <a:t>第 </a:t>
+            </a:r>
+            <a:r>
+              <a:rPr lang="en-US" altLang="ja-JP"/>
+              <a:t>2 </a:t>
+            </a:r>
+            <a:r>
+              <a:rPr lang="ja-JP" altLang="en-US"/>
+              <a:t>レベル</a:t>
+            </a:r>
+          </a:p>
+          <a:p>
+            <a:pPr lvl="2"/>
+            <a:r>
+              <a:rPr lang="ja-JP" altLang="en-US"/>
+              <a:t>第 </a:t>
+            </a:r>
+            <a:r>
+              <a:rPr lang="en-US" altLang="ja-JP"/>
+              <a:t>3 </a:t>
+            </a:r>
+            <a:r>
+              <a:rPr lang="ja-JP" altLang="en-US"/>
+              <a:t>レベル</a:t>
+            </a:r>
+          </a:p>
+          <a:p>
+            <a:pPr lvl="3"/>
+            <a:r>
+              <a:rPr lang="ja-JP" altLang="en-US"/>
+              <a:t>第 </a:t>
+            </a:r>
+            <a:r>
+              <a:rPr lang="en-US" altLang="ja-JP"/>
+              <a:t>4 </a:t>
+            </a:r>
+            <a:r>
+              <a:rPr lang="ja-JP" altLang="en-US"/>
+              <a:t>レベル</a:t>
+            </a:r>
+          </a:p>
+          <a:p>
+            <a:pPr lvl="4"/>
+            <a:r>
+              <a:rPr lang="ja-JP" altLang="en-US"/>
+              <a:t>第 </a:t>
+            </a:r>
+            <a:r>
+              <a:rPr lang="en-US" altLang="ja-JP"/>
+              <a:t>5 </a:t>
+            </a:r>
+            <a:r>
+              <a:rPr lang="ja-JP" altLang="en-US"/>
+              <a:t>レベル</a:t>
+            </a:r>
+            <a:endParaRPr lang="en-US" dirty="0"/>
+          </a:p>
+        </p:txBody>
+      </p:sp>
+      <p:sp>
+        <p:nvSpPr>
+          <p:cNvPr id="4" name="Content Placeholder 3"/>
+          <p:cNvSpPr>
+            <a:spLocks noGrp="1"/>
+          </p:cNvSpPr>
+          <p:nvPr>
+            <p:ph sz="half" idx="2"/>
+          </p:nvPr>
+        </p:nvSpPr>
+        <p:spPr>
+          <a:xfrm>
+            <a:off x="6525403" y="2285999"/>
+            <a:ext cx="4447786" cy="3581401"/>
+          </a:xfrm>
+        </p:spPr>
+        <p:txBody>
+          <a:bodyPr/>
+          <a:lstStyle>
+            <a:lvl1pPr>
+              <a:defRPr>
+                <a:solidFill>
+                  <a:schemeClr val="tx2"/>
+                </a:solidFill>
+              </a:defRPr>
+            </a:lvl1pPr>
+            <a:lvl2pPr>
+              <a:defRPr>
+                <a:solidFill>
+                  <a:schemeClr val="tx2"/>
+                </a:solidFill>
+              </a:defRPr>
+            </a:lvl2pPr>
+            <a:lvl3pPr>
+              <a:defRPr>
+                <a:solidFill>
+                  <a:schemeClr val="tx2"/>
+                </a:solidFill>
+              </a:defRPr>
+            </a:lvl3pPr>
+            <a:lvl4pPr>
+              <a:defRPr>
+                <a:solidFill>
+                  <a:schemeClr val="tx2"/>
+                </a:solidFill>
+              </a:defRPr>
+            </a:lvl4pPr>
+            <a:lvl5pPr>
+              <a:defRPr>
+                <a:solidFill>
+                  <a:schemeClr val="tx2"/>
+                </a:solidFill>
+              </a:defRPr>
+            </a:lvl5pPr>
+          </a:lstStyle>
+          <a:p>
+            <a:pPr lvl="0"/>
+            <a:r>
+              <a:rPr lang="ja-JP" altLang="en-US"/>
+              <a:t>マスター テキストの書式設定</a:t>
+            </a:r>
+          </a:p>
+          <a:p>
+            <a:pPr lvl="1"/>
+            <a:r>
+              <a:rPr lang="ja-JP" altLang="en-US"/>
+              <a:t>第 </a:t>
+            </a:r>
+            <a:r>
+              <a:rPr lang="en-US" altLang="ja-JP"/>
+              <a:t>2 </a:t>
+            </a:r>
+            <a:r>
+              <a:rPr lang="ja-JP" altLang="en-US"/>
+              <a:t>レベル</a:t>
+            </a:r>
+          </a:p>
+          <a:p>
+            <a:pPr lvl="2"/>
+            <a:r>
+              <a:rPr lang="ja-JP" altLang="en-US"/>
+              <a:t>第 </a:t>
+            </a:r>
+            <a:r>
+              <a:rPr lang="en-US" altLang="ja-JP"/>
+              <a:t>3 </a:t>
+            </a:r>
+            <a:r>
+              <a:rPr lang="ja-JP" altLang="en-US"/>
+              <a:t>レベル</a:t>
+            </a:r>
+          </a:p>
+          <a:p>
+            <a:pPr lvl="3"/>
+            <a:r>
+              <a:rPr lang="ja-JP" altLang="en-US"/>
+              <a:t>第 </a:t>
+            </a:r>
+            <a:r>
+              <a:rPr lang="en-US" altLang="ja-JP"/>
+              <a:t>4 </a:t>
+            </a:r>
+            <a:r>
+              <a:rPr lang="ja-JP" altLang="en-US"/>
+              <a:t>レベル</a:t>
+            </a:r>
+          </a:p>
+          <a:p>
+            <a:pPr lvl="4"/>
+            <a:r>
+              <a:rPr lang="ja-JP" altLang="en-US"/>
+              <a:t>第 </a:t>
+            </a:r>
+            <a:r>
+              <a:rPr lang="en-US" altLang="ja-JP"/>
+              <a:t>5 </a:t>
+            </a:r>
+            <a:r>
+              <a:rPr lang="ja-JP" altLang="en-US"/>
+              <a:t>レベル</a:t>
+            </a:r>
+            <a:endParaRPr lang="en-US" dirty="0"/>
+          </a:p>
+        </p:txBody>
+      </p:sp>
+      <p:sp>
+        <p:nvSpPr>
+          <p:cNvPr id="5" name="Date Placeholder 4"/>
+          <p:cNvSpPr>
+            <a:spLocks noGrp="1"/>
+          </p:cNvSpPr>
+          <p:nvPr>
+            <p:ph type="dt" sz="half" idx="10"/>
           </p:nvPr>
         </p:nvSpPr>
         <p:spPr/>
@@ -1346,264 +1797,36 @@
           <a:bodyPr/>
           <a:lstStyle/>
           <a:p>
-            <a:r>
-              <a:rPr kumimoji="1" lang="ja-JP" altLang="en-US"/>
-              <a:t>マスター タイトルの書式設定</a:t>
-            </a:r>
-          </a:p>
-        </p:txBody>
-      </p:sp>
-      <p:sp>
-        <p:nvSpPr>
-          <p:cNvPr id="3" name="コンテンツ プレースホルダー 2">
-            <a:extLst>
-              <a:ext uri="{FF2B5EF4-FFF2-40B4-BE49-F238E27FC236}">
-                <a16:creationId xmlns:a16="http://schemas.microsoft.com/office/drawing/2014/main" id="{0BDB81FC-CF07-56A3-4D2F-FC57F150E244}"/>
-              </a:ext>
-            </a:extLst>
-          </p:cNvPr>
+            <a:fld id="{60AD3CCE-071F-4B8E-8AC5-D36671CE0CE8}" type="datetimeFigureOut">
+              <a:rPr kumimoji="1" lang="ja-JP" altLang="en-US" smtClean="0"/>
+              <a:t>2026/7/6</a:t>
+            </a:fld>
+            <a:endParaRPr kumimoji="1" lang="ja-JP" altLang="en-US"/>
+          </a:p>
+        </p:txBody>
+      </p:sp>
+      <p:sp>
+        <p:nvSpPr>
+          <p:cNvPr id="6" name="Footer Placeholder 5"/>
           <p:cNvSpPr>
             <a:spLocks noGrp="1"/>
           </p:cNvSpPr>
           <p:nvPr>
-            <p:ph sz="half" idx="1"/>
-          </p:nvPr>
-        </p:nvSpPr>
-        <p:spPr>
-          <a:xfrm>
-            <a:off x="838200" y="1825625"/>
-            <a:ext cx="5181600" cy="4351338"/>
-          </a:xfrm>
-        </p:spPr>
+            <p:ph type="ftr" sz="quarter" idx="11"/>
+          </p:nvPr>
+        </p:nvSpPr>
+        <p:spPr/>
         <p:txBody>
           <a:bodyPr/>
           <a:lstStyle/>
           <a:p>
-            <a:pPr lvl="0"/>
-            <a:r>
-              <a:rPr kumimoji="1" lang="ja-JP" altLang="en-US"/>
-              <a:t>マスター テキストの書式設定</a:t>
-            </a:r>
-          </a:p>
-          <a:p>
-            <a:pPr lvl="1"/>
-            <a:r>
-              <a:rPr kumimoji="1" lang="ja-JP" altLang="en-US"/>
-              <a:t>第 </a:t>
-            </a:r>
-            <a:r>
-              <a:rPr kumimoji="1" lang="en-US" altLang="ja-JP"/>
-              <a:t>2 </a:t>
-            </a:r>
-            <a:r>
-              <a:rPr kumimoji="1" lang="ja-JP" altLang="en-US"/>
-              <a:t>レベル</a:t>
-            </a:r>
-          </a:p>
-          <a:p>
-            <a:pPr lvl="2"/>
-            <a:r>
-              <a:rPr kumimoji="1" lang="ja-JP" altLang="en-US"/>
-              <a:t>第 </a:t>
-            </a:r>
-            <a:r>
-              <a:rPr kumimoji="1" lang="en-US" altLang="ja-JP"/>
-              <a:t>3 </a:t>
-            </a:r>
-            <a:r>
-              <a:rPr kumimoji="1" lang="ja-JP" altLang="en-US"/>
-              <a:t>レベル</a:t>
-            </a:r>
-          </a:p>
-          <a:p>
-            <a:pPr lvl="3"/>
-            <a:r>
-              <a:rPr kumimoji="1" lang="ja-JP" altLang="en-US"/>
-              <a:t>第 </a:t>
-            </a:r>
-            <a:r>
-              <a:rPr kumimoji="1" lang="en-US" altLang="ja-JP"/>
-              <a:t>4 </a:t>
-            </a:r>
-            <a:r>
-              <a:rPr kumimoji="1" lang="ja-JP" altLang="en-US"/>
-              <a:t>レベル</a:t>
-            </a:r>
-          </a:p>
-          <a:p>
-            <a:pPr lvl="4"/>
-            <a:r>
-              <a:rPr kumimoji="1" lang="ja-JP" altLang="en-US"/>
-              <a:t>第 </a:t>
-            </a:r>
-            <a:r>
-              <a:rPr kumimoji="1" lang="en-US" altLang="ja-JP"/>
-              <a:t>5 </a:t>
-            </a:r>
-            <a:r>
-              <a:rPr kumimoji="1" lang="ja-JP" altLang="en-US"/>
-              <a:t>レベル</a:t>
-            </a:r>
-          </a:p>
-        </p:txBody>
-      </p:sp>
-      <p:sp>
-        <p:nvSpPr>
-          <p:cNvPr id="4" name="コンテンツ プレースホルダー 3">
-            <a:extLst>
-              <a:ext uri="{FF2B5EF4-FFF2-40B4-BE49-F238E27FC236}">
-                <a16:creationId xmlns:a16="http://schemas.microsoft.com/office/drawing/2014/main" id="{DACC7CE2-0052-1581-DD66-79E35CFA1110}"/>
-              </a:ext>
-            </a:extLst>
-          </p:cNvPr>
-          <p:cNvSpPr>
-            <a:spLocks noGrp="1"/>
-          </p:cNvSpPr>
-          <p:nvPr>
-            <p:ph sz="half" idx="2"/>
-          </p:nvPr>
-        </p:nvSpPr>
-        <p:spPr>
-          <a:xfrm>
-            <a:off x="6172200" y="1825625"/>
-            <a:ext cx="5181600" cy="4351338"/>
-          </a:xfrm>
-        </p:spPr>
-        <p:txBody>
-          <a:bodyPr/>
-          <a:lstStyle/>
-          <a:p>
-            <a:pPr lvl="0"/>
-            <a:r>
-              <a:rPr kumimoji="1" lang="ja-JP" altLang="en-US"/>
-              <a:t>マスター テキストの書式設定</a:t>
-            </a:r>
-          </a:p>
-          <a:p>
-            <a:pPr lvl="1"/>
-            <a:r>
-              <a:rPr kumimoji="1" lang="ja-JP" altLang="en-US"/>
-              <a:t>第 </a:t>
-            </a:r>
-            <a:r>
-              <a:rPr kumimoji="1" lang="en-US" altLang="ja-JP"/>
-              <a:t>2 </a:t>
-            </a:r>
-            <a:r>
-              <a:rPr kumimoji="1" lang="ja-JP" altLang="en-US"/>
-              <a:t>レベル</a:t>
-            </a:r>
-          </a:p>
-          <a:p>
-            <a:pPr lvl="2"/>
-            <a:r>
-              <a:rPr kumimoji="1" lang="ja-JP" altLang="en-US"/>
-              <a:t>第 </a:t>
-            </a:r>
-            <a:r>
-              <a:rPr kumimoji="1" lang="en-US" altLang="ja-JP"/>
-              <a:t>3 </a:t>
-            </a:r>
-            <a:r>
-              <a:rPr kumimoji="1" lang="ja-JP" altLang="en-US"/>
-              <a:t>レベル</a:t>
-            </a:r>
-          </a:p>
-          <a:p>
-            <a:pPr lvl="3"/>
-            <a:r>
-              <a:rPr kumimoji="1" lang="ja-JP" altLang="en-US"/>
-              <a:t>第 </a:t>
-            </a:r>
-            <a:r>
-              <a:rPr kumimoji="1" lang="en-US" altLang="ja-JP"/>
-              <a:t>4 </a:t>
-            </a:r>
-            <a:r>
-              <a:rPr kumimoji="1" lang="ja-JP" altLang="en-US"/>
-              <a:t>レベル</a:t>
-            </a:r>
-          </a:p>
-          <a:p>
-            <a:pPr lvl="4"/>
-            <a:r>
-              <a:rPr kumimoji="1" lang="ja-JP" altLang="en-US"/>
-              <a:t>第 </a:t>
-            </a:r>
-            <a:r>
-              <a:rPr kumimoji="1" lang="en-US" altLang="ja-JP"/>
-              <a:t>5 </a:t>
-            </a:r>
-            <a:r>
-              <a:rPr kumimoji="1" lang="ja-JP" altLang="en-US"/>
-              <a:t>レベル</a:t>
-            </a:r>
-          </a:p>
-        </p:txBody>
-      </p:sp>
-      <p:sp>
-        <p:nvSpPr>
-          <p:cNvPr id="5" name="日付プレースホルダー 4">
-            <a:extLst>
-              <a:ext uri="{FF2B5EF4-FFF2-40B4-BE49-F238E27FC236}">
-                <a16:creationId xmlns:a16="http://schemas.microsoft.com/office/drawing/2014/main" id="{37EF5436-D1E6-CBB6-A36E-8D7E622E5D8A}"/>
-              </a:ext>
-            </a:extLst>
-          </p:cNvPr>
-          <p:cNvSpPr>
-            <a:spLocks noGrp="1"/>
-          </p:cNvSpPr>
-          <p:nvPr>
-            <p:ph type="dt" sz="half" idx="10"/>
-          </p:nvPr>
-        </p:nvSpPr>
-        <p:spPr/>
-        <p:txBody>
-          <a:bodyPr/>
-          <a:lstStyle/>
-          <a:p>
-            <a:fld id="{60AD3CCE-071F-4B8E-8AC5-D36671CE0CE8}" type="datetimeFigureOut">
-              <a:rPr kumimoji="1" lang="ja-JP" altLang="en-US" smtClean="0"/>
-              <a:t>2026/7/3</a:t>
-            </a:fld>
             <a:endParaRPr kumimoji="1" lang="ja-JP" altLang="en-US"/>
           </a:p>
         </p:txBody>
       </p:sp>
       <p:sp>
         <p:nvSpPr>
-          <p:cNvPr id="6" name="フッター プレースホルダー 5">
-            <a:extLst>
-              <a:ext uri="{FF2B5EF4-FFF2-40B4-BE49-F238E27FC236}">
-                <a16:creationId xmlns:a16="http://schemas.microsoft.com/office/drawing/2014/main" id="{71C8241C-709B-6128-C2F9-BD1EBDDC3EF7}"/>
-              </a:ext>
-            </a:extLst>
-          </p:cNvPr>
-          <p:cNvSpPr>
-            <a:spLocks noGrp="1"/>
-          </p:cNvSpPr>
-          <p:nvPr>
-            <p:ph type="ftr" sz="quarter" idx="11"/>
-          </p:nvPr>
-        </p:nvSpPr>
-        <p:spPr/>
-        <p:txBody>
-          <a:bodyPr/>
-          <a:lstStyle/>
-          <a:p>
-            <a:endParaRPr kumimoji="1" lang="ja-JP" altLang="en-US"/>
-          </a:p>
-        </p:txBody>
-      </p:sp>
-      <p:sp>
-        <p:nvSpPr>
-          <p:cNvPr id="7" name="スライド番号プレースホルダー 6">
-            <a:extLst>
-              <a:ext uri="{FF2B5EF4-FFF2-40B4-BE49-F238E27FC236}">
-                <a16:creationId xmlns:a16="http://schemas.microsoft.com/office/drawing/2014/main" id="{5D2876A7-AD00-654D-1D33-A53A82352FA1}"/>
-              </a:ext>
-            </a:extLst>
-          </p:cNvPr>
+          <p:cNvPr id="7" name="Slide Number Placeholder 6"/>
           <p:cNvSpPr>
             <a:spLocks noGrp="1"/>
           </p:cNvSpPr>
@@ -1627,7 +1850,7 @@
     </p:spTree>
     <p:extLst>
       <p:ext uri="{BB962C8B-B14F-4D97-AF65-F5344CB8AC3E}">
-        <p14:creationId xmlns:p14="http://schemas.microsoft.com/office/powerpoint/2010/main" val="1167661248"/>
+        <p14:creationId xmlns:p14="http://schemas.microsoft.com/office/powerpoint/2010/main" val="1383230073"/>
       </p:ext>
     </p:extLst>
   </p:cSld>
@@ -1656,13 +1879,7 @@
       </p:grpSpPr>
       <p:sp>
         <p:nvSpPr>
-          <p:cNvPr id="2" name="タイトル 1">
-            <a:extLst>
-              <a:ext uri="{FF2B5EF4-FFF2-40B4-BE49-F238E27FC236}">
-                <a16:creationId xmlns:a16="http://schemas.microsoft.com/office/drawing/2014/main" id="{010B986F-361E-A9A5-4FC9-4724E668265F}"/>
-              </a:ext>
-            </a:extLst>
-          </p:cNvPr>
+          <p:cNvPr id="2" name="Title 1"/>
           <p:cNvSpPr>
             <a:spLocks noGrp="1"/>
           </p:cNvSpPr>
@@ -1672,30 +1889,33 @@
         </p:nvSpPr>
         <p:spPr>
           <a:xfrm>
-            <a:off x="839788" y="365125"/>
-            <a:ext cx="10515600" cy="1325563"/>
+            <a:off x="1371600" y="685800"/>
+            <a:ext cx="9601200" cy="1485900"/>
           </a:xfrm>
         </p:spPr>
         <p:txBody>
           <a:bodyPr/>
-          <a:lstStyle/>
-          <a:p>
-            <a:r>
-              <a:rPr kumimoji="1" lang="ja-JP" altLang="en-US"/>
+          <a:lstStyle>
+            <a:lvl1pPr>
+              <a:defRPr>
+                <a:solidFill>
+                  <a:schemeClr val="tx2"/>
+                </a:solidFill>
+              </a:defRPr>
+            </a:lvl1pPr>
+          </a:lstStyle>
+          <a:p>
+            <a:r>
+              <a:rPr lang="ja-JP" altLang="en-US"/>
               <a:t>マスター タイトルの書式設定</a:t>
             </a:r>
-          </a:p>
-        </p:txBody>
-      </p:sp>
-      <p:sp>
-        <p:nvSpPr>
-          <p:cNvPr id="3" name="テキスト プレースホルダー 2">
-            <a:extLst>
-              <a:ext uri="{FF2B5EF4-FFF2-40B4-BE49-F238E27FC236}">
-                <a16:creationId xmlns:a16="http://schemas.microsoft.com/office/drawing/2014/main" id="{BE9D010C-F924-3321-18B4-A411BE8891C6}"/>
-              </a:ext>
-            </a:extLst>
-          </p:cNvPr>
+            <a:endParaRPr lang="en-US" dirty="0"/>
+          </a:p>
+        </p:txBody>
+      </p:sp>
+      <p:sp>
+        <p:nvSpPr>
+          <p:cNvPr id="3" name="Text Placeholder 2"/>
           <p:cNvSpPr>
             <a:spLocks noGrp="1"/>
           </p:cNvSpPr>
@@ -1705,16 +1925,31 @@
         </p:nvSpPr>
         <p:spPr>
           <a:xfrm>
-            <a:off x="839788" y="1681163"/>
-            <a:ext cx="5157787" cy="823912"/>
-          </a:xfrm>
-        </p:spPr>
-        <p:txBody>
-          <a:bodyPr anchor="b"/>
+            <a:off x="1371600" y="2340864"/>
+            <a:ext cx="4443984" cy="823912"/>
+          </a:xfrm>
+        </p:spPr>
+        <p:txBody>
+          <a:bodyPr anchor="b">
+            <a:noAutofit/>
+          </a:bodyPr>
           <a:lstStyle>
             <a:lvl1pPr marL="0" indent="0">
+              <a:lnSpc>
+                <a:spcPct val="84000"/>
+              </a:lnSpc>
+              <a:spcBef>
+                <a:spcPts val="0"/>
+              </a:spcBef>
+              <a:spcAft>
+                <a:spcPts val="0"/>
+              </a:spcAft>
               <a:buNone/>
-              <a:defRPr sz="2400" b="1"/>
+              <a:defRPr sz="3000" b="0" baseline="0">
+                <a:solidFill>
+                  <a:schemeClr val="tx2"/>
+                </a:solidFill>
+              </a:defRPr>
             </a:lvl1pPr>
             <a:lvl2pPr marL="457200" indent="0">
               <a:buNone/>
@@ -1752,7 +1987,7 @@
           <a:p>
             <a:pPr lvl="0"/>
             <a:r>
-              <a:rPr kumimoji="1" lang="ja-JP" altLang="en-US"/>
+              <a:rPr lang="ja-JP" altLang="en-US"/>
               <a:t>マスター テキストの書式設定</a:t>
             </a:r>
           </a:p>
@@ -1760,13 +1995,7 @@
       </p:sp>
       <p:sp>
         <p:nvSpPr>
-          <p:cNvPr id="4" name="コンテンツ プレースホルダー 3">
-            <a:extLst>
-              <a:ext uri="{FF2B5EF4-FFF2-40B4-BE49-F238E27FC236}">
-                <a16:creationId xmlns:a16="http://schemas.microsoft.com/office/drawing/2014/main" id="{7673C82D-06DC-B673-1C62-0A59BA88BC8A}"/>
-              </a:ext>
-            </a:extLst>
-          </p:cNvPr>
+          <p:cNvPr id="4" name="Content Placeholder 3"/>
           <p:cNvSpPr>
             <a:spLocks noGrp="1"/>
           </p:cNvSpPr>
@@ -1776,91 +2005,122 @@
         </p:nvSpPr>
         <p:spPr>
           <a:xfrm>
-            <a:off x="839788" y="2505075"/>
-            <a:ext cx="5157787" cy="3684588"/>
+            <a:off x="1371600" y="3305207"/>
+            <a:ext cx="4443984" cy="2562193"/>
           </a:xfrm>
         </p:spPr>
         <p:txBody>
           <a:bodyPr/>
-          <a:lstStyle/>
+          <a:lstStyle>
+            <a:lvl1pPr>
+              <a:defRPr baseline="0">
+                <a:solidFill>
+                  <a:schemeClr val="tx2"/>
+                </a:solidFill>
+              </a:defRPr>
+            </a:lvl1pPr>
+            <a:lvl2pPr>
+              <a:defRPr baseline="0">
+                <a:solidFill>
+                  <a:schemeClr val="tx2"/>
+                </a:solidFill>
+              </a:defRPr>
+            </a:lvl2pPr>
+            <a:lvl3pPr>
+              <a:defRPr baseline="0">
+                <a:solidFill>
+                  <a:schemeClr val="tx2"/>
+                </a:solidFill>
+              </a:defRPr>
+            </a:lvl3pPr>
+            <a:lvl4pPr>
+              <a:defRPr baseline="0">
+                <a:solidFill>
+                  <a:schemeClr val="tx2"/>
+                </a:solidFill>
+              </a:defRPr>
+            </a:lvl4pPr>
+            <a:lvl5pPr>
+              <a:defRPr baseline="0">
+                <a:solidFill>
+                  <a:schemeClr val="tx2"/>
+                </a:solidFill>
+              </a:defRPr>
+            </a:lvl5pPr>
+          </a:lstStyle>
           <a:p>
             <a:pPr lvl="0"/>
             <a:r>
-              <a:rPr kumimoji="1" lang="ja-JP" altLang="en-US"/>
+              <a:rPr lang="ja-JP" altLang="en-US"/>
               <a:t>マスター テキストの書式設定</a:t>
             </a:r>
           </a:p>
           <a:p>
             <a:pPr lvl="1"/>
             <a:r>
-              <a:rPr kumimoji="1" lang="ja-JP" altLang="en-US"/>
+              <a:rPr lang="ja-JP" altLang="en-US"/>
               <a:t>第 </a:t>
             </a:r>
             <a:r>
-              <a:rPr kumimoji="1" lang="en-US" altLang="ja-JP"/>
+              <a:rPr lang="en-US" altLang="ja-JP"/>
               <a:t>2 </a:t>
             </a:r>
             <a:r>
-              <a:rPr kumimoji="1" lang="ja-JP" altLang="en-US"/>
+              <a:rPr lang="ja-JP" altLang="en-US"/>
               <a:t>レベル</a:t>
             </a:r>
           </a:p>
           <a:p>
             <a:pPr lvl="2"/>
             <a:r>
-              <a:rPr kumimoji="1" lang="ja-JP" altLang="en-US"/>
+              <a:rPr lang="ja-JP" altLang="en-US"/>
               <a:t>第 </a:t>
             </a:r>
             <a:r>
-              <a:rPr kumimoji="1" lang="en-US" altLang="ja-JP"/>
+              <a:rPr lang="en-US" altLang="ja-JP"/>
               <a:t>3 </a:t>
             </a:r>
             <a:r>
-              <a:rPr kumimoji="1" lang="ja-JP" altLang="en-US"/>
+              <a:rPr lang="ja-JP" altLang="en-US"/>
               <a:t>レベル</a:t>
             </a:r>
           </a:p>
           <a:p>
             <a:pPr lvl="3"/>
             <a:r>
-              <a:rPr kumimoji="1" lang="ja-JP" altLang="en-US"/>
+              <a:rPr lang="ja-JP" altLang="en-US"/>
               <a:t>第 </a:t>
             </a:r>
             <a:r>
-              <a:rPr kumimoji="1" lang="en-US" altLang="ja-JP"/>
+              <a:rPr lang="en-US" altLang="ja-JP"/>
               <a:t>4 </a:t>
             </a:r>
             <a:r>
-              <a:rPr kumimoji="1" lang="ja-JP" altLang="en-US"/>
+              <a:rPr lang="ja-JP" altLang="en-US"/>
               <a:t>レベル</a:t>
             </a:r>
           </a:p>
           <a:p>
             <a:pPr lvl="4"/>
             <a:r>
-              <a:rPr kumimoji="1" lang="ja-JP" altLang="en-US"/>
+              <a:rPr lang="ja-JP" altLang="en-US"/>
               <a:t>第 </a:t>
             </a:r>
             <a:r>
-              <a:rPr kumimoji="1" lang="en-US" altLang="ja-JP"/>
+              <a:rPr lang="en-US" altLang="ja-JP"/>
               <a:t>5 </a:t>
             </a:r>
             <a:r>
-              <a:rPr kumimoji="1" lang="ja-JP" altLang="en-US"/>
+              <a:rPr lang="ja-JP" altLang="en-US"/>
               <a:t>レベル</a:t>
             </a:r>
-          </a:p>
-        </p:txBody>
-      </p:sp>
-      <p:sp>
-        <p:nvSpPr>
-          <p:cNvPr id="5" name="テキスト プレースホルダー 4">
-            <a:extLst>
-              <a:ext uri="{FF2B5EF4-FFF2-40B4-BE49-F238E27FC236}">
-                <a16:creationId xmlns:a16="http://schemas.microsoft.com/office/drawing/2014/main" id="{9C2CE84C-FA68-D560-5BA7-9DDFD4B54C79}"/>
-              </a:ext>
-            </a:extLst>
-          </p:cNvPr>
+            <a:endParaRPr lang="en-US" dirty="0"/>
+          </a:p>
+        </p:txBody>
+      </p:sp>
+      <p:sp>
+        <p:nvSpPr>
+          <p:cNvPr id="5" name="Text Placeholder 4"/>
           <p:cNvSpPr>
             <a:spLocks noGrp="1"/>
           </p:cNvSpPr>
@@ -1870,16 +2130,31 @@
         </p:nvSpPr>
         <p:spPr>
           <a:xfrm>
-            <a:off x="6172200" y="1681163"/>
-            <a:ext cx="5183188" cy="823912"/>
-          </a:xfrm>
-        </p:spPr>
-        <p:txBody>
-          <a:bodyPr anchor="b"/>
+            <a:off x="6525014" y="2340864"/>
+            <a:ext cx="4443984" cy="823912"/>
+          </a:xfrm>
+        </p:spPr>
+        <p:txBody>
+          <a:bodyPr anchor="b">
+            <a:noAutofit/>
+          </a:bodyPr>
           <a:lstStyle>
             <a:lvl1pPr marL="0" indent="0">
+              <a:lnSpc>
+                <a:spcPct val="84000"/>
+              </a:lnSpc>
+              <a:spcBef>
+                <a:spcPts val="0"/>
+              </a:spcBef>
+              <a:spcAft>
+                <a:spcPts val="0"/>
+              </a:spcAft>
               <a:buNone/>
-              <a:defRPr sz="2400" b="1"/>
+              <a:defRPr sz="3000" b="0" baseline="0">
+                <a:solidFill>
+                  <a:schemeClr val="tx2"/>
+                </a:solidFill>
+              </a:defRPr>
             </a:lvl1pPr>
             <a:lvl2pPr marL="457200" indent="0">
               <a:buNone/>
@@ -1917,7 +2192,7 @@
           <a:p>
             <a:pPr lvl="0"/>
             <a:r>
-              <a:rPr kumimoji="1" lang="ja-JP" altLang="en-US"/>
+              <a:rPr lang="ja-JP" altLang="en-US"/>
               <a:t>マスター テキストの書式設定</a:t>
             </a:r>
           </a:p>
@@ -1925,13 +2200,7 @@
       </p:sp>
       <p:sp>
         <p:nvSpPr>
-          <p:cNvPr id="6" name="コンテンツ プレースホルダー 5">
-            <a:extLst>
-              <a:ext uri="{FF2B5EF4-FFF2-40B4-BE49-F238E27FC236}">
-                <a16:creationId xmlns:a16="http://schemas.microsoft.com/office/drawing/2014/main" id="{BF5CE6E4-3A09-60AF-4154-17BAD490D9E1}"/>
-              </a:ext>
-            </a:extLst>
-          </p:cNvPr>
+          <p:cNvPr id="6" name="Content Placeholder 5"/>
           <p:cNvSpPr>
             <a:spLocks noGrp="1"/>
           </p:cNvSpPr>
@@ -1941,96 +2210,150 @@
         </p:nvSpPr>
         <p:spPr>
           <a:xfrm>
-            <a:off x="6172200" y="2505075"/>
-            <a:ext cx="5183188" cy="3684588"/>
-          </a:xfrm>
-        </p:spPr>
+            <a:off x="6525014" y="3305207"/>
+            <a:ext cx="4443984" cy="2562193"/>
+          </a:xfrm>
+        </p:spPr>
+        <p:txBody>
+          <a:bodyPr/>
+          <a:lstStyle>
+            <a:lvl1pPr>
+              <a:defRPr baseline="0">
+                <a:solidFill>
+                  <a:schemeClr val="tx2"/>
+                </a:solidFill>
+              </a:defRPr>
+            </a:lvl1pPr>
+            <a:lvl2pPr>
+              <a:defRPr baseline="0">
+                <a:solidFill>
+                  <a:schemeClr val="tx2"/>
+                </a:solidFill>
+              </a:defRPr>
+            </a:lvl2pPr>
+            <a:lvl3pPr>
+              <a:defRPr baseline="0">
+                <a:solidFill>
+                  <a:schemeClr val="tx2"/>
+                </a:solidFill>
+              </a:defRPr>
+            </a:lvl3pPr>
+            <a:lvl4pPr>
+              <a:defRPr baseline="0">
+                <a:solidFill>
+                  <a:schemeClr val="tx2"/>
+                </a:solidFill>
+              </a:defRPr>
+            </a:lvl4pPr>
+            <a:lvl5pPr>
+              <a:defRPr baseline="0">
+                <a:solidFill>
+                  <a:schemeClr val="tx2"/>
+                </a:solidFill>
+              </a:defRPr>
+            </a:lvl5pPr>
+          </a:lstStyle>
+          <a:p>
+            <a:pPr lvl="0"/>
+            <a:r>
+              <a:rPr lang="ja-JP" altLang="en-US"/>
+              <a:t>マスター テキストの書式設定</a:t>
+            </a:r>
+          </a:p>
+          <a:p>
+            <a:pPr lvl="1"/>
+            <a:r>
+              <a:rPr lang="ja-JP" altLang="en-US"/>
+              <a:t>第 </a:t>
+            </a:r>
+            <a:r>
+              <a:rPr lang="en-US" altLang="ja-JP"/>
+              <a:t>2 </a:t>
+            </a:r>
+            <a:r>
+              <a:rPr lang="ja-JP" altLang="en-US"/>
+              <a:t>レベル</a:t>
+            </a:r>
+          </a:p>
+          <a:p>
+            <a:pPr lvl="2"/>
+            <a:r>
+              <a:rPr lang="ja-JP" altLang="en-US"/>
+              <a:t>第 </a:t>
+            </a:r>
+            <a:r>
+              <a:rPr lang="en-US" altLang="ja-JP"/>
+              <a:t>3 </a:t>
+            </a:r>
+            <a:r>
+              <a:rPr lang="ja-JP" altLang="en-US"/>
+              <a:t>レベル</a:t>
+            </a:r>
+          </a:p>
+          <a:p>
+            <a:pPr lvl="3"/>
+            <a:r>
+              <a:rPr lang="ja-JP" altLang="en-US"/>
+              <a:t>第 </a:t>
+            </a:r>
+            <a:r>
+              <a:rPr lang="en-US" altLang="ja-JP"/>
+              <a:t>4 </a:t>
+            </a:r>
+            <a:r>
+              <a:rPr lang="ja-JP" altLang="en-US"/>
+              <a:t>レベル</a:t>
+            </a:r>
+          </a:p>
+          <a:p>
+            <a:pPr lvl="4"/>
+            <a:r>
+              <a:rPr lang="ja-JP" altLang="en-US"/>
+              <a:t>第 </a:t>
+            </a:r>
+            <a:r>
+              <a:rPr lang="en-US" altLang="ja-JP"/>
+              <a:t>5 </a:t>
+            </a:r>
+            <a:r>
+              <a:rPr lang="ja-JP" altLang="en-US"/>
+              <a:t>レベル</a:t>
+            </a:r>
+            <a:endParaRPr lang="en-US" dirty="0"/>
+          </a:p>
+        </p:txBody>
+      </p:sp>
+      <p:sp>
+        <p:nvSpPr>
+          <p:cNvPr id="7" name="Date Placeholder 6"/>
+          <p:cNvSpPr>
+            <a:spLocks noGrp="1"/>
+          </p:cNvSpPr>
+          <p:nvPr>
+            <p:ph type="dt" sz="half" idx="10"/>
+          </p:nvPr>
+        </p:nvSpPr>
+        <p:spPr/>
         <p:txBody>
           <a:bodyPr/>
           <a:lstStyle/>
           <a:p>
-            <a:pPr lvl="0"/>
-            <a:r>
-              <a:rPr kumimoji="1" lang="ja-JP" altLang="en-US"/>
-              <a:t>マスター テキストの書式設定</a:t>
-            </a:r>
-          </a:p>
-          <a:p>
-            <a:pPr lvl="1"/>
-            <a:r>
-              <a:rPr kumimoji="1" lang="ja-JP" altLang="en-US"/>
-              <a:t>第 </a:t>
-            </a:r>
-            <a:r>
-              <a:rPr kumimoji="1" lang="en-US" altLang="ja-JP"/>
-              <a:t>2 </a:t>
-            </a:r>
-            <a:r>
-              <a:rPr kumimoji="1" lang="ja-JP" altLang="en-US"/>
-              <a:t>レベル</a:t>
-            </a:r>
-          </a:p>
-          <a:p>
-            <a:pPr lvl="2"/>
-            <a:r>
-              <a:rPr kumimoji="1" lang="ja-JP" altLang="en-US"/>
-              <a:t>第 </a:t>
-            </a:r>
-            <a:r>
-              <a:rPr kumimoji="1" lang="en-US" altLang="ja-JP"/>
-              <a:t>3 </a:t>
-            </a:r>
-            <a:r>
-              <a:rPr kumimoji="1" lang="ja-JP" altLang="en-US"/>
-              <a:t>レベル</a:t>
-            </a:r>
-          </a:p>
-          <a:p>
-            <a:pPr lvl="3"/>
-            <a:r>
-              <a:rPr kumimoji="1" lang="ja-JP" altLang="en-US"/>
-              <a:t>第 </a:t>
-            </a:r>
-            <a:r>
-              <a:rPr kumimoji="1" lang="en-US" altLang="ja-JP"/>
-              <a:t>4 </a:t>
-            </a:r>
-            <a:r>
-              <a:rPr kumimoji="1" lang="ja-JP" altLang="en-US"/>
-              <a:t>レベル</a:t>
-            </a:r>
-          </a:p>
-          <a:p>
-            <a:pPr lvl="4"/>
-            <a:r>
-              <a:rPr kumimoji="1" lang="ja-JP" altLang="en-US"/>
-              <a:t>第 </a:t>
-            </a:r>
-            <a:r>
-              <a:rPr kumimoji="1" lang="en-US" altLang="ja-JP"/>
-              <a:t>5 </a:t>
-            </a:r>
-            <a:r>
-              <a:rPr kumimoji="1" lang="ja-JP" altLang="en-US"/>
-              <a:t>レベル</a:t>
-            </a:r>
-          </a:p>
-        </p:txBody>
-      </p:sp>
-      <p:sp>
-        <p:nvSpPr>
-          <p:cNvPr id="7" name="日付プレースホルダー 6">
-            <a:extLst>
-              <a:ext uri="{FF2B5EF4-FFF2-40B4-BE49-F238E27FC236}">
-                <a16:creationId xmlns:a16="http://schemas.microsoft.com/office/drawing/2014/main" id="{834A3242-2F8F-9407-11EC-27A6629D0683}"/>
-              </a:ext>
-            </a:extLst>
-          </p:cNvPr>
+            <a:fld id="{60AD3CCE-071F-4B8E-8AC5-D36671CE0CE8}" type="datetimeFigureOut">
+              <a:rPr kumimoji="1" lang="ja-JP" altLang="en-US" smtClean="0"/>
+              <a:t>2026/7/6</a:t>
+            </a:fld>
+            <a:endParaRPr kumimoji="1" lang="ja-JP" altLang="en-US"/>
+          </a:p>
+        </p:txBody>
+      </p:sp>
+      <p:sp>
+        <p:nvSpPr>
+          <p:cNvPr id="8" name="Footer Placeholder 7"/>
           <p:cNvSpPr>
             <a:spLocks noGrp="1"/>
           </p:cNvSpPr>
           <p:nvPr>
-            <p:ph type="dt" sz="half" idx="10"/>
+            <p:ph type="ftr" sz="quarter" idx="11"/>
           </p:nvPr>
         </p:nvSpPr>
         <p:spPr/>
@@ -2038,48 +2361,13 @@
           <a:bodyPr/>
           <a:lstStyle/>
           <a:p>
-            <a:fld id="{60AD3CCE-071F-4B8E-8AC5-D36671CE0CE8}" type="datetimeFigureOut">
-              <a:rPr kumimoji="1" lang="ja-JP" altLang="en-US" smtClean="0"/>
-              <a:t>2026/7/3</a:t>
-            </a:fld>
             <a:endParaRPr kumimoji="1" lang="ja-JP" altLang="en-US"/>
           </a:p>
         </p:txBody>
       </p:sp>
       <p:sp>
         <p:nvSpPr>
-          <p:cNvPr id="8" name="フッター プレースホルダー 7">
-            <a:extLst>
-              <a:ext uri="{FF2B5EF4-FFF2-40B4-BE49-F238E27FC236}">
-                <a16:creationId xmlns:a16="http://schemas.microsoft.com/office/drawing/2014/main" id="{CC21B101-733A-8018-7365-6D1D50F16BAA}"/>
-              </a:ext>
-            </a:extLst>
-          </p:cNvPr>
-          <p:cNvSpPr>
-            <a:spLocks noGrp="1"/>
-          </p:cNvSpPr>
-          <p:nvPr>
-            <p:ph type="ftr" sz="quarter" idx="11"/>
-          </p:nvPr>
-        </p:nvSpPr>
-        <p:spPr/>
-        <p:txBody>
-          <a:bodyPr/>
-          <a:lstStyle/>
-          <a:p>
-            <a:endParaRPr kumimoji="1" lang="ja-JP" altLang="en-US"/>
-          </a:p>
-        </p:txBody>
-      </p:sp>
-      <p:sp>
-        <p:nvSpPr>
-          <p:cNvPr id="9" name="スライド番号プレースホルダー 8">
-            <a:extLst>
-              <a:ext uri="{FF2B5EF4-FFF2-40B4-BE49-F238E27FC236}">
-                <a16:creationId xmlns:a16="http://schemas.microsoft.com/office/drawing/2014/main" id="{2464DC7E-8107-B1E5-765B-E2213CD0EBDE}"/>
-              </a:ext>
-            </a:extLst>
-          </p:cNvPr>
+          <p:cNvPr id="9" name="Slide Number Placeholder 8"/>
           <p:cNvSpPr>
             <a:spLocks noGrp="1"/>
           </p:cNvSpPr>
@@ -2103,7 +2391,7 @@
     </p:spTree>
     <p:extLst>
       <p:ext uri="{BB962C8B-B14F-4D97-AF65-F5344CB8AC3E}">
-        <p14:creationId xmlns:p14="http://schemas.microsoft.com/office/powerpoint/2010/main" val="3206384345"/>
+        <p14:creationId xmlns:p14="http://schemas.microsoft.com/office/powerpoint/2010/main" val="562422763"/>
       </p:ext>
     </p:extLst>
   </p:cSld>
@@ -2132,13 +2420,7 @@
       </p:grpSpPr>
       <p:sp>
         <p:nvSpPr>
-          <p:cNvPr id="2" name="タイトル 1">
-            <a:extLst>
-              <a:ext uri="{FF2B5EF4-FFF2-40B4-BE49-F238E27FC236}">
-                <a16:creationId xmlns:a16="http://schemas.microsoft.com/office/drawing/2014/main" id="{9BA6D9AD-2D39-47F6-71BF-69AF46EBCEE8}"/>
-              </a:ext>
-            </a:extLst>
-          </p:cNvPr>
+          <p:cNvPr id="2" name="Title 1"/>
           <p:cNvSpPr>
             <a:spLocks noGrp="1"/>
           </p:cNvSpPr>
@@ -2152,21 +2434,16 @@
           <a:lstStyle/>
           <a:p>
             <a:r>
-              <a:rPr kumimoji="1" lang="ja-JP" altLang="en-US"/>
+              <a:rPr lang="ja-JP" altLang="en-US"/>
               <a:t>マスター タイトルの書式設定</a:t>
             </a:r>
-          </a:p>
-        </p:txBody>
-      </p:sp>
-      <p:sp>
-        <p:nvSpPr>
-          <p:cNvPr id="3" name="日付プレースホルダー 2">
-            <a:extLst>
-              <a:ext uri="{FF2B5EF4-FFF2-40B4-BE49-F238E27FC236}">
-                <a16:creationId xmlns:a16="http://schemas.microsoft.com/office/drawing/2014/main" id="{26928D5F-4540-A01B-ACD9-BC5166311432}"/>
-              </a:ext>
-            </a:extLst>
-          </p:cNvPr>
+            <a:endParaRPr lang="en-US" dirty="0"/>
+          </a:p>
+        </p:txBody>
+      </p:sp>
+      <p:sp>
+        <p:nvSpPr>
+          <p:cNvPr id="3" name="Date Placeholder 2"/>
           <p:cNvSpPr>
             <a:spLocks noGrp="1"/>
           </p:cNvSpPr>
@@ -2181,7 +2458,7 @@
           <a:p>
             <a:fld id="{60AD3CCE-071F-4B8E-8AC5-D36671CE0CE8}" type="datetimeFigureOut">
               <a:rPr kumimoji="1" lang="ja-JP" altLang="en-US" smtClean="0"/>
-              <a:t>2026/7/3</a:t>
+              <a:t>2026/7/6</a:t>
             </a:fld>
             <a:endParaRPr kumimoji="1" lang="ja-JP" altLang="en-US"/>
           </a:p>
@@ -2189,13 +2466,7 @@
       </p:sp>
       <p:sp>
         <p:nvSpPr>
-          <p:cNvPr id="4" name="フッター プレースホルダー 3">
-            <a:extLst>
-              <a:ext uri="{FF2B5EF4-FFF2-40B4-BE49-F238E27FC236}">
-                <a16:creationId xmlns:a16="http://schemas.microsoft.com/office/drawing/2014/main" id="{1EB843F6-6B8E-BE72-F3AA-310B72D2FA5B}"/>
-              </a:ext>
-            </a:extLst>
-          </p:cNvPr>
+          <p:cNvPr id="4" name="Footer Placeholder 3"/>
           <p:cNvSpPr>
             <a:spLocks noGrp="1"/>
           </p:cNvSpPr>
@@ -2214,13 +2485,7 @@
       </p:sp>
       <p:sp>
         <p:nvSpPr>
-          <p:cNvPr id="5" name="スライド番号プレースホルダー 4">
-            <a:extLst>
-              <a:ext uri="{FF2B5EF4-FFF2-40B4-BE49-F238E27FC236}">
-                <a16:creationId xmlns:a16="http://schemas.microsoft.com/office/drawing/2014/main" id="{B4CB29DB-CDE9-B941-8DD4-2FB85EFE5DF7}"/>
-              </a:ext>
-            </a:extLst>
-          </p:cNvPr>
+          <p:cNvPr id="5" name="Slide Number Placeholder 4"/>
           <p:cNvSpPr>
             <a:spLocks noGrp="1"/>
           </p:cNvSpPr>
@@ -2244,7 +2509,7 @@
     </p:spTree>
     <p:extLst>
       <p:ext uri="{BB962C8B-B14F-4D97-AF65-F5344CB8AC3E}">
-        <p14:creationId xmlns:p14="http://schemas.microsoft.com/office/powerpoint/2010/main" val="4061947557"/>
+        <p14:creationId xmlns:p14="http://schemas.microsoft.com/office/powerpoint/2010/main" val="3466438687"/>
       </p:ext>
     </p:extLst>
   </p:cSld>
@@ -2273,13 +2538,7 @@
       </p:grpSpPr>
       <p:sp>
         <p:nvSpPr>
-          <p:cNvPr id="2" name="日付プレースホルダー 1">
-            <a:extLst>
-              <a:ext uri="{FF2B5EF4-FFF2-40B4-BE49-F238E27FC236}">
-                <a16:creationId xmlns:a16="http://schemas.microsoft.com/office/drawing/2014/main" id="{584B0D00-774D-6E5B-AE8F-B1AE1229830D}"/>
-              </a:ext>
-            </a:extLst>
-          </p:cNvPr>
+          <p:cNvPr id="2" name="Date Placeholder 1"/>
           <p:cNvSpPr>
             <a:spLocks noGrp="1"/>
           </p:cNvSpPr>
@@ -2294,7 +2553,7 @@
           <a:p>
             <a:fld id="{60AD3CCE-071F-4B8E-8AC5-D36671CE0CE8}" type="datetimeFigureOut">
               <a:rPr kumimoji="1" lang="ja-JP" altLang="en-US" smtClean="0"/>
-              <a:t>2026/7/3</a:t>
+              <a:t>2026/7/6</a:t>
             </a:fld>
             <a:endParaRPr kumimoji="1" lang="ja-JP" altLang="en-US"/>
           </a:p>
@@ -2302,13 +2561,7 @@
       </p:sp>
       <p:sp>
         <p:nvSpPr>
-          <p:cNvPr id="3" name="フッター プレースホルダー 2">
-            <a:extLst>
-              <a:ext uri="{FF2B5EF4-FFF2-40B4-BE49-F238E27FC236}">
-                <a16:creationId xmlns:a16="http://schemas.microsoft.com/office/drawing/2014/main" id="{D77438F9-2CB9-CEE6-E775-564999FC9149}"/>
-              </a:ext>
-            </a:extLst>
-          </p:cNvPr>
+          <p:cNvPr id="3" name="Footer Placeholder 2"/>
           <p:cNvSpPr>
             <a:spLocks noGrp="1"/>
           </p:cNvSpPr>
@@ -2327,13 +2580,7 @@
       </p:sp>
       <p:sp>
         <p:nvSpPr>
-          <p:cNvPr id="4" name="スライド番号プレースホルダー 3">
-            <a:extLst>
-              <a:ext uri="{FF2B5EF4-FFF2-40B4-BE49-F238E27FC236}">
-                <a16:creationId xmlns:a16="http://schemas.microsoft.com/office/drawing/2014/main" id="{B3488C4C-C558-B5DC-B434-68343F750AFC}"/>
-              </a:ext>
-            </a:extLst>
-          </p:cNvPr>
+          <p:cNvPr id="4" name="Slide Number Placeholder 3"/>
           <p:cNvSpPr>
             <a:spLocks noGrp="1"/>
           </p:cNvSpPr>
@@ -2357,7 +2604,7 @@
     </p:spTree>
     <p:extLst>
       <p:ext uri="{BB962C8B-B14F-4D97-AF65-F5344CB8AC3E}">
-        <p14:creationId xmlns:p14="http://schemas.microsoft.com/office/powerpoint/2010/main" val="3398153646"/>
+        <p14:creationId xmlns:p14="http://schemas.microsoft.com/office/powerpoint/2010/main" val="1173663552"/>
       </p:ext>
     </p:extLst>
   </p:cSld>
@@ -2368,7 +2615,7 @@
 </file>
 
 <file path=ppt/slideLayouts/slideLayout8.xml><?xml version="1.0" encoding="utf-8"?>
-<p:sldLayout xmlns:a="http://schemas.openxmlformats.org/drawingml/2006/main" xmlns:r="http://schemas.openxmlformats.org/officeDocument/2006/relationships" xmlns:p="http://schemas.openxmlformats.org/presentationml/2006/main" type="objTx" preserve="1">
+<p:sldLayout xmlns:a="http://schemas.openxmlformats.org/drawingml/2006/main" xmlns:r="http://schemas.openxmlformats.org/officeDocument/2006/relationships" xmlns:p="http://schemas.openxmlformats.org/presentationml/2006/main" showMasterSp="0" type="objTx" preserve="1">
   <p:cSld name="タイトル付きのコンテンツ">
     <p:spTree>
       <p:nvGrpSpPr>
@@ -2386,13 +2633,45 @@
       </p:grpSpPr>
       <p:sp>
         <p:nvSpPr>
-          <p:cNvPr id="2" name="タイトル 1">
-            <a:extLst>
-              <a:ext uri="{FF2B5EF4-FFF2-40B4-BE49-F238E27FC236}">
-                <a16:creationId xmlns:a16="http://schemas.microsoft.com/office/drawing/2014/main" id="{0D992E6B-6DD5-AAE6-B228-74ED42C59501}"/>
-              </a:ext>
-            </a:extLst>
-          </p:cNvPr>
+          <p:cNvPr id="8" name="Rectangle 7" title="Background Shape"/>
+          <p:cNvSpPr/>
+          <p:nvPr/>
+        </p:nvSpPr>
+        <p:spPr>
+          <a:xfrm>
+            <a:off x="0" y="376"/>
+            <a:ext cx="5303520" cy="6857624"/>
+          </a:xfrm>
+          <a:prstGeom prst="rect">
+            <a:avLst/>
+          </a:prstGeom>
+          <a:solidFill>
+            <a:schemeClr val="accent1"/>
+          </a:solidFill>
+          <a:ln>
+            <a:noFill/>
+          </a:ln>
+        </p:spPr>
+        <p:style>
+          <a:lnRef idx="2">
+            <a:schemeClr val="accent1">
+              <a:shade val="50000"/>
+            </a:schemeClr>
+          </a:lnRef>
+          <a:fillRef idx="1">
+            <a:schemeClr val="accent1"/>
+          </a:fillRef>
+          <a:effectRef idx="0">
+            <a:schemeClr val="accent1"/>
+          </a:effectRef>
+          <a:fontRef idx="minor">
+            <a:schemeClr val="lt1"/>
+          </a:fontRef>
+        </p:style>
+      </p:sp>
+      <p:sp>
+        <p:nvSpPr>
+          <p:cNvPr id="2" name="Title 1"/>
           <p:cNvSpPr>
             <a:spLocks noGrp="1"/>
           </p:cNvSpPr>
@@ -2402,34 +2681,38 @@
         </p:nvSpPr>
         <p:spPr>
           <a:xfrm>
-            <a:off x="839788" y="457200"/>
-            <a:ext cx="3932237" cy="1600200"/>
-          </a:xfrm>
-        </p:spPr>
-        <p:txBody>
-          <a:bodyPr anchor="b"/>
+            <a:off x="723900" y="685800"/>
+            <a:ext cx="3855720" cy="2157884"/>
+          </a:xfrm>
+        </p:spPr>
+        <p:txBody>
+          <a:bodyPr anchor="t">
+            <a:noAutofit/>
+          </a:bodyPr>
           <a:lstStyle>
             <a:lvl1pPr>
-              <a:defRPr sz="3200"/>
+              <a:lnSpc>
+                <a:spcPct val="84000"/>
+              </a:lnSpc>
+              <a:defRPr sz="4800" baseline="0">
+                <a:solidFill>
+                  <a:schemeClr val="tx2"/>
+                </a:solidFill>
+              </a:defRPr>
             </a:lvl1pPr>
           </a:lstStyle>
           <a:p>
             <a:r>
-              <a:rPr kumimoji="1" lang="ja-JP" altLang="en-US"/>
+              <a:rPr lang="ja-JP" altLang="en-US"/>
               <a:t>マスター タイトルの書式設定</a:t>
             </a:r>
-          </a:p>
-        </p:txBody>
-      </p:sp>
-      <p:sp>
-        <p:nvSpPr>
-          <p:cNvPr id="3" name="コンテンツ プレースホルダー 2">
-            <a:extLst>
-              <a:ext uri="{FF2B5EF4-FFF2-40B4-BE49-F238E27FC236}">
-                <a16:creationId xmlns:a16="http://schemas.microsoft.com/office/drawing/2014/main" id="{81E22DDF-234B-0F91-843E-8077A89F0F74}"/>
-              </a:ext>
-            </a:extLst>
-          </p:cNvPr>
+            <a:endParaRPr lang="en-US" dirty="0"/>
+          </a:p>
+        </p:txBody>
+      </p:sp>
+      <p:sp>
+        <p:nvSpPr>
+          <p:cNvPr id="3" name="Content Placeholder 2"/>
           <p:cNvSpPr>
             <a:spLocks noGrp="1"/>
           </p:cNvSpPr>
@@ -2439,119 +2722,114 @@
         </p:nvSpPr>
         <p:spPr>
           <a:xfrm>
-            <a:off x="5183188" y="987425"/>
-            <a:ext cx="6172200" cy="4873625"/>
+            <a:off x="6256020" y="685801"/>
+            <a:ext cx="5212080" cy="5175250"/>
           </a:xfrm>
         </p:spPr>
         <p:txBody>
           <a:bodyPr/>
           <a:lstStyle>
             <a:lvl1pPr>
-              <a:defRPr sz="3200"/>
+              <a:defRPr sz="2000"/>
             </a:lvl1pPr>
             <a:lvl2pPr>
-              <a:defRPr sz="2800"/>
+              <a:defRPr sz="2000"/>
             </a:lvl2pPr>
             <a:lvl3pPr>
-              <a:defRPr sz="2400"/>
+              <a:defRPr sz="1800"/>
             </a:lvl3pPr>
             <a:lvl4pPr>
-              <a:defRPr sz="2000"/>
+              <a:defRPr sz="1800"/>
             </a:lvl4pPr>
             <a:lvl5pPr>
-              <a:defRPr sz="2000"/>
+              <a:defRPr sz="1600"/>
             </a:lvl5pPr>
             <a:lvl6pPr>
-              <a:defRPr sz="2000"/>
+              <a:defRPr sz="1600"/>
             </a:lvl6pPr>
             <a:lvl7pPr>
-              <a:defRPr sz="2000"/>
+              <a:defRPr sz="1600"/>
             </a:lvl7pPr>
             <a:lvl8pPr>
-              <a:defRPr sz="2000"/>
+              <a:defRPr sz="1600"/>
             </a:lvl8pPr>
             <a:lvl9pPr>
-              <a:defRPr sz="2000"/>
+              <a:defRPr sz="1600"/>
             </a:lvl9pPr>
           </a:lstStyle>
           <a:p>
             <a:pPr lvl="0"/>
             <a:r>
-              <a:rPr kumimoji="1" lang="ja-JP" altLang="en-US"/>
+              <a:rPr lang="ja-JP" altLang="en-US"/>
               <a:t>マスター テキストの書式設定</a:t>
             </a:r>
           </a:p>
           <a:p>
             <a:pPr lvl="1"/>
             <a:r>
-              <a:rPr kumimoji="1" lang="ja-JP" altLang="en-US"/>
+              <a:rPr lang="ja-JP" altLang="en-US"/>
               <a:t>第 </a:t>
             </a:r>
             <a:r>
-              <a:rPr kumimoji="1" lang="en-US" altLang="ja-JP"/>
+              <a:rPr lang="en-US" altLang="ja-JP"/>
               <a:t>2 </a:t>
             </a:r>
             <a:r>
-              <a:rPr kumimoji="1" lang="ja-JP" altLang="en-US"/>
+              <a:rPr lang="ja-JP" altLang="en-US"/>
               <a:t>レベル</a:t>
             </a:r>
           </a:p>
           <a:p>
             <a:pPr lvl="2"/>
             <a:r>
-              <a:rPr kumimoji="1" lang="ja-JP" altLang="en-US"/>
+              <a:rPr lang="ja-JP" altLang="en-US"/>
               <a:t>第 </a:t>
             </a:r>
             <a:r>
-              <a:rPr kumimoji="1" lang="en-US" altLang="ja-JP"/>
+              <a:rPr lang="en-US" altLang="ja-JP"/>
               <a:t>3 </a:t>
             </a:r>
             <a:r>
-              <a:rPr kumimoji="1" lang="ja-JP" altLang="en-US"/>
+              <a:rPr lang="ja-JP" altLang="en-US"/>
               <a:t>レベル</a:t>
             </a:r>
           </a:p>
           <a:p>
             <a:pPr lvl="3"/>
             <a:r>
-              <a:rPr kumimoji="1" lang="ja-JP" altLang="en-US"/>
+              <a:rPr lang="ja-JP" altLang="en-US"/>
               <a:t>第 </a:t>
             </a:r>
             <a:r>
-              <a:rPr kumimoji="1" lang="en-US" altLang="ja-JP"/>
+              <a:rPr lang="en-US" altLang="ja-JP"/>
               <a:t>4 </a:t>
             </a:r>
             <a:r>
-              <a:rPr kumimoji="1" lang="ja-JP" altLang="en-US"/>
+              <a:rPr lang="ja-JP" altLang="en-US"/>
               <a:t>レベル</a:t>
             </a:r>
           </a:p>
           <a:p>
             <a:pPr lvl="4"/>
             <a:r>
-              <a:rPr kumimoji="1" lang="ja-JP" altLang="en-US"/>
+              <a:rPr lang="ja-JP" altLang="en-US"/>
               <a:t>第 </a:t>
             </a:r>
             <a:r>
-              <a:rPr kumimoji="1" lang="en-US" altLang="ja-JP"/>
+              <a:rPr lang="en-US" altLang="ja-JP"/>
               <a:t>5 </a:t>
             </a:r>
             <a:r>
-              <a:rPr kumimoji="1" lang="ja-JP" altLang="en-US"/>
+              <a:rPr lang="ja-JP" altLang="en-US"/>
               <a:t>レベル</a:t>
             </a:r>
-          </a:p>
-        </p:txBody>
-      </p:sp>
-      <p:sp>
-        <p:nvSpPr>
-          <p:cNvPr id="4" name="テキスト プレースホルダー 3">
-            <a:extLst>
-              <a:ext uri="{FF2B5EF4-FFF2-40B4-BE49-F238E27FC236}">
-                <a16:creationId xmlns:a16="http://schemas.microsoft.com/office/drawing/2014/main" id="{794F5337-56D5-8842-1C8F-9ED9D4EC2FC9}"/>
-              </a:ext>
-            </a:extLst>
-          </p:cNvPr>
+            <a:endParaRPr lang="en-US" dirty="0"/>
+          </a:p>
+        </p:txBody>
+      </p:sp>
+      <p:sp>
+        <p:nvSpPr>
+          <p:cNvPr id="4" name="Text Placeholder 3"/>
           <p:cNvSpPr>
             <a:spLocks noGrp="1"/>
           </p:cNvSpPr>
@@ -2561,14 +2839,23 @@
         </p:nvSpPr>
         <p:spPr>
           <a:xfrm>
-            <a:off x="839788" y="2057400"/>
-            <a:ext cx="3932237" cy="3811588"/>
+            <a:off x="723900" y="2856344"/>
+            <a:ext cx="3855720" cy="3011056"/>
           </a:xfrm>
         </p:spPr>
         <p:txBody>
           <a:bodyPr/>
           <a:lstStyle>
             <a:lvl1pPr marL="0" indent="0">
+              <a:lnSpc>
+                <a:spcPct val="113000"/>
+              </a:lnSpc>
+              <a:spcBef>
+                <a:spcPts val="0"/>
+              </a:spcBef>
+              <a:spcAft>
+                <a:spcPts val="1500"/>
+              </a:spcAft>
               <a:buNone/>
               <a:defRPr sz="1600"/>
             </a:lvl1pPr>
@@ -2608,7 +2895,7 @@
           <a:p>
             <a:pPr lvl="0"/>
             <a:r>
-              <a:rPr kumimoji="1" lang="ja-JP" altLang="en-US"/>
+              <a:rPr lang="ja-JP" altLang="en-US"/>
               <a:t>マスター テキストの書式設定</a:t>
             </a:r>
           </a:p>
@@ -2616,13 +2903,7 @@
       </p:sp>
       <p:sp>
         <p:nvSpPr>
-          <p:cNvPr id="5" name="日付プレースホルダー 4">
-            <a:extLst>
-              <a:ext uri="{FF2B5EF4-FFF2-40B4-BE49-F238E27FC236}">
-                <a16:creationId xmlns:a16="http://schemas.microsoft.com/office/drawing/2014/main" id="{FE063860-8FD7-6AEE-0065-828EAAD744C8}"/>
-              </a:ext>
-            </a:extLst>
-          </p:cNvPr>
+          <p:cNvPr id="5" name="Date Placeholder 4"/>
           <p:cNvSpPr>
             <a:spLocks noGrp="1"/>
           </p:cNvSpPr>
@@ -2630,14 +2911,27 @@
             <p:ph type="dt" sz="half" idx="10"/>
           </p:nvPr>
         </p:nvSpPr>
-        <p:spPr/>
+        <p:spPr>
+          <a:xfrm>
+            <a:off x="723900" y="6453386"/>
+            <a:ext cx="1204572" cy="404614"/>
+          </a:xfrm>
+        </p:spPr>
         <p:txBody>
           <a:bodyPr/>
-          <a:lstStyle/>
+          <a:lstStyle>
+            <a:lvl1pPr>
+              <a:defRPr>
+                <a:solidFill>
+                  <a:schemeClr val="tx2"/>
+                </a:solidFill>
+              </a:defRPr>
+            </a:lvl1pPr>
+          </a:lstStyle>
           <a:p>
             <a:fld id="{60AD3CCE-071F-4B8E-8AC5-D36671CE0CE8}" type="datetimeFigureOut">
               <a:rPr kumimoji="1" lang="ja-JP" altLang="en-US" smtClean="0"/>
-              <a:t>2026/7/3</a:t>
+              <a:t>2026/7/6</a:t>
             </a:fld>
             <a:endParaRPr kumimoji="1" lang="ja-JP" altLang="en-US"/>
           </a:p>
@@ -2645,13 +2939,7 @@
       </p:sp>
       <p:sp>
         <p:nvSpPr>
-          <p:cNvPr id="6" name="フッター プレースホルダー 5">
-            <a:extLst>
-              <a:ext uri="{FF2B5EF4-FFF2-40B4-BE49-F238E27FC236}">
-                <a16:creationId xmlns:a16="http://schemas.microsoft.com/office/drawing/2014/main" id="{461B5420-F865-AC45-83F4-F4E08EF2FA50}"/>
-              </a:ext>
-            </a:extLst>
-          </p:cNvPr>
+          <p:cNvPr id="6" name="Footer Placeholder 5"/>
           <p:cNvSpPr>
             <a:spLocks noGrp="1"/>
           </p:cNvSpPr>
@@ -2659,10 +2947,23 @@
             <p:ph type="ftr" sz="quarter" idx="11"/>
           </p:nvPr>
         </p:nvSpPr>
-        <p:spPr/>
+        <p:spPr>
+          <a:xfrm>
+            <a:off x="2205945" y="6453386"/>
+            <a:ext cx="2373675" cy="404614"/>
+          </a:xfrm>
+        </p:spPr>
         <p:txBody>
           <a:bodyPr/>
-          <a:lstStyle/>
+          <a:lstStyle>
+            <a:lvl1pPr>
+              <a:defRPr>
+                <a:solidFill>
+                  <a:schemeClr val="tx2"/>
+                </a:solidFill>
+              </a:defRPr>
+            </a:lvl1pPr>
+          </a:lstStyle>
           <a:p>
             <a:endParaRPr kumimoji="1" lang="ja-JP" altLang="en-US"/>
           </a:p>
@@ -2670,13 +2971,7 @@
       </p:sp>
       <p:sp>
         <p:nvSpPr>
-          <p:cNvPr id="7" name="スライド番号プレースホルダー 6">
-            <a:extLst>
-              <a:ext uri="{FF2B5EF4-FFF2-40B4-BE49-F238E27FC236}">
-                <a16:creationId xmlns:a16="http://schemas.microsoft.com/office/drawing/2014/main" id="{B376784B-1246-4E1B-4E35-0DBB55F6FCA3}"/>
-              </a:ext>
-            </a:extLst>
-          </p:cNvPr>
+          <p:cNvPr id="7" name="Slide Number Placeholder 6"/>
           <p:cNvSpPr>
             <a:spLocks noGrp="1"/>
           </p:cNvSpPr>
@@ -2684,10 +2979,23 @@
             <p:ph type="sldNum" sz="quarter" idx="12"/>
           </p:nvPr>
         </p:nvSpPr>
-        <p:spPr/>
+        <p:spPr>
+          <a:xfrm>
+            <a:off x="9883140" y="6453386"/>
+            <a:ext cx="1596292" cy="404614"/>
+          </a:xfrm>
+        </p:spPr>
         <p:txBody>
           <a:bodyPr/>
-          <a:lstStyle/>
+          <a:lstStyle>
+            <a:lvl1pPr>
+              <a:defRPr>
+                <a:solidFill>
+                  <a:schemeClr val="tx2"/>
+                </a:solidFill>
+              </a:defRPr>
+            </a:lvl1pPr>
+          </a:lstStyle>
           <a:p>
             <a:fld id="{B37D7E2B-F8ED-469C-8F05-023F1D7F84D6}" type="slidenum">
               <a:rPr kumimoji="1" lang="ja-JP" altLang="en-US" smtClean="0"/>
@@ -2697,10 +3005,48 @@
           </a:p>
         </p:txBody>
       </p:sp>
+      <p:sp>
+        <p:nvSpPr>
+          <p:cNvPr id="9" name="Rectangle 8" title="Divider Bar"/>
+          <p:cNvSpPr/>
+          <p:nvPr/>
+        </p:nvSpPr>
+        <p:spPr>
+          <a:xfrm>
+            <a:off x="5303520" y="376"/>
+            <a:ext cx="228600" cy="6858000"/>
+          </a:xfrm>
+          <a:prstGeom prst="rect">
+            <a:avLst/>
+          </a:prstGeom>
+          <a:solidFill>
+            <a:schemeClr val="tx2"/>
+          </a:solidFill>
+          <a:ln>
+            <a:noFill/>
+          </a:ln>
+        </p:spPr>
+        <p:style>
+          <a:lnRef idx="2">
+            <a:schemeClr val="accent1">
+              <a:shade val="50000"/>
+            </a:schemeClr>
+          </a:lnRef>
+          <a:fillRef idx="1">
+            <a:schemeClr val="accent1"/>
+          </a:fillRef>
+          <a:effectRef idx="0">
+            <a:schemeClr val="accent1"/>
+          </a:effectRef>
+          <a:fontRef idx="minor">
+            <a:schemeClr val="lt1"/>
+          </a:fontRef>
+        </p:style>
+      </p:sp>
     </p:spTree>
     <p:extLst>
       <p:ext uri="{BB962C8B-B14F-4D97-AF65-F5344CB8AC3E}">
-        <p14:creationId xmlns:p14="http://schemas.microsoft.com/office/powerpoint/2010/main" val="4141246702"/>
+        <p14:creationId xmlns:p14="http://schemas.microsoft.com/office/powerpoint/2010/main" val="2197497604"/>
       </p:ext>
     </p:extLst>
   </p:cSld>
@@ -2711,7 +3057,7 @@
 </file>
 
 <file path=ppt/slideLayouts/slideLayout9.xml><?xml version="1.0" encoding="utf-8"?>
-<p:sldLayout xmlns:a="http://schemas.openxmlformats.org/drawingml/2006/main" xmlns:r="http://schemas.openxmlformats.org/officeDocument/2006/relationships" xmlns:p="http://schemas.openxmlformats.org/presentationml/2006/main" type="picTx" preserve="1">
+<p:sldLayout xmlns:a="http://schemas.openxmlformats.org/drawingml/2006/main" xmlns:r="http://schemas.openxmlformats.org/officeDocument/2006/relationships" xmlns:p="http://schemas.openxmlformats.org/presentationml/2006/main" showMasterSp="0" type="picTx" preserve="1">
   <p:cSld name="タイトル付きの図">
     <p:spTree>
       <p:nvGrpSpPr>
@@ -2729,13 +3075,45 @@
       </p:grpSpPr>
       <p:sp>
         <p:nvSpPr>
-          <p:cNvPr id="2" name="タイトル 1">
-            <a:extLst>
-              <a:ext uri="{FF2B5EF4-FFF2-40B4-BE49-F238E27FC236}">
-                <a16:creationId xmlns:a16="http://schemas.microsoft.com/office/drawing/2014/main" id="{22FAC59D-1A15-A975-A519-1546C024A399}"/>
-              </a:ext>
-            </a:extLst>
-          </p:cNvPr>
+          <p:cNvPr id="8" name="Rectangle 7" title="Background Shape"/>
+          <p:cNvSpPr/>
+          <p:nvPr/>
+        </p:nvSpPr>
+        <p:spPr>
+          <a:xfrm>
+            <a:off x="0" y="376"/>
+            <a:ext cx="5303520" cy="6857624"/>
+          </a:xfrm>
+          <a:prstGeom prst="rect">
+            <a:avLst/>
+          </a:prstGeom>
+          <a:solidFill>
+            <a:schemeClr val="accent1"/>
+          </a:solidFill>
+          <a:ln>
+            <a:noFill/>
+          </a:ln>
+        </p:spPr>
+        <p:style>
+          <a:lnRef idx="2">
+            <a:schemeClr val="accent1">
+              <a:shade val="50000"/>
+            </a:schemeClr>
+          </a:lnRef>
+          <a:fillRef idx="1">
+            <a:schemeClr val="accent1"/>
+          </a:fillRef>
+          <a:effectRef idx="0">
+            <a:schemeClr val="accent1"/>
+          </a:effectRef>
+          <a:fontRef idx="minor">
+            <a:schemeClr val="lt1"/>
+          </a:fontRef>
+        </p:style>
+      </p:sp>
+      <p:sp>
+        <p:nvSpPr>
+          <p:cNvPr id="2" name="Title 1"/>
           <p:cNvSpPr>
             <a:spLocks noGrp="1"/>
           </p:cNvSpPr>
@@ -2745,36 +3123,36 @@
         </p:nvSpPr>
         <p:spPr>
           <a:xfrm>
-            <a:off x="839788" y="457200"/>
-            <a:ext cx="3932237" cy="1600200"/>
-          </a:xfrm>
-        </p:spPr>
-        <p:txBody>
-          <a:bodyPr anchor="b"/>
+            <a:off x="723900" y="685800"/>
+            <a:ext cx="3855720" cy="2157884"/>
+          </a:xfrm>
+        </p:spPr>
+        <p:txBody>
+          <a:bodyPr anchor="t">
+            <a:normAutofit/>
+          </a:bodyPr>
           <a:lstStyle>
             <a:lvl1pPr>
-              <a:defRPr sz="3200"/>
+              <a:lnSpc>
+                <a:spcPct val="84000"/>
+              </a:lnSpc>
+              <a:defRPr sz="4800" baseline="0"/>
             </a:lvl1pPr>
           </a:lstStyle>
           <a:p>
             <a:r>
-              <a:rPr kumimoji="1" lang="ja-JP" altLang="en-US"/>
+              <a:rPr lang="ja-JP" altLang="en-US"/>
               <a:t>マスター タイトルの書式設定</a:t>
             </a:r>
-          </a:p>
-        </p:txBody>
-      </p:sp>
-      <p:sp>
-        <p:nvSpPr>
-          <p:cNvPr id="3" name="図プレースホルダー 2">
-            <a:extLst>
-              <a:ext uri="{FF2B5EF4-FFF2-40B4-BE49-F238E27FC236}">
-                <a16:creationId xmlns:a16="http://schemas.microsoft.com/office/drawing/2014/main" id="{15F1E490-3799-CC3F-F22B-BC3AEF6B2856}"/>
-              </a:ext>
-            </a:extLst>
-          </p:cNvPr>
-          <p:cNvSpPr>
-            <a:spLocks noGrp="1"/>
+            <a:endParaRPr lang="en-US" dirty="0"/>
+          </a:p>
+        </p:txBody>
+      </p:sp>
+      <p:sp>
+        <p:nvSpPr>
+          <p:cNvPr id="3" name="Picture Placeholder 2"/>
+          <p:cNvSpPr>
+            <a:spLocks noGrp="1" noChangeAspect="1"/>
           </p:cNvSpPr>
           <p:nvPr>
             <p:ph type="pic" idx="1"/>
@@ -2782,24 +3160,26 @@
         </p:nvSpPr>
         <p:spPr>
           <a:xfrm>
-            <a:off x="5183188" y="987425"/>
-            <a:ext cx="6172200" cy="4873625"/>
-          </a:xfrm>
-        </p:spPr>
-        <p:txBody>
-          <a:bodyPr/>
+            <a:off x="5532120" y="0"/>
+            <a:ext cx="6659880" cy="6857999"/>
+          </a:xfrm>
+        </p:spPr>
+        <p:txBody>
+          <a:bodyPr anchor="t">
+            <a:normAutofit/>
+          </a:bodyPr>
           <a:lstStyle>
             <a:lvl1pPr marL="0" indent="0">
               <a:buNone/>
-              <a:defRPr sz="3200"/>
+              <a:defRPr sz="2000"/>
             </a:lvl1pPr>
             <a:lvl2pPr marL="457200" indent="0">
               <a:buNone/>
-              <a:defRPr sz="2800"/>
+              <a:defRPr sz="2000"/>
             </a:lvl2pPr>
             <a:lvl3pPr marL="914400" indent="0">
               <a:buNone/>
-              <a:defRPr sz="2400"/>
+              <a:defRPr sz="2000"/>
             </a:lvl3pPr>
             <a:lvl4pPr marL="1371600" indent="0">
               <a:buNone/>
@@ -2827,19 +3207,17 @@
             </a:lvl9pPr>
           </a:lstStyle>
           <a:p>
-            <a:endParaRPr kumimoji="1" lang="ja-JP" altLang="en-US"/>
-          </a:p>
-        </p:txBody>
-      </p:sp>
-      <p:sp>
-        <p:nvSpPr>
-          <p:cNvPr id="4" name="テキスト プレースホルダー 3">
-            <a:extLst>
-              <a:ext uri="{FF2B5EF4-FFF2-40B4-BE49-F238E27FC236}">
-                <a16:creationId xmlns:a16="http://schemas.microsoft.com/office/drawing/2014/main" id="{48A1EFE7-21C4-70AC-95FA-5FD36558DF85}"/>
-              </a:ext>
-            </a:extLst>
-          </p:cNvPr>
+            <a:r>
+              <a:rPr lang="ja-JP" altLang="en-US"/>
+              <a:t>アイコンをクリックして図を追加</a:t>
+            </a:r>
+            <a:endParaRPr lang="en-US" dirty="0"/>
+          </a:p>
+        </p:txBody>
+      </p:sp>
+      <p:sp>
+        <p:nvSpPr>
+          <p:cNvPr id="4" name="Text Placeholder 3"/>
           <p:cNvSpPr>
             <a:spLocks noGrp="1"/>
           </p:cNvSpPr>
@@ -2849,14 +3227,23 @@
         </p:nvSpPr>
         <p:spPr>
           <a:xfrm>
-            <a:off x="839788" y="2057400"/>
-            <a:ext cx="3932237" cy="3811588"/>
+            <a:off x="723900" y="2855968"/>
+            <a:ext cx="3855720" cy="3011432"/>
           </a:xfrm>
         </p:spPr>
         <p:txBody>
           <a:bodyPr/>
           <a:lstStyle>
             <a:lvl1pPr marL="0" indent="0">
+              <a:lnSpc>
+                <a:spcPct val="113000"/>
+              </a:lnSpc>
+              <a:spcBef>
+                <a:spcPts val="0"/>
+              </a:spcBef>
+              <a:spcAft>
+                <a:spcPts val="1500"/>
+              </a:spcAft>
               <a:buNone/>
               <a:defRPr sz="1600"/>
             </a:lvl1pPr>
@@ -2896,7 +3283,7 @@
           <a:p>
             <a:pPr lvl="0"/>
             <a:r>
-              <a:rPr kumimoji="1" lang="ja-JP" altLang="en-US"/>
+              <a:rPr lang="ja-JP" altLang="en-US"/>
               <a:t>マスター テキストの書式設定</a:t>
             </a:r>
           </a:p>
@@ -2904,13 +3291,7 @@
       </p:sp>
       <p:sp>
         <p:nvSpPr>
-          <p:cNvPr id="5" name="日付プレースホルダー 4">
-            <a:extLst>
-              <a:ext uri="{FF2B5EF4-FFF2-40B4-BE49-F238E27FC236}">
-                <a16:creationId xmlns:a16="http://schemas.microsoft.com/office/drawing/2014/main" id="{A51AC2A2-2FD9-F7BC-E8E3-6B6E69E57BA7}"/>
-              </a:ext>
-            </a:extLst>
-          </p:cNvPr>
+          <p:cNvPr id="5" name="Date Placeholder 4"/>
           <p:cNvSpPr>
             <a:spLocks noGrp="1"/>
           </p:cNvSpPr>
@@ -2918,14 +3299,27 @@
             <p:ph type="dt" sz="half" idx="10"/>
           </p:nvPr>
         </p:nvSpPr>
-        <p:spPr/>
+        <p:spPr>
+          <a:xfrm>
+            <a:off x="723900" y="6453386"/>
+            <a:ext cx="1204572" cy="404614"/>
+          </a:xfrm>
+        </p:spPr>
         <p:txBody>
           <a:bodyPr/>
-          <a:lstStyle/>
+          <a:lstStyle>
+            <a:lvl1pPr>
+              <a:defRPr>
+                <a:solidFill>
+                  <a:schemeClr val="tx2"/>
+                </a:solidFill>
+              </a:defRPr>
+            </a:lvl1pPr>
+          </a:lstStyle>
           <a:p>
             <a:fld id="{60AD3CCE-071F-4B8E-8AC5-D36671CE0CE8}" type="datetimeFigureOut">
               <a:rPr kumimoji="1" lang="ja-JP" altLang="en-US" smtClean="0"/>
-              <a:t>2026/7/3</a:t>
+              <a:t>2026/7/6</a:t>
             </a:fld>
             <a:endParaRPr kumimoji="1" lang="ja-JP" altLang="en-US"/>
           </a:p>
@@ -2933,13 +3327,7 @@
       </p:sp>
       <p:sp>
         <p:nvSpPr>
-          <p:cNvPr id="6" name="フッター プレースホルダー 5">
-            <a:extLst>
-              <a:ext uri="{FF2B5EF4-FFF2-40B4-BE49-F238E27FC236}">
-                <a16:creationId xmlns:a16="http://schemas.microsoft.com/office/drawing/2014/main" id="{9AF12244-B74B-3AFC-0B26-17EC7D1D090A}"/>
-              </a:ext>
-            </a:extLst>
-          </p:cNvPr>
+          <p:cNvPr id="6" name="Footer Placeholder 5"/>
           <p:cNvSpPr>
             <a:spLocks noGrp="1"/>
           </p:cNvSpPr>
@@ -2947,10 +3335,23 @@
             <p:ph type="ftr" sz="quarter" idx="11"/>
           </p:nvPr>
         </p:nvSpPr>
-        <p:spPr/>
+        <p:spPr>
+          <a:xfrm>
+            <a:off x="2205945" y="6453386"/>
+            <a:ext cx="2373675" cy="404614"/>
+          </a:xfrm>
+        </p:spPr>
         <p:txBody>
           <a:bodyPr/>
-          <a:lstStyle/>
+          <a:lstStyle>
+            <a:lvl1pPr>
+              <a:defRPr>
+                <a:solidFill>
+                  <a:schemeClr val="tx2"/>
+                </a:solidFill>
+              </a:defRPr>
+            </a:lvl1pPr>
+          </a:lstStyle>
           <a:p>
             <a:endParaRPr kumimoji="1" lang="ja-JP" altLang="en-US"/>
           </a:p>
@@ -2958,13 +3359,7 @@
       </p:sp>
       <p:sp>
         <p:nvSpPr>
-          <p:cNvPr id="7" name="スライド番号プレースホルダー 6">
-            <a:extLst>
-              <a:ext uri="{FF2B5EF4-FFF2-40B4-BE49-F238E27FC236}">
-                <a16:creationId xmlns:a16="http://schemas.microsoft.com/office/drawing/2014/main" id="{40C70041-4FD4-9BFC-A087-804F0D290F58}"/>
-              </a:ext>
-            </a:extLst>
-          </p:cNvPr>
+          <p:cNvPr id="7" name="Slide Number Placeholder 6"/>
           <p:cNvSpPr>
             <a:spLocks noGrp="1"/>
           </p:cNvSpPr>
@@ -2972,10 +3367,23 @@
             <p:ph type="sldNum" sz="quarter" idx="12"/>
           </p:nvPr>
         </p:nvSpPr>
-        <p:spPr/>
+        <p:spPr>
+          <a:xfrm>
+            <a:off x="9883140" y="6453386"/>
+            <a:ext cx="1596292" cy="404614"/>
+          </a:xfrm>
+        </p:spPr>
         <p:txBody>
           <a:bodyPr/>
-          <a:lstStyle/>
+          <a:lstStyle>
+            <a:lvl1pPr>
+              <a:defRPr>
+                <a:solidFill>
+                  <a:schemeClr val="tx2"/>
+                </a:solidFill>
+              </a:defRPr>
+            </a:lvl1pPr>
+          </a:lstStyle>
           <a:p>
             <a:fld id="{B37D7E2B-F8ED-469C-8F05-023F1D7F84D6}" type="slidenum">
               <a:rPr kumimoji="1" lang="ja-JP" altLang="en-US" smtClean="0"/>
@@ -2985,10 +3393,48 @@
           </a:p>
         </p:txBody>
       </p:sp>
+      <p:sp>
+        <p:nvSpPr>
+          <p:cNvPr id="9" name="Rectangle 8" title="Divider Bar"/>
+          <p:cNvSpPr/>
+          <p:nvPr/>
+        </p:nvSpPr>
+        <p:spPr>
+          <a:xfrm>
+            <a:off x="5303520" y="376"/>
+            <a:ext cx="228600" cy="6858000"/>
+          </a:xfrm>
+          <a:prstGeom prst="rect">
+            <a:avLst/>
+          </a:prstGeom>
+          <a:solidFill>
+            <a:schemeClr val="tx2"/>
+          </a:solidFill>
+          <a:ln>
+            <a:noFill/>
+          </a:ln>
+        </p:spPr>
+        <p:style>
+          <a:lnRef idx="2">
+            <a:schemeClr val="accent1">
+              <a:shade val="50000"/>
+            </a:schemeClr>
+          </a:lnRef>
+          <a:fillRef idx="1">
+            <a:schemeClr val="accent1"/>
+          </a:fillRef>
+          <a:effectRef idx="0">
+            <a:schemeClr val="accent1"/>
+          </a:effectRef>
+          <a:fontRef idx="minor">
+            <a:schemeClr val="lt1"/>
+          </a:fontRef>
+        </p:style>
+      </p:sp>
     </p:spTree>
     <p:extLst>
       <p:ext uri="{BB962C8B-B14F-4D97-AF65-F5344CB8AC3E}">
-        <p14:creationId xmlns:p14="http://schemas.microsoft.com/office/powerpoint/2010/main" val="3101045493"/>
+        <p14:creationId xmlns:p14="http://schemas.microsoft.com/office/powerpoint/2010/main" val="1402432294"/>
       </p:ext>
     </p:extLst>
   </p:cSld>
@@ -3002,9 +3448,12 @@
 <p:sldMaster xmlns:a="http://schemas.openxmlformats.org/drawingml/2006/main" xmlns:r="http://schemas.openxmlformats.org/officeDocument/2006/relationships" xmlns:p="http://schemas.openxmlformats.org/presentationml/2006/main">
   <p:cSld>
     <p:bg>
-      <p:bgRef idx="1001">
-        <a:schemeClr val="bg1"/>
-      </p:bgRef>
+      <p:bgPr>
+        <a:solidFill>
+          <a:schemeClr val="bg2"/>
+        </a:solidFill>
+        <a:effectLst/>
+      </p:bgPr>
     </p:bg>
     <p:spTree>
       <p:nvGrpSpPr>
@@ -3022,13 +3471,7 @@
       </p:grpSpPr>
       <p:sp>
         <p:nvSpPr>
-          <p:cNvPr id="2" name="タイトル プレースホルダー 1">
-            <a:extLst>
-              <a:ext uri="{FF2B5EF4-FFF2-40B4-BE49-F238E27FC236}">
-                <a16:creationId xmlns:a16="http://schemas.microsoft.com/office/drawing/2014/main" id="{60FA7452-D313-084F-9D36-00C1FE7AA6FB}"/>
-              </a:ext>
-            </a:extLst>
-          </p:cNvPr>
+          <p:cNvPr id="2" name="Title Placeholder 1"/>
           <p:cNvSpPr>
             <a:spLocks noGrp="1"/>
           </p:cNvSpPr>
@@ -3038,35 +3481,30 @@
         </p:nvSpPr>
         <p:spPr>
           <a:xfrm>
-            <a:off x="838200" y="365125"/>
-            <a:ext cx="10515600" cy="1325563"/>
+            <a:off x="1371600" y="685800"/>
+            <a:ext cx="9601200" cy="1485900"/>
           </a:xfrm>
           <a:prstGeom prst="rect">
             <a:avLst/>
           </a:prstGeom>
         </p:spPr>
         <p:txBody>
-          <a:bodyPr vert="horz" lIns="91440" tIns="45720" rIns="91440" bIns="45720" rtlCol="0" anchor="ctr">
+          <a:bodyPr vert="horz" lIns="91440" tIns="45720" rIns="91440" bIns="45720" rtlCol="0" anchor="t">
             <a:normAutofit/>
           </a:bodyPr>
           <a:lstStyle/>
           <a:p>
             <a:r>
-              <a:rPr kumimoji="1" lang="ja-JP" altLang="en-US"/>
+              <a:rPr lang="ja-JP" altLang="en-US"/>
               <a:t>マスター タイトルの書式設定</a:t>
             </a:r>
-          </a:p>
-        </p:txBody>
-      </p:sp>
-      <p:sp>
-        <p:nvSpPr>
-          <p:cNvPr id="3" name="テキスト プレースホルダー 2">
-            <a:extLst>
-              <a:ext uri="{FF2B5EF4-FFF2-40B4-BE49-F238E27FC236}">
-                <a16:creationId xmlns:a16="http://schemas.microsoft.com/office/drawing/2014/main" id="{9AF2FF2F-F3A3-FA8C-7361-D05DE5AB30BD}"/>
-              </a:ext>
-            </a:extLst>
-          </p:cNvPr>
+            <a:endParaRPr lang="en-US" dirty="0"/>
+          </a:p>
+        </p:txBody>
+      </p:sp>
+      <p:sp>
+        <p:nvSpPr>
+          <p:cNvPr id="3" name="Text Placeholder 2"/>
           <p:cNvSpPr>
             <a:spLocks noGrp="1"/>
           </p:cNvSpPr>
@@ -3076,8 +3514,8 @@
         </p:nvSpPr>
         <p:spPr>
           <a:xfrm>
-            <a:off x="838200" y="1825625"/>
-            <a:ext cx="10515600" cy="4351338"/>
+            <a:off x="1371600" y="2286000"/>
+            <a:ext cx="9601200" cy="3581400"/>
           </a:xfrm>
           <a:prstGeom prst="rect">
             <a:avLst/>
@@ -3091,81 +3529,76 @@
           <a:p>
             <a:pPr lvl="0"/>
             <a:r>
-              <a:rPr kumimoji="1" lang="ja-JP" altLang="en-US"/>
+              <a:rPr lang="ja-JP" altLang="en-US"/>
               <a:t>マスター テキストの書式設定</a:t>
             </a:r>
           </a:p>
           <a:p>
             <a:pPr lvl="1"/>
             <a:r>
-              <a:rPr kumimoji="1" lang="ja-JP" altLang="en-US"/>
+              <a:rPr lang="ja-JP" altLang="en-US"/>
               <a:t>第 </a:t>
             </a:r>
             <a:r>
-              <a:rPr kumimoji="1" lang="en-US" altLang="ja-JP"/>
+              <a:rPr lang="en-US" altLang="ja-JP"/>
               <a:t>2 </a:t>
             </a:r>
             <a:r>
-              <a:rPr kumimoji="1" lang="ja-JP" altLang="en-US"/>
+              <a:rPr lang="ja-JP" altLang="en-US"/>
               <a:t>レベル</a:t>
             </a:r>
           </a:p>
           <a:p>
             <a:pPr lvl="2"/>
             <a:r>
-              <a:rPr kumimoji="1" lang="ja-JP" altLang="en-US"/>
+              <a:rPr lang="ja-JP" altLang="en-US"/>
               <a:t>第 </a:t>
             </a:r>
             <a:r>
-              <a:rPr kumimoji="1" lang="en-US" altLang="ja-JP"/>
+              <a:rPr lang="en-US" altLang="ja-JP"/>
               <a:t>3 </a:t>
             </a:r>
             <a:r>
-              <a:rPr kumimoji="1" lang="ja-JP" altLang="en-US"/>
+              <a:rPr lang="ja-JP" altLang="en-US"/>
               <a:t>レベル</a:t>
             </a:r>
           </a:p>
           <a:p>
             <a:pPr lvl="3"/>
             <a:r>
-              <a:rPr kumimoji="1" lang="ja-JP" altLang="en-US"/>
+              <a:rPr lang="ja-JP" altLang="en-US"/>
               <a:t>第 </a:t>
             </a:r>
             <a:r>
-              <a:rPr kumimoji="1" lang="en-US" altLang="ja-JP"/>
+              <a:rPr lang="en-US" altLang="ja-JP"/>
               <a:t>4 </a:t>
             </a:r>
             <a:r>
-              <a:rPr kumimoji="1" lang="ja-JP" altLang="en-US"/>
+              <a:rPr lang="ja-JP" altLang="en-US"/>
               <a:t>レベル</a:t>
             </a:r>
           </a:p>
           <a:p>
             <a:pPr lvl="4"/>
             <a:r>
-              <a:rPr kumimoji="1" lang="ja-JP" altLang="en-US"/>
+              <a:rPr lang="ja-JP" altLang="en-US"/>
               <a:t>第 </a:t>
             </a:r>
             <a:r>
-              <a:rPr kumimoji="1" lang="en-US" altLang="ja-JP"/>
+              <a:rPr lang="en-US" altLang="ja-JP"/>
               <a:t>5 </a:t>
             </a:r>
             <a:r>
-              <a:rPr kumimoji="1" lang="ja-JP" altLang="en-US"/>
+              <a:rPr lang="ja-JP" altLang="en-US"/>
               <a:t>レベル</a:t>
             </a:r>
-          </a:p>
-        </p:txBody>
-      </p:sp>
-      <p:sp>
-        <p:nvSpPr>
-          <p:cNvPr id="4" name="日付プレースホルダー 3">
-            <a:extLst>
-              <a:ext uri="{FF2B5EF4-FFF2-40B4-BE49-F238E27FC236}">
-                <a16:creationId xmlns:a16="http://schemas.microsoft.com/office/drawing/2014/main" id="{1FC5F453-8504-5CAB-9286-36CA9FF81E91}"/>
-              </a:ext>
-            </a:extLst>
-          </p:cNvPr>
+            <a:endParaRPr lang="en-US" dirty="0"/>
+          </a:p>
+        </p:txBody>
+      </p:sp>
+      <p:sp>
+        <p:nvSpPr>
+          <p:cNvPr id="4" name="Date Placeholder 3"/>
           <p:cNvSpPr>
             <a:spLocks noGrp="1"/>
           </p:cNvSpPr>
@@ -3175,8 +3608,8 @@
         </p:nvSpPr>
         <p:spPr>
           <a:xfrm>
-            <a:off x="838200" y="6356350"/>
-            <a:ext cx="2743200" cy="365125"/>
+            <a:off x="1390650" y="6453386"/>
+            <a:ext cx="1204572" cy="404614"/>
           </a:xfrm>
           <a:prstGeom prst="rect">
             <a:avLst/>
@@ -3186,11 +3619,9 @@
           <a:bodyPr vert="horz" lIns="91440" tIns="45720" rIns="91440" bIns="45720" rtlCol="0" anchor="ctr"/>
           <a:lstStyle>
             <a:lvl1pPr algn="l">
-              <a:defRPr sz="1200">
-                <a:solidFill>
-                  <a:schemeClr val="tx1">
-                    <a:tint val="82000"/>
-                  </a:schemeClr>
+              <a:defRPr sz="1200" baseline="0">
+                <a:solidFill>
+                  <a:schemeClr val="tx2"/>
                 </a:solidFill>
               </a:defRPr>
             </a:lvl1pPr>
@@ -3198,7 +3629,7 @@
           <a:p>
             <a:fld id="{60AD3CCE-071F-4B8E-8AC5-D36671CE0CE8}" type="datetimeFigureOut">
               <a:rPr kumimoji="1" lang="ja-JP" altLang="en-US" smtClean="0"/>
-              <a:t>2026/7/3</a:t>
+              <a:t>2026/7/6</a:t>
             </a:fld>
             <a:endParaRPr kumimoji="1" lang="ja-JP" altLang="en-US"/>
           </a:p>
@@ -3206,13 +3637,7 @@
       </p:sp>
       <p:sp>
         <p:nvSpPr>
-          <p:cNvPr id="5" name="フッター プレースホルダー 4">
-            <a:extLst>
-              <a:ext uri="{FF2B5EF4-FFF2-40B4-BE49-F238E27FC236}">
-                <a16:creationId xmlns:a16="http://schemas.microsoft.com/office/drawing/2014/main" id="{31C27E11-04D8-A3D8-689D-B25D650DB10A}"/>
-              </a:ext>
-            </a:extLst>
-          </p:cNvPr>
+          <p:cNvPr id="5" name="Footer Placeholder 4"/>
           <p:cNvSpPr>
             <a:spLocks noGrp="1"/>
           </p:cNvSpPr>
@@ -3222,8 +3647,8 @@
         </p:nvSpPr>
         <p:spPr>
           <a:xfrm>
-            <a:off x="4038600" y="6356350"/>
-            <a:ext cx="4114800" cy="365125"/>
+            <a:off x="2893564" y="6453386"/>
+            <a:ext cx="6280830" cy="404614"/>
           </a:xfrm>
           <a:prstGeom prst="rect">
             <a:avLst/>
@@ -3232,12 +3657,10 @@
         <p:txBody>
           <a:bodyPr vert="horz" lIns="91440" tIns="45720" rIns="91440" bIns="45720" rtlCol="0" anchor="ctr"/>
           <a:lstStyle>
-            <a:lvl1pPr algn="ctr">
-              <a:defRPr sz="1200">
-                <a:solidFill>
-                  <a:schemeClr val="tx1">
-                    <a:tint val="82000"/>
-                  </a:schemeClr>
+            <a:lvl1pPr algn="l">
+              <a:defRPr sz="1200" baseline="0">
+                <a:solidFill>
+                  <a:schemeClr val="tx2"/>
                 </a:solidFill>
               </a:defRPr>
             </a:lvl1pPr>
@@ -3249,13 +3672,7 @@
       </p:sp>
       <p:sp>
         <p:nvSpPr>
-          <p:cNvPr id="6" name="スライド番号プレースホルダー 5">
-            <a:extLst>
-              <a:ext uri="{FF2B5EF4-FFF2-40B4-BE49-F238E27FC236}">
-                <a16:creationId xmlns:a16="http://schemas.microsoft.com/office/drawing/2014/main" id="{DC8E07E2-B7FC-7F5C-8202-C7B2954C145F}"/>
-              </a:ext>
-            </a:extLst>
-          </p:cNvPr>
+          <p:cNvPr id="6" name="Slide Number Placeholder 5"/>
           <p:cNvSpPr>
             <a:spLocks noGrp="1"/>
           </p:cNvSpPr>
@@ -3265,8 +3682,8 @@
         </p:nvSpPr>
         <p:spPr>
           <a:xfrm>
-            <a:off x="8610600" y="6356350"/>
-            <a:ext cx="2743200" cy="365125"/>
+            <a:off x="9472736" y="6453386"/>
+            <a:ext cx="1596292" cy="404614"/>
           </a:xfrm>
           <a:prstGeom prst="rect">
             <a:avLst/>
@@ -3276,11 +3693,9 @@
           <a:bodyPr vert="horz" lIns="91440" tIns="45720" rIns="91440" bIns="45720" rtlCol="0" anchor="ctr"/>
           <a:lstStyle>
             <a:lvl1pPr algn="r">
-              <a:defRPr sz="1200">
-                <a:solidFill>
-                  <a:schemeClr val="tx1">
-                    <a:tint val="82000"/>
-                  </a:schemeClr>
+              <a:defRPr sz="1200" baseline="0">
+                <a:solidFill>
+                  <a:schemeClr val="tx2"/>
                 </a:solidFill>
               </a:defRPr>
             </a:lvl1pPr>
@@ -3294,40 +3709,85 @@
           </a:p>
         </p:txBody>
       </p:sp>
+      <p:sp>
+        <p:nvSpPr>
+          <p:cNvPr id="9" name="Rectangle 8" title="Side bar"/>
+          <p:cNvSpPr/>
+          <p:nvPr/>
+        </p:nvSpPr>
+        <p:spPr>
+          <a:xfrm>
+            <a:off x="478095" y="376"/>
+            <a:ext cx="228600" cy="6858000"/>
+          </a:xfrm>
+          <a:prstGeom prst="rect">
+            <a:avLst/>
+          </a:prstGeom>
+          <a:solidFill>
+            <a:schemeClr val="tx2"/>
+          </a:solidFill>
+          <a:ln>
+            <a:noFill/>
+          </a:ln>
+        </p:spPr>
+        <p:style>
+          <a:lnRef idx="2">
+            <a:schemeClr val="accent1">
+              <a:shade val="50000"/>
+            </a:schemeClr>
+          </a:lnRef>
+          <a:fillRef idx="1">
+            <a:schemeClr val="accent1"/>
+          </a:fillRef>
+          <a:effectRef idx="0">
+            <a:schemeClr val="accent1"/>
+          </a:effectRef>
+          <a:fontRef idx="minor">
+            <a:schemeClr val="lt1"/>
+          </a:fontRef>
+        </p:style>
+        <p:txBody>
+          <a:bodyPr/>
+          <a:lstStyle/>
+          <a:p>
+            <a:endParaRPr lang="ja-JP" altLang="en-US"/>
+          </a:p>
+        </p:txBody>
+      </p:sp>
     </p:spTree>
     <p:extLst>
       <p:ext uri="{BB962C8B-B14F-4D97-AF65-F5344CB8AC3E}">
-        <p14:creationId xmlns:p14="http://schemas.microsoft.com/office/powerpoint/2010/main" val="1835417062"/>
+        <p14:creationId xmlns:p14="http://schemas.microsoft.com/office/powerpoint/2010/main" val="3065001115"/>
       </p:ext>
     </p:extLst>
   </p:cSld>
   <p:clrMap bg1="lt1" tx1="dk1" bg2="lt2" tx2="dk2" accent1="accent1" accent2="accent2" accent3="accent3" accent4="accent4" accent5="accent5" accent6="accent6" hlink="hlink" folHlink="folHlink"/>
   <p:sldLayoutIdLst>
-    <p:sldLayoutId id="2147483649" r:id="rId1"/>
-    <p:sldLayoutId id="2147483650" r:id="rId2"/>
-    <p:sldLayoutId id="2147483651" r:id="rId3"/>
-    <p:sldLayoutId id="2147483652" r:id="rId4"/>
-    <p:sldLayoutId id="2147483653" r:id="rId5"/>
-    <p:sldLayoutId id="2147483654" r:id="rId6"/>
-    <p:sldLayoutId id="2147483655" r:id="rId7"/>
-    <p:sldLayoutId id="2147483656" r:id="rId8"/>
-    <p:sldLayoutId id="2147483657" r:id="rId9"/>
-    <p:sldLayoutId id="2147483658" r:id="rId10"/>
-    <p:sldLayoutId id="2147483659" r:id="rId11"/>
+    <p:sldLayoutId id="2147483661" r:id="rId1"/>
+    <p:sldLayoutId id="2147483662" r:id="rId2"/>
+    <p:sldLayoutId id="2147483663" r:id="rId3"/>
+    <p:sldLayoutId id="2147483664" r:id="rId4"/>
+    <p:sldLayoutId id="2147483665" r:id="rId5"/>
+    <p:sldLayoutId id="2147483666" r:id="rId6"/>
+    <p:sldLayoutId id="2147483667" r:id="rId7"/>
+    <p:sldLayoutId id="2147483668" r:id="rId8"/>
+    <p:sldLayoutId id="2147483669" r:id="rId9"/>
+    <p:sldLayoutId id="2147483670" r:id="rId10"/>
+    <p:sldLayoutId id="2147483671" r:id="rId11"/>
   </p:sldLayoutIdLst>
   <p:txStyles>
     <p:titleStyle>
       <a:lvl1pPr algn="l" defTabSz="914400" rtl="0" eaLnBrk="1" latinLnBrk="0" hangingPunct="1">
         <a:lnSpc>
-          <a:spcPct val="90000"/>
+          <a:spcPct val="89000"/>
         </a:lnSpc>
         <a:spcBef>
           <a:spcPct val="0"/>
         </a:spcBef>
         <a:buNone/>
-        <a:defRPr kumimoji="1" sz="4400" kern="1200">
+        <a:defRPr kumimoji="1" sz="4400" kern="1200" baseline="0">
           <a:solidFill>
-            <a:schemeClr val="tx1"/>
+            <a:schemeClr val="tx2"/>
           </a:solidFill>
           <a:latin typeface="+mj-lt"/>
           <a:ea typeface="+mj-ea"/>
@@ -3336,162 +3796,189 @@
       </a:lvl1pPr>
     </p:titleStyle>
     <p:bodyStyle>
-      <a:lvl1pPr marL="228600" indent="-228600" algn="l" defTabSz="914400" rtl="0" eaLnBrk="1" latinLnBrk="0" hangingPunct="1">
+      <a:lvl1pPr marL="384048" indent="-384048" algn="l" defTabSz="914400" rtl="0" eaLnBrk="1" latinLnBrk="0" hangingPunct="1">
         <a:lnSpc>
-          <a:spcPct val="90000"/>
+          <a:spcPct val="94000"/>
         </a:lnSpc>
         <a:spcBef>
           <a:spcPts val="1000"/>
         </a:spcBef>
-        <a:buFont typeface="Arial" panose="020B0604020202020204" pitchFamily="34" charset="0"/>
-        <a:buChar char="•"/>
-        <a:defRPr kumimoji="1" sz="2800" kern="1200">
+        <a:spcAft>
+          <a:spcPts val="200"/>
+        </a:spcAft>
+        <a:buFont typeface="Franklin Gothic Book" panose="020B0503020102020204" pitchFamily="34" charset="0"/>
+        <a:buChar char="■"/>
+        <a:defRPr kumimoji="1" sz="2000" kern="1200" baseline="0">
           <a:solidFill>
-            <a:schemeClr val="tx1"/>
+            <a:schemeClr val="tx2"/>
           </a:solidFill>
           <a:latin typeface="+mn-lt"/>
           <a:ea typeface="+mn-ea"/>
           <a:cs typeface="+mn-cs"/>
         </a:defRPr>
       </a:lvl1pPr>
-      <a:lvl2pPr marL="685800" indent="-228600" algn="l" defTabSz="914400" rtl="0" eaLnBrk="1" latinLnBrk="0" hangingPunct="1">
+      <a:lvl2pPr marL="914400" indent="-384048" algn="l" defTabSz="914400" rtl="0" eaLnBrk="1" latinLnBrk="0" hangingPunct="1">
         <a:lnSpc>
-          <a:spcPct val="90000"/>
+          <a:spcPct val="94000"/>
         </a:lnSpc>
         <a:spcBef>
           <a:spcPts val="500"/>
         </a:spcBef>
-        <a:buFont typeface="Arial" panose="020B0604020202020204" pitchFamily="34" charset="0"/>
-        <a:buChar char="•"/>
-        <a:defRPr kumimoji="1" sz="2400" kern="1200">
+        <a:spcAft>
+          <a:spcPts val="200"/>
+        </a:spcAft>
+        <a:buFont typeface="Franklin Gothic Book" panose="020B0503020102020204" pitchFamily="34" charset="0"/>
+        <a:buChar char="–"/>
+        <a:defRPr kumimoji="1" sz="2000" i="1" kern="1200" baseline="0">
           <a:solidFill>
-            <a:schemeClr val="tx1"/>
+            <a:schemeClr val="tx2"/>
           </a:solidFill>
           <a:latin typeface="+mn-lt"/>
           <a:ea typeface="+mn-ea"/>
           <a:cs typeface="+mn-cs"/>
         </a:defRPr>
       </a:lvl2pPr>
-      <a:lvl3pPr marL="1143000" indent="-228600" algn="l" defTabSz="914400" rtl="0" eaLnBrk="1" latinLnBrk="0" hangingPunct="1">
+      <a:lvl3pPr marL="1371600" indent="-384048" algn="l" defTabSz="914400" rtl="0" eaLnBrk="1" latinLnBrk="0" hangingPunct="1">
         <a:lnSpc>
-          <a:spcPct val="90000"/>
+          <a:spcPct val="94000"/>
         </a:lnSpc>
         <a:spcBef>
           <a:spcPts val="500"/>
         </a:spcBef>
-        <a:buFont typeface="Arial" panose="020B0604020202020204" pitchFamily="34" charset="0"/>
-        <a:buChar char="•"/>
-        <a:defRPr kumimoji="1" sz="2000" kern="1200">
+        <a:spcAft>
+          <a:spcPts val="200"/>
+        </a:spcAft>
+        <a:buFont typeface="Franklin Gothic Book" panose="020B0503020102020204" pitchFamily="34" charset="0"/>
+        <a:buChar char="■"/>
+        <a:defRPr kumimoji="1" sz="1800" kern="1200" baseline="0">
           <a:solidFill>
-            <a:schemeClr val="tx1"/>
+            <a:schemeClr val="tx2"/>
           </a:solidFill>
           <a:latin typeface="+mn-lt"/>
           <a:ea typeface="+mn-ea"/>
           <a:cs typeface="+mn-cs"/>
         </a:defRPr>
       </a:lvl3pPr>
-      <a:lvl4pPr marL="1600200" indent="-228600" algn="l" defTabSz="914400" rtl="0" eaLnBrk="1" latinLnBrk="0" hangingPunct="1">
+      <a:lvl4pPr marL="1828800" indent="-384048" algn="l" defTabSz="914400" rtl="0" eaLnBrk="1" latinLnBrk="0" hangingPunct="1">
         <a:lnSpc>
-          <a:spcPct val="90000"/>
+          <a:spcPct val="94000"/>
         </a:lnSpc>
         <a:spcBef>
           <a:spcPts val="500"/>
         </a:spcBef>
-        <a:buFont typeface="Arial" panose="020B0604020202020204" pitchFamily="34" charset="0"/>
-        <a:buChar char="•"/>
-        <a:defRPr kumimoji="1" sz="1800" kern="1200">
+        <a:spcAft>
+          <a:spcPts val="200"/>
+        </a:spcAft>
+        <a:buFont typeface="Franklin Gothic Book" panose="020B0503020102020204" pitchFamily="34" charset="0"/>
+        <a:buChar char="–"/>
+        <a:defRPr kumimoji="1" sz="1800" i="1" kern="1200" baseline="0">
           <a:solidFill>
-            <a:schemeClr val="tx1"/>
+            <a:schemeClr val="tx2"/>
           </a:solidFill>
           <a:latin typeface="+mn-lt"/>
           <a:ea typeface="+mn-ea"/>
           <a:cs typeface="+mn-cs"/>
         </a:defRPr>
       </a:lvl4pPr>
-      <a:lvl5pPr marL="2057400" indent="-228600" algn="l" defTabSz="914400" rtl="0" eaLnBrk="1" latinLnBrk="0" hangingPunct="1">
+      <a:lvl5pPr marL="2286000" indent="-384048" algn="l" defTabSz="914400" rtl="0" eaLnBrk="1" latinLnBrk="0" hangingPunct="1">
         <a:lnSpc>
-          <a:spcPct val="90000"/>
+          <a:spcPct val="94000"/>
         </a:lnSpc>
         <a:spcBef>
           <a:spcPts val="500"/>
         </a:spcBef>
-        <a:buFont typeface="Arial" panose="020B0604020202020204" pitchFamily="34" charset="0"/>
-        <a:buChar char="•"/>
-        <a:defRPr kumimoji="1" sz="1800" kern="1200">
+        <a:spcAft>
+          <a:spcPts val="200"/>
+        </a:spcAft>
+        <a:buFont typeface="Franklin Gothic Book" panose="020B0503020102020204" pitchFamily="34" charset="0"/>
+        <a:buChar char="■"/>
+        <a:defRPr kumimoji="1" sz="1600" kern="1200" baseline="0">
           <a:solidFill>
-            <a:schemeClr val="tx1"/>
+            <a:schemeClr val="tx2"/>
           </a:solidFill>
           <a:latin typeface="+mn-lt"/>
           <a:ea typeface="+mn-ea"/>
           <a:cs typeface="+mn-cs"/>
         </a:defRPr>
       </a:lvl5pPr>
-      <a:lvl6pPr marL="2514600" indent="-228600" algn="l" defTabSz="914400" rtl="0" eaLnBrk="1" latinLnBrk="0" hangingPunct="1">
+      <a:lvl6pPr marL="2743200" indent="-384048" algn="l" defTabSz="914400" rtl="0" eaLnBrk="1" latinLnBrk="0" hangingPunct="1">
         <a:lnSpc>
-          <a:spcPct val="90000"/>
+          <a:spcPct val="94000"/>
         </a:lnSpc>
         <a:spcBef>
           <a:spcPts val="500"/>
         </a:spcBef>
-        <a:buFont typeface="Arial" panose="020B0604020202020204" pitchFamily="34" charset="0"/>
-        <a:buChar char="•"/>
-        <a:defRPr kumimoji="1" sz="1800" kern="1200">
+        <a:spcAft>
+          <a:spcPts val="200"/>
+        </a:spcAft>
+        <a:buFont typeface="Franklin Gothic Book" panose="020B0503020102020204" pitchFamily="34" charset="0"/>
+        <a:buChar char="–"/>
+        <a:defRPr kumimoji="1" sz="1600" i="1" kern="1200" baseline="0">
           <a:solidFill>
-            <a:schemeClr val="tx1"/>
+            <a:schemeClr val="tx2"/>
           </a:solidFill>
           <a:latin typeface="+mn-lt"/>
           <a:ea typeface="+mn-ea"/>
           <a:cs typeface="+mn-cs"/>
         </a:defRPr>
       </a:lvl6pPr>
-      <a:lvl7pPr marL="2971800" indent="-228600" algn="l" defTabSz="914400" rtl="0" eaLnBrk="1" latinLnBrk="0" hangingPunct="1">
+      <a:lvl7pPr marL="3200400" indent="-384048" algn="l" defTabSz="914400" rtl="0" eaLnBrk="1" latinLnBrk="0" hangingPunct="1">
         <a:lnSpc>
-          <a:spcPct val="90000"/>
+          <a:spcPct val="94000"/>
         </a:lnSpc>
         <a:spcBef>
           <a:spcPts val="500"/>
         </a:spcBef>
-        <a:buFont typeface="Arial" panose="020B0604020202020204" pitchFamily="34" charset="0"/>
-        <a:buChar char="•"/>
-        <a:defRPr kumimoji="1" sz="1800" kern="1200">
+        <a:spcAft>
+          <a:spcPts val="200"/>
+        </a:spcAft>
+        <a:buFont typeface="Franklin Gothic Book" panose="020B0503020102020204" pitchFamily="34" charset="0"/>
+        <a:buChar char="■"/>
+        <a:defRPr kumimoji="1" sz="1400" kern="1200" baseline="0">
           <a:solidFill>
-            <a:schemeClr val="tx1"/>
+            <a:schemeClr val="tx2"/>
           </a:solidFill>
           <a:latin typeface="+mn-lt"/>
           <a:ea typeface="+mn-ea"/>
           <a:cs typeface="+mn-cs"/>
         </a:defRPr>
       </a:lvl7pPr>
-      <a:lvl8pPr marL="3429000" indent="-228600" algn="l" defTabSz="914400" rtl="0" eaLnBrk="1" latinLnBrk="0" hangingPunct="1">
+      <a:lvl8pPr marL="3657600" indent="-384048" algn="l" defTabSz="914400" rtl="0" eaLnBrk="1" latinLnBrk="0" hangingPunct="1">
         <a:lnSpc>
-          <a:spcPct val="90000"/>
+          <a:spcPct val="94000"/>
         </a:lnSpc>
         <a:spcBef>
           <a:spcPts val="500"/>
         </a:spcBef>
-        <a:buFont typeface="Arial" panose="020B0604020202020204" pitchFamily="34" charset="0"/>
-        <a:buChar char="•"/>
-        <a:defRPr kumimoji="1" sz="1800" kern="1200">
+        <a:spcAft>
+          <a:spcPts val="200"/>
+        </a:spcAft>
+        <a:buFont typeface="Franklin Gothic Book" panose="020B0503020102020204" pitchFamily="34" charset="0"/>
+        <a:buChar char="–"/>
+        <a:defRPr kumimoji="1" sz="1400" i="1" kern="1200" baseline="0">
           <a:solidFill>
-            <a:schemeClr val="tx1"/>
+            <a:schemeClr val="tx2"/>
           </a:solidFill>
           <a:latin typeface="+mn-lt"/>
           <a:ea typeface="+mn-ea"/>
           <a:cs typeface="+mn-cs"/>
         </a:defRPr>
       </a:lvl8pPr>
-      <a:lvl9pPr marL="3886200" indent="-228600" algn="l" defTabSz="914400" rtl="0" eaLnBrk="1" latinLnBrk="0" hangingPunct="1">
+      <a:lvl9pPr marL="4114800" indent="-384048" algn="l" defTabSz="914400" rtl="0" eaLnBrk="1" latinLnBrk="0" hangingPunct="1">
         <a:lnSpc>
-          <a:spcPct val="90000"/>
+          <a:spcPct val="94000"/>
         </a:lnSpc>
         <a:spcBef>
           <a:spcPts val="500"/>
         </a:spcBef>
-        <a:buFont typeface="Arial" panose="020B0604020202020204" pitchFamily="34" charset="0"/>
-        <a:buChar char="•"/>
-        <a:defRPr kumimoji="1" sz="1800" kern="1200">
+        <a:spcAft>
+          <a:spcPts val="200"/>
+        </a:spcAft>
+        <a:buFont typeface="Franklin Gothic Book" panose="020B0503020102020204" pitchFamily="34" charset="0"/>
+        <a:buChar char="■"/>
+        <a:defRPr kumimoji="1" sz="1400" kern="1200" baseline="0">
           <a:solidFill>
-            <a:schemeClr val="tx1"/>
+            <a:schemeClr val="tx2"/>
           </a:solidFill>
           <a:latin typeface="+mn-lt"/>
           <a:ea typeface="+mn-ea"/>
@@ -3501,7 +3988,7 @@
     </p:bodyStyle>
     <p:otherStyle>
       <a:defPPr>
-        <a:defRPr lang="ja-JP"/>
+        <a:defRPr lang="en-US"/>
       </a:defPPr>
       <a:lvl1pPr marL="0" algn="l" defTabSz="914400" rtl="0" eaLnBrk="1" latinLnBrk="0" hangingPunct="1">
         <a:defRPr kumimoji="1" sz="1800" kern="1200">
@@ -3595,12 +4082,66 @@
       </a:lvl9pPr>
     </p:otherStyle>
   </p:txStyles>
+  <p:extLst>
+    <p:ext uri="{27BBF7A9-308A-43DC-89C8-2F10F3537804}">
+      <p15:sldGuideLst xmlns:p15="http://schemas.microsoft.com/office/powerpoint/2012/main">
+        <p15:guide id="3" orient="horz" pos="1368">
+          <p15:clr>
+            <a:srgbClr val="F26B43"/>
+          </p15:clr>
+        </p15:guide>
+        <p15:guide id="4" orient="horz" pos="1440">
+          <p15:clr>
+            <a:srgbClr val="F26B43"/>
+          </p15:clr>
+        </p15:guide>
+        <p15:guide id="6" orient="horz" pos="3696">
+          <p15:clr>
+            <a:srgbClr val="F26B43"/>
+          </p15:clr>
+        </p15:guide>
+        <p15:guide id="7" orient="horz" pos="432">
+          <p15:clr>
+            <a:srgbClr val="F26B43"/>
+          </p15:clr>
+        </p15:guide>
+        <p15:guide id="8" orient="horz" pos="1512">
+          <p15:clr>
+            <a:srgbClr val="F26B43"/>
+          </p15:clr>
+        </p15:guide>
+        <p15:guide id="9" pos="6912">
+          <p15:clr>
+            <a:srgbClr val="F26B43"/>
+          </p15:clr>
+        </p15:guide>
+        <p15:guide id="10" pos="936">
+          <p15:clr>
+            <a:srgbClr val="F26B43"/>
+          </p15:clr>
+        </p15:guide>
+        <p15:guide id="11" pos="864">
+          <p15:clr>
+            <a:srgbClr val="F26B43"/>
+          </p15:clr>
+        </p15:guide>
+      </p15:sldGuideLst>
+    </p:ext>
+  </p:extLst>
 </p:sldMaster>
 </file>
 
 <file path=ppt/slides/slide1.xml><?xml version="1.0" encoding="utf-8"?>
 <p:sld xmlns:a="http://schemas.openxmlformats.org/drawingml/2006/main" xmlns:r="http://schemas.openxmlformats.org/officeDocument/2006/relationships" xmlns:p="http://schemas.openxmlformats.org/presentationml/2006/main">
   <p:cSld>
+    <p:bg>
+      <p:bgPr>
+        <a:solidFill>
+          <a:schemeClr val="bg2"/>
+        </a:solidFill>
+        <a:effectLst/>
+      </p:bgPr>
+    </p:bg>
     <p:spTree>
       <p:nvGrpSpPr>
         <p:cNvPr id="1" name=""/>
@@ -3615,12 +4156,482 @@
           <a:chExt cx="0" cy="0"/>
         </a:xfrm>
       </p:grpSpPr>
-      <p:sp>
-        <p:nvSpPr>
-          <p:cNvPr id="5" name="テキスト ボックス 4">
+      <p:grpSp>
+        <p:nvGrpSpPr>
+          <p:cNvPr id="9" name="Group 8">
             <a:extLst>
               <a:ext uri="{FF2B5EF4-FFF2-40B4-BE49-F238E27FC236}">
-                <a16:creationId xmlns:a16="http://schemas.microsoft.com/office/drawing/2014/main" id="{79074537-0ADE-E0A0-9FC6-40DE49542FA4}"/>
+                <a16:creationId xmlns:a16="http://schemas.microsoft.com/office/drawing/2014/main" id="{8C89EA62-F38E-4285-A105-C5E1BD360093}"/>
+              </a:ext>
+              <a:ext uri="{C183D7F6-B498-43B3-948B-1728B52AA6E4}">
+                <adec:decorative xmlns:adec="http://schemas.microsoft.com/office/drawing/2017/decorative" val="1"/>
+              </a:ext>
+            </a:extLst>
+          </p:cNvPr>
+          <p:cNvGrpSpPr>
+            <a:grpSpLocks noGrp="1" noUngrp="1" noRot="1" noChangeAspect="1" noMove="1" noResize="1"/>
+          </p:cNvGrpSpPr>
+          <p:nvPr>
+            <p:extLst>
+              <p:ext uri="{386F3935-93C4-4BCD-93E2-E3B085C9AB24}">
+                <p16:designElem xmlns:p16="http://schemas.microsoft.com/office/powerpoint/2015/main" val="1"/>
+              </p:ext>
+            </p:extLst>
+          </p:nvPr>
+        </p:nvGrpSpPr>
+        <p:grpSpPr>
+          <a:xfrm>
+            <a:off x="752858" y="744469"/>
+            <a:ext cx="10674117" cy="5349671"/>
+            <a:chOff x="752858" y="744469"/>
+            <a:chExt cx="10674117" cy="5349671"/>
+          </a:xfrm>
+        </p:grpSpPr>
+        <p:sp>
+          <p:nvSpPr>
+            <p:cNvPr id="10" name="Freeform 6">
+              <a:extLst>
+                <a:ext uri="{FF2B5EF4-FFF2-40B4-BE49-F238E27FC236}">
+                  <a16:creationId xmlns:a16="http://schemas.microsoft.com/office/drawing/2014/main" id="{2CF6E46A-CCCD-4728-B011-E147B23629A3}"/>
+                </a:ext>
+                <a:ext uri="{C183D7F6-B498-43B3-948B-1728B52AA6E4}">
+                  <adec:decorative xmlns:adec="http://schemas.microsoft.com/office/drawing/2017/decorative" val="1"/>
+                </a:ext>
+              </a:extLst>
+            </p:cNvPr>
+            <p:cNvSpPr/>
+            <p:nvPr>
+              <p:extLst>
+                <p:ext uri="{386F3935-93C4-4BCD-93E2-E3B085C9AB24}">
+                  <p16:designElem xmlns:p16="http://schemas.microsoft.com/office/powerpoint/2015/main" val="1"/>
+                </p:ext>
+              </p:extLst>
+            </p:nvPr>
+          </p:nvSpPr>
+          <p:spPr bwMode="auto">
+            <a:xfrm>
+              <a:off x="8151962" y="1685652"/>
+              <a:ext cx="3275013" cy="4408488"/>
+            </a:xfrm>
+            <a:custGeom>
+              <a:avLst/>
+              <a:gdLst/>
+              <a:ahLst/>
+              <a:cxnLst/>
+              <a:rect l="l" t="t" r="r" b="b"/>
+              <a:pathLst>
+                <a:path w="10000" h="10000">
+                  <a:moveTo>
+                    <a:pt x="8761" y="0"/>
+                  </a:moveTo>
+                  <a:lnTo>
+                    <a:pt x="10000" y="0"/>
+                  </a:lnTo>
+                  <a:lnTo>
+                    <a:pt x="10000" y="10000"/>
+                  </a:lnTo>
+                  <a:lnTo>
+                    <a:pt x="0" y="10000"/>
+                  </a:lnTo>
+                  <a:lnTo>
+                    <a:pt x="0" y="9126"/>
+                  </a:lnTo>
+                  <a:lnTo>
+                    <a:pt x="8761" y="9127"/>
+                  </a:lnTo>
+                  <a:lnTo>
+                    <a:pt x="8761" y="0"/>
+                  </a:lnTo>
+                  <a:close/>
+                </a:path>
+              </a:pathLst>
+            </a:custGeom>
+            <a:solidFill>
+              <a:schemeClr val="tx2"/>
+            </a:solidFill>
+            <a:ln w="0">
+              <a:noFill/>
+              <a:prstDash val="solid"/>
+              <a:round/>
+              <a:headEnd/>
+              <a:tailEnd/>
+            </a:ln>
+          </p:spPr>
+          <p:txBody>
+            <a:bodyPr/>
+            <a:lstStyle/>
+            <a:p>
+              <a:endParaRPr lang="ja-JP" altLang="en-US"/>
+            </a:p>
+          </p:txBody>
+        </p:sp>
+        <p:sp>
+          <p:nvSpPr>
+            <p:cNvPr id="11" name="Freeform 6">
+              <a:extLst>
+                <a:ext uri="{FF2B5EF4-FFF2-40B4-BE49-F238E27FC236}">
+                  <a16:creationId xmlns:a16="http://schemas.microsoft.com/office/drawing/2014/main" id="{2E2C684B-30C9-4689-A529-EBF1B8ADB215}"/>
+                </a:ext>
+                <a:ext uri="{C183D7F6-B498-43B3-948B-1728B52AA6E4}">
+                  <adec:decorative xmlns:adec="http://schemas.microsoft.com/office/drawing/2017/decorative" val="1"/>
+                </a:ext>
+              </a:extLst>
+            </p:cNvPr>
+            <p:cNvSpPr/>
+            <p:nvPr>
+              <p:extLst>
+                <p:ext uri="{386F3935-93C4-4BCD-93E2-E3B085C9AB24}">
+                  <p16:designElem xmlns:p16="http://schemas.microsoft.com/office/powerpoint/2015/main" val="1"/>
+                </p:ext>
+              </p:extLst>
+            </p:nvPr>
+          </p:nvSpPr>
+          <p:spPr bwMode="auto">
+            <a:xfrm flipH="1" flipV="1">
+              <a:off x="752858" y="744469"/>
+              <a:ext cx="3275668" cy="4408488"/>
+            </a:xfrm>
+            <a:custGeom>
+              <a:avLst/>
+              <a:gdLst/>
+              <a:ahLst/>
+              <a:cxnLst/>
+              <a:rect l="l" t="t" r="r" b="b"/>
+              <a:pathLst>
+                <a:path w="10002" h="10000">
+                  <a:moveTo>
+                    <a:pt x="8763" y="0"/>
+                  </a:moveTo>
+                  <a:lnTo>
+                    <a:pt x="10002" y="0"/>
+                  </a:lnTo>
+                  <a:lnTo>
+                    <a:pt x="10002" y="10000"/>
+                  </a:lnTo>
+                  <a:lnTo>
+                    <a:pt x="2" y="10000"/>
+                  </a:lnTo>
+                  <a:cubicBezTo>
+                    <a:pt x="-2" y="9698"/>
+                    <a:pt x="4" y="9427"/>
+                    <a:pt x="0" y="9125"/>
+                  </a:cubicBezTo>
+                  <a:lnTo>
+                    <a:pt x="8763" y="9128"/>
+                  </a:lnTo>
+                  <a:lnTo>
+                    <a:pt x="8763" y="0"/>
+                  </a:lnTo>
+                  <a:close/>
+                </a:path>
+              </a:pathLst>
+            </a:custGeom>
+            <a:solidFill>
+              <a:schemeClr val="tx2"/>
+            </a:solidFill>
+            <a:ln w="0">
+              <a:noFill/>
+              <a:prstDash val="solid"/>
+              <a:round/>
+              <a:headEnd/>
+              <a:tailEnd/>
+            </a:ln>
+          </p:spPr>
+          <p:txBody>
+            <a:bodyPr/>
+            <a:lstStyle/>
+            <a:p>
+              <a:endParaRPr lang="ja-JP" altLang="en-US"/>
+            </a:p>
+          </p:txBody>
+        </p:sp>
+      </p:grpSp>
+      <p:sp useBgFill="1">
+        <p:nvSpPr>
+          <p:cNvPr id="13" name="Rectangle 12">
+            <a:extLst>
+              <a:ext uri="{FF2B5EF4-FFF2-40B4-BE49-F238E27FC236}">
+                <a16:creationId xmlns:a16="http://schemas.microsoft.com/office/drawing/2014/main" id="{EC2B4A13-0632-456F-A66A-2D0CDB9D30AE}"/>
+              </a:ext>
+              <a:ext uri="{C183D7F6-B498-43B3-948B-1728B52AA6E4}">
+                <adec:decorative xmlns:adec="http://schemas.microsoft.com/office/drawing/2017/decorative" val="1"/>
+              </a:ext>
+            </a:extLst>
+          </p:cNvPr>
+          <p:cNvSpPr>
+            <a:spLocks noGrp="1" noRot="1" noChangeAspect="1" noMove="1" noResize="1" noEditPoints="1" noAdjustHandles="1" noChangeArrowheads="1" noChangeShapeType="1" noTextEdit="1"/>
+          </p:cNvSpPr>
+          <p:nvPr>
+            <p:extLst>
+              <p:ext uri="{386F3935-93C4-4BCD-93E2-E3B085C9AB24}">
+                <p16:designElem xmlns:p16="http://schemas.microsoft.com/office/powerpoint/2015/main" val="1"/>
+              </p:ext>
+            </p:extLst>
+          </p:nvPr>
+        </p:nvSpPr>
+        <p:spPr>
+          <a:xfrm>
+            <a:off x="0" y="0"/>
+            <a:ext cx="12192000" cy="6858000"/>
+          </a:xfrm>
+          <a:prstGeom prst="rect">
+            <a:avLst/>
+          </a:prstGeom>
+          <a:ln>
+            <a:noFill/>
+          </a:ln>
+        </p:spPr>
+        <p:style>
+          <a:lnRef idx="2">
+            <a:schemeClr val="accent1">
+              <a:shade val="50000"/>
+            </a:schemeClr>
+          </a:lnRef>
+          <a:fillRef idx="1001">
+            <a:schemeClr val="lt2"/>
+          </a:fillRef>
+          <a:effectRef idx="0">
+            <a:schemeClr val="accent1"/>
+          </a:effectRef>
+          <a:fontRef idx="minor">
+            <a:schemeClr val="lt1"/>
+          </a:fontRef>
+        </p:style>
+        <p:txBody>
+          <a:bodyPr rtlCol="0" anchor="ctr"/>
+          <a:lstStyle/>
+          <a:p>
+            <a:pPr algn="ctr"/>
+            <a:endParaRPr lang="en-US"/>
+          </a:p>
+        </p:txBody>
+      </p:sp>
+      <p:sp>
+        <p:nvSpPr>
+          <p:cNvPr id="15" name="Freeform: Shape 14">
+            <a:extLst>
+              <a:ext uri="{FF2B5EF4-FFF2-40B4-BE49-F238E27FC236}">
+                <a16:creationId xmlns:a16="http://schemas.microsoft.com/office/drawing/2014/main" id="{1568A552-34C4-41D2-A36B-9E86EC569E10}"/>
+              </a:ext>
+              <a:ext uri="{C183D7F6-B498-43B3-948B-1728B52AA6E4}">
+                <adec:decorative xmlns:adec="http://schemas.microsoft.com/office/drawing/2017/decorative" val="1"/>
+              </a:ext>
+            </a:extLst>
+          </p:cNvPr>
+          <p:cNvSpPr>
+            <a:spLocks noGrp="1" noRot="1" noChangeAspect="1" noMove="1" noResize="1" noEditPoints="1" noAdjustHandles="1" noChangeArrowheads="1" noChangeShapeType="1" noTextEdit="1"/>
+          </p:cNvSpPr>
+          <p:nvPr>
+            <p:extLst>
+              <p:ext uri="{386F3935-93C4-4BCD-93E2-E3B085C9AB24}">
+                <p16:designElem xmlns:p16="http://schemas.microsoft.com/office/powerpoint/2015/main" val="1"/>
+              </p:ext>
+            </p:extLst>
+          </p:nvPr>
+        </p:nvSpPr>
+        <p:spPr bwMode="auto">
+          <a:xfrm rot="5400000" flipH="1">
+            <a:off x="1730653" y="-921117"/>
+            <a:ext cx="1756584" cy="4408488"/>
+          </a:xfrm>
+          <a:custGeom>
+            <a:avLst/>
+            <a:gdLst>
+              <a:gd name="connsiteX0" fmla="*/ 1756584 w 1756584"/>
+              <a:gd name="connsiteY0" fmla="*/ 4408488 h 4408488"/>
+              <a:gd name="connsiteX1" fmla="*/ 1756584 w 1756584"/>
+              <a:gd name="connsiteY1" fmla="*/ 0 h 4408488"/>
+              <a:gd name="connsiteX2" fmla="*/ 1350810 w 1756584"/>
+              <a:gd name="connsiteY2" fmla="*/ 0 h 4408488"/>
+              <a:gd name="connsiteX3" fmla="*/ 1350810 w 1756584"/>
+              <a:gd name="connsiteY3" fmla="*/ 4024068 h 4408488"/>
+              <a:gd name="connsiteX4" fmla="*/ 0 w 1756584"/>
+              <a:gd name="connsiteY4" fmla="*/ 4023445 h 4408488"/>
+              <a:gd name="connsiteX5" fmla="*/ 0 w 1756584"/>
+              <a:gd name="connsiteY5" fmla="*/ 4408488 h 4408488"/>
+            </a:gdLst>
+            <a:ahLst/>
+            <a:cxnLst>
+              <a:cxn ang="0">
+                <a:pos x="connsiteX0" y="connsiteY0"/>
+              </a:cxn>
+              <a:cxn ang="0">
+                <a:pos x="connsiteX1" y="connsiteY1"/>
+              </a:cxn>
+              <a:cxn ang="0">
+                <a:pos x="connsiteX2" y="connsiteY2"/>
+              </a:cxn>
+              <a:cxn ang="0">
+                <a:pos x="connsiteX3" y="connsiteY3"/>
+              </a:cxn>
+              <a:cxn ang="0">
+                <a:pos x="connsiteX4" y="connsiteY4"/>
+              </a:cxn>
+              <a:cxn ang="0">
+                <a:pos x="connsiteX5" y="connsiteY5"/>
+              </a:cxn>
+            </a:cxnLst>
+            <a:rect l="l" t="t" r="r" b="b"/>
+            <a:pathLst>
+              <a:path w="1756584" h="4408488">
+                <a:moveTo>
+                  <a:pt x="1756584" y="4408488"/>
+                </a:moveTo>
+                <a:lnTo>
+                  <a:pt x="1756584" y="0"/>
+                </a:lnTo>
+                <a:lnTo>
+                  <a:pt x="1350810" y="0"/>
+                </a:lnTo>
+                <a:lnTo>
+                  <a:pt x="1350810" y="4024068"/>
+                </a:lnTo>
+                <a:lnTo>
+                  <a:pt x="0" y="4023445"/>
+                </a:lnTo>
+                <a:lnTo>
+                  <a:pt x="0" y="4408488"/>
+                </a:lnTo>
+                <a:close/>
+              </a:path>
+            </a:pathLst>
+          </a:custGeom>
+          <a:solidFill>
+            <a:schemeClr val="tx2"/>
+          </a:solidFill>
+          <a:ln w="0">
+            <a:noFill/>
+            <a:prstDash val="solid"/>
+            <a:round/>
+            <a:headEnd/>
+            <a:tailEnd/>
+          </a:ln>
+        </p:spPr>
+        <p:txBody>
+          <a:bodyPr wrap="square">
+            <a:noAutofit/>
+          </a:bodyPr>
+          <a:lstStyle/>
+          <a:p>
+            <a:endParaRPr lang="en-US" dirty="0"/>
+          </a:p>
+        </p:txBody>
+      </p:sp>
+      <p:sp>
+        <p:nvSpPr>
+          <p:cNvPr id="17" name="Freeform: Shape 16">
+            <a:extLst>
+              <a:ext uri="{FF2B5EF4-FFF2-40B4-BE49-F238E27FC236}">
+                <a16:creationId xmlns:a16="http://schemas.microsoft.com/office/drawing/2014/main" id="{B8BE655E-142C-41C9-895E-54D55EDDAF85}"/>
+              </a:ext>
+              <a:ext uri="{C183D7F6-B498-43B3-948B-1728B52AA6E4}">
+                <adec:decorative xmlns:adec="http://schemas.microsoft.com/office/drawing/2017/decorative" val="1"/>
+              </a:ext>
+            </a:extLst>
+          </p:cNvPr>
+          <p:cNvSpPr>
+            <a:spLocks noGrp="1" noRot="1" noChangeAspect="1" noMove="1" noResize="1" noEditPoints="1" noAdjustHandles="1" noChangeArrowheads="1" noChangeShapeType="1" noTextEdit="1"/>
+          </p:cNvSpPr>
+          <p:nvPr>
+            <p:extLst>
+              <p:ext uri="{386F3935-93C4-4BCD-93E2-E3B085C9AB24}">
+                <p16:designElem xmlns:p16="http://schemas.microsoft.com/office/powerpoint/2015/main" val="1"/>
+              </p:ext>
+            </p:extLst>
+          </p:nvPr>
+        </p:nvSpPr>
+        <p:spPr bwMode="auto">
+          <a:xfrm rot="5400000" flipV="1">
+            <a:off x="8673443" y="2182330"/>
+            <a:ext cx="1755930" cy="4408488"/>
+          </a:xfrm>
+          <a:custGeom>
+            <a:avLst/>
+            <a:gdLst>
+              <a:gd name="connsiteX0" fmla="*/ 0 w 1755930"/>
+              <a:gd name="connsiteY0" fmla="*/ 4023420 h 4408488"/>
+              <a:gd name="connsiteX1" fmla="*/ 1 w 1755930"/>
+              <a:gd name="connsiteY1" fmla="*/ 4408488 h 4408488"/>
+              <a:gd name="connsiteX2" fmla="*/ 1755930 w 1755930"/>
+              <a:gd name="connsiteY2" fmla="*/ 4408488 h 4408488"/>
+              <a:gd name="connsiteX3" fmla="*/ 1755930 w 1755930"/>
+              <a:gd name="connsiteY3" fmla="*/ 0 h 4408488"/>
+              <a:gd name="connsiteX4" fmla="*/ 1350156 w 1755930"/>
+              <a:gd name="connsiteY4" fmla="*/ 0 h 4408488"/>
+              <a:gd name="connsiteX5" fmla="*/ 1350156 w 1755930"/>
+              <a:gd name="connsiteY5" fmla="*/ 4023628 h 4408488"/>
+            </a:gdLst>
+            <a:ahLst/>
+            <a:cxnLst>
+              <a:cxn ang="0">
+                <a:pos x="connsiteX0" y="connsiteY0"/>
+              </a:cxn>
+              <a:cxn ang="0">
+                <a:pos x="connsiteX1" y="connsiteY1"/>
+              </a:cxn>
+              <a:cxn ang="0">
+                <a:pos x="connsiteX2" y="connsiteY2"/>
+              </a:cxn>
+              <a:cxn ang="0">
+                <a:pos x="connsiteX3" y="connsiteY3"/>
+              </a:cxn>
+              <a:cxn ang="0">
+                <a:pos x="connsiteX4" y="connsiteY4"/>
+              </a:cxn>
+              <a:cxn ang="0">
+                <a:pos x="connsiteX5" y="connsiteY5"/>
+              </a:cxn>
+            </a:cxnLst>
+            <a:rect l="l" t="t" r="r" b="b"/>
+            <a:pathLst>
+              <a:path w="1755930" h="4408488">
+                <a:moveTo>
+                  <a:pt x="0" y="4023420"/>
+                </a:moveTo>
+                <a:lnTo>
+                  <a:pt x="1" y="4408488"/>
+                </a:lnTo>
+                <a:lnTo>
+                  <a:pt x="1755930" y="4408488"/>
+                </a:lnTo>
+                <a:lnTo>
+                  <a:pt x="1755930" y="0"/>
+                </a:lnTo>
+                <a:lnTo>
+                  <a:pt x="1350156" y="0"/>
+                </a:lnTo>
+                <a:lnTo>
+                  <a:pt x="1350156" y="4023628"/>
+                </a:lnTo>
+                <a:close/>
+              </a:path>
+            </a:pathLst>
+          </a:custGeom>
+          <a:solidFill>
+            <a:schemeClr val="tx2"/>
+          </a:solidFill>
+          <a:ln w="0">
+            <a:noFill/>
+            <a:prstDash val="solid"/>
+            <a:round/>
+            <a:headEnd/>
+            <a:tailEnd/>
+          </a:ln>
+        </p:spPr>
+        <p:txBody>
+          <a:bodyPr/>
+          <a:lstStyle/>
+          <a:p>
+            <a:endParaRPr lang="ja-JP" altLang="en-US"/>
+          </a:p>
+        </p:txBody>
+      </p:sp>
+      <p:sp>
+        <p:nvSpPr>
+          <p:cNvPr id="4" name="テキスト ボックス 3">
+            <a:extLst>
+              <a:ext uri="{FF2B5EF4-FFF2-40B4-BE49-F238E27FC236}">
+                <a16:creationId xmlns:a16="http://schemas.microsoft.com/office/drawing/2014/main" id="{63631589-79E5-7069-11C6-7C5DB9335643}"/>
               </a:ext>
             </a:extLst>
           </p:cNvPr>
@@ -3629,156 +4640,154 @@
         </p:nvSpPr>
         <p:spPr>
           <a:xfrm>
-            <a:off x="5094514" y="2455333"/>
-            <a:ext cx="6696891" cy="1938992"/>
+            <a:off x="1105289" y="1579048"/>
+            <a:ext cx="9969910" cy="2465172"/>
           </a:xfrm>
           <a:prstGeom prst="rect">
             <a:avLst/>
           </a:prstGeom>
-          <a:noFill/>
-        </p:spPr>
-        <p:txBody>
-          <a:bodyPr wrap="square" rtlCol="0">
-            <a:spAutoFit/>
+        </p:spPr>
+        <p:txBody>
+          <a:bodyPr vert="horz" lIns="91440" tIns="45720" rIns="91440" bIns="45720" rtlCol="0" anchor="b">
+            <a:normAutofit/>
           </a:bodyPr>
           <a:lstStyle/>
           <a:p>
-            <a:pPr algn="ctr"/>
-            <a:r>
-              <a:rPr lang="ja-JP" altLang="en-US" sz="4000" dirty="0">
+            <a:pPr algn="ctr" defTabSz="914400">
+              <a:lnSpc>
+                <a:spcPct val="89000"/>
+              </a:lnSpc>
+              <a:spcBef>
+                <a:spcPct val="0"/>
+              </a:spcBef>
+              <a:spcAft>
+                <a:spcPts val="600"/>
+              </a:spcAft>
+            </a:pPr>
+            <a:r>
+              <a:rPr kumimoji="1" lang="ja-JP" altLang="en-US" sz="7200" cap="all" dirty="0">
+                <a:solidFill>
+                  <a:schemeClr val="tx2"/>
+                </a:solidFill>
                 <a:latin typeface="HGS創英角ﾎﾟｯﾌﾟ体" panose="040B0A00000000000000" pitchFamily="50" charset="-128"/>
                 <a:ea typeface="HGS創英角ﾎﾟｯﾌﾟ体" panose="040B0A00000000000000" pitchFamily="50" charset="-128"/>
+                <a:cs typeface="+mj-cs"/>
               </a:rPr>
-              <a:t>個人経営</a:t>
-            </a:r>
-            <a:endParaRPr lang="en-US" altLang="ja-JP" sz="4000" dirty="0">
+              <a:t>卒業制作</a:t>
+            </a:r>
+            <a:endParaRPr kumimoji="1" lang="en-US" altLang="ja-JP" sz="7200" cap="all" dirty="0">
+              <a:solidFill>
+                <a:schemeClr val="tx2"/>
+              </a:solidFill>
               <a:latin typeface="HGS創英角ﾎﾟｯﾌﾟ体" panose="040B0A00000000000000" pitchFamily="50" charset="-128"/>
               <a:ea typeface="HGS創英角ﾎﾟｯﾌﾟ体" panose="040B0A00000000000000" pitchFamily="50" charset="-128"/>
+              <a:cs typeface="+mj-cs"/>
             </a:endParaRPr>
           </a:p>
           <a:p>
-            <a:pPr algn="ctr"/>
-            <a:r>
-              <a:rPr kumimoji="1" lang="ja-JP" altLang="en-US" sz="4000" dirty="0">
+            <a:pPr algn="ctr" defTabSz="914400">
+              <a:lnSpc>
+                <a:spcPct val="89000"/>
+              </a:lnSpc>
+              <a:spcBef>
+                <a:spcPct val="0"/>
+              </a:spcBef>
+              <a:spcAft>
+                <a:spcPts val="600"/>
+              </a:spcAft>
+            </a:pPr>
+            <a:r>
+              <a:rPr lang="ja-JP" altLang="en-US" sz="7200" cap="all" dirty="0">
+                <a:solidFill>
+                  <a:schemeClr val="tx2"/>
+                </a:solidFill>
                 <a:latin typeface="HGS創英角ﾎﾟｯﾌﾟ体" panose="040B0A00000000000000" pitchFamily="50" charset="-128"/>
                 <a:ea typeface="HGS創英角ﾎﾟｯﾌﾟ体" panose="040B0A00000000000000" pitchFamily="50" charset="-128"/>
+                <a:cs typeface="+mj-cs"/>
               </a:rPr>
-              <a:t>美容サイト</a:t>
-            </a:r>
-            <a:endParaRPr lang="en-US" altLang="ja-JP" sz="4000" dirty="0">
+              <a:t>中間発表</a:t>
+            </a:r>
+            <a:endParaRPr kumimoji="1" lang="en-US" altLang="ja-JP" sz="7200" cap="all" dirty="0">
+              <a:solidFill>
+                <a:schemeClr val="tx2"/>
+              </a:solidFill>
               <a:latin typeface="HGS創英角ﾎﾟｯﾌﾟ体" panose="040B0A00000000000000" pitchFamily="50" charset="-128"/>
               <a:ea typeface="HGS創英角ﾎﾟｯﾌﾟ体" panose="040B0A00000000000000" pitchFamily="50" charset="-128"/>
+              <a:cs typeface="+mj-cs"/>
             </a:endParaRPr>
           </a:p>
-          <a:p>
-            <a:pPr algn="ctr"/>
-            <a:r>
-              <a:rPr lang="ja-JP" altLang="en-US" sz="4000" dirty="0">
-                <a:latin typeface="HGS創英角ﾎﾟｯﾌﾟ体" panose="040B0A00000000000000" pitchFamily="50" charset="-128"/>
-                <a:ea typeface="HGS創英角ﾎﾟｯﾌﾟ体" panose="040B0A00000000000000" pitchFamily="50" charset="-128"/>
-              </a:rPr>
-              <a:t>メニュー表ポスターの制作</a:t>
-            </a:r>
-            <a:endParaRPr lang="en-US" altLang="ja-JP" sz="4000" dirty="0">
-              <a:latin typeface="HGS創英角ﾎﾟｯﾌﾟ体" panose="040B0A00000000000000" pitchFamily="50" charset="-128"/>
-              <a:ea typeface="HGS創英角ﾎﾟｯﾌﾟ体" panose="040B0A00000000000000" pitchFamily="50" charset="-128"/>
-            </a:endParaRPr>
-          </a:p>
-        </p:txBody>
-      </p:sp>
-      <p:sp>
-        <p:nvSpPr>
-          <p:cNvPr id="6" name="平行四辺形 5">
+        </p:txBody>
+      </p:sp>
+      <p:sp>
+        <p:nvSpPr>
+          <p:cNvPr id="19" name="Rectangle 18">
             <a:extLst>
               <a:ext uri="{FF2B5EF4-FFF2-40B4-BE49-F238E27FC236}">
-                <a16:creationId xmlns:a16="http://schemas.microsoft.com/office/drawing/2014/main" id="{22EFFCD8-E214-FEB7-DBE4-515B72DC8047}"/>
+                <a16:creationId xmlns:a16="http://schemas.microsoft.com/office/drawing/2014/main" id="{198CC593-9FF4-46EF-81AE-2D26922F154C}"/>
+              </a:ext>
+              <a:ext uri="{C183D7F6-B498-43B3-948B-1728B52AA6E4}">
+                <adec:decorative xmlns:adec="http://schemas.microsoft.com/office/drawing/2017/decorative" val="1"/>
               </a:ext>
             </a:extLst>
           </p:cNvPr>
-          <p:cNvSpPr/>
-          <p:nvPr/>
+          <p:cNvSpPr>
+            <a:spLocks noGrp="1" noRot="1" noChangeAspect="1" noMove="1" noResize="1" noEditPoints="1" noAdjustHandles="1" noChangeArrowheads="1" noChangeShapeType="1" noTextEdit="1"/>
+          </p:cNvSpPr>
+          <p:nvPr>
+            <p:extLst>
+              <p:ext uri="{386F3935-93C4-4BCD-93E2-E3B085C9AB24}">
+                <p16:designElem xmlns:p16="http://schemas.microsoft.com/office/powerpoint/2015/main" val="1"/>
+              </p:ext>
+            </p:extLst>
+          </p:nvPr>
         </p:nvSpPr>
         <p:spPr>
           <a:xfrm>
-            <a:off x="-2638696" y="0"/>
-            <a:ext cx="7654833" cy="6858000"/>
-          </a:xfrm>
-          <a:prstGeom prst="parallelogram">
+            <a:off x="2" y="6453386"/>
+            <a:ext cx="12191998" cy="404614"/>
+          </a:xfrm>
+          <a:prstGeom prst="rect">
             <a:avLst/>
           </a:prstGeom>
+          <a:solidFill>
+            <a:schemeClr val="tx2"/>
+          </a:solidFill>
+          <a:ln>
+            <a:noFill/>
+          </a:ln>
         </p:spPr>
         <p:style>
           <a:lnRef idx="2">
-            <a:schemeClr val="dk1">
-              <a:shade val="15000"/>
+            <a:schemeClr val="accent1">
+              <a:shade val="50000"/>
             </a:schemeClr>
           </a:lnRef>
           <a:fillRef idx="1">
-            <a:schemeClr val="dk1"/>
+            <a:schemeClr val="accent1"/>
           </a:fillRef>
           <a:effectRef idx="0">
-            <a:schemeClr val="dk1"/>
+            <a:schemeClr val="accent1"/>
           </a:effectRef>
           <a:fontRef idx="minor">
             <a:schemeClr val="lt1"/>
           </a:fontRef>
         </p:style>
         <p:txBody>
-          <a:bodyPr rtlCol="0" anchor="ctr"/>
+          <a:bodyPr/>
           <a:lstStyle/>
           <a:p>
-            <a:pPr algn="ctr"/>
-            <a:endParaRPr kumimoji="1" lang="ja-JP" altLang="en-US" dirty="0"/>
-          </a:p>
-        </p:txBody>
-      </p:sp>
-      <p:sp>
-        <p:nvSpPr>
-          <p:cNvPr id="7" name="テキスト ボックス 6">
-            <a:extLst>
-              <a:ext uri="{FF2B5EF4-FFF2-40B4-BE49-F238E27FC236}">
-                <a16:creationId xmlns:a16="http://schemas.microsoft.com/office/drawing/2014/main" id="{FB2B1741-831A-B56D-CDFE-E47DC7EBB0DF}"/>
-              </a:ext>
-            </a:extLst>
-          </p:cNvPr>
-          <p:cNvSpPr txBox="1"/>
-          <p:nvPr/>
-        </p:nvSpPr>
-        <p:spPr>
-          <a:xfrm>
-            <a:off x="400595" y="2598003"/>
-            <a:ext cx="3849188" cy="830997"/>
-          </a:xfrm>
-          <a:prstGeom prst="rect">
-            <a:avLst/>
-          </a:prstGeom>
-          <a:noFill/>
-        </p:spPr>
-        <p:txBody>
-          <a:bodyPr wrap="square" rtlCol="0">
-            <a:spAutoFit/>
-          </a:bodyPr>
-          <a:lstStyle/>
-          <a:p>
-            <a:pPr algn="ctr"/>
-            <a:r>
-              <a:rPr kumimoji="1" lang="ja-JP" altLang="en-US" sz="4800" b="1" dirty="0">
-                <a:solidFill>
-                  <a:schemeClr val="bg1"/>
-                </a:solidFill>
-                <a:latin typeface="HGS創英角ﾎﾟｯﾌﾟ体" panose="040B0A00000000000000" pitchFamily="50" charset="-128"/>
-                <a:ea typeface="HGS創英角ﾎﾟｯﾌﾟ体" panose="040B0A00000000000000" pitchFamily="50" charset="-128"/>
-                <a:cs typeface="ADLaM Display" panose="020F0502020204030204" pitchFamily="2" charset="0"/>
-              </a:rPr>
-              <a:t>テーマ１</a:t>
-            </a:r>
+            <a:endParaRPr lang="en-US" dirty="0">
+              <a:solidFill>
+                <a:schemeClr val="bg1"/>
+              </a:solidFill>
+            </a:endParaRPr>
           </a:p>
         </p:txBody>
       </p:sp>
     </p:spTree>
     <p:extLst>
       <p:ext uri="{BB962C8B-B14F-4D97-AF65-F5344CB8AC3E}">
-        <p14:creationId xmlns:p14="http://schemas.microsoft.com/office/powerpoint/2010/main" val="344619827"/>
+        <p14:creationId xmlns:p14="http://schemas.microsoft.com/office/powerpoint/2010/main" val="3596598215"/>
       </p:ext>
     </p:extLst>
   </p:cSld>
@@ -3791,6 +4800,14 @@
 <file path=ppt/slides/slide2.xml><?xml version="1.0" encoding="utf-8"?>
 <p:sld xmlns:a="http://schemas.openxmlformats.org/drawingml/2006/main" xmlns:r="http://schemas.openxmlformats.org/officeDocument/2006/relationships" xmlns:p="http://schemas.openxmlformats.org/presentationml/2006/main">
   <p:cSld>
+    <p:bg>
+      <p:bgPr>
+        <a:solidFill>
+          <a:schemeClr val="bg2"/>
+        </a:solidFill>
+        <a:effectLst/>
+      </p:bgPr>
+    </p:bg>
     <p:spTree>
       <p:nvGrpSpPr>
         <p:cNvPr id="1" name=""/>
@@ -3805,150 +4822,3217 @@
           <a:chExt cx="0" cy="0"/>
         </a:xfrm>
       </p:grpSpPr>
-      <p:pic>
-        <p:nvPicPr>
-          <p:cNvPr id="3" name="図 2">
+      <p:sp useBgFill="1">
+        <p:nvSpPr>
+          <p:cNvPr id="10" name="Rectangle 9">
             <a:extLst>
               <a:ext uri="{FF2B5EF4-FFF2-40B4-BE49-F238E27FC236}">
-                <a16:creationId xmlns:a16="http://schemas.microsoft.com/office/drawing/2014/main" id="{61AD315D-B714-BE16-9728-E581B3E2CD98}"/>
+                <a16:creationId xmlns:a16="http://schemas.microsoft.com/office/drawing/2014/main" id="{32812C54-7AEF-4ABB-826E-221F51CB0F30}"/>
+              </a:ext>
+              <a:ext uri="{C183D7F6-B498-43B3-948B-1728B52AA6E4}">
+                <adec:decorative xmlns:adec="http://schemas.microsoft.com/office/drawing/2017/decorative" val="1"/>
               </a:ext>
             </a:extLst>
           </p:cNvPr>
-          <p:cNvPicPr>
-            <a:picLocks noChangeAspect="1"/>
-          </p:cNvPicPr>
-          <p:nvPr/>
-        </p:nvPicPr>
-        <p:blipFill>
-          <a:blip r:embed="rId2">
-            <a:extLst>
-              <a:ext uri="{28A0092B-C50C-407E-A947-70E740481C1C}">
-                <a14:useLocalDpi xmlns:a14="http://schemas.microsoft.com/office/drawing/2010/main" val="0"/>
-              </a:ext>
-            </a:extLst>
-          </a:blip>
-          <a:stretch>
-            <a:fillRect/>
-          </a:stretch>
-        </p:blipFill>
+          <p:cNvSpPr>
+            <a:spLocks noGrp="1" noRot="1" noChangeAspect="1" noMove="1" noResize="1" noEditPoints="1" noAdjustHandles="1" noChangeArrowheads="1" noChangeShapeType="1" noTextEdit="1"/>
+          </p:cNvSpPr>
+          <p:nvPr>
+            <p:extLst>
+              <p:ext uri="{386F3935-93C4-4BCD-93E2-E3B085C9AB24}">
+                <p16:designElem xmlns:p16="http://schemas.microsoft.com/office/powerpoint/2015/main" val="1"/>
+              </p:ext>
+            </p:extLst>
+          </p:nvPr>
+        </p:nvSpPr>
         <p:spPr>
           <a:xfrm>
-            <a:off x="7030720" y="701040"/>
-            <a:ext cx="4023360" cy="5029200"/>
+            <a:off x="0" y="0"/>
+            <a:ext cx="12192000" cy="6858000"/>
           </a:xfrm>
           <a:prstGeom prst="rect">
             <a:avLst/>
           </a:prstGeom>
-        </p:spPr>
-      </p:pic>
-      <p:sp>
-        <p:nvSpPr>
-          <p:cNvPr id="4" name="正方形/長方形 3">
+          <a:ln>
+            <a:noFill/>
+          </a:ln>
+        </p:spPr>
+        <p:style>
+          <a:lnRef idx="2">
+            <a:schemeClr val="accent1">
+              <a:shade val="50000"/>
+            </a:schemeClr>
+          </a:lnRef>
+          <a:fillRef idx="1">
+            <a:schemeClr val="accent1"/>
+          </a:fillRef>
+          <a:effectRef idx="0">
+            <a:schemeClr val="accent1"/>
+          </a:effectRef>
+          <a:fontRef idx="minor">
+            <a:schemeClr val="lt1"/>
+          </a:fontRef>
+        </p:style>
+        <p:txBody>
+          <a:bodyPr rtlCol="0" anchor="ctr"/>
+          <a:lstStyle/>
+          <a:p>
+            <a:pPr algn="ctr"/>
+            <a:endParaRPr lang="en-US"/>
+          </a:p>
+        </p:txBody>
+      </p:sp>
+      <p:sp>
+        <p:nvSpPr>
+          <p:cNvPr id="12" name="Rectangle 11">
             <a:extLst>
               <a:ext uri="{FF2B5EF4-FFF2-40B4-BE49-F238E27FC236}">
-                <a16:creationId xmlns:a16="http://schemas.microsoft.com/office/drawing/2014/main" id="{43C75826-A79C-835B-7F4B-8F9537812EB3}"/>
+                <a16:creationId xmlns:a16="http://schemas.microsoft.com/office/drawing/2014/main" id="{891F40E4-8A76-44CF-91EC-907367352626}"/>
+              </a:ext>
+              <a:ext uri="{C183D7F6-B498-43B3-948B-1728B52AA6E4}">
+                <adec:decorative xmlns:adec="http://schemas.microsoft.com/office/drawing/2017/decorative" val="1"/>
               </a:ext>
             </a:extLst>
           </p:cNvPr>
-          <p:cNvSpPr/>
-          <p:nvPr/>
+          <p:cNvSpPr>
+            <a:spLocks noGrp="1" noRot="1" noChangeAspect="1" noMove="1" noResize="1" noEditPoints="1" noAdjustHandles="1" noChangeArrowheads="1" noChangeShapeType="1" noTextEdit="1"/>
+          </p:cNvSpPr>
+          <p:nvPr>
+            <p:extLst>
+              <p:ext uri="{386F3935-93C4-4BCD-93E2-E3B085C9AB24}">
+                <p16:designElem xmlns:p16="http://schemas.microsoft.com/office/powerpoint/2015/main" val="1"/>
+              </p:ext>
+            </p:extLst>
+          </p:nvPr>
         </p:nvSpPr>
         <p:spPr>
           <a:xfrm>
-            <a:off x="1535854" y="701040"/>
-            <a:ext cx="4023360" cy="5113867"/>
+            <a:off x="1" y="376"/>
+            <a:ext cx="3044410" cy="6857624"/>
           </a:xfrm>
           <a:prstGeom prst="rect">
             <a:avLst/>
           </a:prstGeom>
+          <a:solidFill>
+            <a:schemeClr val="accent1"/>
+          </a:solidFill>
+          <a:ln>
+            <a:noFill/>
+          </a:ln>
         </p:spPr>
         <p:style>
           <a:lnRef idx="2">
-            <a:schemeClr val="dk1"/>
+            <a:schemeClr val="accent1">
+              <a:shade val="50000"/>
+            </a:schemeClr>
           </a:lnRef>
           <a:fillRef idx="1">
-            <a:schemeClr val="lt1"/>
+            <a:schemeClr val="accent1"/>
           </a:fillRef>
           <a:effectRef idx="0">
-            <a:schemeClr val="dk1"/>
+            <a:schemeClr val="accent1"/>
           </a:effectRef>
           <a:fontRef idx="minor">
-            <a:schemeClr val="dk1"/>
+            <a:schemeClr val="lt1"/>
           </a:fontRef>
         </p:style>
         <p:txBody>
-          <a:bodyPr rtlCol="0" anchor="ctr"/>
+          <a:bodyPr/>
           <a:lstStyle/>
           <a:p>
-            <a:pPr algn="ctr"/>
-            <a:r>
-              <a:rPr kumimoji="1" lang="ja-JP" altLang="en-US" dirty="0"/>
-              <a:t>メニュー表</a:t>
-            </a:r>
-            <a:endParaRPr kumimoji="1" lang="en-US" altLang="ja-JP" dirty="0"/>
-          </a:p>
-          <a:p>
-            <a:pPr algn="ctr"/>
-            <a:r>
-              <a:rPr kumimoji="1" lang="ja-JP" altLang="en-US" dirty="0"/>
-              <a:t>デザインとしては</a:t>
-            </a:r>
-            <a:endParaRPr kumimoji="1" lang="en-US" altLang="ja-JP" dirty="0"/>
-          </a:p>
-          <a:p>
-            <a:pPr algn="ctr"/>
-            <a:r>
-              <a:rPr kumimoji="1" lang="ja-JP" altLang="en-US" dirty="0"/>
-              <a:t>このような感じの</a:t>
-            </a:r>
-            <a:endParaRPr kumimoji="1" lang="en-US" altLang="ja-JP" dirty="0"/>
-          </a:p>
-          <a:p>
-            <a:pPr algn="ctr"/>
-            <a:r>
-              <a:rPr kumimoji="1" lang="ja-JP" altLang="en-US" dirty="0"/>
-              <a:t>デザインが作られていますが</a:t>
-            </a:r>
-            <a:endParaRPr kumimoji="1" lang="en-US" altLang="ja-JP" dirty="0"/>
-          </a:p>
-          <a:p>
-            <a:pPr algn="ctr"/>
-            <a:r>
-              <a:rPr lang="ja-JP" altLang="en-US" dirty="0"/>
-              <a:t>文字などのデザインを</a:t>
-            </a:r>
-            <a:endParaRPr lang="en-US" altLang="ja-JP" dirty="0"/>
-          </a:p>
-          <a:p>
-            <a:pPr algn="ctr"/>
-            <a:r>
-              <a:rPr lang="ja-JP" altLang="en-US" dirty="0"/>
-              <a:t>こだわりたいこともあり</a:t>
-            </a:r>
-            <a:endParaRPr lang="en-US" altLang="ja-JP" dirty="0"/>
-          </a:p>
-          <a:p>
-            <a:pPr algn="ctr"/>
-            <a:r>
-              <a:rPr lang="ja-JP" altLang="en-US" dirty="0"/>
-              <a:t>そこが改良する感じになって</a:t>
-            </a:r>
-            <a:endParaRPr lang="en-US" altLang="ja-JP" dirty="0"/>
-          </a:p>
-          <a:p>
-            <a:pPr algn="ctr"/>
-            <a:r>
-              <a:rPr lang="ja-JP" altLang="en-US" dirty="0"/>
-              <a:t>おります。</a:t>
-            </a:r>
-            <a:endParaRPr lang="en-US" altLang="ja-JP" dirty="0"/>
+            <a:endParaRPr lang="ja-JP" altLang="en-US"/>
+          </a:p>
+        </p:txBody>
+      </p:sp>
+      <p:sp>
+        <p:nvSpPr>
+          <p:cNvPr id="14" name="Rectangle 13">
+            <a:extLst>
+              <a:ext uri="{FF2B5EF4-FFF2-40B4-BE49-F238E27FC236}">
+                <a16:creationId xmlns:a16="http://schemas.microsoft.com/office/drawing/2014/main" id="{72171013-D973-4187-9CF2-EE098EEF8194}"/>
+              </a:ext>
+              <a:ext uri="{C183D7F6-B498-43B3-948B-1728B52AA6E4}">
+                <adec:decorative xmlns:adec="http://schemas.microsoft.com/office/drawing/2017/decorative" val="1"/>
+              </a:ext>
+            </a:extLst>
+          </p:cNvPr>
+          <p:cNvSpPr>
+            <a:spLocks noGrp="1" noRot="1" noChangeAspect="1" noMove="1" noResize="1" noEditPoints="1" noAdjustHandles="1" noChangeArrowheads="1" noChangeShapeType="1" noTextEdit="1"/>
+          </p:cNvSpPr>
+          <p:nvPr>
+            <p:extLst>
+              <p:ext uri="{386F3935-93C4-4BCD-93E2-E3B085C9AB24}">
+                <p16:designElem xmlns:p16="http://schemas.microsoft.com/office/powerpoint/2015/main" val="1"/>
+              </p:ext>
+            </p:extLst>
+          </p:nvPr>
+        </p:nvSpPr>
+        <p:spPr>
+          <a:xfrm>
+            <a:off x="2815810" y="376"/>
+            <a:ext cx="228600" cy="6858000"/>
+          </a:xfrm>
+          <a:prstGeom prst="rect">
+            <a:avLst/>
+          </a:prstGeom>
+          <a:solidFill>
+            <a:schemeClr val="tx2"/>
+          </a:solidFill>
+          <a:ln>
+            <a:noFill/>
+          </a:ln>
+        </p:spPr>
+        <p:style>
+          <a:lnRef idx="2">
+            <a:schemeClr val="accent1">
+              <a:shade val="50000"/>
+            </a:schemeClr>
+          </a:lnRef>
+          <a:fillRef idx="1">
+            <a:schemeClr val="accent1"/>
+          </a:fillRef>
+          <a:effectRef idx="0">
+            <a:schemeClr val="accent1"/>
+          </a:effectRef>
+          <a:fontRef idx="minor">
+            <a:schemeClr val="lt1"/>
+          </a:fontRef>
+        </p:style>
+        <p:txBody>
+          <a:bodyPr/>
+          <a:lstStyle/>
+          <a:p>
+            <a:endParaRPr lang="ja-JP" altLang="en-US"/>
+          </a:p>
+        </p:txBody>
+      </p:sp>
+      <p:sp>
+        <p:nvSpPr>
+          <p:cNvPr id="5" name="テキスト ボックス 4">
+            <a:extLst>
+              <a:ext uri="{FF2B5EF4-FFF2-40B4-BE49-F238E27FC236}">
+                <a16:creationId xmlns:a16="http://schemas.microsoft.com/office/drawing/2014/main" id="{758F93EE-CCF5-3529-034A-2769ADC0A87F}"/>
+              </a:ext>
+            </a:extLst>
+          </p:cNvPr>
+          <p:cNvSpPr txBox="1"/>
+          <p:nvPr/>
+        </p:nvSpPr>
+        <p:spPr>
+          <a:xfrm>
+            <a:off x="3423131" y="1638300"/>
+            <a:ext cx="7705164" cy="3581400"/>
+          </a:xfrm>
+          <a:prstGeom prst="rect">
+            <a:avLst/>
+          </a:prstGeom>
+        </p:spPr>
+        <p:txBody>
+          <a:bodyPr vert="horz" lIns="91440" tIns="45720" rIns="91440" bIns="45720" rtlCol="0">
+            <a:normAutofit/>
+          </a:bodyPr>
+          <a:lstStyle/>
+          <a:p>
+            <a:pPr indent="-384048" defTabSz="914400">
+              <a:lnSpc>
+                <a:spcPct val="94000"/>
+              </a:lnSpc>
+              <a:spcAft>
+                <a:spcPts val="200"/>
+              </a:spcAft>
+              <a:buFont typeface="Franklin Gothic Book" panose="020B0503020102020204" pitchFamily="34" charset="0"/>
+            </a:pPr>
+            <a:r>
+              <a:rPr kumimoji="1" lang="ja-JP" altLang="en-US" sz="4800" b="1" dirty="0">
+                <a:solidFill>
+                  <a:schemeClr val="tx2"/>
+                </a:solidFill>
+                <a:latin typeface="HGS創英角ﾎﾟｯﾌﾟ体" panose="040B0A00000000000000" pitchFamily="50" charset="-128"/>
+                <a:ea typeface="HGS創英角ﾎﾟｯﾌﾟ体" panose="040B0A00000000000000" pitchFamily="50" charset="-128"/>
+              </a:rPr>
+              <a:t>・テーマ</a:t>
+            </a:r>
+            <a:r>
+              <a:rPr kumimoji="1" lang="en-US" altLang="ja-JP" sz="4800" b="1" dirty="0">
+                <a:solidFill>
+                  <a:schemeClr val="tx2"/>
+                </a:solidFill>
+                <a:latin typeface="HGS創英角ﾎﾟｯﾌﾟ体" panose="040B0A00000000000000" pitchFamily="50" charset="-128"/>
+                <a:ea typeface="HGS創英角ﾎﾟｯﾌﾟ体" panose="040B0A00000000000000" pitchFamily="50" charset="-128"/>
+              </a:rPr>
+              <a:t>(2</a:t>
+            </a:r>
+            <a:r>
+              <a:rPr kumimoji="1" lang="ja-JP" altLang="en-US" sz="4800" b="1" dirty="0">
+                <a:solidFill>
+                  <a:schemeClr val="tx2"/>
+                </a:solidFill>
+                <a:latin typeface="HGS創英角ﾎﾟｯﾌﾟ体" panose="040B0A00000000000000" pitchFamily="50" charset="-128"/>
+                <a:ea typeface="HGS創英角ﾎﾟｯﾌﾟ体" panose="040B0A00000000000000" pitchFamily="50" charset="-128"/>
+              </a:rPr>
+              <a:t>つ</a:t>
+            </a:r>
+            <a:r>
+              <a:rPr kumimoji="1" lang="en-US" altLang="ja-JP" sz="4800" b="1" dirty="0">
+                <a:solidFill>
+                  <a:schemeClr val="tx2"/>
+                </a:solidFill>
+                <a:latin typeface="HGS創英角ﾎﾟｯﾌﾟ体" panose="040B0A00000000000000" pitchFamily="50" charset="-128"/>
+                <a:ea typeface="HGS創英角ﾎﾟｯﾌﾟ体" panose="040B0A00000000000000" pitchFamily="50" charset="-128"/>
+              </a:rPr>
+              <a:t>)</a:t>
+            </a:r>
+          </a:p>
+          <a:p>
+            <a:pPr indent="-384048" defTabSz="914400">
+              <a:lnSpc>
+                <a:spcPct val="94000"/>
+              </a:lnSpc>
+              <a:spcAft>
+                <a:spcPts val="200"/>
+              </a:spcAft>
+              <a:buFont typeface="Franklin Gothic Book" panose="020B0503020102020204" pitchFamily="34" charset="0"/>
+            </a:pPr>
+            <a:r>
+              <a:rPr lang="ja-JP" altLang="en-US" sz="4800" b="1" dirty="0">
+                <a:solidFill>
+                  <a:schemeClr val="tx2"/>
+                </a:solidFill>
+                <a:latin typeface="HGS創英角ﾎﾟｯﾌﾟ体" panose="040B0A00000000000000" pitchFamily="50" charset="-128"/>
+                <a:ea typeface="HGS創英角ﾎﾟｯﾌﾟ体" panose="040B0A00000000000000" pitchFamily="50" charset="-128"/>
+              </a:rPr>
+              <a:t>・目的</a:t>
+            </a:r>
+            <a:endParaRPr lang="en-US" altLang="ja-JP" sz="4800" b="1" dirty="0">
+              <a:solidFill>
+                <a:schemeClr val="tx2"/>
+              </a:solidFill>
+              <a:latin typeface="HGS創英角ﾎﾟｯﾌﾟ体" panose="040B0A00000000000000" pitchFamily="50" charset="-128"/>
+              <a:ea typeface="HGS創英角ﾎﾟｯﾌﾟ体" panose="040B0A00000000000000" pitchFamily="50" charset="-128"/>
+            </a:endParaRPr>
+          </a:p>
+          <a:p>
+            <a:pPr indent="-384048" defTabSz="914400">
+              <a:lnSpc>
+                <a:spcPct val="94000"/>
+              </a:lnSpc>
+              <a:spcAft>
+                <a:spcPts val="200"/>
+              </a:spcAft>
+              <a:buFont typeface="Franklin Gothic Book" panose="020B0503020102020204" pitchFamily="34" charset="0"/>
+            </a:pPr>
+            <a:r>
+              <a:rPr kumimoji="1" lang="ja-JP" altLang="en-US" sz="4800" b="1" dirty="0">
+                <a:solidFill>
+                  <a:schemeClr val="tx2"/>
+                </a:solidFill>
+                <a:latin typeface="HGS創英角ﾎﾟｯﾌﾟ体" panose="040B0A00000000000000" pitchFamily="50" charset="-128"/>
+                <a:ea typeface="HGS創英角ﾎﾟｯﾌﾟ体" panose="040B0A00000000000000" pitchFamily="50" charset="-128"/>
+              </a:rPr>
+              <a:t>・内容</a:t>
+            </a:r>
+            <a:endParaRPr kumimoji="1" lang="en-US" altLang="ja-JP" sz="4800" b="1" dirty="0">
+              <a:solidFill>
+                <a:schemeClr val="tx2"/>
+              </a:solidFill>
+              <a:latin typeface="HGS創英角ﾎﾟｯﾌﾟ体" panose="040B0A00000000000000" pitchFamily="50" charset="-128"/>
+              <a:ea typeface="HGS創英角ﾎﾟｯﾌﾟ体" panose="040B0A00000000000000" pitchFamily="50" charset="-128"/>
+            </a:endParaRPr>
+          </a:p>
+          <a:p>
+            <a:pPr indent="-384048" defTabSz="914400">
+              <a:lnSpc>
+                <a:spcPct val="94000"/>
+              </a:lnSpc>
+              <a:spcAft>
+                <a:spcPts val="200"/>
+              </a:spcAft>
+              <a:buFont typeface="Franklin Gothic Book" panose="020B0503020102020204" pitchFamily="34" charset="0"/>
+            </a:pPr>
+            <a:r>
+              <a:rPr lang="ja-JP" altLang="en-US" sz="4800" b="1" dirty="0">
+                <a:solidFill>
+                  <a:schemeClr val="tx2"/>
+                </a:solidFill>
+                <a:latin typeface="HGS創英角ﾎﾟｯﾌﾟ体" panose="040B0A00000000000000" pitchFamily="50" charset="-128"/>
+                <a:ea typeface="HGS創英角ﾎﾟｯﾌﾟ体" panose="040B0A00000000000000" pitchFamily="50" charset="-128"/>
+              </a:rPr>
+              <a:t>・今後の流れ</a:t>
+            </a:r>
+            <a:endParaRPr lang="en-US" altLang="ja-JP" b="1" dirty="0">
+              <a:solidFill>
+                <a:schemeClr val="tx2"/>
+              </a:solidFill>
+              <a:latin typeface="HGS創英角ﾎﾟｯﾌﾟ体" panose="040B0A00000000000000" pitchFamily="50" charset="-128"/>
+              <a:ea typeface="HGS創英角ﾎﾟｯﾌﾟ体" panose="040B0A00000000000000" pitchFamily="50" charset="-128"/>
+            </a:endParaRPr>
+          </a:p>
+        </p:txBody>
+      </p:sp>
+      <p:sp>
+        <p:nvSpPr>
+          <p:cNvPr id="4" name="テキスト ボックス 3">
+            <a:extLst>
+              <a:ext uri="{FF2B5EF4-FFF2-40B4-BE49-F238E27FC236}">
+                <a16:creationId xmlns:a16="http://schemas.microsoft.com/office/drawing/2014/main" id="{ADE868A0-70BC-DDFE-BF0B-1EF8370C1B50}"/>
+              </a:ext>
+            </a:extLst>
+          </p:cNvPr>
+          <p:cNvSpPr txBox="1"/>
+          <p:nvPr/>
+        </p:nvSpPr>
+        <p:spPr>
+          <a:xfrm>
+            <a:off x="634255" y="2590800"/>
+            <a:ext cx="1702545" cy="956733"/>
+          </a:xfrm>
+          <a:prstGeom prst="rect">
+            <a:avLst/>
+          </a:prstGeom>
+        </p:spPr>
+        <p:txBody>
+          <a:bodyPr vert="horz" lIns="91440" tIns="45720" rIns="91440" bIns="45720" rtlCol="0" anchor="t">
+            <a:normAutofit/>
+          </a:bodyPr>
+          <a:lstStyle/>
+          <a:p>
+            <a:pPr defTabSz="914400">
+              <a:lnSpc>
+                <a:spcPct val="89000"/>
+              </a:lnSpc>
+              <a:spcBef>
+                <a:spcPct val="0"/>
+              </a:spcBef>
+              <a:spcAft>
+                <a:spcPts val="600"/>
+              </a:spcAft>
+            </a:pPr>
+            <a:r>
+              <a:rPr kumimoji="1" lang="ja-JP" altLang="en-US" sz="4800" b="1" spc="300" dirty="0">
+                <a:solidFill>
+                  <a:schemeClr val="tx2"/>
+                </a:solidFill>
+                <a:latin typeface="HGS創英角ﾎﾟｯﾌﾟ体" panose="040B0A00000000000000" pitchFamily="50" charset="-128"/>
+                <a:ea typeface="HGS創英角ﾎﾟｯﾌﾟ体" panose="040B0A00000000000000" pitchFamily="50" charset="-128"/>
+                <a:cs typeface="+mj-cs"/>
+              </a:rPr>
+              <a:t>目次</a:t>
+            </a:r>
           </a:p>
         </p:txBody>
       </p:sp>
     </p:spTree>
     <p:extLst>
       <p:ext uri="{BB962C8B-B14F-4D97-AF65-F5344CB8AC3E}">
-        <p14:creationId xmlns:p14="http://schemas.microsoft.com/office/powerpoint/2010/main" val="3455383276"/>
+        <p14:creationId xmlns:p14="http://schemas.microsoft.com/office/powerpoint/2010/main" val="1378443875"/>
+      </p:ext>
+    </p:extLst>
+  </p:cSld>
+  <p:clrMapOvr>
+    <a:masterClrMapping/>
+  </p:clrMapOvr>
+</p:sld>
+</file>
+
+<file path=ppt/slides/slide3.xml><?xml version="1.0" encoding="utf-8"?>
+<p:sld xmlns:a="http://schemas.openxmlformats.org/drawingml/2006/main" xmlns:r="http://schemas.openxmlformats.org/officeDocument/2006/relationships" xmlns:p="http://schemas.openxmlformats.org/presentationml/2006/main">
+  <p:cSld>
+    <p:bg>
+      <p:bgPr>
+        <a:solidFill>
+          <a:schemeClr val="bg2"/>
+        </a:solidFill>
+        <a:effectLst/>
+      </p:bgPr>
+    </p:bg>
+    <p:spTree>
+      <p:nvGrpSpPr>
+        <p:cNvPr id="1" name=""/>
+        <p:cNvGrpSpPr/>
+        <p:nvPr/>
+      </p:nvGrpSpPr>
+      <p:grpSpPr>
+        <a:xfrm>
+          <a:off x="0" y="0"/>
+          <a:ext cx="0" cy="0"/>
+          <a:chOff x="0" y="0"/>
+          <a:chExt cx="0" cy="0"/>
+        </a:xfrm>
+      </p:grpSpPr>
+      <p:sp>
+        <p:nvSpPr>
+          <p:cNvPr id="12" name="Rectangle 11">
+            <a:extLst>
+              <a:ext uri="{FF2B5EF4-FFF2-40B4-BE49-F238E27FC236}">
+                <a16:creationId xmlns:a16="http://schemas.microsoft.com/office/drawing/2014/main" id="{2A97F59D-628C-4053-B41F-489D0045FD5C}"/>
+              </a:ext>
+              <a:ext uri="{C183D7F6-B498-43B3-948B-1728B52AA6E4}">
+                <adec:decorative xmlns:adec="http://schemas.microsoft.com/office/drawing/2017/decorative" val="1"/>
+              </a:ext>
+            </a:extLst>
+          </p:cNvPr>
+          <p:cNvSpPr>
+            <a:spLocks noGrp="1" noRot="1" noChangeAspect="1" noMove="1" noResize="1" noEditPoints="1" noAdjustHandles="1" noChangeArrowheads="1" noChangeShapeType="1" noTextEdit="1"/>
+          </p:cNvSpPr>
+          <p:nvPr>
+            <p:extLst>
+              <p:ext uri="{386F3935-93C4-4BCD-93E2-E3B085C9AB24}">
+                <p16:designElem xmlns:p16="http://schemas.microsoft.com/office/powerpoint/2015/main" val="1"/>
+              </p:ext>
+            </p:extLst>
+          </p:nvPr>
+        </p:nvSpPr>
+        <p:spPr>
+          <a:xfrm>
+            <a:off x="478095" y="376"/>
+            <a:ext cx="228600" cy="6858000"/>
+          </a:xfrm>
+          <a:prstGeom prst="rect">
+            <a:avLst/>
+          </a:prstGeom>
+          <a:solidFill>
+            <a:schemeClr val="tx2"/>
+          </a:solidFill>
+          <a:ln>
+            <a:noFill/>
+          </a:ln>
+        </p:spPr>
+        <p:style>
+          <a:lnRef idx="2">
+            <a:schemeClr val="accent1">
+              <a:shade val="50000"/>
+            </a:schemeClr>
+          </a:lnRef>
+          <a:fillRef idx="1">
+            <a:schemeClr val="accent1"/>
+          </a:fillRef>
+          <a:effectRef idx="0">
+            <a:schemeClr val="accent1"/>
+          </a:effectRef>
+          <a:fontRef idx="minor">
+            <a:schemeClr val="lt1"/>
+          </a:fontRef>
+        </p:style>
+        <p:txBody>
+          <a:bodyPr/>
+          <a:lstStyle/>
+          <a:p>
+            <a:endParaRPr lang="ja-JP" altLang="en-US"/>
+          </a:p>
+        </p:txBody>
+      </p:sp>
+      <p:sp useBgFill="1">
+        <p:nvSpPr>
+          <p:cNvPr id="14" name="Rectangle 13">
+            <a:extLst>
+              <a:ext uri="{FF2B5EF4-FFF2-40B4-BE49-F238E27FC236}">
+                <a16:creationId xmlns:a16="http://schemas.microsoft.com/office/drawing/2014/main" id="{32812C54-7AEF-4ABB-826E-221F51CB0F30}"/>
+              </a:ext>
+              <a:ext uri="{C183D7F6-B498-43B3-948B-1728B52AA6E4}">
+                <adec:decorative xmlns:adec="http://schemas.microsoft.com/office/drawing/2017/decorative" val="1"/>
+              </a:ext>
+            </a:extLst>
+          </p:cNvPr>
+          <p:cNvSpPr>
+            <a:spLocks noGrp="1" noRot="1" noChangeAspect="1" noMove="1" noResize="1" noEditPoints="1" noAdjustHandles="1" noChangeArrowheads="1" noChangeShapeType="1" noTextEdit="1"/>
+          </p:cNvSpPr>
+          <p:nvPr>
+            <p:extLst>
+              <p:ext uri="{386F3935-93C4-4BCD-93E2-E3B085C9AB24}">
+                <p16:designElem xmlns:p16="http://schemas.microsoft.com/office/powerpoint/2015/main" val="1"/>
+              </p:ext>
+            </p:extLst>
+          </p:nvPr>
+        </p:nvSpPr>
+        <p:spPr>
+          <a:xfrm>
+            <a:off x="0" y="0"/>
+            <a:ext cx="12192000" cy="6858000"/>
+          </a:xfrm>
+          <a:prstGeom prst="rect">
+            <a:avLst/>
+          </a:prstGeom>
+          <a:ln>
+            <a:noFill/>
+          </a:ln>
+        </p:spPr>
+        <p:style>
+          <a:lnRef idx="2">
+            <a:schemeClr val="accent1">
+              <a:shade val="50000"/>
+            </a:schemeClr>
+          </a:lnRef>
+          <a:fillRef idx="1">
+            <a:schemeClr val="accent1"/>
+          </a:fillRef>
+          <a:effectRef idx="0">
+            <a:schemeClr val="accent1"/>
+          </a:effectRef>
+          <a:fontRef idx="minor">
+            <a:schemeClr val="lt1"/>
+          </a:fontRef>
+        </p:style>
+        <p:txBody>
+          <a:bodyPr rtlCol="0" anchor="ctr"/>
+          <a:lstStyle/>
+          <a:p>
+            <a:pPr algn="ctr"/>
+            <a:endParaRPr lang="en-US"/>
+          </a:p>
+        </p:txBody>
+      </p:sp>
+      <p:sp>
+        <p:nvSpPr>
+          <p:cNvPr id="16" name="Rectangle 15">
+            <a:extLst>
+              <a:ext uri="{FF2B5EF4-FFF2-40B4-BE49-F238E27FC236}">
+                <a16:creationId xmlns:a16="http://schemas.microsoft.com/office/drawing/2014/main" id="{891F40E4-8A76-44CF-91EC-907367352626}"/>
+              </a:ext>
+              <a:ext uri="{C183D7F6-B498-43B3-948B-1728B52AA6E4}">
+                <adec:decorative xmlns:adec="http://schemas.microsoft.com/office/drawing/2017/decorative" val="1"/>
+              </a:ext>
+            </a:extLst>
+          </p:cNvPr>
+          <p:cNvSpPr>
+            <a:spLocks noGrp="1" noRot="1" noChangeAspect="1" noMove="1" noResize="1" noEditPoints="1" noAdjustHandles="1" noChangeArrowheads="1" noChangeShapeType="1" noTextEdit="1"/>
+          </p:cNvSpPr>
+          <p:nvPr>
+            <p:extLst>
+              <p:ext uri="{386F3935-93C4-4BCD-93E2-E3B085C9AB24}">
+                <p16:designElem xmlns:p16="http://schemas.microsoft.com/office/powerpoint/2015/main" val="1"/>
+              </p:ext>
+            </p:extLst>
+          </p:nvPr>
+        </p:nvSpPr>
+        <p:spPr>
+          <a:xfrm>
+            <a:off x="1" y="376"/>
+            <a:ext cx="3044410" cy="6857624"/>
+          </a:xfrm>
+          <a:prstGeom prst="rect">
+            <a:avLst/>
+          </a:prstGeom>
+          <a:solidFill>
+            <a:schemeClr val="accent1"/>
+          </a:solidFill>
+          <a:ln>
+            <a:noFill/>
+          </a:ln>
+        </p:spPr>
+        <p:style>
+          <a:lnRef idx="2">
+            <a:schemeClr val="accent1">
+              <a:shade val="50000"/>
+            </a:schemeClr>
+          </a:lnRef>
+          <a:fillRef idx="1">
+            <a:schemeClr val="accent1"/>
+          </a:fillRef>
+          <a:effectRef idx="0">
+            <a:schemeClr val="accent1"/>
+          </a:effectRef>
+          <a:fontRef idx="minor">
+            <a:schemeClr val="lt1"/>
+          </a:fontRef>
+        </p:style>
+        <p:txBody>
+          <a:bodyPr/>
+          <a:lstStyle/>
+          <a:p>
+            <a:endParaRPr lang="ja-JP" altLang="en-US"/>
+          </a:p>
+        </p:txBody>
+      </p:sp>
+      <p:sp>
+        <p:nvSpPr>
+          <p:cNvPr id="18" name="Rectangle 17">
+            <a:extLst>
+              <a:ext uri="{FF2B5EF4-FFF2-40B4-BE49-F238E27FC236}">
+                <a16:creationId xmlns:a16="http://schemas.microsoft.com/office/drawing/2014/main" id="{72171013-D973-4187-9CF2-EE098EEF8194}"/>
+              </a:ext>
+              <a:ext uri="{C183D7F6-B498-43B3-948B-1728B52AA6E4}">
+                <adec:decorative xmlns:adec="http://schemas.microsoft.com/office/drawing/2017/decorative" val="1"/>
+              </a:ext>
+            </a:extLst>
+          </p:cNvPr>
+          <p:cNvSpPr>
+            <a:spLocks noGrp="1" noRot="1" noChangeAspect="1" noMove="1" noResize="1" noEditPoints="1" noAdjustHandles="1" noChangeArrowheads="1" noChangeShapeType="1" noTextEdit="1"/>
+          </p:cNvSpPr>
+          <p:nvPr>
+            <p:extLst>
+              <p:ext uri="{386F3935-93C4-4BCD-93E2-E3B085C9AB24}">
+                <p16:designElem xmlns:p16="http://schemas.microsoft.com/office/powerpoint/2015/main" val="1"/>
+              </p:ext>
+            </p:extLst>
+          </p:nvPr>
+        </p:nvSpPr>
+        <p:spPr>
+          <a:xfrm>
+            <a:off x="2815810" y="376"/>
+            <a:ext cx="228600" cy="6858000"/>
+          </a:xfrm>
+          <a:prstGeom prst="rect">
+            <a:avLst/>
+          </a:prstGeom>
+          <a:solidFill>
+            <a:schemeClr val="tx2"/>
+          </a:solidFill>
+          <a:ln>
+            <a:noFill/>
+          </a:ln>
+        </p:spPr>
+        <p:style>
+          <a:lnRef idx="2">
+            <a:schemeClr val="accent1">
+              <a:shade val="50000"/>
+            </a:schemeClr>
+          </a:lnRef>
+          <a:fillRef idx="1">
+            <a:schemeClr val="accent1"/>
+          </a:fillRef>
+          <a:effectRef idx="0">
+            <a:schemeClr val="accent1"/>
+          </a:effectRef>
+          <a:fontRef idx="minor">
+            <a:schemeClr val="lt1"/>
+          </a:fontRef>
+        </p:style>
+        <p:txBody>
+          <a:bodyPr/>
+          <a:lstStyle/>
+          <a:p>
+            <a:endParaRPr lang="ja-JP" altLang="en-US"/>
+          </a:p>
+        </p:txBody>
+      </p:sp>
+      <p:sp>
+        <p:nvSpPr>
+          <p:cNvPr id="5" name="テキスト ボックス 4">
+            <a:extLst>
+              <a:ext uri="{FF2B5EF4-FFF2-40B4-BE49-F238E27FC236}">
+                <a16:creationId xmlns:a16="http://schemas.microsoft.com/office/drawing/2014/main" id="{79074537-0ADE-E0A0-9FC6-40DE49542FA4}"/>
+              </a:ext>
+            </a:extLst>
+          </p:cNvPr>
+          <p:cNvSpPr txBox="1"/>
+          <p:nvPr/>
+        </p:nvSpPr>
+        <p:spPr>
+          <a:xfrm>
+            <a:off x="3363864" y="2286000"/>
+            <a:ext cx="8431896" cy="3581400"/>
+          </a:xfrm>
+          <a:prstGeom prst="rect">
+            <a:avLst/>
+          </a:prstGeom>
+        </p:spPr>
+        <p:txBody>
+          <a:bodyPr vert="horz" lIns="91440" tIns="45720" rIns="91440" bIns="45720" rtlCol="0">
+            <a:normAutofit/>
+          </a:bodyPr>
+          <a:lstStyle/>
+          <a:p>
+            <a:pPr indent="-384048" defTabSz="914400">
+              <a:lnSpc>
+                <a:spcPct val="94000"/>
+              </a:lnSpc>
+              <a:spcAft>
+                <a:spcPts val="200"/>
+              </a:spcAft>
+              <a:buFont typeface="Franklin Gothic Book" panose="020B0503020102020204" pitchFamily="34" charset="0"/>
+            </a:pPr>
+            <a:r>
+              <a:rPr lang="ja-JP" altLang="en-US" sz="4800" dirty="0">
+                <a:solidFill>
+                  <a:schemeClr val="tx2"/>
+                </a:solidFill>
+                <a:latin typeface="HGS創英角ﾎﾟｯﾌﾟ体" panose="040B0A00000000000000" pitchFamily="50" charset="-128"/>
+                <a:ea typeface="HGS創英角ﾎﾟｯﾌﾟ体" panose="040B0A00000000000000" pitchFamily="50" charset="-128"/>
+              </a:rPr>
+              <a:t>・個人経営</a:t>
+            </a:r>
+            <a:endParaRPr lang="en-US" altLang="ja-JP" sz="4800" dirty="0">
+              <a:solidFill>
+                <a:schemeClr val="tx2"/>
+              </a:solidFill>
+              <a:latin typeface="HGS創英角ﾎﾟｯﾌﾟ体" panose="040B0A00000000000000" pitchFamily="50" charset="-128"/>
+              <a:ea typeface="HGS創英角ﾎﾟｯﾌﾟ体" panose="040B0A00000000000000" pitchFamily="50" charset="-128"/>
+            </a:endParaRPr>
+          </a:p>
+          <a:p>
+            <a:pPr indent="-384048" defTabSz="914400">
+              <a:lnSpc>
+                <a:spcPct val="94000"/>
+              </a:lnSpc>
+              <a:spcAft>
+                <a:spcPts val="200"/>
+              </a:spcAft>
+              <a:buFont typeface="Franklin Gothic Book" panose="020B0503020102020204" pitchFamily="34" charset="0"/>
+            </a:pPr>
+            <a:r>
+              <a:rPr kumimoji="1" lang="ja-JP" altLang="en-US" sz="4800" dirty="0">
+                <a:solidFill>
+                  <a:schemeClr val="tx2"/>
+                </a:solidFill>
+                <a:latin typeface="HGS創英角ﾎﾟｯﾌﾟ体" panose="040B0A00000000000000" pitchFamily="50" charset="-128"/>
+                <a:ea typeface="HGS創英角ﾎﾟｯﾌﾟ体" panose="040B0A00000000000000" pitchFamily="50" charset="-128"/>
+              </a:rPr>
+              <a:t>・美容サイト</a:t>
+            </a:r>
+            <a:endParaRPr lang="en-US" altLang="ja-JP" sz="4800" dirty="0">
+              <a:solidFill>
+                <a:schemeClr val="tx2"/>
+              </a:solidFill>
+              <a:latin typeface="HGS創英角ﾎﾟｯﾌﾟ体" panose="040B0A00000000000000" pitchFamily="50" charset="-128"/>
+              <a:ea typeface="HGS創英角ﾎﾟｯﾌﾟ体" panose="040B0A00000000000000" pitchFamily="50" charset="-128"/>
+            </a:endParaRPr>
+          </a:p>
+          <a:p>
+            <a:pPr indent="-384048" defTabSz="914400">
+              <a:lnSpc>
+                <a:spcPct val="94000"/>
+              </a:lnSpc>
+              <a:spcAft>
+                <a:spcPts val="200"/>
+              </a:spcAft>
+              <a:buFont typeface="Franklin Gothic Book" panose="020B0503020102020204" pitchFamily="34" charset="0"/>
+            </a:pPr>
+            <a:r>
+              <a:rPr lang="ja-JP" altLang="en-US" sz="4800" dirty="0">
+                <a:solidFill>
+                  <a:schemeClr val="tx2"/>
+                </a:solidFill>
+                <a:latin typeface="HGS創英角ﾎﾟｯﾌﾟ体" panose="040B0A00000000000000" pitchFamily="50" charset="-128"/>
+                <a:ea typeface="HGS創英角ﾎﾟｯﾌﾟ体" panose="040B0A00000000000000" pitchFamily="50" charset="-128"/>
+              </a:rPr>
+              <a:t>・メニュー表、チラシの制作</a:t>
+            </a:r>
+            <a:endParaRPr lang="en-US" altLang="ja-JP" sz="4800" dirty="0">
+              <a:solidFill>
+                <a:schemeClr val="tx2"/>
+              </a:solidFill>
+              <a:latin typeface="HGS創英角ﾎﾟｯﾌﾟ体" panose="040B0A00000000000000" pitchFamily="50" charset="-128"/>
+              <a:ea typeface="HGS創英角ﾎﾟｯﾌﾟ体" panose="040B0A00000000000000" pitchFamily="50" charset="-128"/>
+            </a:endParaRPr>
+          </a:p>
+        </p:txBody>
+      </p:sp>
+      <p:sp>
+        <p:nvSpPr>
+          <p:cNvPr id="7" name="テキスト ボックス 6">
+            <a:extLst>
+              <a:ext uri="{FF2B5EF4-FFF2-40B4-BE49-F238E27FC236}">
+                <a16:creationId xmlns:a16="http://schemas.microsoft.com/office/drawing/2014/main" id="{FB2B1741-831A-B56D-CDFE-E47DC7EBB0DF}"/>
+              </a:ext>
+            </a:extLst>
+          </p:cNvPr>
+          <p:cNvSpPr txBox="1"/>
+          <p:nvPr/>
+        </p:nvSpPr>
+        <p:spPr>
+          <a:xfrm>
+            <a:off x="248774" y="2799080"/>
+            <a:ext cx="2681336" cy="817880"/>
+          </a:xfrm>
+          <a:prstGeom prst="rect">
+            <a:avLst/>
+          </a:prstGeom>
+        </p:spPr>
+        <p:txBody>
+          <a:bodyPr vert="horz" lIns="91440" tIns="45720" rIns="91440" bIns="45720" rtlCol="0" anchor="t">
+            <a:normAutofit/>
+          </a:bodyPr>
+          <a:lstStyle/>
+          <a:p>
+            <a:pPr defTabSz="914400">
+              <a:lnSpc>
+                <a:spcPct val="89000"/>
+              </a:lnSpc>
+              <a:spcBef>
+                <a:spcPct val="0"/>
+              </a:spcBef>
+              <a:spcAft>
+                <a:spcPts val="600"/>
+              </a:spcAft>
+            </a:pPr>
+            <a:r>
+              <a:rPr kumimoji="1" lang="ja-JP" altLang="en-US" sz="4400" b="1" dirty="0">
+                <a:solidFill>
+                  <a:schemeClr val="tx2"/>
+                </a:solidFill>
+                <a:latin typeface="HGS創英角ﾎﾟｯﾌﾟ体" panose="040B0A00000000000000" pitchFamily="50" charset="-128"/>
+                <a:ea typeface="HGS創英角ﾎﾟｯﾌﾟ体" panose="040B0A00000000000000" pitchFamily="50" charset="-128"/>
+                <a:cs typeface="+mj-cs"/>
+              </a:rPr>
+              <a:t>テーマ１</a:t>
+            </a:r>
+          </a:p>
+        </p:txBody>
+      </p:sp>
+    </p:spTree>
+    <p:extLst>
+      <p:ext uri="{BB962C8B-B14F-4D97-AF65-F5344CB8AC3E}">
+        <p14:creationId xmlns:p14="http://schemas.microsoft.com/office/powerpoint/2010/main" val="344619827"/>
+      </p:ext>
+    </p:extLst>
+  </p:cSld>
+  <p:clrMapOvr>
+    <a:masterClrMapping/>
+  </p:clrMapOvr>
+</p:sld>
+</file>
+
+<file path=ppt/slides/slide4.xml><?xml version="1.0" encoding="utf-8"?>
+<p:sld xmlns:a="http://schemas.openxmlformats.org/drawingml/2006/main" xmlns:r="http://schemas.openxmlformats.org/officeDocument/2006/relationships" xmlns:p="http://schemas.openxmlformats.org/presentationml/2006/main">
+  <p:cSld>
+    <p:bg>
+      <p:bgPr>
+        <a:solidFill>
+          <a:schemeClr val="bg2"/>
+        </a:solidFill>
+        <a:effectLst/>
+      </p:bgPr>
+    </p:bg>
+    <p:spTree>
+      <p:nvGrpSpPr>
+        <p:cNvPr id="1" name=""/>
+        <p:cNvGrpSpPr/>
+        <p:nvPr/>
+      </p:nvGrpSpPr>
+      <p:grpSpPr>
+        <a:xfrm>
+          <a:off x="0" y="0"/>
+          <a:ext cx="0" cy="0"/>
+          <a:chOff x="0" y="0"/>
+          <a:chExt cx="0" cy="0"/>
+        </a:xfrm>
+      </p:grpSpPr>
+      <p:sp useBgFill="1">
+        <p:nvSpPr>
+          <p:cNvPr id="11" name="Rectangle 10">
+            <a:extLst>
+              <a:ext uri="{FF2B5EF4-FFF2-40B4-BE49-F238E27FC236}">
+                <a16:creationId xmlns:a16="http://schemas.microsoft.com/office/drawing/2014/main" id="{32812C54-7AEF-4ABB-826E-221F51CB0F30}"/>
+              </a:ext>
+              <a:ext uri="{C183D7F6-B498-43B3-948B-1728B52AA6E4}">
+                <adec:decorative xmlns:adec="http://schemas.microsoft.com/office/drawing/2017/decorative" val="1"/>
+              </a:ext>
+            </a:extLst>
+          </p:cNvPr>
+          <p:cNvSpPr>
+            <a:spLocks noGrp="1" noRot="1" noChangeAspect="1" noMove="1" noResize="1" noEditPoints="1" noAdjustHandles="1" noChangeArrowheads="1" noChangeShapeType="1" noTextEdit="1"/>
+          </p:cNvSpPr>
+          <p:nvPr>
+            <p:extLst>
+              <p:ext uri="{386F3935-93C4-4BCD-93E2-E3B085C9AB24}">
+                <p16:designElem xmlns:p16="http://schemas.microsoft.com/office/powerpoint/2015/main" val="1"/>
+              </p:ext>
+            </p:extLst>
+          </p:nvPr>
+        </p:nvSpPr>
+        <p:spPr>
+          <a:xfrm>
+            <a:off x="0" y="0"/>
+            <a:ext cx="12192000" cy="6858000"/>
+          </a:xfrm>
+          <a:prstGeom prst="rect">
+            <a:avLst/>
+          </a:prstGeom>
+          <a:ln>
+            <a:noFill/>
+          </a:ln>
+        </p:spPr>
+        <p:style>
+          <a:lnRef idx="2">
+            <a:schemeClr val="accent1">
+              <a:shade val="50000"/>
+            </a:schemeClr>
+          </a:lnRef>
+          <a:fillRef idx="1">
+            <a:schemeClr val="accent1"/>
+          </a:fillRef>
+          <a:effectRef idx="0">
+            <a:schemeClr val="accent1"/>
+          </a:effectRef>
+          <a:fontRef idx="minor">
+            <a:schemeClr val="lt1"/>
+          </a:fontRef>
+        </p:style>
+        <p:txBody>
+          <a:bodyPr rtlCol="0" anchor="ctr"/>
+          <a:lstStyle/>
+          <a:p>
+            <a:pPr algn="ctr"/>
+            <a:endParaRPr lang="en-US"/>
+          </a:p>
+        </p:txBody>
+      </p:sp>
+      <p:sp>
+        <p:nvSpPr>
+          <p:cNvPr id="13" name="Rectangle 12">
+            <a:extLst>
+              <a:ext uri="{FF2B5EF4-FFF2-40B4-BE49-F238E27FC236}">
+                <a16:creationId xmlns:a16="http://schemas.microsoft.com/office/drawing/2014/main" id="{891F40E4-8A76-44CF-91EC-907367352626}"/>
+              </a:ext>
+              <a:ext uri="{C183D7F6-B498-43B3-948B-1728B52AA6E4}">
+                <adec:decorative xmlns:adec="http://schemas.microsoft.com/office/drawing/2017/decorative" val="1"/>
+              </a:ext>
+            </a:extLst>
+          </p:cNvPr>
+          <p:cNvSpPr>
+            <a:spLocks noGrp="1" noRot="1" noChangeAspect="1" noMove="1" noResize="1" noEditPoints="1" noAdjustHandles="1" noChangeArrowheads="1" noChangeShapeType="1" noTextEdit="1"/>
+          </p:cNvSpPr>
+          <p:nvPr>
+            <p:extLst>
+              <p:ext uri="{386F3935-93C4-4BCD-93E2-E3B085C9AB24}">
+                <p16:designElem xmlns:p16="http://schemas.microsoft.com/office/powerpoint/2015/main" val="1"/>
+              </p:ext>
+            </p:extLst>
+          </p:nvPr>
+        </p:nvSpPr>
+        <p:spPr>
+          <a:xfrm>
+            <a:off x="1" y="376"/>
+            <a:ext cx="3044410" cy="6857624"/>
+          </a:xfrm>
+          <a:prstGeom prst="rect">
+            <a:avLst/>
+          </a:prstGeom>
+          <a:solidFill>
+            <a:schemeClr val="accent1"/>
+          </a:solidFill>
+          <a:ln>
+            <a:noFill/>
+          </a:ln>
+        </p:spPr>
+        <p:style>
+          <a:lnRef idx="2">
+            <a:schemeClr val="accent1">
+              <a:shade val="50000"/>
+            </a:schemeClr>
+          </a:lnRef>
+          <a:fillRef idx="1">
+            <a:schemeClr val="accent1"/>
+          </a:fillRef>
+          <a:effectRef idx="0">
+            <a:schemeClr val="accent1"/>
+          </a:effectRef>
+          <a:fontRef idx="minor">
+            <a:schemeClr val="lt1"/>
+          </a:fontRef>
+        </p:style>
+        <p:txBody>
+          <a:bodyPr/>
+          <a:lstStyle/>
+          <a:p>
+            <a:endParaRPr lang="ja-JP" altLang="en-US"/>
+          </a:p>
+        </p:txBody>
+      </p:sp>
+      <p:sp>
+        <p:nvSpPr>
+          <p:cNvPr id="15" name="Rectangle 14">
+            <a:extLst>
+              <a:ext uri="{FF2B5EF4-FFF2-40B4-BE49-F238E27FC236}">
+                <a16:creationId xmlns:a16="http://schemas.microsoft.com/office/drawing/2014/main" id="{72171013-D973-4187-9CF2-EE098EEF8194}"/>
+              </a:ext>
+              <a:ext uri="{C183D7F6-B498-43B3-948B-1728B52AA6E4}">
+                <adec:decorative xmlns:adec="http://schemas.microsoft.com/office/drawing/2017/decorative" val="1"/>
+              </a:ext>
+            </a:extLst>
+          </p:cNvPr>
+          <p:cNvSpPr>
+            <a:spLocks noGrp="1" noRot="1" noChangeAspect="1" noMove="1" noResize="1" noEditPoints="1" noAdjustHandles="1" noChangeArrowheads="1" noChangeShapeType="1" noTextEdit="1"/>
+          </p:cNvSpPr>
+          <p:nvPr>
+            <p:extLst>
+              <p:ext uri="{386F3935-93C4-4BCD-93E2-E3B085C9AB24}">
+                <p16:designElem xmlns:p16="http://schemas.microsoft.com/office/powerpoint/2015/main" val="1"/>
+              </p:ext>
+            </p:extLst>
+          </p:nvPr>
+        </p:nvSpPr>
+        <p:spPr>
+          <a:xfrm>
+            <a:off x="2815810" y="376"/>
+            <a:ext cx="228600" cy="6858000"/>
+          </a:xfrm>
+          <a:prstGeom prst="rect">
+            <a:avLst/>
+          </a:prstGeom>
+          <a:solidFill>
+            <a:schemeClr val="tx2"/>
+          </a:solidFill>
+          <a:ln>
+            <a:noFill/>
+          </a:ln>
+        </p:spPr>
+        <p:style>
+          <a:lnRef idx="2">
+            <a:schemeClr val="accent1">
+              <a:shade val="50000"/>
+            </a:schemeClr>
+          </a:lnRef>
+          <a:fillRef idx="1">
+            <a:schemeClr val="accent1"/>
+          </a:fillRef>
+          <a:effectRef idx="0">
+            <a:schemeClr val="accent1"/>
+          </a:effectRef>
+          <a:fontRef idx="minor">
+            <a:schemeClr val="lt1"/>
+          </a:fontRef>
+        </p:style>
+        <p:txBody>
+          <a:bodyPr/>
+          <a:lstStyle/>
+          <a:p>
+            <a:endParaRPr lang="ja-JP" altLang="en-US"/>
+          </a:p>
+        </p:txBody>
+      </p:sp>
+      <p:sp>
+        <p:nvSpPr>
+          <p:cNvPr id="6" name="テキスト ボックス 5">
+            <a:extLst>
+              <a:ext uri="{FF2B5EF4-FFF2-40B4-BE49-F238E27FC236}">
+                <a16:creationId xmlns:a16="http://schemas.microsoft.com/office/drawing/2014/main" id="{FBB0EEBE-1F55-D96C-F2A0-B486C9BB67FA}"/>
+              </a:ext>
+            </a:extLst>
+          </p:cNvPr>
+          <p:cNvSpPr txBox="1"/>
+          <p:nvPr/>
+        </p:nvSpPr>
+        <p:spPr>
+          <a:xfrm>
+            <a:off x="3363863" y="2286000"/>
+            <a:ext cx="8828135" cy="3581400"/>
+          </a:xfrm>
+          <a:prstGeom prst="rect">
+            <a:avLst/>
+          </a:prstGeom>
+        </p:spPr>
+        <p:txBody>
+          <a:bodyPr vert="horz" lIns="91440" tIns="45720" rIns="91440" bIns="45720" rtlCol="0">
+            <a:normAutofit/>
+          </a:bodyPr>
+          <a:lstStyle/>
+          <a:p>
+            <a:pPr indent="-384048" defTabSz="914400">
+              <a:lnSpc>
+                <a:spcPct val="94000"/>
+              </a:lnSpc>
+              <a:spcAft>
+                <a:spcPts val="200"/>
+              </a:spcAft>
+              <a:buFont typeface="Franklin Gothic Book" panose="020B0503020102020204" pitchFamily="34" charset="0"/>
+            </a:pPr>
+            <a:r>
+              <a:rPr kumimoji="1" lang="ja-JP" altLang="en-US" sz="3200" dirty="0">
+                <a:solidFill>
+                  <a:schemeClr val="tx2"/>
+                </a:solidFill>
+                <a:latin typeface="HGS創英角ﾎﾟｯﾌﾟ体" panose="040B0A00000000000000" pitchFamily="50" charset="-128"/>
+                <a:ea typeface="HGS創英角ﾎﾟｯﾌﾟ体" panose="040B0A00000000000000" pitchFamily="50" charset="-128"/>
+              </a:rPr>
+              <a:t>もっと多くの人にこの個人経営をしている</a:t>
+            </a:r>
+            <a:endParaRPr kumimoji="1" lang="en-US" altLang="ja-JP" sz="3200" dirty="0">
+              <a:solidFill>
+                <a:schemeClr val="tx2"/>
+              </a:solidFill>
+              <a:latin typeface="HGS創英角ﾎﾟｯﾌﾟ体" panose="040B0A00000000000000" pitchFamily="50" charset="-128"/>
+              <a:ea typeface="HGS創英角ﾎﾟｯﾌﾟ体" panose="040B0A00000000000000" pitchFamily="50" charset="-128"/>
+            </a:endParaRPr>
+          </a:p>
+          <a:p>
+            <a:pPr indent="-384048" defTabSz="914400">
+              <a:lnSpc>
+                <a:spcPct val="94000"/>
+              </a:lnSpc>
+              <a:spcAft>
+                <a:spcPts val="200"/>
+              </a:spcAft>
+              <a:buFont typeface="Franklin Gothic Book" panose="020B0503020102020204" pitchFamily="34" charset="0"/>
+            </a:pPr>
+            <a:r>
+              <a:rPr kumimoji="1" lang="ja-JP" altLang="en-US" sz="3200" dirty="0">
+                <a:solidFill>
+                  <a:schemeClr val="tx2"/>
+                </a:solidFill>
+                <a:latin typeface="HGS創英角ﾎﾟｯﾌﾟ体" panose="040B0A00000000000000" pitchFamily="50" charset="-128"/>
+                <a:ea typeface="HGS創英角ﾎﾟｯﾌﾟ体" panose="040B0A00000000000000" pitchFamily="50" charset="-128"/>
+              </a:rPr>
+              <a:t>場所に訪問してもらいたい</a:t>
+            </a:r>
+            <a:endParaRPr kumimoji="1" lang="en-US" altLang="ja-JP" sz="3200" dirty="0">
+              <a:solidFill>
+                <a:schemeClr val="tx2"/>
+              </a:solidFill>
+              <a:latin typeface="HGS創英角ﾎﾟｯﾌﾟ体" panose="040B0A00000000000000" pitchFamily="50" charset="-128"/>
+              <a:ea typeface="HGS創英角ﾎﾟｯﾌﾟ体" panose="040B0A00000000000000" pitchFamily="50" charset="-128"/>
+            </a:endParaRPr>
+          </a:p>
+          <a:p>
+            <a:pPr indent="-384048" defTabSz="914400">
+              <a:lnSpc>
+                <a:spcPct val="94000"/>
+              </a:lnSpc>
+              <a:spcAft>
+                <a:spcPts val="200"/>
+              </a:spcAft>
+              <a:buFont typeface="Franklin Gothic Book" panose="020B0503020102020204" pitchFamily="34" charset="0"/>
+            </a:pPr>
+            <a:r>
+              <a:rPr kumimoji="1" lang="ja-JP" altLang="en-US" sz="3200" dirty="0">
+                <a:solidFill>
+                  <a:schemeClr val="tx2"/>
+                </a:solidFill>
+                <a:latin typeface="HGS創英角ﾎﾟｯﾌﾟ体" panose="040B0A00000000000000" pitchFamily="50" charset="-128"/>
+                <a:ea typeface="HGS創英角ﾎﾟｯﾌﾟ体" panose="040B0A00000000000000" pitchFamily="50" charset="-128"/>
+              </a:rPr>
+              <a:t>もっと多くの知らないお客さんを増やしたい</a:t>
+            </a:r>
+          </a:p>
+        </p:txBody>
+      </p:sp>
+      <p:sp>
+        <p:nvSpPr>
+          <p:cNvPr id="5" name="テキスト ボックス 4">
+            <a:extLst>
+              <a:ext uri="{FF2B5EF4-FFF2-40B4-BE49-F238E27FC236}">
+                <a16:creationId xmlns:a16="http://schemas.microsoft.com/office/drawing/2014/main" id="{E2D2A2F2-F24B-DB59-C2AD-21FDB881CB42}"/>
+              </a:ext>
+            </a:extLst>
+          </p:cNvPr>
+          <p:cNvSpPr txBox="1"/>
+          <p:nvPr/>
+        </p:nvSpPr>
+        <p:spPr>
+          <a:xfrm>
+            <a:off x="718887" y="2600584"/>
+            <a:ext cx="1378037" cy="914776"/>
+          </a:xfrm>
+          <a:prstGeom prst="rect">
+            <a:avLst/>
+          </a:prstGeom>
+        </p:spPr>
+        <p:txBody>
+          <a:bodyPr vert="horz" lIns="91440" tIns="45720" rIns="91440" bIns="45720" rtlCol="0" anchor="t">
+            <a:normAutofit/>
+          </a:bodyPr>
+          <a:lstStyle/>
+          <a:p>
+            <a:pPr defTabSz="914400">
+              <a:lnSpc>
+                <a:spcPct val="89000"/>
+              </a:lnSpc>
+              <a:spcBef>
+                <a:spcPct val="0"/>
+              </a:spcBef>
+              <a:spcAft>
+                <a:spcPts val="600"/>
+              </a:spcAft>
+            </a:pPr>
+            <a:r>
+              <a:rPr kumimoji="1" lang="ja-JP" altLang="en-US" sz="4400" dirty="0">
+                <a:solidFill>
+                  <a:schemeClr val="tx2"/>
+                </a:solidFill>
+                <a:latin typeface="HGS創英角ﾎﾟｯﾌﾟ体" panose="040B0A00000000000000" pitchFamily="50" charset="-128"/>
+                <a:ea typeface="HGS創英角ﾎﾟｯﾌﾟ体" panose="040B0A00000000000000" pitchFamily="50" charset="-128"/>
+                <a:cs typeface="+mj-cs"/>
+              </a:rPr>
+              <a:t>目的</a:t>
+            </a:r>
+            <a:endParaRPr kumimoji="1" lang="en-US" altLang="ja-JP" sz="4400" dirty="0">
+              <a:solidFill>
+                <a:schemeClr val="tx2"/>
+              </a:solidFill>
+              <a:latin typeface="HGS創英角ﾎﾟｯﾌﾟ体" panose="040B0A00000000000000" pitchFamily="50" charset="-128"/>
+              <a:ea typeface="HGS創英角ﾎﾟｯﾌﾟ体" panose="040B0A00000000000000" pitchFamily="50" charset="-128"/>
+              <a:cs typeface="+mj-cs"/>
+            </a:endParaRPr>
+          </a:p>
+        </p:txBody>
+      </p:sp>
+    </p:spTree>
+    <p:extLst>
+      <p:ext uri="{BB962C8B-B14F-4D97-AF65-F5344CB8AC3E}">
+        <p14:creationId xmlns:p14="http://schemas.microsoft.com/office/powerpoint/2010/main" val="2031487580"/>
+      </p:ext>
+    </p:extLst>
+  </p:cSld>
+  <p:clrMapOvr>
+    <a:masterClrMapping/>
+  </p:clrMapOvr>
+</p:sld>
+</file>
+
+<file path=ppt/slides/slide5.xml><?xml version="1.0" encoding="utf-8"?>
+<p:sld xmlns:a="http://schemas.openxmlformats.org/drawingml/2006/main" xmlns:r="http://schemas.openxmlformats.org/officeDocument/2006/relationships" xmlns:p="http://schemas.openxmlformats.org/presentationml/2006/main">
+  <p:cSld>
+    <p:bg>
+      <p:bgPr>
+        <a:solidFill>
+          <a:schemeClr val="bg2"/>
+        </a:solidFill>
+        <a:effectLst/>
+      </p:bgPr>
+    </p:bg>
+    <p:spTree>
+      <p:nvGrpSpPr>
+        <p:cNvPr id="1" name=""/>
+        <p:cNvGrpSpPr/>
+        <p:nvPr/>
+      </p:nvGrpSpPr>
+      <p:grpSpPr>
+        <a:xfrm>
+          <a:off x="0" y="0"/>
+          <a:ext cx="0" cy="0"/>
+          <a:chOff x="0" y="0"/>
+          <a:chExt cx="0" cy="0"/>
+        </a:xfrm>
+      </p:grpSpPr>
+      <p:sp useBgFill="1">
+        <p:nvSpPr>
+          <p:cNvPr id="10" name="Rectangle 9">
+            <a:extLst>
+              <a:ext uri="{FF2B5EF4-FFF2-40B4-BE49-F238E27FC236}">
+                <a16:creationId xmlns:a16="http://schemas.microsoft.com/office/drawing/2014/main" id="{32812C54-7AEF-4ABB-826E-221F51CB0F30}"/>
+              </a:ext>
+              <a:ext uri="{C183D7F6-B498-43B3-948B-1728B52AA6E4}">
+                <adec:decorative xmlns:adec="http://schemas.microsoft.com/office/drawing/2017/decorative" val="1"/>
+              </a:ext>
+            </a:extLst>
+          </p:cNvPr>
+          <p:cNvSpPr>
+            <a:spLocks noGrp="1" noRot="1" noChangeAspect="1" noMove="1" noResize="1" noEditPoints="1" noAdjustHandles="1" noChangeArrowheads="1" noChangeShapeType="1" noTextEdit="1"/>
+          </p:cNvSpPr>
+          <p:nvPr>
+            <p:extLst>
+              <p:ext uri="{386F3935-93C4-4BCD-93E2-E3B085C9AB24}">
+                <p16:designElem xmlns:p16="http://schemas.microsoft.com/office/powerpoint/2015/main" val="1"/>
+              </p:ext>
+            </p:extLst>
+          </p:nvPr>
+        </p:nvSpPr>
+        <p:spPr>
+          <a:xfrm>
+            <a:off x="0" y="0"/>
+            <a:ext cx="12192000" cy="6858000"/>
+          </a:xfrm>
+          <a:prstGeom prst="rect">
+            <a:avLst/>
+          </a:prstGeom>
+          <a:ln>
+            <a:noFill/>
+          </a:ln>
+        </p:spPr>
+        <p:style>
+          <a:lnRef idx="2">
+            <a:schemeClr val="accent1">
+              <a:shade val="50000"/>
+            </a:schemeClr>
+          </a:lnRef>
+          <a:fillRef idx="1">
+            <a:schemeClr val="accent1"/>
+          </a:fillRef>
+          <a:effectRef idx="0">
+            <a:schemeClr val="accent1"/>
+          </a:effectRef>
+          <a:fontRef idx="minor">
+            <a:schemeClr val="lt1"/>
+          </a:fontRef>
+        </p:style>
+        <p:txBody>
+          <a:bodyPr rtlCol="0" anchor="ctr"/>
+          <a:lstStyle/>
+          <a:p>
+            <a:pPr algn="ctr"/>
+            <a:endParaRPr lang="en-US"/>
+          </a:p>
+        </p:txBody>
+      </p:sp>
+      <p:sp>
+        <p:nvSpPr>
+          <p:cNvPr id="12" name="Rectangle 11">
+            <a:extLst>
+              <a:ext uri="{FF2B5EF4-FFF2-40B4-BE49-F238E27FC236}">
+                <a16:creationId xmlns:a16="http://schemas.microsoft.com/office/drawing/2014/main" id="{891F40E4-8A76-44CF-91EC-907367352626}"/>
+              </a:ext>
+              <a:ext uri="{C183D7F6-B498-43B3-948B-1728B52AA6E4}">
+                <adec:decorative xmlns:adec="http://schemas.microsoft.com/office/drawing/2017/decorative" val="1"/>
+              </a:ext>
+            </a:extLst>
+          </p:cNvPr>
+          <p:cNvSpPr>
+            <a:spLocks noGrp="1" noRot="1" noChangeAspect="1" noMove="1" noResize="1" noEditPoints="1" noAdjustHandles="1" noChangeArrowheads="1" noChangeShapeType="1" noTextEdit="1"/>
+          </p:cNvSpPr>
+          <p:nvPr>
+            <p:extLst>
+              <p:ext uri="{386F3935-93C4-4BCD-93E2-E3B085C9AB24}">
+                <p16:designElem xmlns:p16="http://schemas.microsoft.com/office/powerpoint/2015/main" val="1"/>
+              </p:ext>
+            </p:extLst>
+          </p:nvPr>
+        </p:nvSpPr>
+        <p:spPr>
+          <a:xfrm>
+            <a:off x="1" y="376"/>
+            <a:ext cx="3044410" cy="6857624"/>
+          </a:xfrm>
+          <a:prstGeom prst="rect">
+            <a:avLst/>
+          </a:prstGeom>
+          <a:solidFill>
+            <a:schemeClr val="accent1"/>
+          </a:solidFill>
+          <a:ln>
+            <a:noFill/>
+          </a:ln>
+        </p:spPr>
+        <p:style>
+          <a:lnRef idx="2">
+            <a:schemeClr val="accent1">
+              <a:shade val="50000"/>
+            </a:schemeClr>
+          </a:lnRef>
+          <a:fillRef idx="1">
+            <a:schemeClr val="accent1"/>
+          </a:fillRef>
+          <a:effectRef idx="0">
+            <a:schemeClr val="accent1"/>
+          </a:effectRef>
+          <a:fontRef idx="minor">
+            <a:schemeClr val="lt1"/>
+          </a:fontRef>
+        </p:style>
+        <p:txBody>
+          <a:bodyPr/>
+          <a:lstStyle/>
+          <a:p>
+            <a:endParaRPr lang="ja-JP" altLang="en-US"/>
+          </a:p>
+        </p:txBody>
+      </p:sp>
+      <p:sp>
+        <p:nvSpPr>
+          <p:cNvPr id="14" name="Rectangle 13">
+            <a:extLst>
+              <a:ext uri="{FF2B5EF4-FFF2-40B4-BE49-F238E27FC236}">
+                <a16:creationId xmlns:a16="http://schemas.microsoft.com/office/drawing/2014/main" id="{72171013-D973-4187-9CF2-EE098EEF8194}"/>
+              </a:ext>
+              <a:ext uri="{C183D7F6-B498-43B3-948B-1728B52AA6E4}">
+                <adec:decorative xmlns:adec="http://schemas.microsoft.com/office/drawing/2017/decorative" val="1"/>
+              </a:ext>
+            </a:extLst>
+          </p:cNvPr>
+          <p:cNvSpPr>
+            <a:spLocks noGrp="1" noRot="1" noChangeAspect="1" noMove="1" noResize="1" noEditPoints="1" noAdjustHandles="1" noChangeArrowheads="1" noChangeShapeType="1" noTextEdit="1"/>
+          </p:cNvSpPr>
+          <p:nvPr>
+            <p:extLst>
+              <p:ext uri="{386F3935-93C4-4BCD-93E2-E3B085C9AB24}">
+                <p16:designElem xmlns:p16="http://schemas.microsoft.com/office/powerpoint/2015/main" val="1"/>
+              </p:ext>
+            </p:extLst>
+          </p:nvPr>
+        </p:nvSpPr>
+        <p:spPr>
+          <a:xfrm>
+            <a:off x="2815810" y="376"/>
+            <a:ext cx="228600" cy="6858000"/>
+          </a:xfrm>
+          <a:prstGeom prst="rect">
+            <a:avLst/>
+          </a:prstGeom>
+          <a:solidFill>
+            <a:schemeClr val="tx2"/>
+          </a:solidFill>
+          <a:ln>
+            <a:noFill/>
+          </a:ln>
+        </p:spPr>
+        <p:style>
+          <a:lnRef idx="2">
+            <a:schemeClr val="accent1">
+              <a:shade val="50000"/>
+            </a:schemeClr>
+          </a:lnRef>
+          <a:fillRef idx="1">
+            <a:schemeClr val="accent1"/>
+          </a:fillRef>
+          <a:effectRef idx="0">
+            <a:schemeClr val="accent1"/>
+          </a:effectRef>
+          <a:fontRef idx="minor">
+            <a:schemeClr val="lt1"/>
+          </a:fontRef>
+        </p:style>
+        <p:txBody>
+          <a:bodyPr/>
+          <a:lstStyle/>
+          <a:p>
+            <a:endParaRPr lang="ja-JP" altLang="en-US"/>
+          </a:p>
+        </p:txBody>
+      </p:sp>
+      <p:sp>
+        <p:nvSpPr>
+          <p:cNvPr id="11" name="テキスト ボックス 10">
+            <a:extLst>
+              <a:ext uri="{FF2B5EF4-FFF2-40B4-BE49-F238E27FC236}">
+                <a16:creationId xmlns:a16="http://schemas.microsoft.com/office/drawing/2014/main" id="{FE542270-765C-BB90-6C86-1771D2729914}"/>
+              </a:ext>
+            </a:extLst>
+          </p:cNvPr>
+          <p:cNvSpPr txBox="1"/>
+          <p:nvPr/>
+        </p:nvSpPr>
+        <p:spPr>
+          <a:xfrm>
+            <a:off x="3363864" y="2286000"/>
+            <a:ext cx="8614776" cy="3581400"/>
+          </a:xfrm>
+          <a:prstGeom prst="rect">
+            <a:avLst/>
+          </a:prstGeom>
+        </p:spPr>
+        <p:txBody>
+          <a:bodyPr vert="horz" lIns="91440" tIns="45720" rIns="91440" bIns="45720" rtlCol="0">
+            <a:normAutofit/>
+          </a:bodyPr>
+          <a:lstStyle/>
+          <a:p>
+            <a:pPr indent="-384048" defTabSz="914400">
+              <a:lnSpc>
+                <a:spcPct val="94000"/>
+              </a:lnSpc>
+              <a:spcAft>
+                <a:spcPts val="200"/>
+              </a:spcAft>
+              <a:buFont typeface="Franklin Gothic Book" panose="020B0503020102020204" pitchFamily="34" charset="0"/>
+            </a:pPr>
+            <a:r>
+              <a:rPr kumimoji="1" lang="en-US" altLang="ja-JP" sz="2800" dirty="0">
+                <a:solidFill>
+                  <a:schemeClr val="tx2"/>
+                </a:solidFill>
+                <a:latin typeface="HGS創英角ﾎﾟｯﾌﾟ体" panose="040B0A00000000000000" pitchFamily="50" charset="-128"/>
+                <a:ea typeface="HGS創英角ﾎﾟｯﾌﾟ体" panose="040B0A00000000000000" pitchFamily="50" charset="-128"/>
+              </a:rPr>
+              <a:t>7</a:t>
+            </a:r>
+            <a:r>
+              <a:rPr kumimoji="1" lang="ja-JP" altLang="en-US" sz="2800" dirty="0">
+                <a:solidFill>
+                  <a:schemeClr val="tx2"/>
+                </a:solidFill>
+                <a:latin typeface="HGS創英角ﾎﾟｯﾌﾟ体" panose="040B0A00000000000000" pitchFamily="50" charset="-128"/>
+                <a:ea typeface="HGS創英角ﾎﾟｯﾌﾟ体" panose="040B0A00000000000000" pitchFamily="50" charset="-128"/>
+              </a:rPr>
+              <a:t>月～</a:t>
+            </a:r>
+            <a:r>
+              <a:rPr kumimoji="1" lang="en-US" altLang="ja-JP" sz="2800" dirty="0">
+                <a:solidFill>
+                  <a:schemeClr val="tx2"/>
+                </a:solidFill>
+                <a:latin typeface="HGS創英角ﾎﾟｯﾌﾟ体" panose="040B0A00000000000000" pitchFamily="50" charset="-128"/>
+                <a:ea typeface="HGS創英角ﾎﾟｯﾌﾟ体" panose="040B0A00000000000000" pitchFamily="50" charset="-128"/>
+              </a:rPr>
+              <a:t>10</a:t>
+            </a:r>
+            <a:r>
+              <a:rPr kumimoji="1" lang="ja-JP" altLang="en-US" sz="2800" dirty="0">
+                <a:solidFill>
+                  <a:schemeClr val="tx2"/>
+                </a:solidFill>
+                <a:latin typeface="HGS創英角ﾎﾟｯﾌﾟ体" panose="040B0A00000000000000" pitchFamily="50" charset="-128"/>
+                <a:ea typeface="HGS創英角ﾎﾟｯﾌﾟ体" panose="040B0A00000000000000" pitchFamily="50" charset="-128"/>
+              </a:rPr>
+              <a:t>月までに</a:t>
+            </a:r>
+            <a:r>
+              <a:rPr kumimoji="1" lang="en-US" altLang="ja-JP" sz="2800" dirty="0">
+                <a:solidFill>
+                  <a:schemeClr val="tx2"/>
+                </a:solidFill>
+                <a:latin typeface="HGS創英角ﾎﾟｯﾌﾟ体" panose="040B0A00000000000000" pitchFamily="50" charset="-128"/>
+                <a:ea typeface="HGS創英角ﾎﾟｯﾌﾟ体" panose="040B0A00000000000000" pitchFamily="50" charset="-128"/>
+              </a:rPr>
+              <a:t>Web</a:t>
+            </a:r>
+            <a:r>
+              <a:rPr kumimoji="1" lang="ja-JP" altLang="en-US" sz="2800" dirty="0">
+                <a:solidFill>
+                  <a:schemeClr val="tx2"/>
+                </a:solidFill>
+                <a:latin typeface="HGS創英角ﾎﾟｯﾌﾟ体" panose="040B0A00000000000000" pitchFamily="50" charset="-128"/>
+                <a:ea typeface="HGS創英角ﾎﾟｯﾌﾟ体" panose="040B0A00000000000000" pitchFamily="50" charset="-128"/>
+              </a:rPr>
+              <a:t>ページの形を作り</a:t>
+            </a:r>
+            <a:endParaRPr kumimoji="1" lang="en-US" altLang="ja-JP" sz="2800" dirty="0">
+              <a:solidFill>
+                <a:schemeClr val="tx2"/>
+              </a:solidFill>
+              <a:latin typeface="HGS創英角ﾎﾟｯﾌﾟ体" panose="040B0A00000000000000" pitchFamily="50" charset="-128"/>
+              <a:ea typeface="HGS創英角ﾎﾟｯﾌﾟ体" panose="040B0A00000000000000" pitchFamily="50" charset="-128"/>
+            </a:endParaRPr>
+          </a:p>
+          <a:p>
+            <a:pPr indent="-384048" defTabSz="914400">
+              <a:lnSpc>
+                <a:spcPct val="94000"/>
+              </a:lnSpc>
+              <a:spcAft>
+                <a:spcPts val="200"/>
+              </a:spcAft>
+              <a:buFont typeface="Franklin Gothic Book" panose="020B0503020102020204" pitchFamily="34" charset="0"/>
+            </a:pPr>
+            <a:r>
+              <a:rPr kumimoji="1" lang="en-US" altLang="ja-JP" sz="2800" dirty="0">
+                <a:solidFill>
+                  <a:schemeClr val="tx2"/>
+                </a:solidFill>
+                <a:latin typeface="HGS創英角ﾎﾟｯﾌﾟ体" panose="040B0A00000000000000" pitchFamily="50" charset="-128"/>
+                <a:ea typeface="HGS創英角ﾎﾟｯﾌﾟ体" panose="040B0A00000000000000" pitchFamily="50" charset="-128"/>
+              </a:rPr>
+              <a:t>11</a:t>
+            </a:r>
+            <a:r>
+              <a:rPr kumimoji="1" lang="ja-JP" altLang="en-US" sz="2800" dirty="0">
+                <a:solidFill>
+                  <a:schemeClr val="tx2"/>
+                </a:solidFill>
+                <a:latin typeface="HGS創英角ﾎﾟｯﾌﾟ体" panose="040B0A00000000000000" pitchFamily="50" charset="-128"/>
+                <a:ea typeface="HGS創英角ﾎﾟｯﾌﾟ体" panose="040B0A00000000000000" pitchFamily="50" charset="-128"/>
+              </a:rPr>
+              <a:t>月で</a:t>
+            </a:r>
+            <a:r>
+              <a:rPr kumimoji="1" lang="en-US" altLang="ja-JP" sz="2800" dirty="0">
+                <a:solidFill>
+                  <a:schemeClr val="tx2"/>
+                </a:solidFill>
+                <a:latin typeface="HGS創英角ﾎﾟｯﾌﾟ体" panose="040B0A00000000000000" pitchFamily="50" charset="-128"/>
+                <a:ea typeface="HGS創英角ﾎﾟｯﾌﾟ体" panose="040B0A00000000000000" pitchFamily="50" charset="-128"/>
+              </a:rPr>
+              <a:t>Web</a:t>
+            </a:r>
+            <a:r>
+              <a:rPr kumimoji="1" lang="ja-JP" altLang="en-US" sz="2800" dirty="0">
+                <a:solidFill>
+                  <a:schemeClr val="tx2"/>
+                </a:solidFill>
+                <a:latin typeface="HGS創英角ﾎﾟｯﾌﾟ体" panose="040B0A00000000000000" pitchFamily="50" charset="-128"/>
+                <a:ea typeface="HGS創英角ﾎﾟｯﾌﾟ体" panose="040B0A00000000000000" pitchFamily="50" charset="-128"/>
+              </a:rPr>
+              <a:t>ページのデザインで使うイラストなどのを制作いたします</a:t>
+            </a:r>
+            <a:endParaRPr kumimoji="1" lang="en-US" altLang="ja-JP" sz="2800" dirty="0">
+              <a:solidFill>
+                <a:schemeClr val="tx2"/>
+              </a:solidFill>
+              <a:latin typeface="HGS創英角ﾎﾟｯﾌﾟ体" panose="040B0A00000000000000" pitchFamily="50" charset="-128"/>
+              <a:ea typeface="HGS創英角ﾎﾟｯﾌﾟ体" panose="040B0A00000000000000" pitchFamily="50" charset="-128"/>
+            </a:endParaRPr>
+          </a:p>
+          <a:p>
+            <a:pPr indent="-384048" defTabSz="914400">
+              <a:lnSpc>
+                <a:spcPct val="94000"/>
+              </a:lnSpc>
+              <a:spcAft>
+                <a:spcPts val="200"/>
+              </a:spcAft>
+              <a:buFont typeface="Franklin Gothic Book" panose="020B0503020102020204" pitchFamily="34" charset="0"/>
+            </a:pPr>
+            <a:r>
+              <a:rPr kumimoji="1" lang="en-US" altLang="ja-JP" sz="2800" dirty="0">
+                <a:solidFill>
+                  <a:schemeClr val="tx2"/>
+                </a:solidFill>
+                <a:latin typeface="HGS創英角ﾎﾟｯﾌﾟ体" panose="040B0A00000000000000" pitchFamily="50" charset="-128"/>
+                <a:ea typeface="HGS創英角ﾎﾟｯﾌﾟ体" panose="040B0A00000000000000" pitchFamily="50" charset="-128"/>
+              </a:rPr>
+              <a:t>7</a:t>
+            </a:r>
+            <a:r>
+              <a:rPr kumimoji="1" lang="ja-JP" altLang="en-US" sz="2800" dirty="0">
+                <a:solidFill>
+                  <a:schemeClr val="tx2"/>
+                </a:solidFill>
+                <a:latin typeface="HGS創英角ﾎﾟｯﾌﾟ体" panose="040B0A00000000000000" pitchFamily="50" charset="-128"/>
+                <a:ea typeface="HGS創英角ﾎﾟｯﾌﾟ体" panose="040B0A00000000000000" pitchFamily="50" charset="-128"/>
+              </a:rPr>
+              <a:t>月～</a:t>
+            </a:r>
+            <a:r>
+              <a:rPr kumimoji="1" lang="en-US" altLang="ja-JP" sz="2800" dirty="0">
+                <a:solidFill>
+                  <a:schemeClr val="tx2"/>
+                </a:solidFill>
+                <a:latin typeface="HGS創英角ﾎﾟｯﾌﾟ体" panose="040B0A00000000000000" pitchFamily="50" charset="-128"/>
+                <a:ea typeface="HGS創英角ﾎﾟｯﾌﾟ体" panose="040B0A00000000000000" pitchFamily="50" charset="-128"/>
+              </a:rPr>
+              <a:t>11</a:t>
+            </a:r>
+            <a:r>
+              <a:rPr kumimoji="1" lang="ja-JP" altLang="en-US" sz="2800" dirty="0">
+                <a:solidFill>
+                  <a:schemeClr val="tx2"/>
+                </a:solidFill>
+                <a:latin typeface="HGS創英角ﾎﾟｯﾌﾟ体" panose="040B0A00000000000000" pitchFamily="50" charset="-128"/>
+                <a:ea typeface="HGS創英角ﾎﾟｯﾌﾟ体" panose="040B0A00000000000000" pitchFamily="50" charset="-128"/>
+              </a:rPr>
+              <a:t>月でここでメニュー表</a:t>
+            </a:r>
+            <a:r>
+              <a:rPr kumimoji="1" lang="en-US" altLang="ja-JP" sz="2800" dirty="0">
+                <a:solidFill>
+                  <a:schemeClr val="tx2"/>
+                </a:solidFill>
+                <a:latin typeface="HGS創英角ﾎﾟｯﾌﾟ体" panose="040B0A00000000000000" pitchFamily="50" charset="-128"/>
+                <a:ea typeface="HGS創英角ﾎﾟｯﾌﾟ体" panose="040B0A00000000000000" pitchFamily="50" charset="-128"/>
+              </a:rPr>
+              <a:t>(</a:t>
+            </a:r>
+            <a:r>
+              <a:rPr kumimoji="1" lang="ja-JP" altLang="en-US" sz="2800" dirty="0">
+                <a:solidFill>
+                  <a:schemeClr val="tx2"/>
+                </a:solidFill>
+                <a:latin typeface="HGS創英角ﾎﾟｯﾌﾟ体" panose="040B0A00000000000000" pitchFamily="50" charset="-128"/>
+                <a:ea typeface="HGS創英角ﾎﾟｯﾌﾟ体" panose="040B0A00000000000000" pitchFamily="50" charset="-128"/>
+              </a:rPr>
+              <a:t>チラシ</a:t>
+            </a:r>
+            <a:r>
+              <a:rPr kumimoji="1" lang="en-US" altLang="ja-JP" sz="2800" dirty="0">
+                <a:solidFill>
+                  <a:schemeClr val="tx2"/>
+                </a:solidFill>
+                <a:latin typeface="HGS創英角ﾎﾟｯﾌﾟ体" panose="040B0A00000000000000" pitchFamily="50" charset="-128"/>
+                <a:ea typeface="HGS創英角ﾎﾟｯﾌﾟ体" panose="040B0A00000000000000" pitchFamily="50" charset="-128"/>
+              </a:rPr>
+              <a:t>)</a:t>
+            </a:r>
+            <a:r>
+              <a:rPr kumimoji="1" lang="ja-JP" altLang="en-US" sz="2800" dirty="0">
+                <a:solidFill>
+                  <a:schemeClr val="tx2"/>
+                </a:solidFill>
+                <a:latin typeface="HGS創英角ﾎﾟｯﾌﾟ体" panose="040B0A00000000000000" pitchFamily="50" charset="-128"/>
+                <a:ea typeface="HGS創英角ﾎﾟｯﾌﾟ体" panose="040B0A00000000000000" pitchFamily="50" charset="-128"/>
+              </a:rPr>
+              <a:t>制作を行います</a:t>
+            </a:r>
+            <a:endParaRPr kumimoji="1" lang="en-US" altLang="ja-JP" sz="2800" dirty="0">
+              <a:solidFill>
+                <a:schemeClr val="tx2"/>
+              </a:solidFill>
+              <a:latin typeface="HGS創英角ﾎﾟｯﾌﾟ体" panose="040B0A00000000000000" pitchFamily="50" charset="-128"/>
+              <a:ea typeface="HGS創英角ﾎﾟｯﾌﾟ体" panose="040B0A00000000000000" pitchFamily="50" charset="-128"/>
+            </a:endParaRPr>
+          </a:p>
+          <a:p>
+            <a:pPr indent="-384048" defTabSz="914400">
+              <a:lnSpc>
+                <a:spcPct val="94000"/>
+              </a:lnSpc>
+              <a:spcAft>
+                <a:spcPts val="200"/>
+              </a:spcAft>
+              <a:buFont typeface="Franklin Gothic Book" panose="020B0503020102020204" pitchFamily="34" charset="0"/>
+            </a:pPr>
+            <a:r>
+              <a:rPr kumimoji="1" lang="en-US" altLang="ja-JP" sz="2800" dirty="0">
+                <a:solidFill>
+                  <a:schemeClr val="tx2"/>
+                </a:solidFill>
+                <a:latin typeface="HGS創英角ﾎﾟｯﾌﾟ体" panose="040B0A00000000000000" pitchFamily="50" charset="-128"/>
+                <a:ea typeface="HGS創英角ﾎﾟｯﾌﾟ体" panose="040B0A00000000000000" pitchFamily="50" charset="-128"/>
+              </a:rPr>
+              <a:t>12</a:t>
+            </a:r>
+            <a:r>
+              <a:rPr kumimoji="1" lang="ja-JP" altLang="en-US" sz="2800" dirty="0">
+                <a:solidFill>
+                  <a:schemeClr val="tx2"/>
+                </a:solidFill>
+                <a:latin typeface="HGS創英角ﾎﾟｯﾌﾟ体" panose="040B0A00000000000000" pitchFamily="50" charset="-128"/>
+                <a:ea typeface="HGS創英角ﾎﾟｯﾌﾟ体" panose="040B0A00000000000000" pitchFamily="50" charset="-128"/>
+              </a:rPr>
+              <a:t>月～</a:t>
+            </a:r>
+            <a:r>
+              <a:rPr kumimoji="1" lang="en-US" altLang="ja-JP" sz="2800" dirty="0">
+                <a:solidFill>
+                  <a:schemeClr val="tx2"/>
+                </a:solidFill>
+                <a:latin typeface="HGS創英角ﾎﾟｯﾌﾟ体" panose="040B0A00000000000000" pitchFamily="50" charset="-128"/>
+                <a:ea typeface="HGS創英角ﾎﾟｯﾌﾟ体" panose="040B0A00000000000000" pitchFamily="50" charset="-128"/>
+              </a:rPr>
+              <a:t>1</a:t>
+            </a:r>
+            <a:r>
+              <a:rPr kumimoji="1" lang="ja-JP" altLang="en-US" sz="2800" dirty="0">
+                <a:solidFill>
+                  <a:schemeClr val="tx2"/>
+                </a:solidFill>
+                <a:latin typeface="HGS創英角ﾎﾟｯﾌﾟ体" panose="040B0A00000000000000" pitchFamily="50" charset="-128"/>
+                <a:ea typeface="HGS創英角ﾎﾟｯﾌﾟ体" panose="040B0A00000000000000" pitchFamily="50" charset="-128"/>
+              </a:rPr>
+              <a:t>月でメニュー表を配り今後来るお客様の声なども</a:t>
+            </a:r>
+            <a:r>
+              <a:rPr kumimoji="1" lang="en-US" altLang="ja-JP" sz="2800" dirty="0">
+                <a:solidFill>
+                  <a:schemeClr val="tx2"/>
+                </a:solidFill>
+                <a:latin typeface="HGS創英角ﾎﾟｯﾌﾟ体" panose="040B0A00000000000000" pitchFamily="50" charset="-128"/>
+                <a:ea typeface="HGS創英角ﾎﾟｯﾌﾟ体" panose="040B0A00000000000000" pitchFamily="50" charset="-128"/>
+              </a:rPr>
+              <a:t>Web</a:t>
+            </a:r>
+            <a:r>
+              <a:rPr kumimoji="1" lang="ja-JP" altLang="en-US" sz="2800" dirty="0">
+                <a:solidFill>
+                  <a:schemeClr val="tx2"/>
+                </a:solidFill>
+                <a:latin typeface="HGS創英角ﾎﾟｯﾌﾟ体" panose="040B0A00000000000000" pitchFamily="50" charset="-128"/>
+                <a:ea typeface="HGS創英角ﾎﾟｯﾌﾟ体" panose="040B0A00000000000000" pitchFamily="50" charset="-128"/>
+              </a:rPr>
+              <a:t>ページに記載</a:t>
+            </a:r>
+            <a:endParaRPr kumimoji="1" lang="en-US" altLang="ja-JP" sz="2800" dirty="0">
+              <a:solidFill>
+                <a:schemeClr val="tx2"/>
+              </a:solidFill>
+              <a:latin typeface="HGS創英角ﾎﾟｯﾌﾟ体" panose="040B0A00000000000000" pitchFamily="50" charset="-128"/>
+              <a:ea typeface="HGS創英角ﾎﾟｯﾌﾟ体" panose="040B0A00000000000000" pitchFamily="50" charset="-128"/>
+            </a:endParaRPr>
+          </a:p>
+        </p:txBody>
+      </p:sp>
+      <p:sp>
+        <p:nvSpPr>
+          <p:cNvPr id="4" name="テキスト ボックス 3">
+            <a:extLst>
+              <a:ext uri="{FF2B5EF4-FFF2-40B4-BE49-F238E27FC236}">
+                <a16:creationId xmlns:a16="http://schemas.microsoft.com/office/drawing/2014/main" id="{0401D1B4-F1CE-AF50-D574-796DAD44D244}"/>
+              </a:ext>
+            </a:extLst>
+          </p:cNvPr>
+          <p:cNvSpPr txBox="1"/>
+          <p:nvPr/>
+        </p:nvSpPr>
+        <p:spPr>
+          <a:xfrm>
+            <a:off x="72768" y="2686050"/>
+            <a:ext cx="2743041" cy="1485900"/>
+          </a:xfrm>
+          <a:prstGeom prst="rect">
+            <a:avLst/>
+          </a:prstGeom>
+        </p:spPr>
+        <p:txBody>
+          <a:bodyPr vert="horz" lIns="91440" tIns="45720" rIns="91440" bIns="45720" rtlCol="0" anchor="t">
+            <a:normAutofit/>
+          </a:bodyPr>
+          <a:lstStyle/>
+          <a:p>
+            <a:pPr defTabSz="914400">
+              <a:lnSpc>
+                <a:spcPct val="89000"/>
+              </a:lnSpc>
+              <a:spcBef>
+                <a:spcPct val="0"/>
+              </a:spcBef>
+              <a:spcAft>
+                <a:spcPts val="600"/>
+              </a:spcAft>
+            </a:pPr>
+            <a:r>
+              <a:rPr kumimoji="1" lang="ja-JP" altLang="en-US" sz="4000" dirty="0">
+                <a:solidFill>
+                  <a:schemeClr val="tx2"/>
+                </a:solidFill>
+                <a:latin typeface="HGS創英角ﾎﾟｯﾌﾟ体" panose="040B0A00000000000000" pitchFamily="50" charset="-128"/>
+                <a:ea typeface="HGS創英角ﾎﾟｯﾌﾟ体" panose="040B0A00000000000000" pitchFamily="50" charset="-128"/>
+                <a:cs typeface="+mj-cs"/>
+              </a:rPr>
+              <a:t>今後の内容</a:t>
+            </a:r>
+            <a:endParaRPr kumimoji="1" lang="en-US" altLang="ja-JP" sz="4000" dirty="0">
+              <a:solidFill>
+                <a:schemeClr val="tx2"/>
+              </a:solidFill>
+              <a:latin typeface="HGS創英角ﾎﾟｯﾌﾟ体" panose="040B0A00000000000000" pitchFamily="50" charset="-128"/>
+              <a:ea typeface="HGS創英角ﾎﾟｯﾌﾟ体" panose="040B0A00000000000000" pitchFamily="50" charset="-128"/>
+              <a:cs typeface="+mj-cs"/>
+            </a:endParaRPr>
+          </a:p>
+        </p:txBody>
+      </p:sp>
+    </p:spTree>
+    <p:extLst>
+      <p:ext uri="{BB962C8B-B14F-4D97-AF65-F5344CB8AC3E}">
+        <p14:creationId xmlns:p14="http://schemas.microsoft.com/office/powerpoint/2010/main" val="613019380"/>
+      </p:ext>
+    </p:extLst>
+  </p:cSld>
+  <p:clrMapOvr>
+    <a:masterClrMapping/>
+  </p:clrMapOvr>
+</p:sld>
+</file>
+
+<file path=ppt/slides/slide6.xml><?xml version="1.0" encoding="utf-8"?>
+<p:sld xmlns:a="http://schemas.openxmlformats.org/drawingml/2006/main" xmlns:r="http://schemas.openxmlformats.org/officeDocument/2006/relationships" xmlns:p="http://schemas.openxmlformats.org/presentationml/2006/main">
+  <p:cSld>
+    <p:bg>
+      <p:bgPr>
+        <a:solidFill>
+          <a:schemeClr val="bg2"/>
+        </a:solidFill>
+        <a:effectLst/>
+      </p:bgPr>
+    </p:bg>
+    <p:spTree>
+      <p:nvGrpSpPr>
+        <p:cNvPr id="1" name=""/>
+        <p:cNvGrpSpPr/>
+        <p:nvPr/>
+      </p:nvGrpSpPr>
+      <p:grpSpPr>
+        <a:xfrm>
+          <a:off x="0" y="0"/>
+          <a:ext cx="0" cy="0"/>
+          <a:chOff x="0" y="0"/>
+          <a:chExt cx="0" cy="0"/>
+        </a:xfrm>
+      </p:grpSpPr>
+      <p:sp useBgFill="1">
+        <p:nvSpPr>
+          <p:cNvPr id="11" name="Rectangle 10">
+            <a:extLst>
+              <a:ext uri="{FF2B5EF4-FFF2-40B4-BE49-F238E27FC236}">
+                <a16:creationId xmlns:a16="http://schemas.microsoft.com/office/drawing/2014/main" id="{32812C54-7AEF-4ABB-826E-221F51CB0F30}"/>
+              </a:ext>
+              <a:ext uri="{C183D7F6-B498-43B3-948B-1728B52AA6E4}">
+                <adec:decorative xmlns:adec="http://schemas.microsoft.com/office/drawing/2017/decorative" val="1"/>
+              </a:ext>
+            </a:extLst>
+          </p:cNvPr>
+          <p:cNvSpPr>
+            <a:spLocks noGrp="1" noRot="1" noChangeAspect="1" noMove="1" noResize="1" noEditPoints="1" noAdjustHandles="1" noChangeArrowheads="1" noChangeShapeType="1" noTextEdit="1"/>
+          </p:cNvSpPr>
+          <p:nvPr>
+            <p:extLst>
+              <p:ext uri="{386F3935-93C4-4BCD-93E2-E3B085C9AB24}">
+                <p16:designElem xmlns:p16="http://schemas.microsoft.com/office/powerpoint/2015/main" val="1"/>
+              </p:ext>
+            </p:extLst>
+          </p:nvPr>
+        </p:nvSpPr>
+        <p:spPr>
+          <a:xfrm>
+            <a:off x="0" y="0"/>
+            <a:ext cx="12192000" cy="6858000"/>
+          </a:xfrm>
+          <a:prstGeom prst="rect">
+            <a:avLst/>
+          </a:prstGeom>
+          <a:ln>
+            <a:noFill/>
+          </a:ln>
+        </p:spPr>
+        <p:style>
+          <a:lnRef idx="2">
+            <a:schemeClr val="accent1">
+              <a:shade val="50000"/>
+            </a:schemeClr>
+          </a:lnRef>
+          <a:fillRef idx="1">
+            <a:schemeClr val="accent1"/>
+          </a:fillRef>
+          <a:effectRef idx="0">
+            <a:schemeClr val="accent1"/>
+          </a:effectRef>
+          <a:fontRef idx="minor">
+            <a:schemeClr val="lt1"/>
+          </a:fontRef>
+        </p:style>
+        <p:txBody>
+          <a:bodyPr rtlCol="0" anchor="ctr"/>
+          <a:lstStyle/>
+          <a:p>
+            <a:pPr algn="ctr"/>
+            <a:endParaRPr lang="en-US"/>
+          </a:p>
+        </p:txBody>
+      </p:sp>
+      <p:sp>
+        <p:nvSpPr>
+          <p:cNvPr id="13" name="Rectangle 12">
+            <a:extLst>
+              <a:ext uri="{FF2B5EF4-FFF2-40B4-BE49-F238E27FC236}">
+                <a16:creationId xmlns:a16="http://schemas.microsoft.com/office/drawing/2014/main" id="{891F40E4-8A76-44CF-91EC-907367352626}"/>
+              </a:ext>
+              <a:ext uri="{C183D7F6-B498-43B3-948B-1728B52AA6E4}">
+                <adec:decorative xmlns:adec="http://schemas.microsoft.com/office/drawing/2017/decorative" val="1"/>
+              </a:ext>
+            </a:extLst>
+          </p:cNvPr>
+          <p:cNvSpPr>
+            <a:spLocks noGrp="1" noRot="1" noChangeAspect="1" noMove="1" noResize="1" noEditPoints="1" noAdjustHandles="1" noChangeArrowheads="1" noChangeShapeType="1" noTextEdit="1"/>
+          </p:cNvSpPr>
+          <p:nvPr>
+            <p:extLst>
+              <p:ext uri="{386F3935-93C4-4BCD-93E2-E3B085C9AB24}">
+                <p16:designElem xmlns:p16="http://schemas.microsoft.com/office/powerpoint/2015/main" val="1"/>
+              </p:ext>
+            </p:extLst>
+          </p:nvPr>
+        </p:nvSpPr>
+        <p:spPr>
+          <a:xfrm>
+            <a:off x="1" y="376"/>
+            <a:ext cx="3044410" cy="6857624"/>
+          </a:xfrm>
+          <a:prstGeom prst="rect">
+            <a:avLst/>
+          </a:prstGeom>
+          <a:solidFill>
+            <a:schemeClr val="accent1"/>
+          </a:solidFill>
+          <a:ln>
+            <a:noFill/>
+          </a:ln>
+        </p:spPr>
+        <p:style>
+          <a:lnRef idx="2">
+            <a:schemeClr val="accent1">
+              <a:shade val="50000"/>
+            </a:schemeClr>
+          </a:lnRef>
+          <a:fillRef idx="1">
+            <a:schemeClr val="accent1"/>
+          </a:fillRef>
+          <a:effectRef idx="0">
+            <a:schemeClr val="accent1"/>
+          </a:effectRef>
+          <a:fontRef idx="minor">
+            <a:schemeClr val="lt1"/>
+          </a:fontRef>
+        </p:style>
+        <p:txBody>
+          <a:bodyPr/>
+          <a:lstStyle/>
+          <a:p>
+            <a:endParaRPr lang="ja-JP" altLang="en-US"/>
+          </a:p>
+        </p:txBody>
+      </p:sp>
+      <p:sp>
+        <p:nvSpPr>
+          <p:cNvPr id="15" name="Rectangle 14">
+            <a:extLst>
+              <a:ext uri="{FF2B5EF4-FFF2-40B4-BE49-F238E27FC236}">
+                <a16:creationId xmlns:a16="http://schemas.microsoft.com/office/drawing/2014/main" id="{72171013-D973-4187-9CF2-EE098EEF8194}"/>
+              </a:ext>
+              <a:ext uri="{C183D7F6-B498-43B3-948B-1728B52AA6E4}">
+                <adec:decorative xmlns:adec="http://schemas.microsoft.com/office/drawing/2017/decorative" val="1"/>
+              </a:ext>
+            </a:extLst>
+          </p:cNvPr>
+          <p:cNvSpPr>
+            <a:spLocks noGrp="1" noRot="1" noChangeAspect="1" noMove="1" noResize="1" noEditPoints="1" noAdjustHandles="1" noChangeArrowheads="1" noChangeShapeType="1" noTextEdit="1"/>
+          </p:cNvSpPr>
+          <p:nvPr>
+            <p:extLst>
+              <p:ext uri="{386F3935-93C4-4BCD-93E2-E3B085C9AB24}">
+                <p16:designElem xmlns:p16="http://schemas.microsoft.com/office/powerpoint/2015/main" val="1"/>
+              </p:ext>
+            </p:extLst>
+          </p:nvPr>
+        </p:nvSpPr>
+        <p:spPr>
+          <a:xfrm>
+            <a:off x="2815810" y="376"/>
+            <a:ext cx="228600" cy="6858000"/>
+          </a:xfrm>
+          <a:prstGeom prst="rect">
+            <a:avLst/>
+          </a:prstGeom>
+          <a:solidFill>
+            <a:schemeClr val="tx2"/>
+          </a:solidFill>
+          <a:ln>
+            <a:noFill/>
+          </a:ln>
+        </p:spPr>
+        <p:style>
+          <a:lnRef idx="2">
+            <a:schemeClr val="accent1">
+              <a:shade val="50000"/>
+            </a:schemeClr>
+          </a:lnRef>
+          <a:fillRef idx="1">
+            <a:schemeClr val="accent1"/>
+          </a:fillRef>
+          <a:effectRef idx="0">
+            <a:schemeClr val="accent1"/>
+          </a:effectRef>
+          <a:fontRef idx="minor">
+            <a:schemeClr val="lt1"/>
+          </a:fontRef>
+        </p:style>
+        <p:txBody>
+          <a:bodyPr/>
+          <a:lstStyle/>
+          <a:p>
+            <a:endParaRPr lang="ja-JP" altLang="en-US"/>
+          </a:p>
+        </p:txBody>
+      </p:sp>
+      <p:sp>
+        <p:nvSpPr>
+          <p:cNvPr id="6" name="テキスト ボックス 5">
+            <a:extLst>
+              <a:ext uri="{FF2B5EF4-FFF2-40B4-BE49-F238E27FC236}">
+                <a16:creationId xmlns:a16="http://schemas.microsoft.com/office/drawing/2014/main" id="{B09425A7-E620-5DF7-950A-0C9356D3B46D}"/>
+              </a:ext>
+            </a:extLst>
+          </p:cNvPr>
+          <p:cNvSpPr txBox="1"/>
+          <p:nvPr/>
+        </p:nvSpPr>
+        <p:spPr>
+          <a:xfrm>
+            <a:off x="2930110" y="2771140"/>
+            <a:ext cx="9929908" cy="3444240"/>
+          </a:xfrm>
+          <a:prstGeom prst="rect">
+            <a:avLst/>
+          </a:prstGeom>
+        </p:spPr>
+        <p:txBody>
+          <a:bodyPr vert="horz" lIns="91440" tIns="45720" rIns="91440" bIns="45720" rtlCol="0">
+            <a:normAutofit/>
+          </a:bodyPr>
+          <a:lstStyle/>
+          <a:p>
+            <a:pPr indent="-384048" defTabSz="914400">
+              <a:lnSpc>
+                <a:spcPct val="94000"/>
+              </a:lnSpc>
+              <a:spcAft>
+                <a:spcPts val="200"/>
+              </a:spcAft>
+              <a:buFont typeface="Franklin Gothic Book" panose="020B0503020102020204" pitchFamily="34" charset="0"/>
+            </a:pPr>
+            <a:r>
+              <a:rPr kumimoji="1" lang="ja-JP" altLang="en-US" sz="4400" dirty="0">
+                <a:solidFill>
+                  <a:schemeClr val="tx2"/>
+                </a:solidFill>
+                <a:latin typeface="HGS創英角ﾎﾟｯﾌﾟ体" panose="040B0A00000000000000" pitchFamily="50" charset="-128"/>
+                <a:ea typeface="HGS創英角ﾎﾟｯﾌﾟ体" panose="040B0A00000000000000" pitchFamily="50" charset="-128"/>
+              </a:rPr>
+              <a:t>・ピアスのデザイン</a:t>
+            </a:r>
+            <a:r>
+              <a:rPr kumimoji="1" lang="en-US" altLang="ja-JP" sz="4400" dirty="0">
+                <a:solidFill>
+                  <a:schemeClr val="tx2"/>
+                </a:solidFill>
+                <a:latin typeface="HGS創英角ﾎﾟｯﾌﾟ体" panose="040B0A00000000000000" pitchFamily="50" charset="-128"/>
+                <a:ea typeface="HGS創英角ﾎﾟｯﾌﾟ体" panose="040B0A00000000000000" pitchFamily="50" charset="-128"/>
+              </a:rPr>
+              <a:t>Web</a:t>
+            </a:r>
+            <a:r>
+              <a:rPr kumimoji="1" lang="ja-JP" altLang="en-US" sz="4400" dirty="0">
+                <a:solidFill>
+                  <a:schemeClr val="tx2"/>
+                </a:solidFill>
+                <a:latin typeface="HGS創英角ﾎﾟｯﾌﾟ体" panose="040B0A00000000000000" pitchFamily="50" charset="-128"/>
+                <a:ea typeface="HGS創英角ﾎﾟｯﾌﾟ体" panose="040B0A00000000000000" pitchFamily="50" charset="-128"/>
+              </a:rPr>
+              <a:t>ページ</a:t>
+            </a:r>
+            <a:r>
+              <a:rPr kumimoji="1" lang="en-US" altLang="ja-JP" sz="4400" dirty="0">
+                <a:solidFill>
+                  <a:schemeClr val="tx2"/>
+                </a:solidFill>
+                <a:latin typeface="HGS創英角ﾎﾟｯﾌﾟ体" panose="040B0A00000000000000" pitchFamily="50" charset="-128"/>
+                <a:ea typeface="HGS創英角ﾎﾟｯﾌﾟ体" panose="040B0A00000000000000" pitchFamily="50" charset="-128"/>
+              </a:rPr>
+              <a:t>(</a:t>
+            </a:r>
+            <a:r>
+              <a:rPr kumimoji="1" lang="ja-JP" altLang="en-US" sz="4400" dirty="0">
+                <a:solidFill>
+                  <a:schemeClr val="tx2"/>
+                </a:solidFill>
+                <a:latin typeface="HGS創英角ﾎﾟｯﾌﾟ体" panose="040B0A00000000000000" pitchFamily="50" charset="-128"/>
+                <a:ea typeface="HGS創英角ﾎﾟｯﾌﾟ体" panose="040B0A00000000000000" pitchFamily="50" charset="-128"/>
+              </a:rPr>
+              <a:t>仮想</a:t>
+            </a:r>
+            <a:r>
+              <a:rPr kumimoji="1" lang="en-US" altLang="ja-JP" sz="4400" dirty="0">
+                <a:solidFill>
+                  <a:schemeClr val="tx2"/>
+                </a:solidFill>
+                <a:latin typeface="HGS創英角ﾎﾟｯﾌﾟ体" panose="040B0A00000000000000" pitchFamily="50" charset="-128"/>
+                <a:ea typeface="HGS創英角ﾎﾟｯﾌﾟ体" panose="040B0A00000000000000" pitchFamily="50" charset="-128"/>
+              </a:rPr>
+              <a:t>)</a:t>
+            </a:r>
+          </a:p>
+          <a:p>
+            <a:pPr indent="-384048" defTabSz="914400">
+              <a:lnSpc>
+                <a:spcPct val="94000"/>
+              </a:lnSpc>
+              <a:spcAft>
+                <a:spcPts val="200"/>
+              </a:spcAft>
+              <a:buFont typeface="Franklin Gothic Book" panose="020B0503020102020204" pitchFamily="34" charset="0"/>
+            </a:pPr>
+            <a:endParaRPr kumimoji="1" lang="en-US" altLang="ja-JP" dirty="0">
+              <a:solidFill>
+                <a:schemeClr val="tx2"/>
+              </a:solidFill>
+            </a:endParaRPr>
+          </a:p>
+        </p:txBody>
+      </p:sp>
+      <p:sp>
+        <p:nvSpPr>
+          <p:cNvPr id="4" name="テキスト ボックス 3">
+            <a:extLst>
+              <a:ext uri="{FF2B5EF4-FFF2-40B4-BE49-F238E27FC236}">
+                <a16:creationId xmlns:a16="http://schemas.microsoft.com/office/drawing/2014/main" id="{B5515FEA-6E8C-4B81-1E60-33B920322618}"/>
+              </a:ext>
+            </a:extLst>
+          </p:cNvPr>
+          <p:cNvSpPr txBox="1"/>
+          <p:nvPr/>
+        </p:nvSpPr>
+        <p:spPr>
+          <a:xfrm>
+            <a:off x="179292" y="2771140"/>
+            <a:ext cx="2367865" cy="939800"/>
+          </a:xfrm>
+          <a:prstGeom prst="rect">
+            <a:avLst/>
+          </a:prstGeom>
+        </p:spPr>
+        <p:txBody>
+          <a:bodyPr vert="horz" lIns="91440" tIns="45720" rIns="91440" bIns="45720" rtlCol="0" anchor="t">
+            <a:normAutofit/>
+          </a:bodyPr>
+          <a:lstStyle/>
+          <a:p>
+            <a:pPr defTabSz="914400">
+              <a:lnSpc>
+                <a:spcPct val="89000"/>
+              </a:lnSpc>
+              <a:spcBef>
+                <a:spcPct val="0"/>
+              </a:spcBef>
+              <a:spcAft>
+                <a:spcPts val="600"/>
+              </a:spcAft>
+            </a:pPr>
+            <a:r>
+              <a:rPr kumimoji="1" lang="ja-JP" altLang="en-US" sz="4400" dirty="0">
+                <a:solidFill>
+                  <a:schemeClr val="tx2"/>
+                </a:solidFill>
+                <a:latin typeface="HGS創英角ﾎﾟｯﾌﾟ体" panose="040B0A00000000000000" pitchFamily="50" charset="-128"/>
+                <a:ea typeface="HGS創英角ﾎﾟｯﾌﾟ体" panose="040B0A00000000000000" pitchFamily="50" charset="-128"/>
+                <a:cs typeface="+mj-cs"/>
+              </a:rPr>
+              <a:t>テーマ</a:t>
+            </a:r>
+            <a:r>
+              <a:rPr kumimoji="1" lang="en-US" altLang="ja-JP" sz="4400" dirty="0">
+                <a:solidFill>
+                  <a:schemeClr val="tx2"/>
+                </a:solidFill>
+                <a:latin typeface="HGS創英角ﾎﾟｯﾌﾟ体" panose="040B0A00000000000000" pitchFamily="50" charset="-128"/>
+                <a:ea typeface="HGS創英角ﾎﾟｯﾌﾟ体" panose="040B0A00000000000000" pitchFamily="50" charset="-128"/>
+                <a:cs typeface="+mj-cs"/>
+              </a:rPr>
+              <a:t>2</a:t>
+            </a:r>
+          </a:p>
+        </p:txBody>
+      </p:sp>
+    </p:spTree>
+    <p:extLst>
+      <p:ext uri="{BB962C8B-B14F-4D97-AF65-F5344CB8AC3E}">
+        <p14:creationId xmlns:p14="http://schemas.microsoft.com/office/powerpoint/2010/main" val="1674011061"/>
+      </p:ext>
+    </p:extLst>
+  </p:cSld>
+  <p:clrMapOvr>
+    <a:masterClrMapping/>
+  </p:clrMapOvr>
+</p:sld>
+</file>
+
+<file path=ppt/slides/slide7.xml><?xml version="1.0" encoding="utf-8"?>
+<p:sld xmlns:a="http://schemas.openxmlformats.org/drawingml/2006/main" xmlns:r="http://schemas.openxmlformats.org/officeDocument/2006/relationships" xmlns:p="http://schemas.openxmlformats.org/presentationml/2006/main">
+  <p:cSld>
+    <p:bg>
+      <p:bgPr>
+        <a:solidFill>
+          <a:schemeClr val="bg2"/>
+        </a:solidFill>
+        <a:effectLst/>
+      </p:bgPr>
+    </p:bg>
+    <p:spTree>
+      <p:nvGrpSpPr>
+        <p:cNvPr id="1" name=""/>
+        <p:cNvGrpSpPr/>
+        <p:nvPr/>
+      </p:nvGrpSpPr>
+      <p:grpSpPr>
+        <a:xfrm>
+          <a:off x="0" y="0"/>
+          <a:ext cx="0" cy="0"/>
+          <a:chOff x="0" y="0"/>
+          <a:chExt cx="0" cy="0"/>
+        </a:xfrm>
+      </p:grpSpPr>
+      <p:sp useBgFill="1">
+        <p:nvSpPr>
+          <p:cNvPr id="10" name="Rectangle 9">
+            <a:extLst>
+              <a:ext uri="{FF2B5EF4-FFF2-40B4-BE49-F238E27FC236}">
+                <a16:creationId xmlns:a16="http://schemas.microsoft.com/office/drawing/2014/main" id="{32812C54-7AEF-4ABB-826E-221F51CB0F30}"/>
+              </a:ext>
+              <a:ext uri="{C183D7F6-B498-43B3-948B-1728B52AA6E4}">
+                <adec:decorative xmlns:adec="http://schemas.microsoft.com/office/drawing/2017/decorative" val="1"/>
+              </a:ext>
+            </a:extLst>
+          </p:cNvPr>
+          <p:cNvSpPr>
+            <a:spLocks noGrp="1" noRot="1" noChangeAspect="1" noMove="1" noResize="1" noEditPoints="1" noAdjustHandles="1" noChangeArrowheads="1" noChangeShapeType="1" noTextEdit="1"/>
+          </p:cNvSpPr>
+          <p:nvPr>
+            <p:extLst>
+              <p:ext uri="{386F3935-93C4-4BCD-93E2-E3B085C9AB24}">
+                <p16:designElem xmlns:p16="http://schemas.microsoft.com/office/powerpoint/2015/main" val="1"/>
+              </p:ext>
+            </p:extLst>
+          </p:nvPr>
+        </p:nvSpPr>
+        <p:spPr>
+          <a:xfrm>
+            <a:off x="0" y="0"/>
+            <a:ext cx="12192000" cy="6858000"/>
+          </a:xfrm>
+          <a:prstGeom prst="rect">
+            <a:avLst/>
+          </a:prstGeom>
+          <a:ln>
+            <a:noFill/>
+          </a:ln>
+        </p:spPr>
+        <p:style>
+          <a:lnRef idx="2">
+            <a:schemeClr val="accent1">
+              <a:shade val="50000"/>
+            </a:schemeClr>
+          </a:lnRef>
+          <a:fillRef idx="1">
+            <a:schemeClr val="accent1"/>
+          </a:fillRef>
+          <a:effectRef idx="0">
+            <a:schemeClr val="accent1"/>
+          </a:effectRef>
+          <a:fontRef idx="minor">
+            <a:schemeClr val="lt1"/>
+          </a:fontRef>
+        </p:style>
+        <p:txBody>
+          <a:bodyPr rtlCol="0" anchor="ctr"/>
+          <a:lstStyle/>
+          <a:p>
+            <a:pPr algn="ctr"/>
+            <a:endParaRPr lang="en-US"/>
+          </a:p>
+        </p:txBody>
+      </p:sp>
+      <p:sp>
+        <p:nvSpPr>
+          <p:cNvPr id="12" name="Rectangle 11">
+            <a:extLst>
+              <a:ext uri="{FF2B5EF4-FFF2-40B4-BE49-F238E27FC236}">
+                <a16:creationId xmlns:a16="http://schemas.microsoft.com/office/drawing/2014/main" id="{891F40E4-8A76-44CF-91EC-907367352626}"/>
+              </a:ext>
+              <a:ext uri="{C183D7F6-B498-43B3-948B-1728B52AA6E4}">
+                <adec:decorative xmlns:adec="http://schemas.microsoft.com/office/drawing/2017/decorative" val="1"/>
+              </a:ext>
+            </a:extLst>
+          </p:cNvPr>
+          <p:cNvSpPr>
+            <a:spLocks noGrp="1" noRot="1" noChangeAspect="1" noMove="1" noResize="1" noEditPoints="1" noAdjustHandles="1" noChangeArrowheads="1" noChangeShapeType="1" noTextEdit="1"/>
+          </p:cNvSpPr>
+          <p:nvPr>
+            <p:extLst>
+              <p:ext uri="{386F3935-93C4-4BCD-93E2-E3B085C9AB24}">
+                <p16:designElem xmlns:p16="http://schemas.microsoft.com/office/powerpoint/2015/main" val="1"/>
+              </p:ext>
+            </p:extLst>
+          </p:nvPr>
+        </p:nvSpPr>
+        <p:spPr>
+          <a:xfrm>
+            <a:off x="1" y="376"/>
+            <a:ext cx="3044410" cy="6857624"/>
+          </a:xfrm>
+          <a:prstGeom prst="rect">
+            <a:avLst/>
+          </a:prstGeom>
+          <a:solidFill>
+            <a:schemeClr val="accent1"/>
+          </a:solidFill>
+          <a:ln>
+            <a:noFill/>
+          </a:ln>
+        </p:spPr>
+        <p:style>
+          <a:lnRef idx="2">
+            <a:schemeClr val="accent1">
+              <a:shade val="50000"/>
+            </a:schemeClr>
+          </a:lnRef>
+          <a:fillRef idx="1">
+            <a:schemeClr val="accent1"/>
+          </a:fillRef>
+          <a:effectRef idx="0">
+            <a:schemeClr val="accent1"/>
+          </a:effectRef>
+          <a:fontRef idx="minor">
+            <a:schemeClr val="lt1"/>
+          </a:fontRef>
+        </p:style>
+        <p:txBody>
+          <a:bodyPr/>
+          <a:lstStyle/>
+          <a:p>
+            <a:endParaRPr lang="ja-JP" altLang="en-US"/>
+          </a:p>
+        </p:txBody>
+      </p:sp>
+      <p:sp>
+        <p:nvSpPr>
+          <p:cNvPr id="14" name="Rectangle 13">
+            <a:extLst>
+              <a:ext uri="{FF2B5EF4-FFF2-40B4-BE49-F238E27FC236}">
+                <a16:creationId xmlns:a16="http://schemas.microsoft.com/office/drawing/2014/main" id="{72171013-D973-4187-9CF2-EE098EEF8194}"/>
+              </a:ext>
+              <a:ext uri="{C183D7F6-B498-43B3-948B-1728B52AA6E4}">
+                <adec:decorative xmlns:adec="http://schemas.microsoft.com/office/drawing/2017/decorative" val="1"/>
+              </a:ext>
+            </a:extLst>
+          </p:cNvPr>
+          <p:cNvSpPr>
+            <a:spLocks noGrp="1" noRot="1" noChangeAspect="1" noMove="1" noResize="1" noEditPoints="1" noAdjustHandles="1" noChangeArrowheads="1" noChangeShapeType="1" noTextEdit="1"/>
+          </p:cNvSpPr>
+          <p:nvPr>
+            <p:extLst>
+              <p:ext uri="{386F3935-93C4-4BCD-93E2-E3B085C9AB24}">
+                <p16:designElem xmlns:p16="http://schemas.microsoft.com/office/powerpoint/2015/main" val="1"/>
+              </p:ext>
+            </p:extLst>
+          </p:nvPr>
+        </p:nvSpPr>
+        <p:spPr>
+          <a:xfrm>
+            <a:off x="2815810" y="376"/>
+            <a:ext cx="228600" cy="6858000"/>
+          </a:xfrm>
+          <a:prstGeom prst="rect">
+            <a:avLst/>
+          </a:prstGeom>
+          <a:solidFill>
+            <a:schemeClr val="tx2"/>
+          </a:solidFill>
+          <a:ln>
+            <a:noFill/>
+          </a:ln>
+        </p:spPr>
+        <p:style>
+          <a:lnRef idx="2">
+            <a:schemeClr val="accent1">
+              <a:shade val="50000"/>
+            </a:schemeClr>
+          </a:lnRef>
+          <a:fillRef idx="1">
+            <a:schemeClr val="accent1"/>
+          </a:fillRef>
+          <a:effectRef idx="0">
+            <a:schemeClr val="accent1"/>
+          </a:effectRef>
+          <a:fontRef idx="minor">
+            <a:schemeClr val="lt1"/>
+          </a:fontRef>
+        </p:style>
+        <p:txBody>
+          <a:bodyPr/>
+          <a:lstStyle/>
+          <a:p>
+            <a:endParaRPr lang="ja-JP" altLang="en-US"/>
+          </a:p>
+        </p:txBody>
+      </p:sp>
+      <p:sp>
+        <p:nvSpPr>
+          <p:cNvPr id="5" name="テキスト ボックス 4">
+            <a:extLst>
+              <a:ext uri="{FF2B5EF4-FFF2-40B4-BE49-F238E27FC236}">
+                <a16:creationId xmlns:a16="http://schemas.microsoft.com/office/drawing/2014/main" id="{9084CA30-3A77-FE3B-666C-1F18753BA6D6}"/>
+              </a:ext>
+            </a:extLst>
+          </p:cNvPr>
+          <p:cNvSpPr txBox="1"/>
+          <p:nvPr/>
+        </p:nvSpPr>
+        <p:spPr>
+          <a:xfrm>
+            <a:off x="3363863" y="2286000"/>
+            <a:ext cx="8328603" cy="3581400"/>
+          </a:xfrm>
+          <a:prstGeom prst="rect">
+            <a:avLst/>
+          </a:prstGeom>
+        </p:spPr>
+        <p:txBody>
+          <a:bodyPr vert="horz" lIns="91440" tIns="45720" rIns="91440" bIns="45720" rtlCol="0">
+            <a:normAutofit/>
+          </a:bodyPr>
+          <a:lstStyle/>
+          <a:p>
+            <a:pPr indent="-384048" defTabSz="914400">
+              <a:lnSpc>
+                <a:spcPct val="94000"/>
+              </a:lnSpc>
+              <a:spcAft>
+                <a:spcPts val="200"/>
+              </a:spcAft>
+              <a:buFont typeface="Franklin Gothic Book" panose="020B0503020102020204" pitchFamily="34" charset="0"/>
+            </a:pPr>
+            <a:endParaRPr kumimoji="1" lang="en-US" altLang="ja-JP" sz="2800" dirty="0">
+              <a:solidFill>
+                <a:schemeClr val="tx2"/>
+              </a:solidFill>
+              <a:latin typeface="HGS創英角ﾎﾟｯﾌﾟ体" panose="040B0A00000000000000" pitchFamily="50" charset="-128"/>
+              <a:ea typeface="HGS創英角ﾎﾟｯﾌﾟ体" panose="040B0A00000000000000" pitchFamily="50" charset="-128"/>
+            </a:endParaRPr>
+          </a:p>
+        </p:txBody>
+      </p:sp>
+      <p:sp>
+        <p:nvSpPr>
+          <p:cNvPr id="4" name="テキスト ボックス 3">
+            <a:extLst>
+              <a:ext uri="{FF2B5EF4-FFF2-40B4-BE49-F238E27FC236}">
+                <a16:creationId xmlns:a16="http://schemas.microsoft.com/office/drawing/2014/main" id="{E0E94C3D-7348-72C3-520A-0A55068A3EAC}"/>
+              </a:ext>
+            </a:extLst>
+          </p:cNvPr>
+          <p:cNvSpPr txBox="1"/>
+          <p:nvPr/>
+        </p:nvSpPr>
+        <p:spPr>
+          <a:xfrm>
+            <a:off x="793981" y="2686050"/>
+            <a:ext cx="1583459" cy="849630"/>
+          </a:xfrm>
+          <a:prstGeom prst="rect">
+            <a:avLst/>
+          </a:prstGeom>
+        </p:spPr>
+        <p:txBody>
+          <a:bodyPr vert="horz" lIns="91440" tIns="45720" rIns="91440" bIns="45720" rtlCol="0" anchor="t">
+            <a:normAutofit/>
+          </a:bodyPr>
+          <a:lstStyle/>
+          <a:p>
+            <a:pPr defTabSz="914400">
+              <a:lnSpc>
+                <a:spcPct val="89000"/>
+              </a:lnSpc>
+              <a:spcBef>
+                <a:spcPct val="0"/>
+              </a:spcBef>
+              <a:spcAft>
+                <a:spcPts val="600"/>
+              </a:spcAft>
+            </a:pPr>
+            <a:r>
+              <a:rPr kumimoji="1" lang="ja-JP" altLang="en-US" sz="4400" dirty="0">
+                <a:solidFill>
+                  <a:schemeClr val="tx2"/>
+                </a:solidFill>
+                <a:latin typeface="HGS創英角ﾎﾟｯﾌﾟ体" panose="040B0A00000000000000" pitchFamily="50" charset="-128"/>
+                <a:ea typeface="HGS創英角ﾎﾟｯﾌﾟ体" panose="040B0A00000000000000" pitchFamily="50" charset="-128"/>
+                <a:cs typeface="+mj-cs"/>
+              </a:rPr>
+              <a:t>目的</a:t>
+            </a:r>
+          </a:p>
+        </p:txBody>
+      </p:sp>
+      <p:sp>
+        <p:nvSpPr>
+          <p:cNvPr id="7" name="テキスト ボックス 6">
+            <a:extLst>
+              <a:ext uri="{FF2B5EF4-FFF2-40B4-BE49-F238E27FC236}">
+                <a16:creationId xmlns:a16="http://schemas.microsoft.com/office/drawing/2014/main" id="{B412A593-D342-00C2-239C-8DEDDC39F7F1}"/>
+              </a:ext>
+            </a:extLst>
+          </p:cNvPr>
+          <p:cNvSpPr txBox="1"/>
+          <p:nvPr/>
+        </p:nvSpPr>
+        <p:spPr>
+          <a:xfrm>
+            <a:off x="3171420" y="2452216"/>
+            <a:ext cx="8842780" cy="1601400"/>
+          </a:xfrm>
+          <a:prstGeom prst="rect">
+            <a:avLst/>
+          </a:prstGeom>
+          <a:noFill/>
+        </p:spPr>
+        <p:txBody>
+          <a:bodyPr wrap="square">
+            <a:spAutoFit/>
+          </a:bodyPr>
+          <a:lstStyle/>
+          <a:p>
+            <a:pPr indent="-384048" defTabSz="914400">
+              <a:lnSpc>
+                <a:spcPct val="150000"/>
+              </a:lnSpc>
+              <a:spcAft>
+                <a:spcPts val="200"/>
+              </a:spcAft>
+              <a:buFont typeface="Franklin Gothic Book" panose="020B0503020102020204" pitchFamily="34" charset="0"/>
+            </a:pPr>
+            <a:r>
+              <a:rPr kumimoji="1" lang="ja-JP" altLang="en-US" sz="3400" dirty="0">
+                <a:solidFill>
+                  <a:schemeClr val="tx2"/>
+                </a:solidFill>
+                <a:latin typeface="HGS創英角ﾎﾟｯﾌﾟ体" panose="040B0A00000000000000" pitchFamily="50" charset="-128"/>
+                <a:ea typeface="HGS創英角ﾎﾟｯﾌﾟ体" panose="040B0A00000000000000" pitchFamily="50" charset="-128"/>
+              </a:rPr>
+              <a:t>ピアスのオーダーメイドの会社が少ないのでそのための</a:t>
+            </a:r>
+            <a:r>
+              <a:rPr kumimoji="1" lang="en-US" altLang="ja-JP" sz="3400" dirty="0">
+                <a:solidFill>
+                  <a:schemeClr val="tx2"/>
+                </a:solidFill>
+                <a:latin typeface="HGS創英角ﾎﾟｯﾌﾟ体" panose="040B0A00000000000000" pitchFamily="50" charset="-128"/>
+                <a:ea typeface="HGS創英角ﾎﾟｯﾌﾟ体" panose="040B0A00000000000000" pitchFamily="50" charset="-128"/>
+              </a:rPr>
+              <a:t>Web</a:t>
+            </a:r>
+            <a:r>
+              <a:rPr kumimoji="1" lang="ja-JP" altLang="en-US" sz="3400" dirty="0">
+                <a:solidFill>
+                  <a:schemeClr val="tx2"/>
+                </a:solidFill>
+                <a:latin typeface="HGS創英角ﾎﾟｯﾌﾟ体" panose="040B0A00000000000000" pitchFamily="50" charset="-128"/>
+                <a:ea typeface="HGS創英角ﾎﾟｯﾌﾟ体" panose="040B0A00000000000000" pitchFamily="50" charset="-128"/>
+              </a:rPr>
+              <a:t>ページ制作を行います</a:t>
+            </a:r>
+            <a:r>
+              <a:rPr kumimoji="1" lang="ja-JP" altLang="en-US" sz="3600" dirty="0">
+                <a:solidFill>
+                  <a:schemeClr val="tx2"/>
+                </a:solidFill>
+                <a:latin typeface="HGS創英角ﾎﾟｯﾌﾟ体" panose="040B0A00000000000000" pitchFamily="50" charset="-128"/>
+                <a:ea typeface="HGS創英角ﾎﾟｯﾌﾟ体" panose="040B0A00000000000000" pitchFamily="50" charset="-128"/>
+              </a:rPr>
+              <a:t>。</a:t>
+            </a:r>
+            <a:endParaRPr kumimoji="1" lang="en-US" altLang="ja-JP" sz="3600" dirty="0">
+              <a:solidFill>
+                <a:schemeClr val="tx2"/>
+              </a:solidFill>
+              <a:latin typeface="HGS創英角ﾎﾟｯﾌﾟ体" panose="040B0A00000000000000" pitchFamily="50" charset="-128"/>
+              <a:ea typeface="HGS創英角ﾎﾟｯﾌﾟ体" panose="040B0A00000000000000" pitchFamily="50" charset="-128"/>
+            </a:endParaRPr>
+          </a:p>
+        </p:txBody>
+      </p:sp>
+    </p:spTree>
+    <p:extLst>
+      <p:ext uri="{BB962C8B-B14F-4D97-AF65-F5344CB8AC3E}">
+        <p14:creationId xmlns:p14="http://schemas.microsoft.com/office/powerpoint/2010/main" val="3784033592"/>
+      </p:ext>
+    </p:extLst>
+  </p:cSld>
+  <p:clrMapOvr>
+    <a:masterClrMapping/>
+  </p:clrMapOvr>
+</p:sld>
+</file>
+
+<file path=ppt/slides/slide8.xml><?xml version="1.0" encoding="utf-8"?>
+<p:sld xmlns:a="http://schemas.openxmlformats.org/drawingml/2006/main" xmlns:r="http://schemas.openxmlformats.org/officeDocument/2006/relationships" xmlns:p="http://schemas.openxmlformats.org/presentationml/2006/main">
+  <p:cSld>
+    <p:bg>
+      <p:bgPr>
+        <a:solidFill>
+          <a:schemeClr val="bg2"/>
+        </a:solidFill>
+        <a:effectLst/>
+      </p:bgPr>
+    </p:bg>
+    <p:spTree>
+      <p:nvGrpSpPr>
+        <p:cNvPr id="1" name=""/>
+        <p:cNvGrpSpPr/>
+        <p:nvPr/>
+      </p:nvGrpSpPr>
+      <p:grpSpPr>
+        <a:xfrm>
+          <a:off x="0" y="0"/>
+          <a:ext cx="0" cy="0"/>
+          <a:chOff x="0" y="0"/>
+          <a:chExt cx="0" cy="0"/>
+        </a:xfrm>
+      </p:grpSpPr>
+      <p:sp useBgFill="1">
+        <p:nvSpPr>
+          <p:cNvPr id="19" name="Rectangle 10">
+            <a:extLst>
+              <a:ext uri="{FF2B5EF4-FFF2-40B4-BE49-F238E27FC236}">
+                <a16:creationId xmlns:a16="http://schemas.microsoft.com/office/drawing/2014/main" id="{32812C54-7AEF-4ABB-826E-221F51CB0F30}"/>
+              </a:ext>
+              <a:ext uri="{C183D7F6-B498-43B3-948B-1728B52AA6E4}">
+                <adec:decorative xmlns:adec="http://schemas.microsoft.com/office/drawing/2017/decorative" val="1"/>
+              </a:ext>
+            </a:extLst>
+          </p:cNvPr>
+          <p:cNvSpPr>
+            <a:spLocks noGrp="1" noRot="1" noChangeAspect="1" noMove="1" noResize="1" noEditPoints="1" noAdjustHandles="1" noChangeArrowheads="1" noChangeShapeType="1" noTextEdit="1"/>
+          </p:cNvSpPr>
+          <p:nvPr>
+            <p:extLst>
+              <p:ext uri="{386F3935-93C4-4BCD-93E2-E3B085C9AB24}">
+                <p16:designElem xmlns:p16="http://schemas.microsoft.com/office/powerpoint/2015/main" val="1"/>
+              </p:ext>
+            </p:extLst>
+          </p:nvPr>
+        </p:nvSpPr>
+        <p:spPr>
+          <a:xfrm>
+            <a:off x="0" y="0"/>
+            <a:ext cx="12192000" cy="6858000"/>
+          </a:xfrm>
+          <a:prstGeom prst="rect">
+            <a:avLst/>
+          </a:prstGeom>
+          <a:ln>
+            <a:noFill/>
+          </a:ln>
+        </p:spPr>
+        <p:style>
+          <a:lnRef idx="2">
+            <a:schemeClr val="accent1">
+              <a:shade val="50000"/>
+            </a:schemeClr>
+          </a:lnRef>
+          <a:fillRef idx="1">
+            <a:schemeClr val="accent1"/>
+          </a:fillRef>
+          <a:effectRef idx="0">
+            <a:schemeClr val="accent1"/>
+          </a:effectRef>
+          <a:fontRef idx="minor">
+            <a:schemeClr val="lt1"/>
+          </a:fontRef>
+        </p:style>
+        <p:txBody>
+          <a:bodyPr rtlCol="0" anchor="ctr"/>
+          <a:lstStyle/>
+          <a:p>
+            <a:pPr algn="ctr"/>
+            <a:endParaRPr lang="en-US"/>
+          </a:p>
+        </p:txBody>
+      </p:sp>
+      <p:sp>
+        <p:nvSpPr>
+          <p:cNvPr id="20" name="Rectangle 12">
+            <a:extLst>
+              <a:ext uri="{FF2B5EF4-FFF2-40B4-BE49-F238E27FC236}">
+                <a16:creationId xmlns:a16="http://schemas.microsoft.com/office/drawing/2014/main" id="{891F40E4-8A76-44CF-91EC-907367352626}"/>
+              </a:ext>
+              <a:ext uri="{C183D7F6-B498-43B3-948B-1728B52AA6E4}">
+                <adec:decorative xmlns:adec="http://schemas.microsoft.com/office/drawing/2017/decorative" val="1"/>
+              </a:ext>
+            </a:extLst>
+          </p:cNvPr>
+          <p:cNvSpPr>
+            <a:spLocks noGrp="1" noRot="1" noChangeAspect="1" noMove="1" noResize="1" noEditPoints="1" noAdjustHandles="1" noChangeArrowheads="1" noChangeShapeType="1" noTextEdit="1"/>
+          </p:cNvSpPr>
+          <p:nvPr>
+            <p:extLst>
+              <p:ext uri="{386F3935-93C4-4BCD-93E2-E3B085C9AB24}">
+                <p16:designElem xmlns:p16="http://schemas.microsoft.com/office/powerpoint/2015/main" val="1"/>
+              </p:ext>
+            </p:extLst>
+          </p:nvPr>
+        </p:nvSpPr>
+        <p:spPr>
+          <a:xfrm>
+            <a:off x="1" y="376"/>
+            <a:ext cx="3044410" cy="6857624"/>
+          </a:xfrm>
+          <a:prstGeom prst="rect">
+            <a:avLst/>
+          </a:prstGeom>
+          <a:solidFill>
+            <a:schemeClr val="accent1"/>
+          </a:solidFill>
+          <a:ln>
+            <a:noFill/>
+          </a:ln>
+        </p:spPr>
+        <p:style>
+          <a:lnRef idx="2">
+            <a:schemeClr val="accent1">
+              <a:shade val="50000"/>
+            </a:schemeClr>
+          </a:lnRef>
+          <a:fillRef idx="1">
+            <a:schemeClr val="accent1"/>
+          </a:fillRef>
+          <a:effectRef idx="0">
+            <a:schemeClr val="accent1"/>
+          </a:effectRef>
+          <a:fontRef idx="minor">
+            <a:schemeClr val="lt1"/>
+          </a:fontRef>
+        </p:style>
+        <p:txBody>
+          <a:bodyPr/>
+          <a:lstStyle/>
+          <a:p>
+            <a:endParaRPr lang="ja-JP" altLang="en-US"/>
+          </a:p>
+        </p:txBody>
+      </p:sp>
+      <p:sp>
+        <p:nvSpPr>
+          <p:cNvPr id="21" name="Rectangle 14">
+            <a:extLst>
+              <a:ext uri="{FF2B5EF4-FFF2-40B4-BE49-F238E27FC236}">
+                <a16:creationId xmlns:a16="http://schemas.microsoft.com/office/drawing/2014/main" id="{72171013-D973-4187-9CF2-EE098EEF8194}"/>
+              </a:ext>
+              <a:ext uri="{C183D7F6-B498-43B3-948B-1728B52AA6E4}">
+                <adec:decorative xmlns:adec="http://schemas.microsoft.com/office/drawing/2017/decorative" val="1"/>
+              </a:ext>
+            </a:extLst>
+          </p:cNvPr>
+          <p:cNvSpPr>
+            <a:spLocks noGrp="1" noRot="1" noChangeAspect="1" noMove="1" noResize="1" noEditPoints="1" noAdjustHandles="1" noChangeArrowheads="1" noChangeShapeType="1" noTextEdit="1"/>
+          </p:cNvSpPr>
+          <p:nvPr>
+            <p:extLst>
+              <p:ext uri="{386F3935-93C4-4BCD-93E2-E3B085C9AB24}">
+                <p16:designElem xmlns:p16="http://schemas.microsoft.com/office/powerpoint/2015/main" val="1"/>
+              </p:ext>
+            </p:extLst>
+          </p:nvPr>
+        </p:nvSpPr>
+        <p:spPr>
+          <a:xfrm>
+            <a:off x="2815810" y="376"/>
+            <a:ext cx="228600" cy="6858000"/>
+          </a:xfrm>
+          <a:prstGeom prst="rect">
+            <a:avLst/>
+          </a:prstGeom>
+          <a:solidFill>
+            <a:schemeClr val="tx2"/>
+          </a:solidFill>
+          <a:ln>
+            <a:noFill/>
+          </a:ln>
+        </p:spPr>
+        <p:style>
+          <a:lnRef idx="2">
+            <a:schemeClr val="accent1">
+              <a:shade val="50000"/>
+            </a:schemeClr>
+          </a:lnRef>
+          <a:fillRef idx="1">
+            <a:schemeClr val="accent1"/>
+          </a:fillRef>
+          <a:effectRef idx="0">
+            <a:schemeClr val="accent1"/>
+          </a:effectRef>
+          <a:fontRef idx="minor">
+            <a:schemeClr val="lt1"/>
+          </a:fontRef>
+        </p:style>
+        <p:txBody>
+          <a:bodyPr/>
+          <a:lstStyle/>
+          <a:p>
+            <a:endParaRPr lang="ja-JP" altLang="en-US"/>
+          </a:p>
+        </p:txBody>
+      </p:sp>
+      <p:sp>
+        <p:nvSpPr>
+          <p:cNvPr id="6" name="テキスト ボックス 5">
+            <a:extLst>
+              <a:ext uri="{FF2B5EF4-FFF2-40B4-BE49-F238E27FC236}">
+                <a16:creationId xmlns:a16="http://schemas.microsoft.com/office/drawing/2014/main" id="{78BB1A90-A6C8-5FB0-8A84-EE0F9A4E3598}"/>
+              </a:ext>
+            </a:extLst>
+          </p:cNvPr>
+          <p:cNvSpPr txBox="1"/>
+          <p:nvPr/>
+        </p:nvSpPr>
+        <p:spPr>
+          <a:xfrm>
+            <a:off x="3389264" y="1486088"/>
+            <a:ext cx="7705164" cy="3581400"/>
+          </a:xfrm>
+          <a:prstGeom prst="rect">
+            <a:avLst/>
+          </a:prstGeom>
+        </p:spPr>
+        <p:txBody>
+          <a:bodyPr vert="horz" lIns="91440" tIns="45720" rIns="91440" bIns="45720" rtlCol="0">
+            <a:normAutofit/>
+          </a:bodyPr>
+          <a:lstStyle/>
+          <a:p>
+            <a:pPr indent="-384048" defTabSz="914400">
+              <a:lnSpc>
+                <a:spcPct val="150000"/>
+              </a:lnSpc>
+              <a:spcAft>
+                <a:spcPts val="200"/>
+              </a:spcAft>
+              <a:buFont typeface="Franklin Gothic Book" panose="020B0503020102020204" pitchFamily="34" charset="0"/>
+            </a:pPr>
+            <a:r>
+              <a:rPr kumimoji="1" lang="ja-JP" altLang="en-US" sz="3200" dirty="0">
+                <a:solidFill>
+                  <a:schemeClr val="tx2"/>
+                </a:solidFill>
+                <a:latin typeface="HGS創英角ﾎﾟｯﾌﾟ体" panose="040B0A00000000000000" pitchFamily="50" charset="-128"/>
+                <a:ea typeface="HGS創英角ﾎﾟｯﾌﾟ体" panose="040B0A00000000000000" pitchFamily="50" charset="-128"/>
+              </a:rPr>
+              <a:t>ピアスのデザイン</a:t>
+            </a:r>
+            <a:r>
+              <a:rPr kumimoji="1" lang="en-US" altLang="ja-JP" sz="3200" dirty="0">
+                <a:solidFill>
+                  <a:schemeClr val="tx2"/>
+                </a:solidFill>
+                <a:latin typeface="HGS創英角ﾎﾟｯﾌﾟ体" panose="040B0A00000000000000" pitchFamily="50" charset="-128"/>
+                <a:ea typeface="HGS創英角ﾎﾟｯﾌﾟ体" panose="040B0A00000000000000" pitchFamily="50" charset="-128"/>
+              </a:rPr>
+              <a:t>7</a:t>
+            </a:r>
+            <a:r>
+              <a:rPr kumimoji="1" lang="ja-JP" altLang="en-US" sz="3200" dirty="0">
+                <a:solidFill>
+                  <a:schemeClr val="tx2"/>
+                </a:solidFill>
+                <a:latin typeface="HGS創英角ﾎﾟｯﾌﾟ体" panose="040B0A00000000000000" pitchFamily="50" charset="-128"/>
+                <a:ea typeface="HGS創英角ﾎﾟｯﾌﾟ体" panose="040B0A00000000000000" pitchFamily="50" charset="-128"/>
+              </a:rPr>
+              <a:t>月～</a:t>
+            </a:r>
+            <a:r>
+              <a:rPr kumimoji="1" lang="en-US" altLang="ja-JP" sz="3200" dirty="0">
+                <a:solidFill>
+                  <a:schemeClr val="tx2"/>
+                </a:solidFill>
+                <a:latin typeface="HGS創英角ﾎﾟｯﾌﾟ体" panose="040B0A00000000000000" pitchFamily="50" charset="-128"/>
+                <a:ea typeface="HGS創英角ﾎﾟｯﾌﾟ体" panose="040B0A00000000000000" pitchFamily="50" charset="-128"/>
+              </a:rPr>
+              <a:t>11</a:t>
+            </a:r>
+            <a:r>
+              <a:rPr kumimoji="1" lang="ja-JP" altLang="en-US" sz="3200" dirty="0">
+                <a:solidFill>
+                  <a:schemeClr val="tx2"/>
+                </a:solidFill>
+                <a:latin typeface="HGS創英角ﾎﾟｯﾌﾟ体" panose="040B0A00000000000000" pitchFamily="50" charset="-128"/>
+                <a:ea typeface="HGS創英角ﾎﾟｯﾌﾟ体" panose="040B0A00000000000000" pitchFamily="50" charset="-128"/>
+              </a:rPr>
+              <a:t>月</a:t>
+            </a:r>
+            <a:endParaRPr kumimoji="1" lang="en-US" altLang="ja-JP" sz="3200" dirty="0">
+              <a:solidFill>
+                <a:schemeClr val="tx2"/>
+              </a:solidFill>
+              <a:latin typeface="HGS創英角ﾎﾟｯﾌﾟ体" panose="040B0A00000000000000" pitchFamily="50" charset="-128"/>
+              <a:ea typeface="HGS創英角ﾎﾟｯﾌﾟ体" panose="040B0A00000000000000" pitchFamily="50" charset="-128"/>
+            </a:endParaRPr>
+          </a:p>
+          <a:p>
+            <a:pPr indent="-384048" defTabSz="914400">
+              <a:lnSpc>
+                <a:spcPct val="150000"/>
+              </a:lnSpc>
+              <a:spcAft>
+                <a:spcPts val="200"/>
+              </a:spcAft>
+              <a:buFont typeface="Franklin Gothic Book" panose="020B0503020102020204" pitchFamily="34" charset="0"/>
+            </a:pPr>
+            <a:r>
+              <a:rPr kumimoji="1" lang="en-US" altLang="ja-JP" sz="3200" dirty="0">
+                <a:solidFill>
+                  <a:schemeClr val="tx2"/>
+                </a:solidFill>
+                <a:latin typeface="HGS創英角ﾎﾟｯﾌﾟ体" panose="040B0A00000000000000" pitchFamily="50" charset="-128"/>
+                <a:ea typeface="HGS創英角ﾎﾟｯﾌﾟ体" panose="040B0A00000000000000" pitchFamily="50" charset="-128"/>
+              </a:rPr>
+              <a:t>Web</a:t>
+            </a:r>
+            <a:r>
+              <a:rPr kumimoji="1" lang="ja-JP" altLang="en-US" sz="3200" dirty="0">
+                <a:solidFill>
+                  <a:schemeClr val="tx2"/>
+                </a:solidFill>
+                <a:latin typeface="HGS創英角ﾎﾟｯﾌﾟ体" panose="040B0A00000000000000" pitchFamily="50" charset="-128"/>
+                <a:ea typeface="HGS創英角ﾎﾟｯﾌﾟ体" panose="040B0A00000000000000" pitchFamily="50" charset="-128"/>
+              </a:rPr>
+              <a:t>ページの形を作り</a:t>
+            </a:r>
+            <a:endParaRPr kumimoji="1" lang="en-US" altLang="ja-JP" sz="3200" dirty="0">
+              <a:solidFill>
+                <a:schemeClr val="tx2"/>
+              </a:solidFill>
+              <a:latin typeface="HGS創英角ﾎﾟｯﾌﾟ体" panose="040B0A00000000000000" pitchFamily="50" charset="-128"/>
+              <a:ea typeface="HGS創英角ﾎﾟｯﾌﾟ体" panose="040B0A00000000000000" pitchFamily="50" charset="-128"/>
+            </a:endParaRPr>
+          </a:p>
+          <a:p>
+            <a:pPr indent="-384048" defTabSz="914400">
+              <a:lnSpc>
+                <a:spcPct val="150000"/>
+              </a:lnSpc>
+              <a:spcAft>
+                <a:spcPts val="200"/>
+              </a:spcAft>
+              <a:buFont typeface="Franklin Gothic Book" panose="020B0503020102020204" pitchFamily="34" charset="0"/>
+            </a:pPr>
+            <a:r>
+              <a:rPr kumimoji="1" lang="en-US" altLang="ja-JP" sz="3200" dirty="0">
+                <a:solidFill>
+                  <a:schemeClr val="tx2"/>
+                </a:solidFill>
+                <a:latin typeface="HGS創英角ﾎﾟｯﾌﾟ体" panose="040B0A00000000000000" pitchFamily="50" charset="-128"/>
+                <a:ea typeface="HGS創英角ﾎﾟｯﾌﾟ体" panose="040B0A00000000000000" pitchFamily="50" charset="-128"/>
+              </a:rPr>
+              <a:t>Web</a:t>
+            </a:r>
+            <a:r>
+              <a:rPr kumimoji="1" lang="ja-JP" altLang="en-US" sz="3200" dirty="0">
+                <a:solidFill>
+                  <a:schemeClr val="tx2"/>
+                </a:solidFill>
+                <a:latin typeface="HGS創英角ﾎﾟｯﾌﾟ体" panose="040B0A00000000000000" pitchFamily="50" charset="-128"/>
+                <a:ea typeface="HGS創英角ﾎﾟｯﾌﾟ体" panose="040B0A00000000000000" pitchFamily="50" charset="-128"/>
+              </a:rPr>
+              <a:t>ページでの内容</a:t>
+            </a:r>
+            <a:r>
+              <a:rPr kumimoji="1" lang="en-US" altLang="ja-JP" sz="3200" dirty="0">
+                <a:solidFill>
+                  <a:schemeClr val="tx2"/>
+                </a:solidFill>
+                <a:latin typeface="HGS創英角ﾎﾟｯﾌﾟ体" panose="040B0A00000000000000" pitchFamily="50" charset="-128"/>
+                <a:ea typeface="HGS創英角ﾎﾟｯﾌﾟ体" panose="040B0A00000000000000" pitchFamily="50" charset="-128"/>
+              </a:rPr>
+              <a:t>7</a:t>
+            </a:r>
+            <a:r>
+              <a:rPr kumimoji="1" lang="ja-JP" altLang="en-US" sz="3200" dirty="0">
+                <a:solidFill>
+                  <a:schemeClr val="tx2"/>
+                </a:solidFill>
+                <a:latin typeface="HGS創英角ﾎﾟｯﾌﾟ体" panose="040B0A00000000000000" pitchFamily="50" charset="-128"/>
+                <a:ea typeface="HGS創英角ﾎﾟｯﾌﾟ体" panose="040B0A00000000000000" pitchFamily="50" charset="-128"/>
+              </a:rPr>
+              <a:t>月</a:t>
+            </a:r>
+            <a:endParaRPr kumimoji="1" lang="en-US" altLang="ja-JP" sz="3200" dirty="0">
+              <a:solidFill>
+                <a:schemeClr val="tx2"/>
+              </a:solidFill>
+              <a:latin typeface="HGS創英角ﾎﾟｯﾌﾟ体" panose="040B0A00000000000000" pitchFamily="50" charset="-128"/>
+              <a:ea typeface="HGS創英角ﾎﾟｯﾌﾟ体" panose="040B0A00000000000000" pitchFamily="50" charset="-128"/>
+            </a:endParaRPr>
+          </a:p>
+          <a:p>
+            <a:pPr indent="-384048" defTabSz="914400">
+              <a:lnSpc>
+                <a:spcPct val="150000"/>
+              </a:lnSpc>
+              <a:spcAft>
+                <a:spcPts val="200"/>
+              </a:spcAft>
+              <a:buFont typeface="Franklin Gothic Book" panose="020B0503020102020204" pitchFamily="34" charset="0"/>
+            </a:pPr>
+            <a:r>
+              <a:rPr kumimoji="1" lang="en-US" altLang="ja-JP" sz="3200" dirty="0">
+                <a:solidFill>
+                  <a:schemeClr val="tx2"/>
+                </a:solidFill>
+                <a:latin typeface="HGS創英角ﾎﾟｯﾌﾟ体" panose="040B0A00000000000000" pitchFamily="50" charset="-128"/>
+                <a:ea typeface="HGS創英角ﾎﾟｯﾌﾟ体" panose="040B0A00000000000000" pitchFamily="50" charset="-128"/>
+              </a:rPr>
+              <a:t>Web</a:t>
+            </a:r>
+            <a:r>
+              <a:rPr kumimoji="1" lang="ja-JP" altLang="en-US" sz="3200" dirty="0">
+                <a:solidFill>
+                  <a:schemeClr val="tx2"/>
+                </a:solidFill>
+                <a:latin typeface="HGS創英角ﾎﾟｯﾌﾟ体" panose="040B0A00000000000000" pitchFamily="50" charset="-128"/>
+                <a:ea typeface="HGS創英角ﾎﾟｯﾌﾟ体" panose="040B0A00000000000000" pitchFamily="50" charset="-128"/>
+              </a:rPr>
+              <a:t>ページの制作</a:t>
+            </a:r>
+            <a:r>
+              <a:rPr kumimoji="1" lang="en-US" altLang="ja-JP" sz="3200" dirty="0">
+                <a:solidFill>
+                  <a:schemeClr val="tx2"/>
+                </a:solidFill>
+                <a:latin typeface="HGS創英角ﾎﾟｯﾌﾟ体" panose="040B0A00000000000000" pitchFamily="50" charset="-128"/>
+                <a:ea typeface="HGS創英角ﾎﾟｯﾌﾟ体" panose="040B0A00000000000000" pitchFamily="50" charset="-128"/>
+              </a:rPr>
+              <a:t>8</a:t>
+            </a:r>
+            <a:r>
+              <a:rPr kumimoji="1" lang="ja-JP" altLang="en-US" sz="3200" dirty="0">
+                <a:solidFill>
+                  <a:schemeClr val="tx2"/>
+                </a:solidFill>
+                <a:latin typeface="HGS創英角ﾎﾟｯﾌﾟ体" panose="040B0A00000000000000" pitchFamily="50" charset="-128"/>
+                <a:ea typeface="HGS創英角ﾎﾟｯﾌﾟ体" panose="040B0A00000000000000" pitchFamily="50" charset="-128"/>
+              </a:rPr>
+              <a:t>月～</a:t>
+            </a:r>
+            <a:r>
+              <a:rPr kumimoji="1" lang="en-US" altLang="ja-JP" sz="3200" dirty="0">
+                <a:solidFill>
+                  <a:schemeClr val="tx2"/>
+                </a:solidFill>
+                <a:latin typeface="HGS創英角ﾎﾟｯﾌﾟ体" panose="040B0A00000000000000" pitchFamily="50" charset="-128"/>
+                <a:ea typeface="HGS創英角ﾎﾟｯﾌﾟ体" panose="040B0A00000000000000" pitchFamily="50" charset="-128"/>
+              </a:rPr>
+              <a:t>12</a:t>
+            </a:r>
+            <a:r>
+              <a:rPr kumimoji="1" lang="ja-JP" altLang="en-US" sz="3200" dirty="0">
+                <a:solidFill>
+                  <a:schemeClr val="tx2"/>
+                </a:solidFill>
+                <a:latin typeface="HGS創英角ﾎﾟｯﾌﾟ体" panose="040B0A00000000000000" pitchFamily="50" charset="-128"/>
+                <a:ea typeface="HGS創英角ﾎﾟｯﾌﾟ体" panose="040B0A00000000000000" pitchFamily="50" charset="-128"/>
+              </a:rPr>
+              <a:t>月</a:t>
+            </a:r>
+            <a:endParaRPr kumimoji="1" lang="ja-JP" altLang="en-US" dirty="0">
+              <a:solidFill>
+                <a:schemeClr val="tx2"/>
+              </a:solidFill>
+              <a:latin typeface="HGS創英角ﾎﾟｯﾌﾟ体" panose="040B0A00000000000000" pitchFamily="50" charset="-128"/>
+              <a:ea typeface="HGS創英角ﾎﾟｯﾌﾟ体" panose="040B0A00000000000000" pitchFamily="50" charset="-128"/>
+            </a:endParaRPr>
+          </a:p>
+        </p:txBody>
+      </p:sp>
+      <p:sp>
+        <p:nvSpPr>
+          <p:cNvPr id="5" name="テキスト ボックス 4">
+            <a:extLst>
+              <a:ext uri="{FF2B5EF4-FFF2-40B4-BE49-F238E27FC236}">
+                <a16:creationId xmlns:a16="http://schemas.microsoft.com/office/drawing/2014/main" id="{2E43E81F-8F5E-0238-131B-1534282508B9}"/>
+              </a:ext>
+            </a:extLst>
+          </p:cNvPr>
+          <p:cNvSpPr txBox="1"/>
+          <p:nvPr/>
+        </p:nvSpPr>
+        <p:spPr>
+          <a:xfrm>
+            <a:off x="0" y="2686050"/>
+            <a:ext cx="2956560" cy="1485900"/>
+          </a:xfrm>
+          <a:prstGeom prst="rect">
+            <a:avLst/>
+          </a:prstGeom>
+        </p:spPr>
+        <p:txBody>
+          <a:bodyPr vert="horz" lIns="91440" tIns="45720" rIns="91440" bIns="45720" rtlCol="0" anchor="t">
+            <a:normAutofit/>
+          </a:bodyPr>
+          <a:lstStyle/>
+          <a:p>
+            <a:pPr defTabSz="914400">
+              <a:lnSpc>
+                <a:spcPct val="89000"/>
+              </a:lnSpc>
+              <a:spcBef>
+                <a:spcPct val="0"/>
+              </a:spcBef>
+              <a:spcAft>
+                <a:spcPts val="600"/>
+              </a:spcAft>
+            </a:pPr>
+            <a:r>
+              <a:rPr kumimoji="1" lang="ja-JP" altLang="en-US" sz="4000" dirty="0">
+                <a:solidFill>
+                  <a:schemeClr val="tx2"/>
+                </a:solidFill>
+                <a:latin typeface="HGS創英角ﾎﾟｯﾌﾟ体" panose="040B0A00000000000000" pitchFamily="50" charset="-128"/>
+                <a:ea typeface="HGS創英角ﾎﾟｯﾌﾟ体" panose="040B0A00000000000000" pitchFamily="50" charset="-128"/>
+                <a:cs typeface="+mj-cs"/>
+              </a:rPr>
+              <a:t>今後の内容</a:t>
+            </a:r>
+          </a:p>
+        </p:txBody>
+      </p:sp>
+    </p:spTree>
+    <p:extLst>
+      <p:ext uri="{BB962C8B-B14F-4D97-AF65-F5344CB8AC3E}">
+        <p14:creationId xmlns:p14="http://schemas.microsoft.com/office/powerpoint/2010/main" val="3311902018"/>
       </p:ext>
     </p:extLst>
   </p:cSld>
@@ -3959,9 +8043,9 @@
 </file>
 
 <file path=ppt/theme/theme1.xml><?xml version="1.0" encoding="utf-8"?>
-<a:theme xmlns:a="http://schemas.openxmlformats.org/drawingml/2006/main" name="Office テーマ">
+<a:theme xmlns:a="http://schemas.openxmlformats.org/drawingml/2006/main" name="トリミング">
   <a:themeElements>
-    <a:clrScheme name="Office">
+    <a:clrScheme name="トリミング">
       <a:dk1>
         <a:sysClr val="windowText" lastClr="000000"/>
       </a:dk1>
@@ -3969,100 +8053,48 @@
         <a:sysClr val="window" lastClr="FFFFFF"/>
       </a:lt1>
       <a:dk2>
-        <a:srgbClr val="0E2841"/>
+        <a:srgbClr val="191B0E"/>
       </a:dk2>
       <a:lt2>
-        <a:srgbClr val="E8E8E8"/>
+        <a:srgbClr val="EFEDE3"/>
       </a:lt2>
       <a:accent1>
-        <a:srgbClr val="156082"/>
+        <a:srgbClr val="8C8D86"/>
       </a:accent1>
       <a:accent2>
-        <a:srgbClr val="E97132"/>
+        <a:srgbClr val="E6C069"/>
       </a:accent2>
       <a:accent3>
-        <a:srgbClr val="196B24"/>
+        <a:srgbClr val="897B61"/>
       </a:accent3>
       <a:accent4>
-        <a:srgbClr val="0F9ED5"/>
+        <a:srgbClr val="8DAB8E"/>
       </a:accent4>
       <a:accent5>
-        <a:srgbClr val="A02B93"/>
+        <a:srgbClr val="77A2BB"/>
       </a:accent5>
       <a:accent6>
-        <a:srgbClr val="4EA72E"/>
+        <a:srgbClr val="E28394"/>
       </a:accent6>
       <a:hlink>
-        <a:srgbClr val="467886"/>
+        <a:srgbClr val="77A2BB"/>
       </a:hlink>
       <a:folHlink>
-        <a:srgbClr val="96607D"/>
+        <a:srgbClr val="957A99"/>
       </a:folHlink>
     </a:clrScheme>
-    <a:fontScheme name="Office">
+    <a:fontScheme name="トリミング">
       <a:majorFont>
-        <a:latin typeface="游ゴシック Light" panose="02110004020202020204"/>
+        <a:latin typeface="Franklin Gothic Book" panose="020B0503020102020204"/>
         <a:ea typeface=""/>
         <a:cs typeface=""/>
-        <a:font script="Jpan" typeface="游ゴシック Light"/>
-        <a:font script="Hang" typeface="맑은 고딕"/>
-        <a:font script="Hans" typeface="等线 Light"/>
-        <a:font script="Hant" typeface="新細明體"/>
-        <a:font script="Arab" typeface="Times New Roman"/>
-        <a:font script="Hebr" typeface="Times New Roman"/>
-        <a:font script="Thai" typeface="Angsana New"/>
-        <a:font script="Ethi" typeface="Nyala"/>
-        <a:font script="Beng" typeface="Vrinda"/>
-        <a:font script="Gujr" typeface="Shruti"/>
-        <a:font script="Khmr" typeface="MoolBoran"/>
-        <a:font script="Knda" typeface="Tunga"/>
-        <a:font script="Guru" typeface="Raavi"/>
-        <a:font script="Cans" typeface="Euphemia"/>
-        <a:font script="Cher" typeface="Plantagenet Cherokee"/>
-        <a:font script="Yiii" typeface="Microsoft Yi Baiti"/>
-        <a:font script="Tibt" typeface="Microsoft Himalaya"/>
-        <a:font script="Thaa" typeface="MV Boli"/>
-        <a:font script="Deva" typeface="Mangal"/>
-        <a:font script="Telu" typeface="Gautami"/>
-        <a:font script="Taml" typeface="Latha"/>
-        <a:font script="Syrc" typeface="Estrangelo Edessa"/>
-        <a:font script="Orya" typeface="Kalinga"/>
-        <a:font script="Mlym" typeface="Kartika"/>
-        <a:font script="Laoo" typeface="DokChampa"/>
-        <a:font script="Sinh" typeface="Iskoola Pota"/>
-        <a:font script="Mong" typeface="Mongolian Baiti"/>
-        <a:font script="Viet" typeface="Times New Roman"/>
-        <a:font script="Uigh" typeface="Microsoft Uighur"/>
-        <a:font script="Geor" typeface="Sylfaen"/>
-        <a:font script="Armn" typeface="Arial"/>
-        <a:font script="Bugi" typeface="Leelawadee UI"/>
-        <a:font script="Bopo" typeface="Microsoft JhengHei"/>
-        <a:font script="Java" typeface="Javanese Text"/>
-        <a:font script="Lisu" typeface="Segoe UI"/>
-        <a:font script="Mymr" typeface="Myanmar Text"/>
-        <a:font script="Nkoo" typeface="Ebrima"/>
-        <a:font script="Olck" typeface="Nirmala UI"/>
-        <a:font script="Osma" typeface="Ebrima"/>
-        <a:font script="Phag" typeface="Phagspa"/>
-        <a:font script="Syrn" typeface="Estrangelo Edessa"/>
-        <a:font script="Syrj" typeface="Estrangelo Edessa"/>
-        <a:font script="Syre" typeface="Estrangelo Edessa"/>
-        <a:font script="Sora" typeface="Nirmala UI"/>
-        <a:font script="Tale" typeface="Microsoft Tai Le"/>
-        <a:font script="Talu" typeface="Microsoft New Tai Lue"/>
-        <a:font script="Tfng" typeface="Ebrima"/>
-      </a:majorFont>
-      <a:minorFont>
-        <a:latin typeface="游ゴシック" panose="02110004020202020204"/>
-        <a:ea typeface=""/>
-        <a:cs typeface=""/>
-        <a:font script="Jpan" typeface="游ゴシック"/>
-        <a:font script="Hang" typeface="맑은 고딕"/>
-        <a:font script="Hans" typeface="等线"/>
-        <a:font script="Hant" typeface="新細明體"/>
-        <a:font script="Arab" typeface="Arial"/>
-        <a:font script="Hebr" typeface="Arial"/>
-        <a:font script="Thai" typeface="Cordia New"/>
+        <a:font script="Jpan" typeface="メイリオ"/>
+        <a:font script="Hang" typeface="돋움"/>
+        <a:font script="Hans" typeface="华文楷体"/>
+        <a:font script="Hant" typeface="微軟正黑體"/>
+        <a:font script="Arab" typeface="Tahoma"/>
+        <a:font script="Hebr" typeface="Aharoni"/>
+        <a:font script="Thai" typeface="LilyUPC"/>
         <a:font script="Ethi" typeface="Nyala"/>
         <a:font script="Beng" typeface="Vrinda"/>
         <a:font script="Gujr" typeface="Shruti"/>
@@ -4083,29 +8115,47 @@
         <a:font script="Laoo" typeface="DokChampa"/>
         <a:font script="Sinh" typeface="Iskoola Pota"/>
         <a:font script="Mong" typeface="Mongolian Baiti"/>
-        <a:font script="Viet" typeface="Arial"/>
+        <a:font script="Viet" typeface="Tahoma"/>
         <a:font script="Uigh" typeface="Microsoft Uighur"/>
         <a:font script="Geor" typeface="Sylfaen"/>
-        <a:font script="Armn" typeface="Arial"/>
-        <a:font script="Bugi" typeface="Leelawadee UI"/>
-        <a:font script="Bopo" typeface="Microsoft JhengHei"/>
-        <a:font script="Java" typeface="Javanese Text"/>
-        <a:font script="Lisu" typeface="Segoe UI"/>
-        <a:font script="Mymr" typeface="Myanmar Text"/>
-        <a:font script="Nkoo" typeface="Ebrima"/>
-        <a:font script="Olck" typeface="Nirmala UI"/>
-        <a:font script="Osma" typeface="Ebrima"/>
-        <a:font script="Phag" typeface="Phagspa"/>
-        <a:font script="Syrn" typeface="Estrangelo Edessa"/>
-        <a:font script="Syrj" typeface="Estrangelo Edessa"/>
-        <a:font script="Syre" typeface="Estrangelo Edessa"/>
-        <a:font script="Sora" typeface="Nirmala UI"/>
-        <a:font script="Tale" typeface="Microsoft Tai Le"/>
-        <a:font script="Talu" typeface="Microsoft New Tai Lue"/>
-        <a:font script="Tfng" typeface="Ebrima"/>
+      </a:majorFont>
+      <a:minorFont>
+        <a:latin typeface="Franklin Gothic Book" panose="020B0503020102020204"/>
+        <a:ea typeface=""/>
+        <a:cs typeface=""/>
+        <a:font script="Jpan" typeface="メイリオ"/>
+        <a:font script="Hang" typeface="돋움"/>
+        <a:font script="Hans" typeface="华文楷体"/>
+        <a:font script="Hant" typeface="微軟正黑體"/>
+        <a:font script="Arab" typeface="Tahoma"/>
+        <a:font script="Hebr" typeface="Aharoni"/>
+        <a:font script="Thai" typeface="LilyUPC"/>
+        <a:font script="Ethi" typeface="Nyala"/>
+        <a:font script="Beng" typeface="Vrinda"/>
+        <a:font script="Gujr" typeface="Shruti"/>
+        <a:font script="Khmr" typeface="DaunPenh"/>
+        <a:font script="Knda" typeface="Tunga"/>
+        <a:font script="Guru" typeface="Raavi"/>
+        <a:font script="Cans" typeface="Euphemia"/>
+        <a:font script="Cher" typeface="Plantagenet Cherokee"/>
+        <a:font script="Yiii" typeface="Microsoft Yi Baiti"/>
+        <a:font script="Tibt" typeface="Microsoft Himalaya"/>
+        <a:font script="Thaa" typeface="MV Boli"/>
+        <a:font script="Deva" typeface="Mangal"/>
+        <a:font script="Telu" typeface="Gautami"/>
+        <a:font script="Taml" typeface="Latha"/>
+        <a:font script="Syrc" typeface="Estrangelo Edessa"/>
+        <a:font script="Orya" typeface="Kalinga"/>
+        <a:font script="Mlym" typeface="Kartika"/>
+        <a:font script="Laoo" typeface="DokChampa"/>
+        <a:font script="Sinh" typeface="Iskoola Pota"/>
+        <a:font script="Mong" typeface="Mongolian Baiti"/>
+        <a:font script="Viet" typeface="Tahoma"/>
+        <a:font script="Uigh" typeface="Microsoft Uighur"/>
+        <a:font script="Geor" typeface="Sylfaen"/>
       </a:minorFont>
     </a:fontScheme>
-    <a:fmtScheme name="Office">
+    <a:fmtScheme name="トリミング">
       <a:fillStyleLst>
         <a:solidFill>
           <a:schemeClr val="phClr"/>
@@ -4114,23 +8164,23 @@
           <a:gsLst>
             <a:gs pos="0">
               <a:schemeClr val="phClr">
+                <a:tint val="67000"/>
+                <a:satMod val="105000"/>
                 <a:lumMod val="110000"/>
-                <a:satMod val="105000"/>
-                <a:tint val="67000"/>
               </a:schemeClr>
             </a:gs>
             <a:gs pos="50000">
               <a:schemeClr val="phClr">
+                <a:tint val="73000"/>
+                <a:satMod val="103000"/>
                 <a:lumMod val="105000"/>
-                <a:satMod val="103000"/>
-                <a:tint val="73000"/>
               </a:schemeClr>
             </a:gs>
             <a:gs pos="100000">
               <a:schemeClr val="phClr">
+                <a:tint val="81000"/>
+                <a:satMod val="109000"/>
                 <a:lumMod val="105000"/>
-                <a:satMod val="109000"/>
-                <a:tint val="81000"/>
               </a:schemeClr>
             </a:gs>
           </a:gsLst>
@@ -4140,23 +8190,23 @@
           <a:gsLst>
             <a:gs pos="0">
               <a:schemeClr val="phClr">
+                <a:tint val="94000"/>
                 <a:satMod val="103000"/>
                 <a:lumMod val="102000"/>
-                <a:tint val="94000"/>
               </a:schemeClr>
             </a:gs>
             <a:gs pos="50000">
               <a:schemeClr val="phClr">
+                <a:shade val="100000"/>
                 <a:satMod val="110000"/>
                 <a:lumMod val="100000"/>
-                <a:shade val="100000"/>
               </a:schemeClr>
             </a:gs>
             <a:gs pos="100000">
               <a:schemeClr val="phClr">
+                <a:shade val="78000"/>
+                <a:satMod val="120000"/>
                 <a:lumMod val="99000"/>
-                <a:satMod val="120000"/>
-                <a:shade val="78000"/>
               </a:schemeClr>
             </a:gs>
           </a:gsLst>
@@ -4164,26 +8214,23 @@
         </a:gradFill>
       </a:fillStyleLst>
       <a:lnStyleLst>
-        <a:ln w="12700" cap="flat" cmpd="sng" algn="ctr">
+        <a:ln w="6350" cap="flat" cmpd="sng" algn="in">
           <a:solidFill>
             <a:schemeClr val="phClr"/>
           </a:solidFill>
           <a:prstDash val="solid"/>
-          <a:miter lim="800000"/>
         </a:ln>
-        <a:ln w="19050" cap="flat" cmpd="sng" algn="ctr">
+        <a:ln w="34925" cap="flat" cmpd="sng" algn="in">
           <a:solidFill>
             <a:schemeClr val="phClr"/>
           </a:solidFill>
           <a:prstDash val="solid"/>
-          <a:miter lim="800000"/>
         </a:ln>
-        <a:ln w="25400" cap="flat" cmpd="sng" algn="ctr">
+        <a:ln w="19050" cap="flat" cmpd="sng" algn="in">
           <a:solidFill>
             <a:schemeClr val="phClr"/>
           </a:solidFill>
           <a:prstDash val="solid"/>
-          <a:miter lim="800000"/>
         </a:ln>
       </a:lnStyleLst>
       <a:effectStyleLst>
@@ -4197,7 +8244,7 @@
           <a:effectLst>
             <a:outerShdw blurRad="57150" dist="19050" dir="5400000" algn="ctr" rotWithShape="0">
               <a:srgbClr val="000000">
-                <a:alpha val="63000"/>
+                <a:alpha val="35000"/>
               </a:srgbClr>
             </a:outerShdw>
           </a:effectLst>
@@ -4218,16 +8265,16 @@
             <a:gs pos="0">
               <a:schemeClr val="phClr">
                 <a:tint val="93000"/>
+                <a:shade val="98000"/>
                 <a:satMod val="150000"/>
-                <a:shade val="98000"/>
                 <a:lumMod val="102000"/>
               </a:schemeClr>
             </a:gs>
             <a:gs pos="50000">
               <a:schemeClr val="phClr">
                 <a:tint val="98000"/>
+                <a:shade val="90000"/>
                 <a:satMod val="130000"/>
-                <a:shade val="90000"/>
                 <a:lumMod val="103000"/>
               </a:schemeClr>
             </a:gs>
@@ -4243,31 +8290,11 @@
       </a:bgFillStyleLst>
     </a:fmtScheme>
   </a:themeElements>
-  <a:objectDefaults>
-    <a:lnDef>
-      <a:spPr/>
-      <a:bodyPr/>
-      <a:lstStyle/>
-      <a:style>
-        <a:lnRef idx="2">
-          <a:schemeClr val="accent1"/>
-        </a:lnRef>
-        <a:fillRef idx="0">
-          <a:schemeClr val="accent1"/>
-        </a:fillRef>
-        <a:effectRef idx="1">
-          <a:schemeClr val="accent1"/>
-        </a:effectRef>
-        <a:fontRef idx="minor">
-          <a:schemeClr val="tx1"/>
-        </a:fontRef>
-      </a:style>
-    </a:lnDef>
-  </a:objectDefaults>
+  <a:objectDefaults/>
   <a:extraClrSchemeLst/>
   <a:extLst>
     <a:ext uri="{05A4C25C-085E-4340-85A3-A5531E510DB2}">
-      <thm15:themeFamily xmlns:thm15="http://schemas.microsoft.com/office/thememl/2012/main" name="Office Theme" id="{2E142A2C-CD16-42D6-873A-C26D2A0506FA}" vid="{1BDDFF52-6CD6-40A5-AB3C-68EB2F1E4D0A}"/>
+      <thm15:themeFamily xmlns:thm15="http://schemas.microsoft.com/office/thememl/2012/main" name="Crop" id="{EC9488ED-E761-4D60-9AC4-764D1FE2C171}" vid="{CE19780C-D67D-4C13-9DE9-A52BC3BA51B4}"/>
     </a:ext>
   </a:extLst>
 </a:theme>
